--- a/docs/Lectures/Week06/Lecture05_GEOG3319_Receivers.pptx
+++ b/docs/Lectures/Week06/Lecture05_GEOG3319_Receivers.pptx
@@ -10,35 +10,37 @@
     <p:sldMasterId id="2147483721" r:id="rId6"/>
   </p:sldMasterIdLst>
   <p:notesMasterIdLst>
-    <p:notesMasterId r:id="rId33"/>
+    <p:notesMasterId r:id="rId35"/>
   </p:notesMasterIdLst>
   <p:sldIdLst>
     <p:sldId id="914" r:id="rId7"/>
     <p:sldId id="1647" r:id="rId8"/>
     <p:sldId id="677" r:id="rId9"/>
-    <p:sldId id="654" r:id="rId10"/>
-    <p:sldId id="655" r:id="rId11"/>
+    <p:sldId id="1667" r:id="rId10"/>
+    <p:sldId id="1665" r:id="rId11"/>
     <p:sldId id="1648" r:id="rId12"/>
     <p:sldId id="1649" r:id="rId13"/>
     <p:sldId id="1650" r:id="rId14"/>
     <p:sldId id="1651" r:id="rId15"/>
-    <p:sldId id="678" r:id="rId16"/>
-    <p:sldId id="687" r:id="rId17"/>
-    <p:sldId id="686" r:id="rId18"/>
-    <p:sldId id="1653" r:id="rId19"/>
-    <p:sldId id="1654" r:id="rId20"/>
-    <p:sldId id="1655" r:id="rId21"/>
-    <p:sldId id="1664" r:id="rId22"/>
-    <p:sldId id="1660" r:id="rId23"/>
-    <p:sldId id="1661" r:id="rId24"/>
-    <p:sldId id="1662" r:id="rId25"/>
-    <p:sldId id="1663" r:id="rId26"/>
-    <p:sldId id="1656" r:id="rId27"/>
-    <p:sldId id="1657" r:id="rId28"/>
-    <p:sldId id="1658" r:id="rId29"/>
-    <p:sldId id="1659" r:id="rId30"/>
-    <p:sldId id="685" r:id="rId31"/>
-    <p:sldId id="270" r:id="rId32"/>
+    <p:sldId id="1666" r:id="rId16"/>
+    <p:sldId id="654" r:id="rId17"/>
+    <p:sldId id="655" r:id="rId18"/>
+    <p:sldId id="678" r:id="rId19"/>
+    <p:sldId id="687" r:id="rId20"/>
+    <p:sldId id="1653" r:id="rId21"/>
+    <p:sldId id="1654" r:id="rId22"/>
+    <p:sldId id="1655" r:id="rId23"/>
+    <p:sldId id="1664" r:id="rId24"/>
+    <p:sldId id="1660" r:id="rId25"/>
+    <p:sldId id="1661" r:id="rId26"/>
+    <p:sldId id="1662" r:id="rId27"/>
+    <p:sldId id="1663" r:id="rId28"/>
+    <p:sldId id="1656" r:id="rId29"/>
+    <p:sldId id="1657" r:id="rId30"/>
+    <p:sldId id="1658" r:id="rId31"/>
+    <p:sldId id="1659" r:id="rId32"/>
+    <p:sldId id="685" r:id="rId33"/>
+    <p:sldId id="270" r:id="rId34"/>
   </p:sldIdLst>
   <p:sldSz cx="8229600" cy="5143500"/>
   <p:notesSz cx="7010400" cy="9296400"/>
@@ -801,7 +803,7 @@
             <a:fld id="{0CE062E2-CA43-4035-9E13-AD9908C25B62}" type="slidenum">
               <a:rPr lang="en-US" altLang="en-US"/>
               <a:pPr/>
-              <a:t>4</a:t>
+              <a:t>11</a:t>
             </a:fld>
             <a:endParaRPr lang="en-US" altLang="en-US"/>
           </a:p>
@@ -909,7 +911,7 @@
             <a:fld id="{0CE062E2-CA43-4035-9E13-AD9908C25B62}" type="slidenum">
               <a:rPr lang="en-US" altLang="en-US"/>
               <a:pPr/>
-              <a:t>5</a:t>
+              <a:t>12</a:t>
             </a:fld>
             <a:endParaRPr lang="en-US" altLang="en-US"/>
           </a:p>
@@ -1017,7 +1019,7 @@
             <a:fld id="{0CE062E2-CA43-4035-9E13-AD9908C25B62}" type="slidenum">
               <a:rPr lang="en-US" altLang="en-US"/>
               <a:pPr/>
-              <a:t>10</a:t>
+              <a:t>13</a:t>
             </a:fld>
             <a:endParaRPr lang="en-US" altLang="en-US"/>
           </a:p>
@@ -1128,7 +1130,7 @@
             <a:fld id="{0CE062E2-CA43-4035-9E13-AD9908C25B62}" type="slidenum">
               <a:rPr lang="en-US" altLang="en-US"/>
               <a:pPr/>
-              <a:t>11</a:t>
+              <a:t>14</a:t>
             </a:fld>
             <a:endParaRPr lang="en-US" altLang="en-US"/>
           </a:p>
@@ -1236,7 +1238,7 @@
             <a:fld id="{0CE062E2-CA43-4035-9E13-AD9908C25B62}" type="slidenum">
               <a:rPr lang="en-US" altLang="en-US"/>
               <a:pPr/>
-              <a:t>12</a:t>
+              <a:t>27</a:t>
             </a:fld>
             <a:endParaRPr lang="en-US" altLang="en-US"/>
           </a:p>
@@ -1284,14 +1286,87 @@
           <a:lstStyle/>
           <a:p>
             <a:pPr algn="l"/>
+            <a:r>
+              <a:rPr lang="en-US" altLang="en-US" dirty="0"/>
+              <a:t>GPS signals are very low in power, as well as it get merged with interference from the higher powerful signals. So we need to improve the power or in the signal as well as we need to filter the interference as well as we need to for the process the signal to get our desire parameters. In order to get those things the GPS receiver hardware contains filters, amplifiers, frequency unity, digital signal, processing unit.</a:t>
+            </a:r>
+          </a:p>
+          <a:p>
+            <a:pPr algn="l"/>
             <a:endParaRPr lang="en-US" altLang="en-US" dirty="0"/>
+          </a:p>
+          <a:p>
+            <a:pPr algn="l"/>
+            <a:r>
+              <a:rPr lang="en-US" altLang="en-US" dirty="0"/>
+              <a:t>We wanted at an intermediate frequency a lower frequency than one and a half </a:t>
+            </a:r>
+            <a:r>
+              <a:rPr lang="en-US" altLang="en-US" dirty="0" err="1"/>
+              <a:t>gighertz</a:t>
+            </a:r>
+            <a:r>
+              <a:rPr lang="en-US" altLang="en-US" dirty="0"/>
+              <a:t> so we can sample and digitally store the signal.</a:t>
+            </a:r>
+          </a:p>
+          <a:p>
+            <a:pPr algn="l"/>
+            <a:r>
+              <a:rPr lang="en-US" altLang="en-US" dirty="0"/>
+              <a:t>IF: intermediate frequency, in which  </a:t>
+            </a:r>
+            <a:r>
+              <a:rPr lang="en-US" b="0" i="0" dirty="0">
+                <a:solidFill>
+                  <a:srgbClr val="202122"/>
+                </a:solidFill>
+                <a:effectLst/>
+                <a:latin typeface="Arial" panose="020B0604020202020204" pitchFamily="34" charset="0"/>
+              </a:rPr>
+              <a:t>incoming signal is shifted to an IF for </a:t>
+            </a:r>
+            <a:r>
+              <a:rPr lang="en-US" b="0" i="0" u="none" strike="noStrike" dirty="0">
+                <a:solidFill>
+                  <a:srgbClr val="0B0080"/>
+                </a:solidFill>
+                <a:effectLst/>
+                <a:latin typeface="Arial" panose="020B0604020202020204" pitchFamily="34" charset="0"/>
+                <a:hlinkClick r:id="rId3"/>
+              </a:rPr>
+              <a:t>amplification</a:t>
+            </a:r>
+            <a:r>
+              <a:rPr lang="en-US" b="0" i="0" u="none" strike="noStrike" dirty="0">
+                <a:solidFill>
+                  <a:srgbClr val="0B0080"/>
+                </a:solidFill>
+                <a:effectLst/>
+                <a:latin typeface="Arial" panose="020B0604020202020204" pitchFamily="34" charset="0"/>
+              </a:rPr>
+              <a:t>.</a:t>
+            </a:r>
+          </a:p>
+          <a:p>
+            <a:pPr algn="l"/>
+            <a:r>
+              <a:rPr lang="en-US" altLang="en-US" b="0" i="0" u="none" strike="noStrike" dirty="0">
+                <a:solidFill>
+                  <a:srgbClr val="0B0080"/>
+                </a:solidFill>
+                <a:effectLst/>
+                <a:latin typeface="Arial" panose="020B0604020202020204" pitchFamily="34" charset="0"/>
+              </a:rPr>
+              <a:t>Converted it to intermediate frequency signal, that means the signal will be possible to be processed through digital signal processor. </a:t>
+            </a:r>
           </a:p>
         </p:txBody>
       </p:sp>
     </p:spTree>
     <p:extLst>
       <p:ext uri="{BB962C8B-B14F-4D97-AF65-F5344CB8AC3E}">
-        <p14:creationId xmlns:p14="http://schemas.microsoft.com/office/powerpoint/2010/main" val="1706178962"/>
+        <p14:creationId xmlns:p14="http://schemas.microsoft.com/office/powerpoint/2010/main" val="631713570"/>
       </p:ext>
     </p:extLst>
   </p:cSld>
@@ -1320,187 +1395,6 @@
       </p:grpSpPr>
       <p:sp>
         <p:nvSpPr>
-          <p:cNvPr id="7" name="Rectangle 5">
-            <a:extLst>
-              <a:ext uri="{FF2B5EF4-FFF2-40B4-BE49-F238E27FC236}">
-                <a16:creationId xmlns:a16="http://schemas.microsoft.com/office/drawing/2014/main" id="{C7E09E1C-40D2-46F9-9F20-07EA588B3A3A}"/>
-              </a:ext>
-            </a:extLst>
-          </p:cNvPr>
-          <p:cNvSpPr>
-            <a:spLocks noGrp="1" noChangeArrowheads="1"/>
-          </p:cNvSpPr>
-          <p:nvPr>
-            <p:ph type="sldNum" sz="quarter" idx="5"/>
-          </p:nvPr>
-        </p:nvSpPr>
-        <p:spPr>
-          <a:ln/>
-        </p:spPr>
-        <p:txBody>
-          <a:bodyPr/>
-          <a:lstStyle/>
-          <a:p>
-            <a:fld id="{0CE062E2-CA43-4035-9E13-AD9908C25B62}" type="slidenum">
-              <a:rPr lang="en-US" altLang="en-US"/>
-              <a:pPr/>
-              <a:t>25</a:t>
-            </a:fld>
-            <a:endParaRPr lang="en-US" altLang="en-US"/>
-          </a:p>
-        </p:txBody>
-      </p:sp>
-      <p:sp>
-        <p:nvSpPr>
-          <p:cNvPr id="124930" name="Rectangle 2">
-            <a:extLst>
-              <a:ext uri="{FF2B5EF4-FFF2-40B4-BE49-F238E27FC236}">
-                <a16:creationId xmlns:a16="http://schemas.microsoft.com/office/drawing/2014/main" id="{DFA605D2-F657-4B1A-895E-09BF5F2A3B65}"/>
-              </a:ext>
-            </a:extLst>
-          </p:cNvPr>
-          <p:cNvSpPr>
-            <a:spLocks noGrp="1" noRot="1" noChangeAspect="1" noChangeArrowheads="1" noTextEdit="1"/>
-          </p:cNvSpPr>
-          <p:nvPr>
-            <p:ph type="sldImg"/>
-          </p:nvPr>
-        </p:nvSpPr>
-        <p:spPr>
-          <a:ln/>
-        </p:spPr>
-      </p:sp>
-      <p:sp>
-        <p:nvSpPr>
-          <p:cNvPr id="124931" name="Rectangle 3">
-            <a:extLst>
-              <a:ext uri="{FF2B5EF4-FFF2-40B4-BE49-F238E27FC236}">
-                <a16:creationId xmlns:a16="http://schemas.microsoft.com/office/drawing/2014/main" id="{4302226F-D9D5-4ED4-8280-5A95D5D61DC0}"/>
-              </a:ext>
-            </a:extLst>
-          </p:cNvPr>
-          <p:cNvSpPr>
-            <a:spLocks noGrp="1" noChangeArrowheads="1"/>
-          </p:cNvSpPr>
-          <p:nvPr>
-            <p:ph type="body" idx="1"/>
-          </p:nvPr>
-        </p:nvSpPr>
-        <p:spPr/>
-        <p:txBody>
-          <a:bodyPr/>
-          <a:lstStyle/>
-          <a:p>
-            <a:pPr algn="l"/>
-            <a:r>
-              <a:rPr lang="en-US" altLang="en-US" dirty="0"/>
-              <a:t>GPS signals are very low in power, as well as it get merged with interference from the higher powerful signals. So we need to improve the power or in the signal as well as we need to filter the interference as well as we need to for the process the signal to get our desire parameters. In order to get those things the GPS receiver hardware contains filters, amplifiers, frequency unity, digital signal, processing unit.</a:t>
-            </a:r>
-          </a:p>
-          <a:p>
-            <a:pPr algn="l"/>
-            <a:endParaRPr lang="en-US" altLang="en-US" dirty="0"/>
-          </a:p>
-          <a:p>
-            <a:pPr algn="l"/>
-            <a:r>
-              <a:rPr lang="en-US" altLang="en-US" dirty="0"/>
-              <a:t>We wanted at an intermediate frequency a lower frequency than one and a half </a:t>
-            </a:r>
-            <a:r>
-              <a:rPr lang="en-US" altLang="en-US" dirty="0" err="1"/>
-              <a:t>gighertz</a:t>
-            </a:r>
-            <a:r>
-              <a:rPr lang="en-US" altLang="en-US" dirty="0"/>
-              <a:t> so we can sample and digitally store the signal.</a:t>
-            </a:r>
-          </a:p>
-          <a:p>
-            <a:pPr algn="l"/>
-            <a:r>
-              <a:rPr lang="en-US" altLang="en-US" dirty="0"/>
-              <a:t>IF: intermediate frequency, in which  </a:t>
-            </a:r>
-            <a:r>
-              <a:rPr lang="en-US" b="0" i="0" dirty="0">
-                <a:solidFill>
-                  <a:srgbClr val="202122"/>
-                </a:solidFill>
-                <a:effectLst/>
-                <a:latin typeface="Arial" panose="020B0604020202020204" pitchFamily="34" charset="0"/>
-              </a:rPr>
-              <a:t>incoming signal is shifted to an IF for </a:t>
-            </a:r>
-            <a:r>
-              <a:rPr lang="en-US" b="0" i="0" u="none" strike="noStrike" dirty="0">
-                <a:solidFill>
-                  <a:srgbClr val="0B0080"/>
-                </a:solidFill>
-                <a:effectLst/>
-                <a:latin typeface="Arial" panose="020B0604020202020204" pitchFamily="34" charset="0"/>
-                <a:hlinkClick r:id="rId3"/>
-              </a:rPr>
-              <a:t>amplification</a:t>
-            </a:r>
-            <a:r>
-              <a:rPr lang="en-US" b="0" i="0" u="none" strike="noStrike" dirty="0">
-                <a:solidFill>
-                  <a:srgbClr val="0B0080"/>
-                </a:solidFill>
-                <a:effectLst/>
-                <a:latin typeface="Arial" panose="020B0604020202020204" pitchFamily="34" charset="0"/>
-              </a:rPr>
-              <a:t>.</a:t>
-            </a:r>
-          </a:p>
-          <a:p>
-            <a:pPr algn="l"/>
-            <a:r>
-              <a:rPr lang="en-US" altLang="en-US" b="0" i="0" u="none" strike="noStrike" dirty="0">
-                <a:solidFill>
-                  <a:srgbClr val="0B0080"/>
-                </a:solidFill>
-                <a:effectLst/>
-                <a:latin typeface="Arial" panose="020B0604020202020204" pitchFamily="34" charset="0"/>
-              </a:rPr>
-              <a:t>Converted it to intermediate frequency signal, that means the signal will be possible to be processed through digital signal processor. </a:t>
-            </a:r>
-          </a:p>
-        </p:txBody>
-      </p:sp>
-    </p:spTree>
-    <p:extLst>
-      <p:ext uri="{BB962C8B-B14F-4D97-AF65-F5344CB8AC3E}">
-        <p14:creationId xmlns:p14="http://schemas.microsoft.com/office/powerpoint/2010/main" val="631713570"/>
-      </p:ext>
-    </p:extLst>
-  </p:cSld>
-  <p:clrMapOvr>
-    <a:masterClrMapping/>
-  </p:clrMapOvr>
-</p:notes>
-</file>
-
-<file path=ppt/notesSlides/notesSlide9.xml><?xml version="1.0" encoding="utf-8"?>
-<p:notes xmlns:a="http://schemas.openxmlformats.org/drawingml/2006/main" xmlns:r="http://schemas.openxmlformats.org/officeDocument/2006/relationships" xmlns:p="http://schemas.openxmlformats.org/presentationml/2006/main">
-  <p:cSld>
-    <p:spTree>
-      <p:nvGrpSpPr>
-        <p:cNvPr id="1" name=""/>
-        <p:cNvGrpSpPr/>
-        <p:nvPr/>
-      </p:nvGrpSpPr>
-      <p:grpSpPr>
-        <a:xfrm>
-          <a:off x="0" y="0"/>
-          <a:ext cx="0" cy="0"/>
-          <a:chOff x="0" y="0"/>
-          <a:chExt cx="0" cy="0"/>
-        </a:xfrm>
-      </p:grpSpPr>
-      <p:sp>
-        <p:nvSpPr>
           <p:cNvPr id="2" name="Slide Image Placeholder 1"/>
           <p:cNvSpPr>
             <a:spLocks noGrp="1" noRot="1" noChangeAspect="1"/>
@@ -1548,7 +1442,7 @@
             <a:fld id="{56507943-197E-CE46-82F0-5A323A24AE7A}" type="slidenum">
               <a:rPr lang="en-US" smtClean="0"/>
               <a:pPr/>
-              <a:t>26</a:t>
+              <a:t>28</a:t>
             </a:fld>
             <a:endParaRPr lang="en-US"/>
           </a:p>
@@ -24719,7 +24613,7 @@
         </p:spPr>
         <p:txBody>
           <a:bodyPr>
-            <a:normAutofit fontScale="90000"/>
+            <a:normAutofit/>
           </a:bodyPr>
           <a:lstStyle/>
           <a:p>
@@ -24741,17 +24635,6 @@
             <a:r>
               <a:rPr lang="en-US" altLang="zh-CN" sz="2800" dirty="0"/>
               <a:t>GPS Receiver</a:t>
-            </a:r>
-            <a:br>
-              <a:rPr lang="en-US" altLang="zh-CN" sz="2800" dirty="0"/>
-            </a:br>
-            <a:r>
-              <a:rPr lang="en-US" altLang="zh-CN" sz="2800" dirty="0" err="1"/>
-              <a:t>gps</a:t>
-            </a:r>
-            <a:r>
-              <a:rPr lang="en-US" altLang="zh-CN" sz="2800" dirty="0"/>
-              <a:t> augmentation</a:t>
             </a:r>
             <a:br>
               <a:rPr lang="en-US" sz="2700" dirty="0">
@@ -24914,115 +24797,82 @@
           <a:chExt cx="0" cy="0"/>
         </a:xfrm>
       </p:grpSpPr>
-      <p:cxnSp>
-        <p:nvCxnSpPr>
-          <p:cNvPr id="4" name="Straight Connector 3">
+      <p:sp>
+        <p:nvSpPr>
+          <p:cNvPr id="2" name="Title 1">
             <a:extLst>
               <a:ext uri="{FF2B5EF4-FFF2-40B4-BE49-F238E27FC236}">
-                <a16:creationId xmlns:a16="http://schemas.microsoft.com/office/drawing/2014/main" id="{D4EB9696-B2DB-43F4-B52A-F64A3152234F}"/>
+                <a16:creationId xmlns:a16="http://schemas.microsoft.com/office/drawing/2014/main" id="{BDF0157F-F15A-E3ED-68A9-83184E216F8A}"/>
               </a:ext>
             </a:extLst>
           </p:cNvPr>
-          <p:cNvCxnSpPr/>
-          <p:nvPr/>
-        </p:nvCxnSpPr>
-        <p:spPr>
-          <a:xfrm>
-            <a:off x="152400" y="922910"/>
-            <a:ext cx="8001000" cy="0"/>
-          </a:xfrm>
-          <a:prstGeom prst="line">
-            <a:avLst/>
-          </a:prstGeom>
-          <a:ln>
-            <a:solidFill>
-              <a:schemeClr val="tx1"/>
-            </a:solidFill>
-          </a:ln>
-          <a:effectLst/>
-        </p:spPr>
-        <p:style>
-          <a:lnRef idx="2">
-            <a:schemeClr val="accent1"/>
-          </a:lnRef>
-          <a:fillRef idx="0">
-            <a:schemeClr val="accent1"/>
-          </a:fillRef>
-          <a:effectRef idx="1">
-            <a:schemeClr val="accent1"/>
-          </a:effectRef>
-          <a:fontRef idx="minor">
-            <a:schemeClr val="tx1"/>
-          </a:fontRef>
-        </p:style>
-      </p:cxnSp>
-      <p:sp>
-        <p:nvSpPr>
-          <p:cNvPr id="5" name="Title 1">
+          <p:cNvSpPr>
+            <a:spLocks noGrp="1"/>
+          </p:cNvSpPr>
+          <p:nvPr>
+            <p:ph type="title"/>
+          </p:nvPr>
+        </p:nvSpPr>
+        <p:spPr>
+          <a:xfrm>
+            <a:off x="392305" y="526617"/>
+            <a:ext cx="7444991" cy="593523"/>
+          </a:xfrm>
+        </p:spPr>
+        <p:txBody>
+          <a:bodyPr/>
+          <a:lstStyle/>
+          <a:p>
+            <a:pPr defTabSz="411480"/>
+            <a:r>
+              <a:rPr lang="en-US" sz="3200" dirty="0">
+                <a:solidFill>
+                  <a:srgbClr val="7030A0"/>
+                </a:solidFill>
+              </a:rPr>
+              <a:t>4 GNSS Constellations</a:t>
+            </a:r>
+          </a:p>
+        </p:txBody>
+      </p:sp>
+      <p:pic>
+        <p:nvPicPr>
+          <p:cNvPr id="6" name="Content Placeholder 5">
             <a:extLst>
               <a:ext uri="{FF2B5EF4-FFF2-40B4-BE49-F238E27FC236}">
-                <a16:creationId xmlns:a16="http://schemas.microsoft.com/office/drawing/2014/main" id="{9D7B9A9B-3B1A-4D8A-8275-AAA1205C7D4E}"/>
+                <a16:creationId xmlns:a16="http://schemas.microsoft.com/office/drawing/2014/main" id="{54C80158-C0B2-A182-EE88-062254416465}"/>
               </a:ext>
             </a:extLst>
           </p:cNvPr>
-          <p:cNvSpPr txBox="1">
-            <a:spLocks/>
-          </p:cNvSpPr>
-          <p:nvPr/>
-        </p:nvSpPr>
-        <p:spPr>
-          <a:xfrm>
-            <a:off x="217394" y="161668"/>
-            <a:ext cx="8077200" cy="857250"/>
+          <p:cNvPicPr>
+            <a:picLocks noGrp="1" noChangeAspect="1"/>
+          </p:cNvPicPr>
+          <p:nvPr>
+            <p:ph idx="1"/>
+          </p:nvPr>
+        </p:nvPicPr>
+        <p:blipFill>
+          <a:blip r:embed="rId2"/>
+          <a:stretch>
+            <a:fillRect/>
+          </a:stretch>
+        </p:blipFill>
+        <p:spPr>
+          <a:xfrm>
+            <a:off x="556526" y="1287780"/>
+            <a:ext cx="7477107" cy="3246120"/>
           </a:xfrm>
           <a:prstGeom prst="rect">
             <a:avLst/>
           </a:prstGeom>
         </p:spPr>
-        <p:txBody>
-          <a:bodyPr vert="horz" lIns="91440" tIns="45720" rIns="91440" bIns="45720" rtlCol="0" anchor="ctr">
-            <a:normAutofit/>
-          </a:bodyPr>
-          <a:lstStyle>
-            <a:lvl1pPr algn="ctr" defTabSz="411480" rtl="0" eaLnBrk="1" latinLnBrk="0" hangingPunct="1">
-              <a:spcBef>
-                <a:spcPct val="0"/>
-              </a:spcBef>
-              <a:buNone/>
-              <a:defRPr sz="3960" kern="1200">
-                <a:solidFill>
-                  <a:schemeClr val="tx1"/>
-                </a:solidFill>
-                <a:latin typeface="+mj-lt"/>
-                <a:ea typeface="+mj-ea"/>
-                <a:cs typeface="+mj-cs"/>
-              </a:defRPr>
-            </a:lvl1pPr>
-          </a:lstStyle>
-          <a:p>
-            <a:pPr algn="l"/>
-            <a:r>
-              <a:rPr lang="en-US" sz="3200" dirty="0">
-                <a:solidFill>
-                  <a:srgbClr val="7030A0"/>
-                </a:solidFill>
-              </a:rPr>
-              <a:t>Antenna</a:t>
-            </a:r>
-            <a:endParaRPr lang="en-US" sz="2600" dirty="0">
-              <a:solidFill>
-                <a:srgbClr val="7030A0"/>
-              </a:solidFill>
-            </a:endParaRPr>
-          </a:p>
-        </p:txBody>
-      </p:sp>
-      <p:sp>
-        <p:nvSpPr>
-          <p:cNvPr id="2" name="Slide Number Placeholder 1">
+      </p:pic>
+      <p:sp>
+        <p:nvSpPr>
+          <p:cNvPr id="4" name="Slide Number Placeholder 3">
             <a:extLst>
               <a:ext uri="{FF2B5EF4-FFF2-40B4-BE49-F238E27FC236}">
-                <a16:creationId xmlns:a16="http://schemas.microsoft.com/office/drawing/2014/main" id="{6EDBF9BC-B3FC-4D00-B7E0-B2749A88364A}"/>
+                <a16:creationId xmlns:a16="http://schemas.microsoft.com/office/drawing/2014/main" id="{C8F6B516-46D0-00F3-8BD3-A21AE76A74EB}"/>
               </a:ext>
             </a:extLst>
           </p:cNvPr>
@@ -25047,297 +24897,10 @@
           </a:p>
         </p:txBody>
       </p:sp>
-      <p:pic>
-        <p:nvPicPr>
-          <p:cNvPr id="1030" name="Picture 6" descr="Trimble TDC100 - 4G Android">
-            <a:extLst>
-              <a:ext uri="{FF2B5EF4-FFF2-40B4-BE49-F238E27FC236}">
-                <a16:creationId xmlns:a16="http://schemas.microsoft.com/office/drawing/2014/main" id="{BBD35913-48CE-4E73-8016-4ADF3E933BCA}"/>
-              </a:ext>
-            </a:extLst>
-          </p:cNvPr>
-          <p:cNvPicPr>
-            <a:picLocks noChangeAspect="1" noChangeArrowheads="1"/>
-          </p:cNvPicPr>
-          <p:nvPr/>
-        </p:nvPicPr>
-        <p:blipFill>
-          <a:blip r:embed="rId3">
-            <a:extLst>
-              <a:ext uri="{28A0092B-C50C-407E-A947-70E740481C1C}">
-                <a14:useLocalDpi xmlns:a14="http://schemas.microsoft.com/office/drawing/2010/main" val="0"/>
-              </a:ext>
-            </a:extLst>
-          </a:blip>
-          <a:srcRect/>
-          <a:stretch>
-            <a:fillRect/>
-          </a:stretch>
-        </p:blipFill>
-        <p:spPr bwMode="auto">
-          <a:xfrm>
-            <a:off x="662416" y="1162785"/>
-            <a:ext cx="2023634" cy="2758888"/>
-          </a:xfrm>
-          <a:prstGeom prst="rect">
-            <a:avLst/>
-          </a:prstGeom>
-          <a:noFill/>
-          <a:extLst>
-            <a:ext uri="{909E8E84-426E-40DD-AFC4-6F175D3DCCD1}">
-              <a14:hiddenFill xmlns:a14="http://schemas.microsoft.com/office/drawing/2010/main">
-                <a:solidFill>
-                  <a:srgbClr val="FFFFFF"/>
-                </a:solidFill>
-              </a14:hiddenFill>
-            </a:ext>
-          </a:extLst>
-        </p:spPr>
-      </p:pic>
-      <p:sp>
-        <p:nvSpPr>
-          <p:cNvPr id="9" name="TextBox 8">
-            <a:extLst>
-              <a:ext uri="{FF2B5EF4-FFF2-40B4-BE49-F238E27FC236}">
-                <a16:creationId xmlns:a16="http://schemas.microsoft.com/office/drawing/2014/main" id="{749BE342-C4C5-42CC-9A80-BAEA046A0314}"/>
-              </a:ext>
-            </a:extLst>
-          </p:cNvPr>
-          <p:cNvSpPr txBox="1"/>
-          <p:nvPr/>
-        </p:nvSpPr>
-        <p:spPr>
-          <a:xfrm>
-            <a:off x="442913" y="4767263"/>
-            <a:ext cx="3226503" cy="246221"/>
-          </a:xfrm>
-          <a:prstGeom prst="rect">
-            <a:avLst/>
-          </a:prstGeom>
-          <a:noFill/>
-        </p:spPr>
-        <p:txBody>
-          <a:bodyPr wrap="square" rtlCol="0">
-            <a:spAutoFit/>
-          </a:bodyPr>
-          <a:lstStyle/>
-          <a:p>
-            <a:r>
-              <a:rPr lang="en-US" sz="1000" dirty="0">
-                <a:solidFill>
-                  <a:srgbClr val="7030A0"/>
-                </a:solidFill>
-              </a:rPr>
-              <a:t>Trimble website</a:t>
-            </a:r>
-          </a:p>
-        </p:txBody>
-      </p:sp>
-      <p:sp>
-        <p:nvSpPr>
-          <p:cNvPr id="3" name="TextBox 2">
-            <a:extLst>
-              <a:ext uri="{FF2B5EF4-FFF2-40B4-BE49-F238E27FC236}">
-                <a16:creationId xmlns:a16="http://schemas.microsoft.com/office/drawing/2014/main" id="{C2A8D52D-EA63-4A13-BF07-D1DDFFEB8BA4}"/>
-              </a:ext>
-            </a:extLst>
-          </p:cNvPr>
-          <p:cNvSpPr txBox="1"/>
-          <p:nvPr/>
-        </p:nvSpPr>
-        <p:spPr>
-          <a:xfrm>
-            <a:off x="1050325" y="4206706"/>
-            <a:ext cx="1334530" cy="369332"/>
-          </a:xfrm>
-          <a:prstGeom prst="rect">
-            <a:avLst/>
-          </a:prstGeom>
-          <a:noFill/>
-        </p:spPr>
-        <p:txBody>
-          <a:bodyPr wrap="square" rtlCol="0">
-            <a:spAutoFit/>
-          </a:bodyPr>
-          <a:lstStyle/>
-          <a:p>
-            <a:r>
-              <a:rPr lang="en-US" dirty="0"/>
-              <a:t>TDC 100</a:t>
-            </a:r>
-          </a:p>
-        </p:txBody>
-      </p:sp>
-      <p:sp>
-        <p:nvSpPr>
-          <p:cNvPr id="6" name="TextBox 5">
-            <a:extLst>
-              <a:ext uri="{FF2B5EF4-FFF2-40B4-BE49-F238E27FC236}">
-                <a16:creationId xmlns:a16="http://schemas.microsoft.com/office/drawing/2014/main" id="{3B72F9F4-3D8D-DB41-DF2E-4CB9472FF4ED}"/>
-              </a:ext>
-            </a:extLst>
-          </p:cNvPr>
-          <p:cNvSpPr txBox="1"/>
-          <p:nvPr/>
-        </p:nvSpPr>
-        <p:spPr>
-          <a:xfrm>
-            <a:off x="2880360" y="1131901"/>
-            <a:ext cx="5189220" cy="3375283"/>
-          </a:xfrm>
-          <a:prstGeom prst="rect">
-            <a:avLst/>
-          </a:prstGeom>
-          <a:noFill/>
-        </p:spPr>
-        <p:txBody>
-          <a:bodyPr wrap="square" rtlCol="0">
-            <a:spAutoFit/>
-          </a:bodyPr>
-          <a:lstStyle/>
-          <a:p>
-            <a:pPr marL="206550" indent="-206550" defTabSz="308610">
-              <a:spcAft>
-                <a:spcPts val="405"/>
-              </a:spcAft>
-              <a:buClr>
-                <a:schemeClr val="accent1"/>
-              </a:buClr>
-              <a:buSzPct val="92000"/>
-              <a:buFont typeface="Courier New" panose="02070309020205020404" pitchFamily="49" charset="0"/>
-              <a:buChar char="o"/>
-            </a:pPr>
-            <a:r>
-              <a:rPr lang="en-US" altLang="zh-CN" sz="2000" dirty="0">
-                <a:solidFill>
-                  <a:schemeClr val="tx1">
-                    <a:lumMod val="75000"/>
-                    <a:lumOff val="25000"/>
-                  </a:schemeClr>
-                </a:solidFill>
-              </a:rPr>
-              <a:t>The TDC100 has a built-in GNSS antenna inside the rugged handheld body (</a:t>
-            </a:r>
-            <a:r>
-              <a:rPr lang="en-US" altLang="zh-CN" sz="2000" dirty="0"/>
-              <a:t>at the top left of the device, near the speaker</a:t>
-            </a:r>
-            <a:r>
-              <a:rPr lang="en-US" altLang="zh-CN" sz="2000" dirty="0">
-                <a:solidFill>
-                  <a:schemeClr val="tx1">
-                    <a:lumMod val="75000"/>
-                    <a:lumOff val="25000"/>
-                  </a:schemeClr>
-                </a:solidFill>
-              </a:rPr>
-              <a:t>).</a:t>
-            </a:r>
-          </a:p>
-          <a:p>
-            <a:pPr marL="206550" indent="-206550" defTabSz="308610">
-              <a:spcAft>
-                <a:spcPts val="405"/>
-              </a:spcAft>
-              <a:buClr>
-                <a:schemeClr val="accent1"/>
-              </a:buClr>
-              <a:buSzPct val="92000"/>
-              <a:buFont typeface="Courier New" panose="02070309020205020404" pitchFamily="49" charset="0"/>
-              <a:buChar char="o"/>
-            </a:pPr>
-            <a:endParaRPr lang="en-US" altLang="zh-CN" sz="2000" dirty="0">
-              <a:solidFill>
-                <a:schemeClr val="tx1">
-                  <a:lumMod val="75000"/>
-                  <a:lumOff val="25000"/>
-                </a:schemeClr>
-              </a:solidFill>
-            </a:endParaRPr>
-          </a:p>
-          <a:p>
-            <a:pPr marL="206550" indent="-206550" defTabSz="308610">
-              <a:spcAft>
-                <a:spcPts val="405"/>
-              </a:spcAft>
-              <a:buClr>
-                <a:schemeClr val="accent1"/>
-              </a:buClr>
-              <a:buSzPct val="92000"/>
-              <a:buFont typeface="Courier New" panose="02070309020205020404" pitchFamily="49" charset="0"/>
-              <a:buChar char="o"/>
-            </a:pPr>
-            <a:r>
-              <a:rPr lang="en-US" altLang="zh-CN" sz="2000" dirty="0">
-                <a:solidFill>
-                  <a:schemeClr val="tx1">
-                    <a:lumMod val="75000"/>
-                    <a:lumOff val="25000"/>
-                  </a:schemeClr>
-                </a:solidFill>
-              </a:rPr>
-              <a:t>It receives satellite signals (GPS, GLONASS, Galileo, BeiDou) directly without needing an external antenna.</a:t>
-            </a:r>
-          </a:p>
-          <a:p>
-            <a:pPr marL="206550" indent="-206550" defTabSz="308610">
-              <a:spcAft>
-                <a:spcPts val="405"/>
-              </a:spcAft>
-              <a:buClr>
-                <a:schemeClr val="accent1"/>
-              </a:buClr>
-              <a:buSzPct val="92000"/>
-              <a:buFont typeface="Courier New" panose="02070309020205020404" pitchFamily="49" charset="0"/>
-              <a:buChar char="o"/>
-            </a:pPr>
-            <a:endParaRPr lang="en-US" altLang="zh-CN" sz="2000" dirty="0">
-              <a:solidFill>
-                <a:schemeClr val="tx1">
-                  <a:lumMod val="75000"/>
-                  <a:lumOff val="25000"/>
-                </a:schemeClr>
-              </a:solidFill>
-            </a:endParaRPr>
-          </a:p>
-          <a:p>
-            <a:pPr marL="206550" indent="-206550" defTabSz="308610">
-              <a:spcAft>
-                <a:spcPts val="405"/>
-              </a:spcAft>
-              <a:buClr>
-                <a:schemeClr val="accent1"/>
-              </a:buClr>
-              <a:buSzPct val="92000"/>
-              <a:buFont typeface="Courier New" panose="02070309020205020404" pitchFamily="49" charset="0"/>
-              <a:buChar char="o"/>
-            </a:pPr>
-            <a:r>
-              <a:rPr lang="en-US" altLang="zh-CN" sz="2000" dirty="0">
-                <a:solidFill>
-                  <a:schemeClr val="tx1">
-                    <a:lumMod val="75000"/>
-                    <a:lumOff val="25000"/>
-                  </a:schemeClr>
-                </a:solidFill>
-              </a:rPr>
-              <a:t>Designed to work outdoors, it minimizes multipath errors and interference.</a:t>
-            </a:r>
-            <a:endParaRPr lang="zh-CN" altLang="en-US" sz="2000" dirty="0">
-              <a:solidFill>
-                <a:schemeClr val="tx1">
-                  <a:lumMod val="75000"/>
-                  <a:lumOff val="25000"/>
-                </a:schemeClr>
-              </a:solidFill>
-            </a:endParaRPr>
-          </a:p>
-        </p:txBody>
-      </p:sp>
     </p:spTree>
     <p:extLst>
       <p:ext uri="{BB962C8B-B14F-4D97-AF65-F5344CB8AC3E}">
-        <p14:creationId xmlns:p14="http://schemas.microsoft.com/office/powerpoint/2010/main" val="1351131825"/>
+        <p14:creationId xmlns:p14="http://schemas.microsoft.com/office/powerpoint/2010/main" val="1616997216"/>
       </p:ext>
     </p:extLst>
   </p:cSld>
@@ -25422,7 +24985,7 @@
         </p:nvSpPr>
         <p:spPr>
           <a:xfrm>
-            <a:off x="356658" y="224057"/>
+            <a:off x="118533" y="43082"/>
             <a:ext cx="8077200" cy="857250"/>
           </a:xfrm>
           <a:prstGeom prst="rect">
@@ -25451,27 +25014,80 @@
           </a:lstStyle>
           <a:p>
             <a:pPr algn="l"/>
-            <a:r>
-              <a:rPr lang="en-US" sz="3200" dirty="0">
-                <a:solidFill>
-                  <a:srgbClr val="7030A0"/>
-                </a:solidFill>
-              </a:rPr>
-              <a:t>R</a:t>
-            </a:r>
-            <a:r>
-              <a:rPr lang="en-US" altLang="zh-CN" sz="3200" dirty="0">
-                <a:solidFill>
-                  <a:srgbClr val="7030A0"/>
-                </a:solidFill>
-              </a:rPr>
-              <a:t>eceiver hardware</a:t>
-            </a:r>
             <a:endParaRPr lang="en-US" sz="2600" dirty="0">
               <a:solidFill>
                 <a:srgbClr val="7030A0"/>
               </a:solidFill>
             </a:endParaRPr>
+          </a:p>
+        </p:txBody>
+      </p:sp>
+      <p:sp>
+        <p:nvSpPr>
+          <p:cNvPr id="9" name="Content Placeholder 2">
+            <a:extLst>
+              <a:ext uri="{FF2B5EF4-FFF2-40B4-BE49-F238E27FC236}">
+                <a16:creationId xmlns:a16="http://schemas.microsoft.com/office/drawing/2014/main" id="{32CDBEE1-9601-4263-A365-F3F6F0E987D2}"/>
+              </a:ext>
+            </a:extLst>
+          </p:cNvPr>
+          <p:cNvSpPr>
+            <a:spLocks noGrp="1"/>
+          </p:cNvSpPr>
+          <p:nvPr>
+            <p:ph idx="1"/>
+          </p:nvPr>
+        </p:nvSpPr>
+        <p:spPr>
+          <a:xfrm>
+            <a:off x="152400" y="900332"/>
+            <a:ext cx="7825317" cy="1144341"/>
+          </a:xfrm>
+        </p:spPr>
+        <p:txBody>
+          <a:bodyPr>
+            <a:normAutofit/>
+          </a:bodyPr>
+          <a:lstStyle/>
+          <a:p>
+            <a:pPr>
+              <a:spcBef>
+                <a:spcPts val="0"/>
+              </a:spcBef>
+              <a:buFont typeface="Courier New" panose="02070309020205020404" pitchFamily="49" charset="0"/>
+              <a:buChar char="o"/>
+            </a:pPr>
+            <a:r>
+              <a:rPr lang="en-US" sz="1600" dirty="0"/>
+              <a:t>GPS receiver</a:t>
+            </a:r>
+            <a:endParaRPr lang="en-US" sz="1600" b="0" dirty="0"/>
+          </a:p>
+          <a:p>
+            <a:pPr lvl="1">
+              <a:spcBef>
+                <a:spcPts val="0"/>
+              </a:spcBef>
+              <a:buFont typeface="Wingdings" panose="05000000000000000000" pitchFamily="2" charset="2"/>
+              <a:buChar char="ü"/>
+            </a:pPr>
+            <a:r>
+              <a:rPr lang="en-US" sz="1600" dirty="0"/>
+              <a:t>An electronic instrument</a:t>
+            </a:r>
+          </a:p>
+          <a:p>
+            <a:pPr lvl="1">
+              <a:spcBef>
+                <a:spcPts val="0"/>
+              </a:spcBef>
+              <a:buFont typeface="Wingdings" panose="05000000000000000000" pitchFamily="2" charset="2"/>
+              <a:buChar char="ü"/>
+            </a:pPr>
+            <a:r>
+              <a:rPr lang="en-US" sz="1600" dirty="0"/>
+              <a:t>Consists: an antenna, a hardware receiver, and a controller</a:t>
+            </a:r>
           </a:p>
         </p:txBody>
       </p:sp>
@@ -25510,7 +25126,7 @@
           <p:cNvPr id="6" name="Picture 5">
             <a:extLst>
               <a:ext uri="{FF2B5EF4-FFF2-40B4-BE49-F238E27FC236}">
-                <a16:creationId xmlns:a16="http://schemas.microsoft.com/office/drawing/2014/main" id="{B1A1195C-3FDF-4141-B2EC-66A6DA293CE8}"/>
+                <a16:creationId xmlns:a16="http://schemas.microsoft.com/office/drawing/2014/main" id="{5599F066-7780-4AAB-B6A5-821267D0FA41}"/>
               </a:ext>
             </a:extLst>
           </p:cNvPr>
@@ -25527,18 +25143,57 @@
         </p:blipFill>
         <p:spPr>
           <a:xfrm>
-            <a:off x="2795587" y="1895475"/>
-            <a:ext cx="1695450" cy="1638300"/>
+            <a:off x="2922436" y="2067253"/>
+            <a:ext cx="5055281" cy="2869016"/>
           </a:xfrm>
           <a:prstGeom prst="rect">
             <a:avLst/>
           </a:prstGeom>
         </p:spPr>
       </p:pic>
+      <p:sp>
+        <p:nvSpPr>
+          <p:cNvPr id="8" name="TextBox 7">
+            <a:extLst>
+              <a:ext uri="{FF2B5EF4-FFF2-40B4-BE49-F238E27FC236}">
+                <a16:creationId xmlns:a16="http://schemas.microsoft.com/office/drawing/2014/main" id="{C5D297AC-838D-456B-92C5-131C84C4273B}"/>
+              </a:ext>
+            </a:extLst>
+          </p:cNvPr>
+          <p:cNvSpPr txBox="1"/>
+          <p:nvPr/>
+        </p:nvSpPr>
+        <p:spPr>
+          <a:xfrm>
+            <a:off x="5233686" y="4850571"/>
+            <a:ext cx="1587244" cy="246221"/>
+          </a:xfrm>
+          <a:prstGeom prst="rect">
+            <a:avLst/>
+          </a:prstGeom>
+          <a:noFill/>
+        </p:spPr>
+        <p:txBody>
+          <a:bodyPr wrap="square" rtlCol="0">
+            <a:spAutoFit/>
+          </a:bodyPr>
+          <a:lstStyle/>
+          <a:p>
+            <a:r>
+              <a:rPr lang="en-US" sz="1000" dirty="0">
+                <a:solidFill>
+                  <a:srgbClr val="7030A0"/>
+                </a:solidFill>
+              </a:rPr>
+              <a:t>Kaplan &amp; Hegarty, 2006</a:t>
+            </a:r>
+          </a:p>
+        </p:txBody>
+      </p:sp>
     </p:spTree>
     <p:extLst>
       <p:ext uri="{BB962C8B-B14F-4D97-AF65-F5344CB8AC3E}">
-        <p14:creationId xmlns:p14="http://schemas.microsoft.com/office/powerpoint/2010/main" val="967411467"/>
+        <p14:creationId xmlns:p14="http://schemas.microsoft.com/office/powerpoint/2010/main" val="4962173"/>
       </p:ext>
     </p:extLst>
   </p:cSld>
@@ -25623,7 +25278,7 @@
         </p:nvSpPr>
         <p:spPr>
           <a:xfrm>
-            <a:off x="385233" y="193149"/>
+            <a:off x="285750" y="172900"/>
             <a:ext cx="8077200" cy="857250"/>
           </a:xfrm>
           <a:prstGeom prst="rect">
@@ -25658,21 +25313,98 @@
                   <a:srgbClr val="7030A0"/>
                 </a:solidFill>
               </a:rPr>
-              <a:t>R</a:t>
-            </a:r>
-            <a:r>
-              <a:rPr lang="en-US" altLang="zh-CN" sz="3200" dirty="0">
-                <a:solidFill>
-                  <a:srgbClr val="7030A0"/>
-                </a:solidFill>
-              </a:rPr>
-              <a:t>eceiver</a:t>
+              <a:t>Antenna</a:t>
             </a:r>
             <a:endParaRPr lang="en-US" sz="2600" dirty="0">
               <a:solidFill>
                 <a:srgbClr val="7030A0"/>
               </a:solidFill>
             </a:endParaRPr>
+          </a:p>
+        </p:txBody>
+      </p:sp>
+      <p:sp>
+        <p:nvSpPr>
+          <p:cNvPr id="8" name="Content Placeholder 2">
+            <a:extLst>
+              <a:ext uri="{FF2B5EF4-FFF2-40B4-BE49-F238E27FC236}">
+                <a16:creationId xmlns:a16="http://schemas.microsoft.com/office/drawing/2014/main" id="{B39E6661-3EBE-4587-AE2F-09CE39F6F0DD}"/>
+              </a:ext>
+            </a:extLst>
+          </p:cNvPr>
+          <p:cNvSpPr>
+            <a:spLocks noGrp="1"/>
+          </p:cNvSpPr>
+          <p:nvPr>
+            <p:ph idx="1"/>
+          </p:nvPr>
+        </p:nvSpPr>
+        <p:spPr>
+          <a:xfrm>
+            <a:off x="328083" y="1030150"/>
+            <a:ext cx="7825317" cy="2421710"/>
+          </a:xfrm>
+        </p:spPr>
+        <p:txBody>
+          <a:bodyPr>
+            <a:normAutofit/>
+          </a:bodyPr>
+          <a:lstStyle/>
+          <a:p>
+            <a:pPr>
+              <a:spcBef>
+                <a:spcPts val="0"/>
+              </a:spcBef>
+              <a:buFont typeface="Courier New" panose="02070309020205020404" pitchFamily="49" charset="0"/>
+              <a:buChar char="o"/>
+            </a:pPr>
+            <a:r>
+              <a:rPr lang="en-US" sz="2000" dirty="0"/>
+              <a:t>Gathers GNSS/GPS signals from satellite and transform into guided wave</a:t>
+            </a:r>
+          </a:p>
+          <a:p>
+            <a:pPr>
+              <a:spcBef>
+                <a:spcPts val="0"/>
+              </a:spcBef>
+              <a:buFont typeface="Courier New" panose="02070309020205020404" pitchFamily="49" charset="0"/>
+              <a:buChar char="o"/>
+            </a:pPr>
+            <a:r>
+              <a:rPr lang="en-US" sz="2000" b="0" dirty="0"/>
+              <a:t>Quality of GNSS/GPS observation primarily depends on the antenna</a:t>
+            </a:r>
+          </a:p>
+          <a:p>
+            <a:pPr>
+              <a:spcBef>
+                <a:spcPts val="0"/>
+              </a:spcBef>
+              <a:buFont typeface="Courier New" panose="02070309020205020404" pitchFamily="49" charset="0"/>
+              <a:buChar char="o"/>
+            </a:pPr>
+            <a:r>
+              <a:rPr lang="en-US" sz="2000" b="0" dirty="0"/>
+              <a:t>A</a:t>
+            </a:r>
+            <a:r>
+              <a:rPr lang="en-US" sz="2000" dirty="0"/>
+              <a:t>ntenna remains integrated with the receiver electronics and all are kept in a single rugged case</a:t>
+            </a:r>
+          </a:p>
+          <a:p>
+            <a:pPr>
+              <a:spcBef>
+                <a:spcPts val="0"/>
+              </a:spcBef>
+              <a:buFont typeface="Courier New" panose="02070309020205020404" pitchFamily="49" charset="0"/>
+              <a:buChar char="o"/>
+            </a:pPr>
+            <a:r>
+              <a:rPr lang="en-US" sz="2000" b="0" dirty="0"/>
+              <a:t>Antenna can also present as an independent unit.</a:t>
+            </a:r>
           </a:p>
         </p:txBody>
       </p:sp>
@@ -25706,161 +25438,10 @@
           </a:p>
         </p:txBody>
       </p:sp>
-      <p:sp>
-        <p:nvSpPr>
-          <p:cNvPr id="15" name="TextBox 14">
-            <a:extLst>
-              <a:ext uri="{FF2B5EF4-FFF2-40B4-BE49-F238E27FC236}">
-                <a16:creationId xmlns:a16="http://schemas.microsoft.com/office/drawing/2014/main" id="{596E2EFB-256B-4269-ABCE-6114F809C4F5}"/>
-              </a:ext>
-            </a:extLst>
-          </p:cNvPr>
-          <p:cNvSpPr txBox="1"/>
-          <p:nvPr/>
-        </p:nvSpPr>
-        <p:spPr>
-          <a:xfrm>
-            <a:off x="286791" y="4526914"/>
-            <a:ext cx="2388715" cy="461665"/>
-          </a:xfrm>
-          <a:prstGeom prst="rect">
-            <a:avLst/>
-          </a:prstGeom>
-          <a:noFill/>
-        </p:spPr>
-        <p:txBody>
-          <a:bodyPr wrap="square" rtlCol="0">
-            <a:spAutoFit/>
-          </a:bodyPr>
-          <a:lstStyle/>
-          <a:p>
-            <a:r>
-              <a:rPr lang="en-US" sz="2400" dirty="0"/>
-              <a:t>Trimble R7</a:t>
-            </a:r>
-          </a:p>
-        </p:txBody>
-      </p:sp>
-      <p:sp>
-        <p:nvSpPr>
-          <p:cNvPr id="18" name="TextBox 17">
-            <a:extLst>
-              <a:ext uri="{FF2B5EF4-FFF2-40B4-BE49-F238E27FC236}">
-                <a16:creationId xmlns:a16="http://schemas.microsoft.com/office/drawing/2014/main" id="{43749AA5-8A6A-4404-8270-E1E123C083D0}"/>
-              </a:ext>
-            </a:extLst>
-          </p:cNvPr>
-          <p:cNvSpPr txBox="1"/>
-          <p:nvPr/>
-        </p:nvSpPr>
-        <p:spPr>
-          <a:xfrm>
-            <a:off x="3485981" y="4704130"/>
-            <a:ext cx="4136230" cy="246221"/>
-          </a:xfrm>
-          <a:prstGeom prst="rect">
-            <a:avLst/>
-          </a:prstGeom>
-          <a:noFill/>
-        </p:spPr>
-        <p:txBody>
-          <a:bodyPr wrap="square">
-            <a:spAutoFit/>
-          </a:bodyPr>
-          <a:lstStyle/>
-          <a:p>
-            <a:r>
-              <a:rPr lang="en-US" sz="1000" dirty="0">
-                <a:solidFill>
-                  <a:srgbClr val="7030A0"/>
-                </a:solidFill>
-              </a:rPr>
-              <a:t>https://commons.wikimedia.org/wiki/File:Station_GPS_receiver.jpg</a:t>
-            </a:r>
-          </a:p>
-        </p:txBody>
-      </p:sp>
-      <p:pic>
-        <p:nvPicPr>
-          <p:cNvPr id="19" name="Picture 18">
-            <a:extLst>
-              <a:ext uri="{FF2B5EF4-FFF2-40B4-BE49-F238E27FC236}">
-                <a16:creationId xmlns:a16="http://schemas.microsoft.com/office/drawing/2014/main" id="{19B68AFC-9EFC-4DE0-A94C-FEFC48BBC4AC}"/>
-              </a:ext>
-            </a:extLst>
-          </p:cNvPr>
-          <p:cNvPicPr>
-            <a:picLocks noChangeAspect="1"/>
-          </p:cNvPicPr>
-          <p:nvPr/>
-        </p:nvPicPr>
-        <p:blipFill>
-          <a:blip r:embed="rId3"/>
-          <a:stretch>
-            <a:fillRect/>
-          </a:stretch>
-        </p:blipFill>
-        <p:spPr>
-          <a:xfrm>
-            <a:off x="256156" y="1187858"/>
-            <a:ext cx="2419350" cy="3000375"/>
-          </a:xfrm>
-          <a:prstGeom prst="rect">
-            <a:avLst/>
-          </a:prstGeom>
-        </p:spPr>
-      </p:pic>
-      <p:pic>
-        <p:nvPicPr>
-          <p:cNvPr id="1026" name="Picture 2">
-            <a:extLst>
-              <a:ext uri="{FF2B5EF4-FFF2-40B4-BE49-F238E27FC236}">
-                <a16:creationId xmlns:a16="http://schemas.microsoft.com/office/drawing/2014/main" id="{3F25C4B4-FAF2-45FB-95DB-DC89DFC1108A}"/>
-              </a:ext>
-            </a:extLst>
-          </p:cNvPr>
-          <p:cNvPicPr>
-            <a:picLocks noChangeAspect="1" noChangeArrowheads="1"/>
-          </p:cNvPicPr>
-          <p:nvPr/>
-        </p:nvPicPr>
-        <p:blipFill>
-          <a:blip r:embed="rId4">
-            <a:extLst>
-              <a:ext uri="{28A0092B-C50C-407E-A947-70E740481C1C}">
-                <a14:useLocalDpi xmlns:a14="http://schemas.microsoft.com/office/drawing/2010/main" val="0"/>
-              </a:ext>
-            </a:extLst>
-          </a:blip>
-          <a:srcRect/>
-          <a:stretch>
-            <a:fillRect/>
-          </a:stretch>
-        </p:blipFill>
-        <p:spPr bwMode="auto">
-          <a:xfrm>
-            <a:off x="4353946" y="1102133"/>
-            <a:ext cx="2400300" cy="3200400"/>
-          </a:xfrm>
-          <a:prstGeom prst="rect">
-            <a:avLst/>
-          </a:prstGeom>
-          <a:noFill/>
-          <a:extLst>
-            <a:ext uri="{909E8E84-426E-40DD-AFC4-6F175D3DCCD1}">
-              <a14:hiddenFill xmlns:a14="http://schemas.microsoft.com/office/drawing/2010/main">
-                <a:solidFill>
-                  <a:srgbClr val="FFFFFF"/>
-                </a:solidFill>
-              </a14:hiddenFill>
-            </a:ext>
-          </a:extLst>
-        </p:spPr>
-      </p:pic>
     </p:spTree>
     <p:extLst>
       <p:ext uri="{BB962C8B-B14F-4D97-AF65-F5344CB8AC3E}">
-        <p14:creationId xmlns:p14="http://schemas.microsoft.com/office/powerpoint/2010/main" val="3095311133"/>
+        <p14:creationId xmlns:p14="http://schemas.microsoft.com/office/powerpoint/2010/main" val="1482322159"/>
       </p:ext>
     </p:extLst>
   </p:cSld>
@@ -25887,123 +25468,115 @@
           <a:chExt cx="0" cy="0"/>
         </a:xfrm>
       </p:grpSpPr>
-      <p:sp>
-        <p:nvSpPr>
-          <p:cNvPr id="2" name="Title 1">
+      <p:cxnSp>
+        <p:nvCxnSpPr>
+          <p:cNvPr id="4" name="Straight Connector 3">
             <a:extLst>
               <a:ext uri="{FF2B5EF4-FFF2-40B4-BE49-F238E27FC236}">
-                <a16:creationId xmlns:a16="http://schemas.microsoft.com/office/drawing/2014/main" id="{88013FD1-95A0-39FC-A147-9395458686D2}"/>
+                <a16:creationId xmlns:a16="http://schemas.microsoft.com/office/drawing/2014/main" id="{D4EB9696-B2DB-43F4-B52A-F64A3152234F}"/>
               </a:ext>
             </a:extLst>
           </p:cNvPr>
-          <p:cNvSpPr>
-            <a:spLocks noGrp="1"/>
-          </p:cNvSpPr>
-          <p:nvPr>
-            <p:ph type="title"/>
-          </p:nvPr>
-        </p:nvSpPr>
-        <p:spPr>
-          <a:xfrm>
-            <a:off x="392305" y="427557"/>
-            <a:ext cx="7444991" cy="471603"/>
-          </a:xfrm>
-        </p:spPr>
-        <p:txBody>
-          <a:bodyPr>
-            <a:normAutofit/>
-          </a:bodyPr>
-          <a:lstStyle/>
-          <a:p>
-            <a:r>
-              <a:rPr lang="en-US" altLang="zh-CN" sz="2000" dirty="0">
-                <a:solidFill>
-                  <a:srgbClr val="7030A0"/>
-                </a:solidFill>
-              </a:rPr>
-              <a:t>Processor</a:t>
-            </a:r>
-            <a:endParaRPr lang="zh-CN" altLang="en-US" dirty="0"/>
-          </a:p>
-        </p:txBody>
-      </p:sp>
-      <p:sp>
-        <p:nvSpPr>
-          <p:cNvPr id="3" name="Content Placeholder 2">
+          <p:cNvCxnSpPr/>
+          <p:nvPr/>
+        </p:nvCxnSpPr>
+        <p:spPr>
+          <a:xfrm>
+            <a:off x="152400" y="922910"/>
+            <a:ext cx="8001000" cy="0"/>
+          </a:xfrm>
+          <a:prstGeom prst="line">
+            <a:avLst/>
+          </a:prstGeom>
+          <a:ln>
+            <a:solidFill>
+              <a:schemeClr val="tx1"/>
+            </a:solidFill>
+          </a:ln>
+          <a:effectLst/>
+        </p:spPr>
+        <p:style>
+          <a:lnRef idx="2">
+            <a:schemeClr val="accent1"/>
+          </a:lnRef>
+          <a:fillRef idx="0">
+            <a:schemeClr val="accent1"/>
+          </a:fillRef>
+          <a:effectRef idx="1">
+            <a:schemeClr val="accent1"/>
+          </a:effectRef>
+          <a:fontRef idx="minor">
+            <a:schemeClr val="tx1"/>
+          </a:fontRef>
+        </p:style>
+      </p:cxnSp>
+      <p:sp>
+        <p:nvSpPr>
+          <p:cNvPr id="5" name="Title 1">
             <a:extLst>
               <a:ext uri="{FF2B5EF4-FFF2-40B4-BE49-F238E27FC236}">
-                <a16:creationId xmlns:a16="http://schemas.microsoft.com/office/drawing/2014/main" id="{67ED3E9A-CC8A-9CE3-1208-6A359EC657E9}"/>
+                <a16:creationId xmlns:a16="http://schemas.microsoft.com/office/drawing/2014/main" id="{9D7B9A9B-3B1A-4D8A-8275-AAA1205C7D4E}"/>
               </a:ext>
             </a:extLst>
           </p:cNvPr>
-          <p:cNvSpPr>
-            <a:spLocks noGrp="1"/>
-          </p:cNvSpPr>
-          <p:nvPr>
-            <p:ph idx="1"/>
-          </p:nvPr>
-        </p:nvSpPr>
-        <p:spPr>
-          <a:xfrm>
-            <a:off x="392307" y="899160"/>
-            <a:ext cx="7444990" cy="1725643"/>
-          </a:xfrm>
-        </p:spPr>
-        <p:txBody>
-          <a:bodyPr>
+          <p:cNvSpPr txBox="1">
+            <a:spLocks/>
+          </p:cNvSpPr>
+          <p:nvPr/>
+        </p:nvSpPr>
+        <p:spPr>
+          <a:xfrm>
+            <a:off x="217394" y="161668"/>
+            <a:ext cx="8077200" cy="857250"/>
+          </a:xfrm>
+          <a:prstGeom prst="rect">
+            <a:avLst/>
+          </a:prstGeom>
+        </p:spPr>
+        <p:txBody>
+          <a:bodyPr vert="horz" lIns="91440" tIns="45720" rIns="91440" bIns="45720" rtlCol="0" anchor="ctr">
             <a:normAutofit/>
           </a:bodyPr>
-          <a:lstStyle/>
-          <a:p>
-            <a:r>
-              <a:rPr lang="en-US" altLang="zh-CN" sz="1600" dirty="0"/>
-              <a:t>The device runs on </a:t>
-            </a:r>
-            <a:r>
-              <a:rPr lang="en-US" altLang="zh-CN" sz="1600" b="1" dirty="0"/>
-              <a:t>Android OS</a:t>
-            </a:r>
-            <a:r>
-              <a:rPr lang="en-US" altLang="zh-CN" sz="1600" dirty="0"/>
-              <a:t>.</a:t>
-            </a:r>
-          </a:p>
-          <a:p>
-            <a:r>
-              <a:rPr lang="en-US" altLang="zh-CN" sz="1600" dirty="0"/>
-              <a:t>This processor not only handles GNSS signal processing but also runs field apps like </a:t>
-            </a:r>
-            <a:r>
-              <a:rPr lang="en-US" altLang="zh-CN" sz="1600" b="1" dirty="0"/>
-              <a:t>Trimble </a:t>
-            </a:r>
-            <a:r>
-              <a:rPr lang="en-US" altLang="zh-CN" sz="1600" b="1" dirty="0" err="1"/>
-              <a:t>TerraFlex</a:t>
-            </a:r>
-            <a:r>
-              <a:rPr lang="en-US" altLang="zh-CN" sz="1600" b="1" dirty="0"/>
-              <a:t>, Esri Field Maps, or Collector</a:t>
-            </a:r>
-            <a:r>
-              <a:rPr lang="en-US" altLang="zh-CN" sz="1600" dirty="0"/>
-              <a:t>.</a:t>
-            </a:r>
-          </a:p>
-          <a:p>
-            <a:r>
-              <a:rPr lang="en-US" altLang="zh-CN" sz="1600" dirty="0"/>
-              <a:t>It integrates GNSS calculations with mapping, data entry, and communication functions.</a:t>
-            </a:r>
-          </a:p>
-        </p:txBody>
-      </p:sp>
-      <p:sp>
-        <p:nvSpPr>
-          <p:cNvPr id="4" name="Slide Number Placeholder 3">
+          <a:lstStyle>
+            <a:lvl1pPr algn="ctr" defTabSz="411480" rtl="0" eaLnBrk="1" latinLnBrk="0" hangingPunct="1">
+              <a:spcBef>
+                <a:spcPct val="0"/>
+              </a:spcBef>
+              <a:buNone/>
+              <a:defRPr sz="3960" kern="1200">
+                <a:solidFill>
+                  <a:schemeClr val="tx1"/>
+                </a:solidFill>
+                <a:latin typeface="+mj-lt"/>
+                <a:ea typeface="+mj-ea"/>
+                <a:cs typeface="+mj-cs"/>
+              </a:defRPr>
+            </a:lvl1pPr>
+          </a:lstStyle>
+          <a:p>
+            <a:pPr algn="l"/>
+            <a:r>
+              <a:rPr lang="en-US" sz="3200" dirty="0">
+                <a:solidFill>
+                  <a:srgbClr val="7030A0"/>
+                </a:solidFill>
+              </a:rPr>
+              <a:t>Antenna</a:t>
+            </a:r>
+            <a:endParaRPr lang="en-US" sz="2600" dirty="0">
+              <a:solidFill>
+                <a:srgbClr val="7030A0"/>
+              </a:solidFill>
+            </a:endParaRPr>
+          </a:p>
+        </p:txBody>
+      </p:sp>
+      <p:sp>
+        <p:nvSpPr>
+          <p:cNvPr id="2" name="Slide Number Placeholder 1">
             <a:extLst>
               <a:ext uri="{FF2B5EF4-FFF2-40B4-BE49-F238E27FC236}">
-                <a16:creationId xmlns:a16="http://schemas.microsoft.com/office/drawing/2014/main" id="{93D24E8C-EF49-FAE4-772E-55CD97807616}"/>
+                <a16:creationId xmlns:a16="http://schemas.microsoft.com/office/drawing/2014/main" id="{6EDBF9BC-B3FC-4D00-B7E0-B2749A88364A}"/>
               </a:ext>
             </a:extLst>
           </p:cNvPr>
@@ -26028,10 +25601,240 @@
           </a:p>
         </p:txBody>
       </p:sp>
+      <p:pic>
+        <p:nvPicPr>
+          <p:cNvPr id="1030" name="Picture 6" descr="Trimble TDC100 - 4G Android">
+            <a:extLst>
+              <a:ext uri="{FF2B5EF4-FFF2-40B4-BE49-F238E27FC236}">
+                <a16:creationId xmlns:a16="http://schemas.microsoft.com/office/drawing/2014/main" id="{BBD35913-48CE-4E73-8016-4ADF3E933BCA}"/>
+              </a:ext>
+            </a:extLst>
+          </p:cNvPr>
+          <p:cNvPicPr>
+            <a:picLocks noChangeAspect="1" noChangeArrowheads="1"/>
+          </p:cNvPicPr>
+          <p:nvPr/>
+        </p:nvPicPr>
+        <p:blipFill>
+          <a:blip r:embed="rId3">
+            <a:extLst>
+              <a:ext uri="{28A0092B-C50C-407E-A947-70E740481C1C}">
+                <a14:useLocalDpi xmlns:a14="http://schemas.microsoft.com/office/drawing/2010/main" val="0"/>
+              </a:ext>
+            </a:extLst>
+          </a:blip>
+          <a:srcRect/>
+          <a:stretch>
+            <a:fillRect/>
+          </a:stretch>
+        </p:blipFill>
+        <p:spPr bwMode="auto">
+          <a:xfrm>
+            <a:off x="662416" y="1162785"/>
+            <a:ext cx="2023634" cy="2758888"/>
+          </a:xfrm>
+          <a:prstGeom prst="rect">
+            <a:avLst/>
+          </a:prstGeom>
+          <a:noFill/>
+          <a:extLst>
+            <a:ext uri="{909E8E84-426E-40DD-AFC4-6F175D3DCCD1}">
+              <a14:hiddenFill xmlns:a14="http://schemas.microsoft.com/office/drawing/2010/main">
+                <a:solidFill>
+                  <a:srgbClr val="FFFFFF"/>
+                </a:solidFill>
+              </a14:hiddenFill>
+            </a:ext>
+          </a:extLst>
+        </p:spPr>
+      </p:pic>
+      <p:sp>
+        <p:nvSpPr>
+          <p:cNvPr id="9" name="TextBox 8">
+            <a:extLst>
+              <a:ext uri="{FF2B5EF4-FFF2-40B4-BE49-F238E27FC236}">
+                <a16:creationId xmlns:a16="http://schemas.microsoft.com/office/drawing/2014/main" id="{749BE342-C4C5-42CC-9A80-BAEA046A0314}"/>
+              </a:ext>
+            </a:extLst>
+          </p:cNvPr>
+          <p:cNvSpPr txBox="1"/>
+          <p:nvPr/>
+        </p:nvSpPr>
+        <p:spPr>
+          <a:xfrm>
+            <a:off x="442913" y="4767263"/>
+            <a:ext cx="3226503" cy="246221"/>
+          </a:xfrm>
+          <a:prstGeom prst="rect">
+            <a:avLst/>
+          </a:prstGeom>
+          <a:noFill/>
+        </p:spPr>
+        <p:txBody>
+          <a:bodyPr wrap="square" rtlCol="0">
+            <a:spAutoFit/>
+          </a:bodyPr>
+          <a:lstStyle/>
+          <a:p>
+            <a:r>
+              <a:rPr lang="en-US" sz="1000" dirty="0">
+                <a:solidFill>
+                  <a:srgbClr val="7030A0"/>
+                </a:solidFill>
+              </a:rPr>
+              <a:t>Trimble website</a:t>
+            </a:r>
+          </a:p>
+        </p:txBody>
+      </p:sp>
+      <p:sp>
+        <p:nvSpPr>
+          <p:cNvPr id="3" name="TextBox 2">
+            <a:extLst>
+              <a:ext uri="{FF2B5EF4-FFF2-40B4-BE49-F238E27FC236}">
+                <a16:creationId xmlns:a16="http://schemas.microsoft.com/office/drawing/2014/main" id="{C2A8D52D-EA63-4A13-BF07-D1DDFFEB8BA4}"/>
+              </a:ext>
+            </a:extLst>
+          </p:cNvPr>
+          <p:cNvSpPr txBox="1"/>
+          <p:nvPr/>
+        </p:nvSpPr>
+        <p:spPr>
+          <a:xfrm>
+            <a:off x="1050325" y="4206706"/>
+            <a:ext cx="1334530" cy="369332"/>
+          </a:xfrm>
+          <a:prstGeom prst="rect">
+            <a:avLst/>
+          </a:prstGeom>
+          <a:noFill/>
+        </p:spPr>
+        <p:txBody>
+          <a:bodyPr wrap="square" rtlCol="0">
+            <a:spAutoFit/>
+          </a:bodyPr>
+          <a:lstStyle/>
+          <a:p>
+            <a:r>
+              <a:rPr lang="en-US" dirty="0"/>
+              <a:t>TDC 100</a:t>
+            </a:r>
+          </a:p>
+        </p:txBody>
+      </p:sp>
+      <p:sp>
+        <p:nvSpPr>
+          <p:cNvPr id="6" name="TextBox 5">
+            <a:extLst>
+              <a:ext uri="{FF2B5EF4-FFF2-40B4-BE49-F238E27FC236}">
+                <a16:creationId xmlns:a16="http://schemas.microsoft.com/office/drawing/2014/main" id="{3B72F9F4-3D8D-DB41-DF2E-4CB9472FF4ED}"/>
+              </a:ext>
+            </a:extLst>
+          </p:cNvPr>
+          <p:cNvSpPr txBox="1"/>
+          <p:nvPr/>
+        </p:nvSpPr>
+        <p:spPr>
+          <a:xfrm>
+            <a:off x="2880360" y="1131901"/>
+            <a:ext cx="5189220" cy="3375283"/>
+          </a:xfrm>
+          <a:prstGeom prst="rect">
+            <a:avLst/>
+          </a:prstGeom>
+          <a:noFill/>
+        </p:spPr>
+        <p:txBody>
+          <a:bodyPr wrap="square" rtlCol="0">
+            <a:spAutoFit/>
+          </a:bodyPr>
+          <a:lstStyle/>
+          <a:p>
+            <a:pPr marL="206550" indent="-206550" defTabSz="308610">
+              <a:spcAft>
+                <a:spcPts val="405"/>
+              </a:spcAft>
+              <a:buClr>
+                <a:schemeClr val="accent1"/>
+              </a:buClr>
+              <a:buSzPct val="92000"/>
+              <a:buFont typeface="Courier New" panose="02070309020205020404" pitchFamily="49" charset="0"/>
+              <a:buChar char="o"/>
+            </a:pPr>
+            <a:r>
+              <a:rPr lang="en-US" altLang="zh-CN" sz="2000" dirty="0"/>
+              <a:t>The TDC100 has a built-in GNSS antenna inside the rugged handheld body (at the top left of the device, near the speaker).</a:t>
+            </a:r>
+          </a:p>
+          <a:p>
+            <a:pPr marL="206550" indent="-206550" defTabSz="308610">
+              <a:spcAft>
+                <a:spcPts val="405"/>
+              </a:spcAft>
+              <a:buClr>
+                <a:schemeClr val="accent1"/>
+              </a:buClr>
+              <a:buSzPct val="92000"/>
+              <a:buFont typeface="Courier New" panose="02070309020205020404" pitchFamily="49" charset="0"/>
+              <a:buChar char="o"/>
+            </a:pPr>
+            <a:endParaRPr lang="en-US" altLang="zh-CN" sz="2000" dirty="0"/>
+          </a:p>
+          <a:p>
+            <a:pPr marL="206550" indent="-206550" defTabSz="308610">
+              <a:spcAft>
+                <a:spcPts val="405"/>
+              </a:spcAft>
+              <a:buClr>
+                <a:schemeClr val="accent1"/>
+              </a:buClr>
+              <a:buSzPct val="92000"/>
+              <a:buFont typeface="Courier New" panose="02070309020205020404" pitchFamily="49" charset="0"/>
+              <a:buChar char="o"/>
+            </a:pPr>
+            <a:r>
+              <a:rPr lang="en-US" altLang="zh-CN" sz="2000" dirty="0"/>
+              <a:t>It receives satellite signals (GPS, GLONASS, Galileo, BeiDou) directly without needing an external antenna.</a:t>
+            </a:r>
+          </a:p>
+          <a:p>
+            <a:pPr marL="206550" indent="-206550" defTabSz="308610">
+              <a:spcAft>
+                <a:spcPts val="405"/>
+              </a:spcAft>
+              <a:buClr>
+                <a:schemeClr val="accent1"/>
+              </a:buClr>
+              <a:buSzPct val="92000"/>
+              <a:buFont typeface="Courier New" panose="02070309020205020404" pitchFamily="49" charset="0"/>
+              <a:buChar char="o"/>
+            </a:pPr>
+            <a:endParaRPr lang="en-US" altLang="zh-CN" sz="2000" dirty="0"/>
+          </a:p>
+          <a:p>
+            <a:pPr marL="206550" indent="-206550" defTabSz="308610">
+              <a:spcAft>
+                <a:spcPts val="405"/>
+              </a:spcAft>
+              <a:buClr>
+                <a:schemeClr val="accent1"/>
+              </a:buClr>
+              <a:buSzPct val="92000"/>
+              <a:buFont typeface="Courier New" panose="02070309020205020404" pitchFamily="49" charset="0"/>
+              <a:buChar char="o"/>
+            </a:pPr>
+            <a:r>
+              <a:rPr lang="en-US" altLang="zh-CN" sz="2000" dirty="0"/>
+              <a:t>Designed to work outdoors, it minimizes multipath errors and interference.</a:t>
+            </a:r>
+            <a:endParaRPr lang="zh-CN" altLang="en-US" sz="2000" dirty="0"/>
+          </a:p>
+        </p:txBody>
+      </p:sp>
     </p:spTree>
     <p:extLst>
       <p:ext uri="{BB962C8B-B14F-4D97-AF65-F5344CB8AC3E}">
-        <p14:creationId xmlns:p14="http://schemas.microsoft.com/office/powerpoint/2010/main" val="232811641"/>
+        <p14:creationId xmlns:p14="http://schemas.microsoft.com/office/powerpoint/2010/main" val="1351131825"/>
       </p:ext>
     </p:extLst>
   </p:cSld>
@@ -26058,41 +25861,110 @@
           <a:chExt cx="0" cy="0"/>
         </a:xfrm>
       </p:grpSpPr>
-      <p:sp>
-        <p:nvSpPr>
-          <p:cNvPr id="2" name="Title 1">
+      <p:cxnSp>
+        <p:nvCxnSpPr>
+          <p:cNvPr id="4" name="Straight Connector 3">
             <a:extLst>
               <a:ext uri="{FF2B5EF4-FFF2-40B4-BE49-F238E27FC236}">
-                <a16:creationId xmlns:a16="http://schemas.microsoft.com/office/drawing/2014/main" id="{DA2A6737-9DB4-869C-3499-8C4F2106B8B8}"/>
+                <a16:creationId xmlns:a16="http://schemas.microsoft.com/office/drawing/2014/main" id="{D4EB9696-B2DB-43F4-B52A-F64A3152234F}"/>
               </a:ext>
             </a:extLst>
           </p:cNvPr>
-          <p:cNvSpPr>
-            <a:spLocks noGrp="1"/>
-          </p:cNvSpPr>
-          <p:nvPr>
-            <p:ph type="title"/>
-          </p:nvPr>
-        </p:nvSpPr>
-        <p:spPr>
-          <a:xfrm>
-            <a:off x="392305" y="526617"/>
-            <a:ext cx="7444991" cy="410643"/>
-          </a:xfrm>
-        </p:spPr>
-        <p:txBody>
-          <a:bodyPr/>
-          <a:lstStyle/>
-          <a:p>
-            <a:r>
-              <a:rPr lang="en-US" altLang="zh-CN" sz="2000" dirty="0">
+          <p:cNvCxnSpPr/>
+          <p:nvPr/>
+        </p:nvCxnSpPr>
+        <p:spPr>
+          <a:xfrm>
+            <a:off x="152400" y="922910"/>
+            <a:ext cx="8001000" cy="0"/>
+          </a:xfrm>
+          <a:prstGeom prst="line">
+            <a:avLst/>
+          </a:prstGeom>
+          <a:ln>
+            <a:solidFill>
+              <a:schemeClr val="tx1"/>
+            </a:solidFill>
+          </a:ln>
+          <a:effectLst/>
+        </p:spPr>
+        <p:style>
+          <a:lnRef idx="2">
+            <a:schemeClr val="accent1"/>
+          </a:lnRef>
+          <a:fillRef idx="0">
+            <a:schemeClr val="accent1"/>
+          </a:fillRef>
+          <a:effectRef idx="1">
+            <a:schemeClr val="accent1"/>
+          </a:effectRef>
+          <a:fontRef idx="minor">
+            <a:schemeClr val="tx1"/>
+          </a:fontRef>
+        </p:style>
+      </p:cxnSp>
+      <p:sp>
+        <p:nvSpPr>
+          <p:cNvPr id="5" name="Title 1">
+            <a:extLst>
+              <a:ext uri="{FF2B5EF4-FFF2-40B4-BE49-F238E27FC236}">
+                <a16:creationId xmlns:a16="http://schemas.microsoft.com/office/drawing/2014/main" id="{9D7B9A9B-3B1A-4D8A-8275-AAA1205C7D4E}"/>
+              </a:ext>
+            </a:extLst>
+          </p:cNvPr>
+          <p:cNvSpPr txBox="1">
+            <a:spLocks/>
+          </p:cNvSpPr>
+          <p:nvPr/>
+        </p:nvSpPr>
+        <p:spPr>
+          <a:xfrm>
+            <a:off x="356658" y="224057"/>
+            <a:ext cx="8077200" cy="857250"/>
+          </a:xfrm>
+          <a:prstGeom prst="rect">
+            <a:avLst/>
+          </a:prstGeom>
+        </p:spPr>
+        <p:txBody>
+          <a:bodyPr vert="horz" lIns="91440" tIns="45720" rIns="91440" bIns="45720" rtlCol="0" anchor="ctr">
+            <a:normAutofit/>
+          </a:bodyPr>
+          <a:lstStyle>
+            <a:lvl1pPr algn="ctr" defTabSz="411480" rtl="0" eaLnBrk="1" latinLnBrk="0" hangingPunct="1">
+              <a:spcBef>
+                <a:spcPct val="0"/>
+              </a:spcBef>
+              <a:buNone/>
+              <a:defRPr sz="3960" kern="1200">
+                <a:solidFill>
+                  <a:schemeClr val="tx1"/>
+                </a:solidFill>
+                <a:latin typeface="+mj-lt"/>
+                <a:ea typeface="+mj-ea"/>
+                <a:cs typeface="+mj-cs"/>
+              </a:defRPr>
+            </a:lvl1pPr>
+          </a:lstStyle>
+          <a:p>
+            <a:pPr algn="l"/>
+            <a:r>
+              <a:rPr lang="en-US" sz="3200" dirty="0">
                 <a:solidFill>
                   <a:srgbClr val="7030A0"/>
                 </a:solidFill>
               </a:rPr>
-              <a:t>I/O (Input/Output)</a:t>
-            </a:r>
-            <a:endParaRPr lang="zh-CN" altLang="en-US" sz="2000" dirty="0">
+              <a:t>R</a:t>
+            </a:r>
+            <a:r>
+              <a:rPr lang="en-US" altLang="zh-CN" sz="3200" dirty="0">
+                <a:solidFill>
+                  <a:srgbClr val="7030A0"/>
+                </a:solidFill>
+              </a:rPr>
+              <a:t>eceiver hardware</a:t>
+            </a:r>
+            <a:endParaRPr lang="en-US" sz="2600" dirty="0">
               <a:solidFill>
                 <a:srgbClr val="7030A0"/>
               </a:solidFill>
@@ -26102,84 +25974,10 @@
       </p:sp>
       <p:sp>
         <p:nvSpPr>
-          <p:cNvPr id="3" name="Content Placeholder 2">
+          <p:cNvPr id="2" name="Slide Number Placeholder 1">
             <a:extLst>
               <a:ext uri="{FF2B5EF4-FFF2-40B4-BE49-F238E27FC236}">
-                <a16:creationId xmlns:a16="http://schemas.microsoft.com/office/drawing/2014/main" id="{08310925-C680-2D2C-1C73-C1C5FC74700A}"/>
-              </a:ext>
-            </a:extLst>
-          </p:cNvPr>
-          <p:cNvSpPr>
-            <a:spLocks noGrp="1"/>
-          </p:cNvSpPr>
-          <p:nvPr>
-            <p:ph idx="1"/>
-          </p:nvPr>
-        </p:nvSpPr>
-        <p:spPr>
-          <a:xfrm>
-            <a:off x="392307" y="937260"/>
-            <a:ext cx="7444990" cy="2351532"/>
-          </a:xfrm>
-        </p:spPr>
-        <p:txBody>
-          <a:bodyPr>
-            <a:normAutofit/>
-          </a:bodyPr>
-          <a:lstStyle/>
-          <a:p>
-            <a:r>
-              <a:rPr lang="en-US" altLang="zh-CN" sz="1600" dirty="0"/>
-              <a:t>On the TDC100, I/O is through:</a:t>
-            </a:r>
-          </a:p>
-          <a:p>
-            <a:pPr lvl="1"/>
-            <a:r>
-              <a:rPr lang="en-US" altLang="zh-CN" sz="1600" b="1" dirty="0"/>
-              <a:t>Touchscreen</a:t>
-            </a:r>
-            <a:r>
-              <a:rPr lang="en-US" altLang="zh-CN" sz="1600" dirty="0"/>
-              <a:t> (main user input/output).</a:t>
-            </a:r>
-          </a:p>
-          <a:p>
-            <a:pPr lvl="1"/>
-            <a:r>
-              <a:rPr lang="en-US" altLang="zh-CN" sz="1600" b="1" dirty="0"/>
-              <a:t>USB-C and Bluetooth/Wi-Fi</a:t>
-            </a:r>
-            <a:r>
-              <a:rPr lang="en-US" altLang="zh-CN" sz="1600" dirty="0"/>
-              <a:t> (data transfer, connectivity with PCs, sensors, or cloud).</a:t>
-            </a:r>
-          </a:p>
-          <a:p>
-            <a:pPr lvl="1"/>
-            <a:r>
-              <a:rPr lang="en-US" altLang="zh-CN" sz="1600" b="1" dirty="0"/>
-              <a:t>Cellular 4G LTE</a:t>
-            </a:r>
-            <a:r>
-              <a:rPr lang="en-US" altLang="zh-CN" sz="1600" dirty="0"/>
-              <a:t> (real-time sync to ArcGIS Online, Trimble Connect, etc.).</a:t>
-            </a:r>
-          </a:p>
-          <a:p>
-            <a:r>
-              <a:rPr lang="en-US" altLang="zh-CN" sz="1600" dirty="0"/>
-              <a:t>These allow data collected in the field to move seamlessly into enterprise GIS systems.</a:t>
-            </a:r>
-          </a:p>
-        </p:txBody>
-      </p:sp>
-      <p:sp>
-        <p:nvSpPr>
-          <p:cNvPr id="4" name="Slide Number Placeholder 3">
-            <a:extLst>
-              <a:ext uri="{FF2B5EF4-FFF2-40B4-BE49-F238E27FC236}">
-                <a16:creationId xmlns:a16="http://schemas.microsoft.com/office/drawing/2014/main" id="{9D4FC28B-FBEA-4C1E-095F-F02EA7C8816D}"/>
+                <a16:creationId xmlns:a16="http://schemas.microsoft.com/office/drawing/2014/main" id="{6EDBF9BC-B3FC-4D00-B7E0-B2749A88364A}"/>
               </a:ext>
             </a:extLst>
           </p:cNvPr>
@@ -26204,10 +26002,133 @@
           </a:p>
         </p:txBody>
       </p:sp>
+      <p:pic>
+        <p:nvPicPr>
+          <p:cNvPr id="6" name="Picture 5">
+            <a:extLst>
+              <a:ext uri="{FF2B5EF4-FFF2-40B4-BE49-F238E27FC236}">
+                <a16:creationId xmlns:a16="http://schemas.microsoft.com/office/drawing/2014/main" id="{B1A1195C-3FDF-4141-B2EC-66A6DA293CE8}"/>
+              </a:ext>
+            </a:extLst>
+          </p:cNvPr>
+          <p:cNvPicPr>
+            <a:picLocks noChangeAspect="1"/>
+          </p:cNvPicPr>
+          <p:nvPr/>
+        </p:nvPicPr>
+        <p:blipFill>
+          <a:blip r:embed="rId3"/>
+          <a:stretch>
+            <a:fillRect/>
+          </a:stretch>
+        </p:blipFill>
+        <p:spPr>
+          <a:xfrm>
+            <a:off x="6141847" y="1480185"/>
+            <a:ext cx="1695450" cy="1638300"/>
+          </a:xfrm>
+          <a:prstGeom prst="rect">
+            <a:avLst/>
+          </a:prstGeom>
+        </p:spPr>
+      </p:pic>
+      <p:sp>
+        <p:nvSpPr>
+          <p:cNvPr id="3" name="TextBox 2">
+            <a:extLst>
+              <a:ext uri="{FF2B5EF4-FFF2-40B4-BE49-F238E27FC236}">
+                <a16:creationId xmlns:a16="http://schemas.microsoft.com/office/drawing/2014/main" id="{B76E71A2-48AB-2BC6-0A36-B702E24775D8}"/>
+              </a:ext>
+            </a:extLst>
+          </p:cNvPr>
+          <p:cNvSpPr txBox="1"/>
+          <p:nvPr/>
+        </p:nvSpPr>
+        <p:spPr>
+          <a:xfrm>
+            <a:off x="255022" y="1173480"/>
+            <a:ext cx="5623560" cy="3416320"/>
+          </a:xfrm>
+          <a:prstGeom prst="rect">
+            <a:avLst/>
+          </a:prstGeom>
+          <a:noFill/>
+        </p:spPr>
+        <p:txBody>
+          <a:bodyPr wrap="square" rtlCol="0">
+            <a:spAutoFit/>
+          </a:bodyPr>
+          <a:lstStyle/>
+          <a:p>
+            <a:pPr marL="285750" indent="-285750">
+              <a:buFont typeface="Wingdings" panose="05000000000000000000" pitchFamily="2" charset="2"/>
+              <a:buChar char="Ø"/>
+            </a:pPr>
+            <a:r>
+              <a:rPr lang="en-US" dirty="0"/>
+              <a:t>It is the electronic hardware that takes the very weak satellite radio signals captured by the antenna.</a:t>
+            </a:r>
+          </a:p>
+          <a:p>
+            <a:pPr marL="285750" indent="-285750">
+              <a:buFont typeface="Wingdings" panose="05000000000000000000" pitchFamily="2" charset="2"/>
+              <a:buChar char="Ø"/>
+            </a:pPr>
+            <a:endParaRPr lang="en-US" dirty="0"/>
+          </a:p>
+          <a:p>
+            <a:pPr marL="285750" indent="-285750">
+              <a:buFont typeface="Wingdings" panose="05000000000000000000" pitchFamily="2" charset="2"/>
+              <a:buChar char="Ø"/>
+            </a:pPr>
+            <a:r>
+              <a:rPr lang="en-US" dirty="0"/>
+              <a:t>It amplifies those signals (since GPS signals are extremely weak by the time they reach Earth).</a:t>
+            </a:r>
+          </a:p>
+          <a:p>
+            <a:pPr marL="285750" indent="-285750">
+              <a:buFont typeface="Wingdings" panose="05000000000000000000" pitchFamily="2" charset="2"/>
+              <a:buChar char="Ø"/>
+            </a:pPr>
+            <a:endParaRPr lang="en-US" dirty="0"/>
+          </a:p>
+          <a:p>
+            <a:pPr marL="285750" indent="-285750">
+              <a:buFont typeface="Wingdings" panose="05000000000000000000" pitchFamily="2" charset="2"/>
+              <a:buChar char="Ø"/>
+            </a:pPr>
+            <a:r>
+              <a:rPr lang="en-US" dirty="0"/>
+              <a:t>It filters them (so only the GPS frequencies are kept, ignoring other noise).</a:t>
+            </a:r>
+          </a:p>
+          <a:p>
+            <a:pPr marL="285750" indent="-285750">
+              <a:buFont typeface="Wingdings" panose="05000000000000000000" pitchFamily="2" charset="2"/>
+              <a:buChar char="Ø"/>
+            </a:pPr>
+            <a:endParaRPr lang="en-US" dirty="0"/>
+          </a:p>
+          <a:p>
+            <a:pPr marL="285750" indent="-285750">
+              <a:buFont typeface="Wingdings" panose="05000000000000000000" pitchFamily="2" charset="2"/>
+              <a:buChar char="Ø"/>
+            </a:pPr>
+            <a:r>
+              <a:rPr lang="en-US" dirty="0"/>
+              <a:t>It converts the signals into a form that the Processor can understand and use to calculate position.</a:t>
+            </a:r>
+          </a:p>
+          <a:p>
+            <a:endParaRPr lang="en-US" dirty="0"/>
+          </a:p>
+        </p:txBody>
+      </p:sp>
     </p:spTree>
     <p:extLst>
       <p:ext uri="{BB962C8B-B14F-4D97-AF65-F5344CB8AC3E}">
-        <p14:creationId xmlns:p14="http://schemas.microsoft.com/office/powerpoint/2010/main" val="507497891"/>
+        <p14:creationId xmlns:p14="http://schemas.microsoft.com/office/powerpoint/2010/main" val="967411467"/>
       </p:ext>
     </p:extLst>
   </p:cSld>
@@ -26239,7 +26160,7 @@
           <p:cNvPr id="2" name="Title 1">
             <a:extLst>
               <a:ext uri="{FF2B5EF4-FFF2-40B4-BE49-F238E27FC236}">
-                <a16:creationId xmlns:a16="http://schemas.microsoft.com/office/drawing/2014/main" id="{FFF4B37B-BB15-7777-C701-EFCB8D2501BD}"/>
+                <a16:creationId xmlns:a16="http://schemas.microsoft.com/office/drawing/2014/main" id="{88013FD1-95A0-39FC-A147-9395458686D2}"/>
               </a:ext>
             </a:extLst>
           </p:cNvPr>
@@ -26252,23 +26173,25 @@
         </p:nvSpPr>
         <p:spPr>
           <a:xfrm>
-            <a:off x="392307" y="442797"/>
-            <a:ext cx="7444991" cy="463983"/>
-          </a:xfrm>
-        </p:spPr>
-        <p:txBody>
-          <a:bodyPr/>
-          <a:lstStyle/>
-          <a:p>
-            <a:r>
-              <a:rPr lang="en-US" altLang="zh-CN" sz="2000" dirty="0">
+            <a:off x="392307" y="663358"/>
+            <a:ext cx="7444991" cy="471603"/>
+          </a:xfrm>
+        </p:spPr>
+        <p:txBody>
+          <a:bodyPr>
+            <a:noAutofit/>
+          </a:bodyPr>
+          <a:lstStyle/>
+          <a:p>
+            <a:r>
+              <a:rPr lang="en-US" altLang="zh-CN" sz="2800" dirty="0">
                 <a:solidFill>
                   <a:srgbClr val="7030A0"/>
                 </a:solidFill>
               </a:rPr>
-              <a:t>Control Display Unit</a:t>
-            </a:r>
-            <a:endParaRPr lang="zh-CN" altLang="en-US" dirty="0"/>
+              <a:t>Processor</a:t>
+            </a:r>
+            <a:endParaRPr lang="zh-CN" altLang="en-US" sz="2800" dirty="0"/>
           </a:p>
         </p:txBody>
       </p:sp>
@@ -26277,7 +26200,7 @@
           <p:cNvPr id="3" name="Content Placeholder 2">
             <a:extLst>
               <a:ext uri="{FF2B5EF4-FFF2-40B4-BE49-F238E27FC236}">
-                <a16:creationId xmlns:a16="http://schemas.microsoft.com/office/drawing/2014/main" id="{CCE10841-AF2C-9B04-36CF-2F8A9C07B257}"/>
+                <a16:creationId xmlns:a16="http://schemas.microsoft.com/office/drawing/2014/main" id="{67ED3E9A-CC8A-9CE3-1208-6A359EC657E9}"/>
               </a:ext>
             </a:extLst>
           </p:cNvPr>
@@ -26290,8 +26213,8 @@
         </p:nvSpPr>
         <p:spPr>
           <a:xfrm>
-            <a:off x="392307" y="1046988"/>
-            <a:ext cx="7444990" cy="2100071"/>
+            <a:off x="392307" y="1112520"/>
+            <a:ext cx="7444990" cy="2491740"/>
           </a:xfrm>
         </p:spPr>
         <p:txBody>
@@ -26301,66 +26224,44 @@
           <a:lstStyle/>
           <a:p>
             <a:r>
-              <a:rPr lang="en-US" altLang="zh-CN" sz="1600" dirty="0"/>
-              <a:t>The </a:t>
-            </a:r>
-            <a:r>
-              <a:rPr lang="en-US" altLang="zh-CN" sz="1600" b="1" dirty="0"/>
-              <a:t>rugged touchscreen display</a:t>
-            </a:r>
-            <a:r>
-              <a:rPr lang="en-US" altLang="zh-CN" sz="1600" dirty="0"/>
-              <a:t> is the control and display unit.</a:t>
-            </a:r>
-          </a:p>
-          <a:p>
-            <a:r>
-              <a:rPr lang="en-US" altLang="zh-CN" sz="1600" dirty="0"/>
-              <a:t>Users can:</a:t>
-            </a:r>
-          </a:p>
-          <a:p>
-            <a:pPr lvl="1">
-              <a:buFont typeface="Wingdings" panose="05000000000000000000" pitchFamily="2" charset="2"/>
-              <a:buChar char="Ø"/>
-            </a:pPr>
-            <a:r>
-              <a:rPr lang="en-US" altLang="zh-CN" sz="1600" dirty="0"/>
-              <a:t>View GNSS status (satellite strength, accuracy, corrections).</a:t>
-            </a:r>
-          </a:p>
-          <a:p>
-            <a:pPr lvl="1">
-              <a:buFont typeface="Wingdings" panose="05000000000000000000" pitchFamily="2" charset="2"/>
-              <a:buChar char="Ø"/>
-            </a:pPr>
-            <a:r>
-              <a:rPr lang="en-US" altLang="zh-CN" sz="1600" dirty="0"/>
-              <a:t>Interact with GIS apps, maps, forms, and data layers.</a:t>
-            </a:r>
-          </a:p>
-          <a:p>
-            <a:pPr lvl="1">
-              <a:buFont typeface="Wingdings" panose="05000000000000000000" pitchFamily="2" charset="2"/>
-              <a:buChar char="Ø"/>
-            </a:pPr>
-            <a:r>
-              <a:rPr lang="en-US" altLang="zh-CN" sz="1600" dirty="0"/>
-              <a:t>Control system settings and monitor battery/power.</a:t>
-            </a:r>
-          </a:p>
-          <a:p>
-            <a:r>
-              <a:rPr lang="en-US" altLang="zh-CN" sz="1600" dirty="0"/>
-              <a:t>Brightness and ruggedness are optimized for </a:t>
-            </a:r>
-            <a:r>
-              <a:rPr lang="en-US" altLang="zh-CN" sz="1600" b="1" dirty="0"/>
-              <a:t>field visibility and durability</a:t>
-            </a:r>
-            <a:r>
-              <a:rPr lang="en-US" altLang="zh-CN" sz="1600" dirty="0"/>
+              <a:rPr lang="en-US" altLang="zh-CN" sz="2000" dirty="0"/>
+              <a:t>The device runs on </a:t>
+            </a:r>
+            <a:r>
+              <a:rPr lang="en-US" altLang="zh-CN" sz="2000" b="1" dirty="0"/>
+              <a:t>Android OS</a:t>
+            </a:r>
+            <a:r>
+              <a:rPr lang="en-US" altLang="zh-CN" sz="2000" dirty="0"/>
               <a:t>.</a:t>
+            </a:r>
+          </a:p>
+          <a:p>
+            <a:r>
+              <a:rPr lang="en-US" altLang="zh-CN" sz="2000" dirty="0"/>
+              <a:t>This processor not only handles GNSS signal processing but also runs field apps like </a:t>
+            </a:r>
+            <a:r>
+              <a:rPr lang="en-US" altLang="zh-CN" sz="2000" b="1" dirty="0"/>
+              <a:t>Trimble </a:t>
+            </a:r>
+            <a:r>
+              <a:rPr lang="en-US" altLang="zh-CN" sz="2000" b="1" dirty="0" err="1"/>
+              <a:t>TerraFlex</a:t>
+            </a:r>
+            <a:r>
+              <a:rPr lang="en-US" altLang="zh-CN" sz="2000" b="1" dirty="0"/>
+              <a:t>, Esri Field Maps, or Collector</a:t>
+            </a:r>
+            <a:r>
+              <a:rPr lang="en-US" altLang="zh-CN" sz="2000" dirty="0"/>
+              <a:t>.</a:t>
+            </a:r>
+          </a:p>
+          <a:p>
+            <a:r>
+              <a:rPr lang="en-US" altLang="zh-CN" sz="2000" dirty="0"/>
+              <a:t>It integrates GNSS calculations with mapping, data entry, and communication functions.</a:t>
             </a:r>
           </a:p>
         </p:txBody>
@@ -26370,7 +26271,7 @@
           <p:cNvPr id="4" name="Slide Number Placeholder 3">
             <a:extLst>
               <a:ext uri="{FF2B5EF4-FFF2-40B4-BE49-F238E27FC236}">
-                <a16:creationId xmlns:a16="http://schemas.microsoft.com/office/drawing/2014/main" id="{E82513E6-444D-14B7-B5DD-752A4D333910}"/>
+                <a16:creationId xmlns:a16="http://schemas.microsoft.com/office/drawing/2014/main" id="{93D24E8C-EF49-FAE4-772E-55CD97807616}"/>
               </a:ext>
             </a:extLst>
           </p:cNvPr>
@@ -26398,7 +26299,7 @@
     </p:spTree>
     <p:extLst>
       <p:ext uri="{BB962C8B-B14F-4D97-AF65-F5344CB8AC3E}">
-        <p14:creationId xmlns:p14="http://schemas.microsoft.com/office/powerpoint/2010/main" val="274900632"/>
+        <p14:creationId xmlns:p14="http://schemas.microsoft.com/office/powerpoint/2010/main" val="232811641"/>
       </p:ext>
     </p:extLst>
   </p:cSld>
@@ -26430,7 +26331,7 @@
           <p:cNvPr id="2" name="Title 1">
             <a:extLst>
               <a:ext uri="{FF2B5EF4-FFF2-40B4-BE49-F238E27FC236}">
-                <a16:creationId xmlns:a16="http://schemas.microsoft.com/office/drawing/2014/main" id="{D466FC72-7A82-0650-B29F-648E094CC979}"/>
+                <a16:creationId xmlns:a16="http://schemas.microsoft.com/office/drawing/2014/main" id="{DA2A6737-9DB4-869C-3499-8C4F2106B8B8}"/>
               </a:ext>
             </a:extLst>
           </p:cNvPr>
@@ -26444,7 +26345,7 @@
         <p:spPr>
           <a:xfrm>
             <a:off x="392305" y="526617"/>
-            <a:ext cx="7444991" cy="403023"/>
+            <a:ext cx="7444991" cy="410643"/>
           </a:xfrm>
         </p:spPr>
         <p:txBody>
@@ -26452,18 +26353,18 @@
           <a:lstStyle/>
           <a:p>
             <a:r>
-              <a:rPr lang="en-US" altLang="zh-CN" dirty="0"/>
-              <a:t>Trimble </a:t>
-            </a:r>
-            <a:r>
-              <a:rPr lang="en-US" altLang="zh-CN" dirty="0" err="1"/>
-              <a:t>tdc</a:t>
-            </a:r>
-            <a:r>
-              <a:rPr lang="en-US" altLang="zh-CN" dirty="0"/>
-              <a:t> 100 series handheld overview</a:t>
-            </a:r>
-            <a:endParaRPr lang="zh-CN" altLang="en-US" dirty="0"/>
+              <a:rPr lang="en-US" altLang="zh-CN" sz="2000" dirty="0">
+                <a:solidFill>
+                  <a:srgbClr val="7030A0"/>
+                </a:solidFill>
+              </a:rPr>
+              <a:t>I/O (Input/Output)</a:t>
+            </a:r>
+            <a:endParaRPr lang="zh-CN" altLang="en-US" sz="2000" dirty="0">
+              <a:solidFill>
+                <a:srgbClr val="7030A0"/>
+              </a:solidFill>
+            </a:endParaRPr>
           </a:p>
         </p:txBody>
       </p:sp>
@@ -26472,7 +26373,7 @@
           <p:cNvPr id="3" name="Content Placeholder 2">
             <a:extLst>
               <a:ext uri="{FF2B5EF4-FFF2-40B4-BE49-F238E27FC236}">
-                <a16:creationId xmlns:a16="http://schemas.microsoft.com/office/drawing/2014/main" id="{6FBA0C13-FAE7-8733-9A05-C4962EFD46C6}"/>
+                <a16:creationId xmlns:a16="http://schemas.microsoft.com/office/drawing/2014/main" id="{08310925-C680-2D2C-1C73-C1C5FC74700A}"/>
               </a:ext>
             </a:extLst>
           </p:cNvPr>
@@ -26485,19 +26386,59 @@
         </p:nvSpPr>
         <p:spPr>
           <a:xfrm>
-            <a:off x="392304" y="1118617"/>
-            <a:ext cx="7444990" cy="637032"/>
-          </a:xfrm>
-        </p:spPr>
-        <p:txBody>
-          <a:bodyPr/>
-          <a:lstStyle/>
-          <a:p>
-            <a:r>
-              <a:rPr lang="en-US" altLang="zh-CN" dirty="0"/>
-              <a:t>https://www.youtube.com/watch?v=fimWxYMRiF8</a:t>
-            </a:r>
-            <a:endParaRPr lang="zh-CN" altLang="en-US" dirty="0"/>
+            <a:off x="392307" y="937260"/>
+            <a:ext cx="7444990" cy="2351532"/>
+          </a:xfrm>
+        </p:spPr>
+        <p:txBody>
+          <a:bodyPr>
+            <a:normAutofit/>
+          </a:bodyPr>
+          <a:lstStyle/>
+          <a:p>
+            <a:r>
+              <a:rPr lang="en-US" altLang="zh-CN" sz="1600" dirty="0"/>
+              <a:t>On the TDC100, I/O is through:</a:t>
+            </a:r>
+          </a:p>
+          <a:p>
+            <a:pPr lvl="1"/>
+            <a:r>
+              <a:rPr lang="en-US" altLang="zh-CN" sz="1600" b="1" dirty="0"/>
+              <a:t>Touchscreen</a:t>
+            </a:r>
+            <a:r>
+              <a:rPr lang="en-US" altLang="zh-CN" sz="1600" dirty="0"/>
+              <a:t> (main user input/output).</a:t>
+            </a:r>
+          </a:p>
+          <a:p>
+            <a:pPr lvl="1"/>
+            <a:r>
+              <a:rPr lang="en-US" altLang="zh-CN" sz="1600" b="1" dirty="0"/>
+              <a:t>USB-C and Bluetooth/Wi-Fi</a:t>
+            </a:r>
+            <a:r>
+              <a:rPr lang="en-US" altLang="zh-CN" sz="1600" dirty="0"/>
+              <a:t> (data transfer, connectivity with PCs, sensors, or cloud).</a:t>
+            </a:r>
+          </a:p>
+          <a:p>
+            <a:pPr lvl="1"/>
+            <a:r>
+              <a:rPr lang="en-US" altLang="zh-CN" sz="1600" b="1" dirty="0"/>
+              <a:t>Cellular 4G LTE</a:t>
+            </a:r>
+            <a:r>
+              <a:rPr lang="en-US" altLang="zh-CN" sz="1600" dirty="0"/>
+              <a:t> (real-time sync to ArcGIS Online, Trimble Connect, etc.).</a:t>
+            </a:r>
+          </a:p>
+          <a:p>
+            <a:r>
+              <a:rPr lang="en-US" altLang="zh-CN" sz="1600" dirty="0"/>
+              <a:t>These allow data collected in the field to move seamlessly into enterprise GIS systems.</a:t>
+            </a:r>
           </a:p>
         </p:txBody>
       </p:sp>
@@ -26506,7 +26447,7 @@
           <p:cNvPr id="4" name="Slide Number Placeholder 3">
             <a:extLst>
               <a:ext uri="{FF2B5EF4-FFF2-40B4-BE49-F238E27FC236}">
-                <a16:creationId xmlns:a16="http://schemas.microsoft.com/office/drawing/2014/main" id="{64AA36AD-947B-43ED-804C-08693D83D8A8}"/>
+                <a16:creationId xmlns:a16="http://schemas.microsoft.com/office/drawing/2014/main" id="{9D4FC28B-FBEA-4C1E-095F-F02EA7C8816D}"/>
               </a:ext>
             </a:extLst>
           </p:cNvPr>
@@ -26534,7 +26475,7 @@
     </p:spTree>
     <p:extLst>
       <p:ext uri="{BB962C8B-B14F-4D97-AF65-F5344CB8AC3E}">
-        <p14:creationId xmlns:p14="http://schemas.microsoft.com/office/powerpoint/2010/main" val="4168480455"/>
+        <p14:creationId xmlns:p14="http://schemas.microsoft.com/office/powerpoint/2010/main" val="507497891"/>
       </p:ext>
     </p:extLst>
   </p:cSld>
@@ -26566,7 +26507,7 @@
           <p:cNvPr id="2" name="Title 1">
             <a:extLst>
               <a:ext uri="{FF2B5EF4-FFF2-40B4-BE49-F238E27FC236}">
-                <a16:creationId xmlns:a16="http://schemas.microsoft.com/office/drawing/2014/main" id="{BECF46BF-B5CD-D6E7-49F8-2846B90E2FF5}"/>
+                <a16:creationId xmlns:a16="http://schemas.microsoft.com/office/drawing/2014/main" id="{FFF4B37B-BB15-7777-C701-EFCB8D2501BD}"/>
               </a:ext>
             </a:extLst>
           </p:cNvPr>
@@ -26579,8 +26520,8 @@
         </p:nvSpPr>
         <p:spPr>
           <a:xfrm>
-            <a:off x="392305" y="526617"/>
-            <a:ext cx="7444991" cy="471603"/>
+            <a:off x="392307" y="442797"/>
+            <a:ext cx="7444991" cy="463983"/>
           </a:xfrm>
         </p:spPr>
         <p:txBody>
@@ -26593,21 +26534,9 @@
                   <a:srgbClr val="7030A0"/>
                 </a:solidFill>
               </a:rPr>
-              <a:t>In-Class Activity: Exploring GNSS with </a:t>
-            </a:r>
-            <a:r>
-              <a:rPr lang="en-US" altLang="zh-CN" sz="2000" dirty="0" err="1">
-                <a:solidFill>
-                  <a:srgbClr val="7030A0"/>
-                </a:solidFill>
-              </a:rPr>
-              <a:t>SatLook</a:t>
-            </a:r>
-            <a:endParaRPr lang="zh-CN" altLang="en-US" sz="2000" dirty="0">
-              <a:solidFill>
-                <a:srgbClr val="7030A0"/>
-              </a:solidFill>
-            </a:endParaRPr>
+              <a:t>Control Display Unit</a:t>
+            </a:r>
+            <a:endParaRPr lang="zh-CN" altLang="en-US" dirty="0"/>
           </a:p>
         </p:txBody>
       </p:sp>
@@ -26616,7 +26545,7 @@
           <p:cNvPr id="3" name="Content Placeholder 2">
             <a:extLst>
               <a:ext uri="{FF2B5EF4-FFF2-40B4-BE49-F238E27FC236}">
-                <a16:creationId xmlns:a16="http://schemas.microsoft.com/office/drawing/2014/main" id="{830E38D9-98D2-F45D-B01B-0A676B492622}"/>
+                <a16:creationId xmlns:a16="http://schemas.microsoft.com/office/drawing/2014/main" id="{CCE10841-AF2C-9B04-36CF-2F8A9C07B257}"/>
               </a:ext>
             </a:extLst>
           </p:cNvPr>
@@ -26629,21 +26558,78 @@
         </p:nvSpPr>
         <p:spPr>
           <a:xfrm>
-            <a:off x="392307" y="1060700"/>
-            <a:ext cx="7444990" cy="621792"/>
+            <a:off x="392307" y="1046988"/>
+            <a:ext cx="7444990" cy="2100071"/>
           </a:xfrm>
         </p:spPr>
         <p:txBody>
           <a:bodyPr>
-            <a:normAutofit/>
+            <a:noAutofit/>
           </a:bodyPr>
           <a:lstStyle/>
           <a:p>
             <a:r>
               <a:rPr lang="en-US" altLang="zh-CN" sz="1600" dirty="0"/>
-              <a:t>What do you think affects GPS accuracy?</a:t>
-            </a:r>
-            <a:endParaRPr lang="zh-CN" altLang="en-US" sz="1600" dirty="0"/>
+              <a:t>The </a:t>
+            </a:r>
+            <a:r>
+              <a:rPr lang="en-US" altLang="zh-CN" sz="1600" b="1" dirty="0"/>
+              <a:t>rugged touchscreen display</a:t>
+            </a:r>
+            <a:r>
+              <a:rPr lang="en-US" altLang="zh-CN" sz="1600" dirty="0"/>
+              <a:t> is the control and display unit.</a:t>
+            </a:r>
+          </a:p>
+          <a:p>
+            <a:r>
+              <a:rPr lang="en-US" altLang="zh-CN" sz="1600" dirty="0"/>
+              <a:t>Users can:</a:t>
+            </a:r>
+          </a:p>
+          <a:p>
+            <a:pPr lvl="1">
+              <a:buFont typeface="Wingdings" panose="05000000000000000000" pitchFamily="2" charset="2"/>
+              <a:buChar char="Ø"/>
+            </a:pPr>
+            <a:r>
+              <a:rPr lang="en-US" altLang="zh-CN" sz="1600" dirty="0"/>
+              <a:t>View GNSS status (satellite strength, accuracy, corrections).</a:t>
+            </a:r>
+          </a:p>
+          <a:p>
+            <a:pPr lvl="1">
+              <a:buFont typeface="Wingdings" panose="05000000000000000000" pitchFamily="2" charset="2"/>
+              <a:buChar char="Ø"/>
+            </a:pPr>
+            <a:r>
+              <a:rPr lang="en-US" altLang="zh-CN" sz="1600" dirty="0"/>
+              <a:t>Interact with GIS apps, maps, forms, and data layers.</a:t>
+            </a:r>
+          </a:p>
+          <a:p>
+            <a:pPr lvl="1">
+              <a:buFont typeface="Wingdings" panose="05000000000000000000" pitchFamily="2" charset="2"/>
+              <a:buChar char="Ø"/>
+            </a:pPr>
+            <a:r>
+              <a:rPr lang="en-US" altLang="zh-CN" sz="1600" dirty="0"/>
+              <a:t>Control system settings and monitor battery/power.</a:t>
+            </a:r>
+          </a:p>
+          <a:p>
+            <a:r>
+              <a:rPr lang="en-US" altLang="zh-CN" sz="1600" dirty="0"/>
+              <a:t>Brightness and ruggedness are optimized for </a:t>
+            </a:r>
+            <a:r>
+              <a:rPr lang="en-US" altLang="zh-CN" sz="1600" b="1" dirty="0"/>
+              <a:t>field visibility and durability</a:t>
+            </a:r>
+            <a:r>
+              <a:rPr lang="en-US" altLang="zh-CN" sz="1600" dirty="0"/>
+              <a:t>.</a:t>
+            </a:r>
           </a:p>
         </p:txBody>
       </p:sp>
@@ -26652,7 +26638,7 @@
           <p:cNvPr id="4" name="Slide Number Placeholder 3">
             <a:extLst>
               <a:ext uri="{FF2B5EF4-FFF2-40B4-BE49-F238E27FC236}">
-                <a16:creationId xmlns:a16="http://schemas.microsoft.com/office/drawing/2014/main" id="{87AFF3DF-1D5B-444D-13A9-F9F72ADF32FA}"/>
+                <a16:creationId xmlns:a16="http://schemas.microsoft.com/office/drawing/2014/main" id="{E82513E6-444D-14B7-B5DD-752A4D333910}"/>
               </a:ext>
             </a:extLst>
           </p:cNvPr>
@@ -26677,231 +26663,10 @@
           </a:p>
         </p:txBody>
       </p:sp>
-      <p:sp>
-        <p:nvSpPr>
-          <p:cNvPr id="6" name="TextBox 5">
-            <a:extLst>
-              <a:ext uri="{FF2B5EF4-FFF2-40B4-BE49-F238E27FC236}">
-                <a16:creationId xmlns:a16="http://schemas.microsoft.com/office/drawing/2014/main" id="{9A06EE18-841C-473C-E877-255939906159}"/>
-              </a:ext>
-            </a:extLst>
-          </p:cNvPr>
-          <p:cNvSpPr txBox="1"/>
-          <p:nvPr/>
-        </p:nvSpPr>
-        <p:spPr>
-          <a:xfrm>
-            <a:off x="1085977" y="1752601"/>
-            <a:ext cx="6751320" cy="2318583"/>
-          </a:xfrm>
-          <a:prstGeom prst="rect">
-            <a:avLst/>
-          </a:prstGeom>
-          <a:noFill/>
-        </p:spPr>
-        <p:txBody>
-          <a:bodyPr wrap="square" rtlCol="0">
-            <a:spAutoFit/>
-          </a:bodyPr>
-          <a:lstStyle/>
-          <a:p>
-            <a:pPr marL="342900" indent="-342900" defTabSz="308610">
-              <a:spcBef>
-                <a:spcPct val="20000"/>
-              </a:spcBef>
-              <a:spcAft>
-                <a:spcPts val="405"/>
-              </a:spcAft>
-              <a:buClr>
-                <a:schemeClr val="accent1"/>
-              </a:buClr>
-              <a:buSzPct val="92000"/>
-              <a:buFont typeface="+mj-lt"/>
-              <a:buAutoNum type="arabicPeriod"/>
-            </a:pPr>
-            <a:r>
-              <a:rPr lang="en-US" altLang="zh-CN" sz="1600" dirty="0">
-                <a:solidFill>
-                  <a:schemeClr val="tx1">
-                    <a:lumMod val="75000"/>
-                    <a:lumOff val="25000"/>
-                  </a:schemeClr>
-                </a:solidFill>
-              </a:rPr>
-              <a:t>Open </a:t>
-            </a:r>
-            <a:r>
-              <a:rPr lang="en-US" altLang="zh-CN" sz="1600" dirty="0" err="1">
-                <a:solidFill>
-                  <a:schemeClr val="tx1">
-                    <a:lumMod val="75000"/>
-                    <a:lumOff val="25000"/>
-                  </a:schemeClr>
-                </a:solidFill>
-              </a:rPr>
-              <a:t>SatLook</a:t>
-            </a:r>
-            <a:r>
-              <a:rPr lang="en-US" altLang="zh-CN" sz="1600" dirty="0">
-                <a:solidFill>
-                  <a:schemeClr val="tx1">
-                    <a:lumMod val="75000"/>
-                    <a:lumOff val="25000"/>
-                  </a:schemeClr>
-                </a:solidFill>
-              </a:rPr>
-              <a:t> on your TDC100.</a:t>
-            </a:r>
-          </a:p>
-          <a:p>
-            <a:pPr marL="342900" indent="-342900" defTabSz="308610">
-              <a:spcBef>
-                <a:spcPct val="20000"/>
-              </a:spcBef>
-              <a:spcAft>
-                <a:spcPts val="405"/>
-              </a:spcAft>
-              <a:buClr>
-                <a:schemeClr val="accent1"/>
-              </a:buClr>
-              <a:buSzPct val="92000"/>
-              <a:buFont typeface="+mj-lt"/>
-              <a:buAutoNum type="arabicPeriod"/>
-            </a:pPr>
-            <a:r>
-              <a:rPr lang="en-US" altLang="zh-CN" sz="1600" dirty="0">
-                <a:solidFill>
-                  <a:schemeClr val="tx1">
-                    <a:lumMod val="75000"/>
-                    <a:lumOff val="25000"/>
-                  </a:schemeClr>
-                </a:solidFill>
-              </a:rPr>
-              <a:t>Show the 3 tabs:</a:t>
-            </a:r>
-          </a:p>
-          <a:p>
-            <a:pPr marL="663750" lvl="1" indent="-206550" defTabSz="308610">
-              <a:spcBef>
-                <a:spcPct val="20000"/>
-              </a:spcBef>
-              <a:spcAft>
-                <a:spcPts val="405"/>
-              </a:spcAft>
-              <a:buClr>
-                <a:schemeClr val="accent1"/>
-              </a:buClr>
-              <a:buSzPct val="92000"/>
-              <a:buFont typeface="Wingdings 2" panose="05020102010507070707" pitchFamily="18" charset="2"/>
-              <a:buChar char=""/>
-            </a:pPr>
-            <a:r>
-              <a:rPr lang="en-US" altLang="zh-CN" sz="1600" dirty="0">
-                <a:solidFill>
-                  <a:schemeClr val="tx1">
-                    <a:lumMod val="75000"/>
-                    <a:lumOff val="25000"/>
-                  </a:schemeClr>
-                </a:solidFill>
-              </a:rPr>
-              <a:t>Sky Plot → Satellites in the sky (constellation + geometry).</a:t>
-            </a:r>
-          </a:p>
-          <a:p>
-            <a:pPr marL="663750" lvl="1" indent="-206550" defTabSz="308610">
-              <a:spcBef>
-                <a:spcPct val="20000"/>
-              </a:spcBef>
-              <a:spcAft>
-                <a:spcPts val="405"/>
-              </a:spcAft>
-              <a:buClr>
-                <a:schemeClr val="accent1"/>
-              </a:buClr>
-              <a:buSzPct val="92000"/>
-              <a:buFont typeface="Wingdings 2" panose="05020102010507070707" pitchFamily="18" charset="2"/>
-              <a:buChar char=""/>
-            </a:pPr>
-            <a:r>
-              <a:rPr lang="en-US" altLang="zh-CN" sz="1600" dirty="0">
-                <a:solidFill>
-                  <a:schemeClr val="tx1">
-                    <a:lumMod val="75000"/>
-                    <a:lumOff val="25000"/>
-                  </a:schemeClr>
-                </a:solidFill>
-              </a:rPr>
-              <a:t>NMEA → Raw GNSS data (for advanced logging).</a:t>
-            </a:r>
-          </a:p>
-          <a:p>
-            <a:pPr marL="663750" lvl="1" indent="-206550" defTabSz="308610">
-              <a:spcBef>
-                <a:spcPct val="20000"/>
-              </a:spcBef>
-              <a:spcAft>
-                <a:spcPts val="405"/>
-              </a:spcAft>
-              <a:buClr>
-                <a:schemeClr val="accent1"/>
-              </a:buClr>
-              <a:buSzPct val="92000"/>
-              <a:buFont typeface="Wingdings 2" panose="05020102010507070707" pitchFamily="18" charset="2"/>
-              <a:buChar char=""/>
-            </a:pPr>
-            <a:r>
-              <a:rPr lang="en-US" altLang="zh-CN" sz="1600" dirty="0">
-                <a:solidFill>
-                  <a:schemeClr val="tx1">
-                    <a:lumMod val="75000"/>
-                    <a:lumOff val="25000"/>
-                  </a:schemeClr>
-                </a:solidFill>
-              </a:rPr>
-              <a:t>SNR → Signal strength for each satellite.</a:t>
-            </a:r>
-          </a:p>
-          <a:p>
-            <a:pPr marL="663750" lvl="1" indent="-206550" defTabSz="308610">
-              <a:spcBef>
-                <a:spcPct val="20000"/>
-              </a:spcBef>
-              <a:spcAft>
-                <a:spcPts val="405"/>
-              </a:spcAft>
-              <a:buClr>
-                <a:schemeClr val="accent1"/>
-              </a:buClr>
-              <a:buSzPct val="92000"/>
-              <a:buFont typeface="Wingdings 2" panose="05020102010507070707" pitchFamily="18" charset="2"/>
-              <a:buChar char=""/>
-            </a:pPr>
-            <a:r>
-              <a:rPr lang="en-US" altLang="zh-CN" sz="1600" dirty="0">
-                <a:solidFill>
-                  <a:schemeClr val="tx1">
-                    <a:lumMod val="75000"/>
-                    <a:lumOff val="25000"/>
-                  </a:schemeClr>
-                </a:solidFill>
-              </a:rPr>
-              <a:t>Highlight: “Tracked vs Used satellites”, SNR levels, and constellations (GPS, GLONASS, BeiDou, Galileo).</a:t>
-            </a:r>
-            <a:endParaRPr lang="zh-CN" altLang="en-US" sz="1600" dirty="0">
-              <a:solidFill>
-                <a:schemeClr val="tx1">
-                  <a:lumMod val="75000"/>
-                  <a:lumOff val="25000"/>
-                </a:schemeClr>
-              </a:solidFill>
-            </a:endParaRPr>
-          </a:p>
-        </p:txBody>
-      </p:sp>
     </p:spTree>
     <p:extLst>
       <p:ext uri="{BB962C8B-B14F-4D97-AF65-F5344CB8AC3E}">
-        <p14:creationId xmlns:p14="http://schemas.microsoft.com/office/powerpoint/2010/main" val="2321144453"/>
+        <p14:creationId xmlns:p14="http://schemas.microsoft.com/office/powerpoint/2010/main" val="274900632"/>
       </p:ext>
     </p:extLst>
   </p:cSld>
@@ -26928,41 +26693,88 @@
           <a:chExt cx="0" cy="0"/>
         </a:xfrm>
       </p:grpSpPr>
-      <p:pic>
-        <p:nvPicPr>
-          <p:cNvPr id="7" name="Content Placeholder 6" descr="A screenshot of a cell phone&#10;&#10;AI-generated content may be incorrect.">
+      <p:sp>
+        <p:nvSpPr>
+          <p:cNvPr id="2" name="Title 1">
             <a:extLst>
               <a:ext uri="{FF2B5EF4-FFF2-40B4-BE49-F238E27FC236}">
-                <a16:creationId xmlns:a16="http://schemas.microsoft.com/office/drawing/2014/main" id="{DE80989D-19AC-0207-776D-DEB9DFADF45C}"/>
+                <a16:creationId xmlns:a16="http://schemas.microsoft.com/office/drawing/2014/main" id="{D466FC72-7A82-0650-B29F-648E094CC979}"/>
               </a:ext>
             </a:extLst>
           </p:cNvPr>
-          <p:cNvPicPr>
-            <a:picLocks noGrp="1" noChangeAspect="1"/>
-          </p:cNvPicPr>
+          <p:cNvSpPr>
+            <a:spLocks noGrp="1"/>
+          </p:cNvSpPr>
+          <p:nvPr>
+            <p:ph type="title"/>
+          </p:nvPr>
+        </p:nvSpPr>
+        <p:spPr>
+          <a:xfrm>
+            <a:off x="392305" y="526617"/>
+            <a:ext cx="7444991" cy="403023"/>
+          </a:xfrm>
+        </p:spPr>
+        <p:txBody>
+          <a:bodyPr/>
+          <a:lstStyle/>
+          <a:p>
+            <a:r>
+              <a:rPr lang="en-US" altLang="zh-CN" dirty="0"/>
+              <a:t>Trimble </a:t>
+            </a:r>
+            <a:r>
+              <a:rPr lang="en-US" altLang="zh-CN" dirty="0" err="1"/>
+              <a:t>tdc</a:t>
+            </a:r>
+            <a:r>
+              <a:rPr lang="en-US" altLang="zh-CN" dirty="0"/>
+              <a:t> 100 series handheld overview</a:t>
+            </a:r>
+            <a:endParaRPr lang="zh-CN" altLang="en-US" dirty="0"/>
+          </a:p>
+        </p:txBody>
+      </p:sp>
+      <p:sp>
+        <p:nvSpPr>
+          <p:cNvPr id="3" name="Content Placeholder 2">
+            <a:extLst>
+              <a:ext uri="{FF2B5EF4-FFF2-40B4-BE49-F238E27FC236}">
+                <a16:creationId xmlns:a16="http://schemas.microsoft.com/office/drawing/2014/main" id="{6FBA0C13-FAE7-8733-9A05-C4962EFD46C6}"/>
+              </a:ext>
+            </a:extLst>
+          </p:cNvPr>
+          <p:cNvSpPr>
+            <a:spLocks noGrp="1"/>
+          </p:cNvSpPr>
           <p:nvPr>
             <p:ph idx="1"/>
           </p:nvPr>
-        </p:nvPicPr>
-        <p:blipFill>
-          <a:blip r:embed="rId2"/>
-          <a:stretch>
-            <a:fillRect/>
-          </a:stretch>
-        </p:blipFill>
-        <p:spPr>
-          <a:xfrm>
-            <a:off x="5463540" y="1072549"/>
-            <a:ext cx="2148075" cy="3818801"/>
-          </a:xfrm>
-        </p:spPr>
-      </p:pic>
+        </p:nvSpPr>
+        <p:spPr>
+          <a:xfrm>
+            <a:off x="392304" y="1118617"/>
+            <a:ext cx="7444990" cy="637032"/>
+          </a:xfrm>
+        </p:spPr>
+        <p:txBody>
+          <a:bodyPr/>
+          <a:lstStyle/>
+          <a:p>
+            <a:r>
+              <a:rPr lang="en-US" altLang="zh-CN" dirty="0"/>
+              <a:t>https://www.youtube.com/watch?v=fimWxYMRiF8</a:t>
+            </a:r>
+            <a:endParaRPr lang="zh-CN" altLang="en-US" dirty="0"/>
+          </a:p>
+        </p:txBody>
+      </p:sp>
       <p:sp>
         <p:nvSpPr>
           <p:cNvPr id="4" name="Slide Number Placeholder 3">
             <a:extLst>
               <a:ext uri="{FF2B5EF4-FFF2-40B4-BE49-F238E27FC236}">
-                <a16:creationId xmlns:a16="http://schemas.microsoft.com/office/drawing/2014/main" id="{FC11821D-148B-55FE-43BD-159608F6886D}"/>
+                <a16:creationId xmlns:a16="http://schemas.microsoft.com/office/drawing/2014/main" id="{64AA36AD-947B-43ED-804C-08693D83D8A8}"/>
               </a:ext>
             </a:extLst>
           </p:cNvPr>
@@ -26987,404 +26799,10 @@
           </a:p>
         </p:txBody>
       </p:sp>
-      <p:sp>
-        <p:nvSpPr>
-          <p:cNvPr id="5" name="Title 1">
-            <a:extLst>
-              <a:ext uri="{FF2B5EF4-FFF2-40B4-BE49-F238E27FC236}">
-                <a16:creationId xmlns:a16="http://schemas.microsoft.com/office/drawing/2014/main" id="{ED80DDB9-68EA-5F81-A54A-F26E46511FD9}"/>
-              </a:ext>
-            </a:extLst>
-          </p:cNvPr>
-          <p:cNvSpPr txBox="1">
-            <a:spLocks/>
-          </p:cNvSpPr>
-          <p:nvPr/>
-        </p:nvSpPr>
-        <p:spPr>
-          <a:xfrm>
-            <a:off x="392305" y="526617"/>
-            <a:ext cx="7444991" cy="471603"/>
-          </a:xfrm>
-          <a:prstGeom prst="rect">
-            <a:avLst/>
-          </a:prstGeom>
-        </p:spPr>
-        <p:txBody>
-          <a:bodyPr vert="horz" lIns="91440" tIns="45720" rIns="91440" bIns="45720" rtlCol="0" anchor="b">
-            <a:normAutofit/>
-          </a:bodyPr>
-          <a:lstStyle>
-            <a:lvl1pPr algn="l" defTabSz="308610" rtl="0" eaLnBrk="1" latinLnBrk="0" hangingPunct="1">
-              <a:lnSpc>
-                <a:spcPct val="100000"/>
-              </a:lnSpc>
-              <a:spcBef>
-                <a:spcPct val="0"/>
-              </a:spcBef>
-              <a:buNone/>
-              <a:defRPr sz="1890" b="0" kern="1200" cap="all">
-                <a:solidFill>
-                  <a:schemeClr val="tx1">
-                    <a:lumMod val="75000"/>
-                    <a:lumOff val="25000"/>
-                  </a:schemeClr>
-                </a:solidFill>
-                <a:latin typeface="+mj-lt"/>
-                <a:ea typeface="+mj-ea"/>
-                <a:cs typeface="+mj-cs"/>
-              </a:defRPr>
-            </a:lvl1pPr>
-            <a:lvl2pPr eaLnBrk="1" hangingPunct="1">
-              <a:defRPr>
-                <a:solidFill>
-                  <a:schemeClr val="tx2"/>
-                </a:solidFill>
-              </a:defRPr>
-            </a:lvl2pPr>
-            <a:lvl3pPr eaLnBrk="1" hangingPunct="1">
-              <a:defRPr>
-                <a:solidFill>
-                  <a:schemeClr val="tx2"/>
-                </a:solidFill>
-              </a:defRPr>
-            </a:lvl3pPr>
-            <a:lvl4pPr eaLnBrk="1" hangingPunct="1">
-              <a:defRPr>
-                <a:solidFill>
-                  <a:schemeClr val="tx2"/>
-                </a:solidFill>
-              </a:defRPr>
-            </a:lvl4pPr>
-            <a:lvl5pPr eaLnBrk="1" hangingPunct="1">
-              <a:defRPr>
-                <a:solidFill>
-                  <a:schemeClr val="tx2"/>
-                </a:solidFill>
-              </a:defRPr>
-            </a:lvl5pPr>
-            <a:lvl6pPr eaLnBrk="1" hangingPunct="1">
-              <a:defRPr>
-                <a:solidFill>
-                  <a:schemeClr val="tx2"/>
-                </a:solidFill>
-              </a:defRPr>
-            </a:lvl6pPr>
-            <a:lvl7pPr eaLnBrk="1" hangingPunct="1">
-              <a:defRPr>
-                <a:solidFill>
-                  <a:schemeClr val="tx2"/>
-                </a:solidFill>
-              </a:defRPr>
-            </a:lvl7pPr>
-            <a:lvl8pPr eaLnBrk="1" hangingPunct="1">
-              <a:defRPr>
-                <a:solidFill>
-                  <a:schemeClr val="tx2"/>
-                </a:solidFill>
-              </a:defRPr>
-            </a:lvl8pPr>
-            <a:lvl9pPr eaLnBrk="1" hangingPunct="1">
-              <a:defRPr>
-                <a:solidFill>
-                  <a:schemeClr val="tx2"/>
-                </a:solidFill>
-              </a:defRPr>
-            </a:lvl9pPr>
-          </a:lstStyle>
-          <a:p>
-            <a:r>
-              <a:rPr lang="en-US" altLang="zh-CN" sz="2000" dirty="0">
-                <a:solidFill>
-                  <a:srgbClr val="7030A0"/>
-                </a:solidFill>
-              </a:rPr>
-              <a:t>In-Class Activity: Exploring GNSS with </a:t>
-            </a:r>
-            <a:r>
-              <a:rPr lang="en-US" altLang="zh-CN" sz="2000" dirty="0" err="1">
-                <a:solidFill>
-                  <a:srgbClr val="7030A0"/>
-                </a:solidFill>
-              </a:rPr>
-              <a:t>SatLook</a:t>
-            </a:r>
-            <a:endParaRPr lang="zh-CN" altLang="en-US" sz="2000" dirty="0">
-              <a:solidFill>
-                <a:srgbClr val="7030A0"/>
-              </a:solidFill>
-            </a:endParaRPr>
-          </a:p>
-        </p:txBody>
-      </p:sp>
-      <p:sp>
-        <p:nvSpPr>
-          <p:cNvPr id="8" name="TextBox 7">
-            <a:extLst>
-              <a:ext uri="{FF2B5EF4-FFF2-40B4-BE49-F238E27FC236}">
-                <a16:creationId xmlns:a16="http://schemas.microsoft.com/office/drawing/2014/main" id="{5795BA1E-57E6-0652-1E2F-3AEED7AF1557}"/>
-              </a:ext>
-            </a:extLst>
-          </p:cNvPr>
-          <p:cNvSpPr txBox="1"/>
-          <p:nvPr/>
-        </p:nvSpPr>
-        <p:spPr>
-          <a:xfrm>
-            <a:off x="287336" y="1367877"/>
-            <a:ext cx="4937760" cy="2556597"/>
-          </a:xfrm>
-          <a:prstGeom prst="rect">
-            <a:avLst/>
-          </a:prstGeom>
-          <a:noFill/>
-        </p:spPr>
-        <p:txBody>
-          <a:bodyPr wrap="square" rtlCol="0">
-            <a:spAutoFit/>
-          </a:bodyPr>
-          <a:lstStyle/>
-          <a:p>
-            <a:pPr marL="206550" indent="-206550" defTabSz="308610">
-              <a:spcBef>
-                <a:spcPct val="20000"/>
-              </a:spcBef>
-              <a:spcAft>
-                <a:spcPts val="405"/>
-              </a:spcAft>
-              <a:buClr>
-                <a:schemeClr val="accent1"/>
-              </a:buClr>
-              <a:buSzPct val="92000"/>
-              <a:buFont typeface="Wingdings 2" panose="05020102010507070707" pitchFamily="18" charset="2"/>
-              <a:buChar char=""/>
-            </a:pPr>
-            <a:r>
-              <a:rPr lang="en-US" altLang="zh-CN" sz="1200" dirty="0">
-                <a:solidFill>
-                  <a:schemeClr val="tx1">
-                    <a:lumMod val="75000"/>
-                    <a:lumOff val="25000"/>
-                  </a:schemeClr>
-                </a:solidFill>
-              </a:rPr>
-              <a:t>The polar plot shows the sky overhead, with your device in the center.</a:t>
-            </a:r>
-          </a:p>
-          <a:p>
-            <a:pPr marL="206550" indent="-206550" defTabSz="308610">
-              <a:spcBef>
-                <a:spcPct val="20000"/>
-              </a:spcBef>
-              <a:spcAft>
-                <a:spcPts val="405"/>
-              </a:spcAft>
-              <a:buClr>
-                <a:schemeClr val="accent1"/>
-              </a:buClr>
-              <a:buSzPct val="92000"/>
-              <a:buFont typeface="Wingdings 2" panose="05020102010507070707" pitchFamily="18" charset="2"/>
-              <a:buChar char=""/>
-            </a:pPr>
-            <a:r>
-              <a:rPr lang="en-US" altLang="zh-CN" sz="1200" dirty="0">
-                <a:solidFill>
-                  <a:schemeClr val="tx1">
-                    <a:lumMod val="75000"/>
-                    <a:lumOff val="25000"/>
-                  </a:schemeClr>
-                </a:solidFill>
-              </a:rPr>
-              <a:t>Each dot = a satellite being tracked.</a:t>
-            </a:r>
-          </a:p>
-          <a:p>
-            <a:pPr marL="206550" indent="-206550" defTabSz="308610">
-              <a:spcBef>
-                <a:spcPct val="20000"/>
-              </a:spcBef>
-              <a:spcAft>
-                <a:spcPts val="405"/>
-              </a:spcAft>
-              <a:buClr>
-                <a:schemeClr val="accent1"/>
-              </a:buClr>
-              <a:buSzPct val="92000"/>
-              <a:buFont typeface="Wingdings 2" panose="05020102010507070707" pitchFamily="18" charset="2"/>
-              <a:buChar char=""/>
-            </a:pPr>
-            <a:r>
-              <a:rPr lang="en-US" altLang="zh-CN" sz="1200" dirty="0">
-                <a:solidFill>
-                  <a:schemeClr val="tx1">
-                    <a:lumMod val="75000"/>
-                    <a:lumOff val="25000"/>
-                  </a:schemeClr>
-                </a:solidFill>
-              </a:rPr>
-              <a:t>Numbers inside the circles = satellite PRN numbers (identifiers).</a:t>
-            </a:r>
-          </a:p>
-          <a:p>
-            <a:pPr marL="206550" indent="-206550" defTabSz="308610">
-              <a:spcBef>
-                <a:spcPct val="20000"/>
-              </a:spcBef>
-              <a:spcAft>
-                <a:spcPts val="405"/>
-              </a:spcAft>
-              <a:buClr>
-                <a:schemeClr val="accent1"/>
-              </a:buClr>
-              <a:buSzPct val="92000"/>
-              <a:buFont typeface="Wingdings 2" panose="05020102010507070707" pitchFamily="18" charset="2"/>
-              <a:buChar char=""/>
-            </a:pPr>
-            <a:r>
-              <a:rPr lang="en-US" altLang="zh-CN" sz="1200" dirty="0">
-                <a:solidFill>
-                  <a:schemeClr val="tx1">
-                    <a:lumMod val="75000"/>
-                    <a:lumOff val="25000"/>
-                  </a:schemeClr>
-                </a:solidFill>
-              </a:rPr>
-              <a:t>Position of the dot = where the satellite is in the sky (azimuth &amp; elevation).</a:t>
-            </a:r>
-          </a:p>
-          <a:p>
-            <a:pPr marL="206550" indent="-206550" defTabSz="308610">
-              <a:spcBef>
-                <a:spcPct val="20000"/>
-              </a:spcBef>
-              <a:spcAft>
-                <a:spcPts val="405"/>
-              </a:spcAft>
-              <a:buClr>
-                <a:schemeClr val="accent1"/>
-              </a:buClr>
-              <a:buSzPct val="92000"/>
-              <a:buFont typeface="Wingdings 2" panose="05020102010507070707" pitchFamily="18" charset="2"/>
-              <a:buChar char=""/>
-            </a:pPr>
-            <a:r>
-              <a:rPr lang="en-US" altLang="zh-CN" sz="1200" dirty="0">
-                <a:solidFill>
-                  <a:schemeClr val="tx1">
-                    <a:lumMod val="75000"/>
-                    <a:lumOff val="25000"/>
-                  </a:schemeClr>
-                </a:solidFill>
-              </a:rPr>
-              <a:t>“Tracked: 9 Used: 5” at the bottom means:</a:t>
-            </a:r>
-          </a:p>
-          <a:p>
-            <a:pPr marL="663750" lvl="1" indent="-206550" defTabSz="308610">
-              <a:spcBef>
-                <a:spcPct val="20000"/>
-              </a:spcBef>
-              <a:spcAft>
-                <a:spcPts val="405"/>
-              </a:spcAft>
-              <a:buClr>
-                <a:schemeClr val="accent1"/>
-              </a:buClr>
-              <a:buSzPct val="92000"/>
-              <a:buFont typeface="Wingdings" panose="05000000000000000000" pitchFamily="2" charset="2"/>
-              <a:buChar char="Ø"/>
-            </a:pPr>
-            <a:r>
-              <a:rPr lang="en-US" altLang="zh-CN" sz="1200" dirty="0">
-                <a:solidFill>
-                  <a:schemeClr val="tx1">
-                    <a:lumMod val="75000"/>
-                    <a:lumOff val="25000"/>
-                  </a:schemeClr>
-                </a:solidFill>
-              </a:rPr>
-              <a:t>9 satellites are visible</a:t>
-            </a:r>
-          </a:p>
-          <a:p>
-            <a:pPr marL="663750" lvl="1" indent="-206550" defTabSz="308610">
-              <a:spcBef>
-                <a:spcPct val="20000"/>
-              </a:spcBef>
-              <a:spcAft>
-                <a:spcPts val="405"/>
-              </a:spcAft>
-              <a:buClr>
-                <a:schemeClr val="accent1"/>
-              </a:buClr>
-              <a:buSzPct val="92000"/>
-              <a:buFont typeface="Wingdings" panose="05000000000000000000" pitchFamily="2" charset="2"/>
-              <a:buChar char="Ø"/>
-            </a:pPr>
-            <a:r>
-              <a:rPr lang="en-US" altLang="zh-CN" sz="1200" dirty="0">
-                <a:solidFill>
-                  <a:schemeClr val="tx1">
-                    <a:lumMod val="75000"/>
-                    <a:lumOff val="25000"/>
-                  </a:schemeClr>
-                </a:solidFill>
-              </a:rPr>
-              <a:t>5 are actually being used in your position calculation</a:t>
-            </a:r>
-          </a:p>
-          <a:p>
-            <a:pPr marL="206550" indent="-206550" defTabSz="308610">
-              <a:spcBef>
-                <a:spcPct val="20000"/>
-              </a:spcBef>
-              <a:spcAft>
-                <a:spcPts val="405"/>
-              </a:spcAft>
-              <a:buClr>
-                <a:schemeClr val="accent1"/>
-              </a:buClr>
-              <a:buSzPct val="92000"/>
-              <a:buFont typeface="Wingdings 2" panose="05020102010507070707" pitchFamily="18" charset="2"/>
-              <a:buChar char=""/>
-            </a:pPr>
-            <a:r>
-              <a:rPr lang="zh-CN" altLang="en-US" sz="1200" dirty="0">
-                <a:solidFill>
-                  <a:schemeClr val="tx1">
-                    <a:lumMod val="75000"/>
-                    <a:lumOff val="25000"/>
-                  </a:schemeClr>
-                </a:solidFill>
-              </a:rPr>
-              <a:t>👉 </a:t>
-            </a:r>
-            <a:r>
-              <a:rPr lang="en-US" altLang="zh-CN" sz="1200" dirty="0">
-                <a:solidFill>
-                  <a:schemeClr val="tx1">
-                    <a:lumMod val="75000"/>
-                    <a:lumOff val="25000"/>
-                  </a:schemeClr>
-                </a:solidFill>
-              </a:rPr>
-              <a:t>This tells you how well the antenna is seeing the sky. If many satellites are visible and used, your accuracy improves.</a:t>
-            </a:r>
-            <a:endParaRPr lang="zh-CN" altLang="en-US" sz="1200" dirty="0">
-              <a:solidFill>
-                <a:schemeClr val="tx1">
-                  <a:lumMod val="75000"/>
-                  <a:lumOff val="25000"/>
-                </a:schemeClr>
-              </a:solidFill>
-            </a:endParaRPr>
-          </a:p>
-        </p:txBody>
-      </p:sp>
     </p:spTree>
     <p:extLst>
       <p:ext uri="{BB962C8B-B14F-4D97-AF65-F5344CB8AC3E}">
-        <p14:creationId xmlns:p14="http://schemas.microsoft.com/office/powerpoint/2010/main" val="3525545515"/>
+        <p14:creationId xmlns:p14="http://schemas.microsoft.com/office/powerpoint/2010/main" val="4168480455"/>
       </p:ext>
     </p:extLst>
   </p:cSld>
@@ -27413,10 +26831,60 @@
       </p:grpSpPr>
       <p:sp>
         <p:nvSpPr>
+          <p:cNvPr id="2" name="Title 1">
+            <a:extLst>
+              <a:ext uri="{FF2B5EF4-FFF2-40B4-BE49-F238E27FC236}">
+                <a16:creationId xmlns:a16="http://schemas.microsoft.com/office/drawing/2014/main" id="{BECF46BF-B5CD-D6E7-49F8-2846B90E2FF5}"/>
+              </a:ext>
+            </a:extLst>
+          </p:cNvPr>
+          <p:cNvSpPr>
+            <a:spLocks noGrp="1"/>
+          </p:cNvSpPr>
+          <p:nvPr>
+            <p:ph type="title"/>
+          </p:nvPr>
+        </p:nvSpPr>
+        <p:spPr>
+          <a:xfrm>
+            <a:off x="392305" y="526617"/>
+            <a:ext cx="7444991" cy="471603"/>
+          </a:xfrm>
+        </p:spPr>
+        <p:txBody>
+          <a:bodyPr/>
+          <a:lstStyle/>
+          <a:p>
+            <a:r>
+              <a:rPr lang="en-US" altLang="zh-CN" sz="2000" dirty="0">
+                <a:solidFill>
+                  <a:srgbClr val="7030A0"/>
+                </a:solidFill>
+              </a:rPr>
+              <a:t>In-Class Activity: Exploring GNSS with </a:t>
+            </a:r>
+            <a:r>
+              <a:rPr lang="en-US" altLang="zh-CN" sz="2000" dirty="0" err="1">
+                <a:solidFill>
+                  <a:srgbClr val="7030A0"/>
+                </a:solidFill>
+              </a:rPr>
+              <a:t>SatLook</a:t>
+            </a:r>
+            <a:endParaRPr lang="zh-CN" altLang="en-US" sz="2000" dirty="0">
+              <a:solidFill>
+                <a:srgbClr val="7030A0"/>
+              </a:solidFill>
+            </a:endParaRPr>
+          </a:p>
+        </p:txBody>
+      </p:sp>
+      <p:sp>
+        <p:nvSpPr>
           <p:cNvPr id="3" name="Content Placeholder 2">
             <a:extLst>
               <a:ext uri="{FF2B5EF4-FFF2-40B4-BE49-F238E27FC236}">
-                <a16:creationId xmlns:a16="http://schemas.microsoft.com/office/drawing/2014/main" id="{C852A89E-24C8-CA12-845C-727631E88812}"/>
+                <a16:creationId xmlns:a16="http://schemas.microsoft.com/office/drawing/2014/main" id="{830E38D9-98D2-F45D-B01B-0A676B492622}"/>
               </a:ext>
             </a:extLst>
           </p:cNvPr>
@@ -27429,8 +26897,8 @@
         </p:nvSpPr>
         <p:spPr>
           <a:xfrm>
-            <a:off x="253589" y="1255014"/>
-            <a:ext cx="5124575" cy="2633472"/>
+            <a:off x="392307" y="1060700"/>
+            <a:ext cx="7444990" cy="621792"/>
           </a:xfrm>
         </p:spPr>
         <p:txBody>
@@ -27440,71 +26908,10 @@
           <a:lstStyle/>
           <a:p>
             <a:r>
-              <a:rPr lang="en-US" altLang="zh-CN" sz="1200" dirty="0"/>
-              <a:t>NMEA Data (NMEA tab)</a:t>
-            </a:r>
-          </a:p>
-          <a:p>
-            <a:r>
-              <a:rPr lang="en-US" altLang="zh-CN" sz="1200" dirty="0"/>
-              <a:t>NMEA = a standard GPS message format.</a:t>
-            </a:r>
-          </a:p>
-          <a:p>
-            <a:r>
-              <a:rPr lang="en-US" altLang="zh-CN" sz="1200" dirty="0"/>
-              <a:t>Each line starts with $ and a code that tells you what the sentence means. For example:</a:t>
-            </a:r>
-          </a:p>
-          <a:p>
-            <a:pPr lvl="1">
-              <a:buFont typeface="Wingdings" panose="05000000000000000000" pitchFamily="2" charset="2"/>
-              <a:buChar char="Ø"/>
-            </a:pPr>
-            <a:r>
-              <a:rPr lang="en-US" altLang="zh-CN" sz="1200" dirty="0"/>
-              <a:t>$GNGSA → GNSS DOP and active satellites (Dilution of Precision info).</a:t>
-            </a:r>
-          </a:p>
-          <a:p>
-            <a:pPr lvl="1">
-              <a:buFont typeface="Wingdings" panose="05000000000000000000" pitchFamily="2" charset="2"/>
-              <a:buChar char="Ø"/>
-            </a:pPr>
-            <a:r>
-              <a:rPr lang="en-US" altLang="zh-CN" sz="1200" dirty="0"/>
-              <a:t>$GNGGA → Fix data (time, latitude, longitude, altitude, fix quality).</a:t>
-            </a:r>
-          </a:p>
-          <a:p>
-            <a:pPr lvl="1">
-              <a:buFont typeface="Wingdings" panose="05000000000000000000" pitchFamily="2" charset="2"/>
-              <a:buChar char="Ø"/>
-            </a:pPr>
-            <a:r>
-              <a:rPr lang="en-US" altLang="zh-CN" sz="1200" dirty="0"/>
-              <a:t>$GNRMC → Recommended Minimum GPS Data (time, date, position, speed).</a:t>
-            </a:r>
-          </a:p>
-          <a:p>
-            <a:pPr lvl="1">
-              <a:buFont typeface="Wingdings" panose="05000000000000000000" pitchFamily="2" charset="2"/>
-              <a:buChar char="Ø"/>
-            </a:pPr>
-            <a:r>
-              <a:rPr lang="en-US" altLang="zh-CN" sz="1200" dirty="0"/>
-              <a:t>$GLGSV → Satellites in view (from GLONASS).</a:t>
-            </a:r>
-          </a:p>
-          <a:p>
-            <a:pPr>
-              <a:buFont typeface="Wingdings" panose="05000000000000000000" pitchFamily="2" charset="2"/>
-              <a:buChar char="n"/>
-            </a:pPr>
-            <a:r>
-              <a:rPr lang="en-US" altLang="zh-CN" sz="1335" dirty="0"/>
-              <a:t>Explore Start Recording</a:t>
-            </a:r>
+              <a:rPr lang="en-US" altLang="zh-CN" sz="1600" dirty="0"/>
+              <a:t>What do you think affects GPS accuracy?</a:t>
+            </a:r>
+            <a:endParaRPr lang="zh-CN" altLang="en-US" sz="1600" dirty="0"/>
           </a:p>
         </p:txBody>
       </p:sp>
@@ -27513,7 +26920,7 @@
           <p:cNvPr id="4" name="Slide Number Placeholder 3">
             <a:extLst>
               <a:ext uri="{FF2B5EF4-FFF2-40B4-BE49-F238E27FC236}">
-                <a16:creationId xmlns:a16="http://schemas.microsoft.com/office/drawing/2014/main" id="{BCBA5436-4BDB-3531-4F4E-F2E0E3FD1F7C}"/>
+                <a16:creationId xmlns:a16="http://schemas.microsoft.com/office/drawing/2014/main" id="{87AFF3DF-1D5B-444D-13A9-F9F72ADF32FA}"/>
               </a:ext>
             </a:extLst>
           </p:cNvPr>
@@ -27540,168 +26947,229 @@
       </p:sp>
       <p:sp>
         <p:nvSpPr>
-          <p:cNvPr id="5" name="Title 1">
+          <p:cNvPr id="6" name="TextBox 5">
             <a:extLst>
               <a:ext uri="{FF2B5EF4-FFF2-40B4-BE49-F238E27FC236}">
-                <a16:creationId xmlns:a16="http://schemas.microsoft.com/office/drawing/2014/main" id="{33A8B8D2-DFB2-A2E9-CCBB-F56433DDBC24}"/>
+                <a16:creationId xmlns:a16="http://schemas.microsoft.com/office/drawing/2014/main" id="{9A06EE18-841C-473C-E877-255939906159}"/>
               </a:ext>
             </a:extLst>
           </p:cNvPr>
-          <p:cNvSpPr txBox="1">
-            <a:spLocks/>
-          </p:cNvSpPr>
+          <p:cNvSpPr txBox="1"/>
           <p:nvPr/>
         </p:nvSpPr>
         <p:spPr>
           <a:xfrm>
-            <a:off x="392306" y="358977"/>
-            <a:ext cx="7444991" cy="471603"/>
+            <a:off x="1085977" y="1752601"/>
+            <a:ext cx="6751320" cy="2318583"/>
           </a:xfrm>
           <a:prstGeom prst="rect">
             <a:avLst/>
           </a:prstGeom>
-        </p:spPr>
-        <p:txBody>
-          <a:bodyPr vert="horz" lIns="91440" tIns="45720" rIns="91440" bIns="45720" rtlCol="0" anchor="b">
-            <a:normAutofit/>
+          <a:noFill/>
+        </p:spPr>
+        <p:txBody>
+          <a:bodyPr wrap="square" rtlCol="0">
+            <a:spAutoFit/>
           </a:bodyPr>
-          <a:lstStyle>
-            <a:lvl1pPr algn="l" defTabSz="308610" rtl="0" eaLnBrk="1" latinLnBrk="0" hangingPunct="1">
-              <a:lnSpc>
-                <a:spcPct val="100000"/>
-              </a:lnSpc>
+          <a:lstStyle/>
+          <a:p>
+            <a:pPr marL="342900" indent="-342900" defTabSz="308610">
               <a:spcBef>
-                <a:spcPct val="0"/>
+                <a:spcPct val="20000"/>
               </a:spcBef>
-              <a:buNone/>
-              <a:defRPr sz="1890" b="0" kern="1200" cap="all">
+              <a:spcAft>
+                <a:spcPts val="405"/>
+              </a:spcAft>
+              <a:buClr>
+                <a:schemeClr val="accent1"/>
+              </a:buClr>
+              <a:buSzPct val="92000"/>
+              <a:buFont typeface="+mj-lt"/>
+              <a:buAutoNum type="arabicPeriod"/>
+            </a:pPr>
+            <a:r>
+              <a:rPr lang="en-US" altLang="zh-CN" sz="1600" dirty="0">
                 <a:solidFill>
                   <a:schemeClr val="tx1">
                     <a:lumMod val="75000"/>
                     <a:lumOff val="25000"/>
                   </a:schemeClr>
                 </a:solidFill>
-                <a:latin typeface="+mj-lt"/>
-                <a:ea typeface="+mj-ea"/>
-                <a:cs typeface="+mj-cs"/>
-              </a:defRPr>
-            </a:lvl1pPr>
-            <a:lvl2pPr eaLnBrk="1" hangingPunct="1">
-              <a:defRPr>
-                <a:solidFill>
-                  <a:schemeClr val="tx2"/>
-                </a:solidFill>
-              </a:defRPr>
-            </a:lvl2pPr>
-            <a:lvl3pPr eaLnBrk="1" hangingPunct="1">
-              <a:defRPr>
-                <a:solidFill>
-                  <a:schemeClr val="tx2"/>
-                </a:solidFill>
-              </a:defRPr>
-            </a:lvl3pPr>
-            <a:lvl4pPr eaLnBrk="1" hangingPunct="1">
-              <a:defRPr>
-                <a:solidFill>
-                  <a:schemeClr val="tx2"/>
-                </a:solidFill>
-              </a:defRPr>
-            </a:lvl4pPr>
-            <a:lvl5pPr eaLnBrk="1" hangingPunct="1">
-              <a:defRPr>
-                <a:solidFill>
-                  <a:schemeClr val="tx2"/>
-                </a:solidFill>
-              </a:defRPr>
-            </a:lvl5pPr>
-            <a:lvl6pPr eaLnBrk="1" hangingPunct="1">
-              <a:defRPr>
-                <a:solidFill>
-                  <a:schemeClr val="tx2"/>
-                </a:solidFill>
-              </a:defRPr>
-            </a:lvl6pPr>
-            <a:lvl7pPr eaLnBrk="1" hangingPunct="1">
-              <a:defRPr>
-                <a:solidFill>
-                  <a:schemeClr val="tx2"/>
-                </a:solidFill>
-              </a:defRPr>
-            </a:lvl7pPr>
-            <a:lvl8pPr eaLnBrk="1" hangingPunct="1">
-              <a:defRPr>
-                <a:solidFill>
-                  <a:schemeClr val="tx2"/>
-                </a:solidFill>
-              </a:defRPr>
-            </a:lvl8pPr>
-            <a:lvl9pPr eaLnBrk="1" hangingPunct="1">
-              <a:defRPr>
-                <a:solidFill>
-                  <a:schemeClr val="tx2"/>
-                </a:solidFill>
-              </a:defRPr>
-            </a:lvl9pPr>
-          </a:lstStyle>
-          <a:p>
-            <a:r>
-              <a:rPr lang="en-US" altLang="zh-CN" sz="2000" dirty="0">
-                <a:solidFill>
-                  <a:srgbClr val="7030A0"/>
-                </a:solidFill>
               </a:rPr>
-              <a:t>In-Class Activity: Exploring GNSS with </a:t>
-            </a:r>
-            <a:r>
-              <a:rPr lang="en-US" altLang="zh-CN" sz="2000" dirty="0" err="1">
-                <a:solidFill>
-                  <a:srgbClr val="7030A0"/>
+              <a:t>Open </a:t>
+            </a:r>
+            <a:r>
+              <a:rPr lang="en-US" altLang="zh-CN" sz="1600" dirty="0" err="1">
+                <a:solidFill>
+                  <a:schemeClr val="tx1">
+                    <a:lumMod val="75000"/>
+                    <a:lumOff val="25000"/>
+                  </a:schemeClr>
                 </a:solidFill>
               </a:rPr>
               <a:t>SatLook</a:t>
             </a:r>
-            <a:endParaRPr lang="zh-CN" altLang="en-US" sz="2000" dirty="0">
+            <a:r>
+              <a:rPr lang="en-US" altLang="zh-CN" sz="1600" dirty="0">
+                <a:solidFill>
+                  <a:schemeClr val="tx1">
+                    <a:lumMod val="75000"/>
+                    <a:lumOff val="25000"/>
+                  </a:schemeClr>
+                </a:solidFill>
+              </a:rPr>
+              <a:t> on your TDC100.</a:t>
+            </a:r>
+          </a:p>
+          <a:p>
+            <a:pPr marL="342900" indent="-342900" defTabSz="308610">
+              <a:spcBef>
+                <a:spcPct val="20000"/>
+              </a:spcBef>
+              <a:spcAft>
+                <a:spcPts val="405"/>
+              </a:spcAft>
+              <a:buClr>
+                <a:schemeClr val="accent1"/>
+              </a:buClr>
+              <a:buSzPct val="92000"/>
+              <a:buFont typeface="+mj-lt"/>
+              <a:buAutoNum type="arabicPeriod"/>
+            </a:pPr>
+            <a:r>
+              <a:rPr lang="en-US" altLang="zh-CN" sz="1600" dirty="0">
+                <a:solidFill>
+                  <a:schemeClr val="tx1">
+                    <a:lumMod val="75000"/>
+                    <a:lumOff val="25000"/>
+                  </a:schemeClr>
+                </a:solidFill>
+              </a:rPr>
+              <a:t>Show the 3 tabs:</a:t>
+            </a:r>
+          </a:p>
+          <a:p>
+            <a:pPr marL="663750" lvl="1" indent="-206550" defTabSz="308610">
+              <a:spcBef>
+                <a:spcPct val="20000"/>
+              </a:spcBef>
+              <a:spcAft>
+                <a:spcPts val="405"/>
+              </a:spcAft>
+              <a:buClr>
+                <a:schemeClr val="accent1"/>
+              </a:buClr>
+              <a:buSzPct val="92000"/>
+              <a:buFont typeface="Wingdings 2" panose="05020102010507070707" pitchFamily="18" charset="2"/>
+              <a:buChar char=""/>
+            </a:pPr>
+            <a:r>
+              <a:rPr lang="en-US" altLang="zh-CN" sz="1600" dirty="0">
+                <a:solidFill>
+                  <a:schemeClr val="tx1">
+                    <a:lumMod val="75000"/>
+                    <a:lumOff val="25000"/>
+                  </a:schemeClr>
+                </a:solidFill>
+              </a:rPr>
+              <a:t>Sky Plot → Satellites in the sky (constellation + geometry).</a:t>
+            </a:r>
+          </a:p>
+          <a:p>
+            <a:pPr marL="663750" lvl="1" indent="-206550" defTabSz="308610">
+              <a:spcBef>
+                <a:spcPct val="20000"/>
+              </a:spcBef>
+              <a:spcAft>
+                <a:spcPts val="405"/>
+              </a:spcAft>
+              <a:buClr>
+                <a:schemeClr val="accent1"/>
+              </a:buClr>
+              <a:buSzPct val="92000"/>
+              <a:buFont typeface="Wingdings 2" panose="05020102010507070707" pitchFamily="18" charset="2"/>
+              <a:buChar char=""/>
+            </a:pPr>
+            <a:r>
+              <a:rPr lang="en-US" altLang="zh-CN" sz="1600" dirty="0">
+                <a:solidFill>
+                  <a:schemeClr val="tx1">
+                    <a:lumMod val="75000"/>
+                    <a:lumOff val="25000"/>
+                  </a:schemeClr>
+                </a:solidFill>
+              </a:rPr>
+              <a:t>NMEA → Raw GNSS data (for advanced logging).</a:t>
+            </a:r>
+          </a:p>
+          <a:p>
+            <a:pPr marL="663750" lvl="1" indent="-206550" defTabSz="308610">
+              <a:spcBef>
+                <a:spcPct val="20000"/>
+              </a:spcBef>
+              <a:spcAft>
+                <a:spcPts val="405"/>
+              </a:spcAft>
+              <a:buClr>
+                <a:schemeClr val="accent1"/>
+              </a:buClr>
+              <a:buSzPct val="92000"/>
+              <a:buFont typeface="Wingdings 2" panose="05020102010507070707" pitchFamily="18" charset="2"/>
+              <a:buChar char=""/>
+            </a:pPr>
+            <a:r>
+              <a:rPr lang="en-US" altLang="zh-CN" sz="1600" dirty="0">
+                <a:solidFill>
+                  <a:schemeClr val="tx1">
+                    <a:lumMod val="75000"/>
+                    <a:lumOff val="25000"/>
+                  </a:schemeClr>
+                </a:solidFill>
+              </a:rPr>
+              <a:t>SNR → Signal strength for each satellite.</a:t>
+            </a:r>
+          </a:p>
+          <a:p>
+            <a:pPr marL="663750" lvl="1" indent="-206550" defTabSz="308610">
+              <a:spcBef>
+                <a:spcPct val="20000"/>
+              </a:spcBef>
+              <a:spcAft>
+                <a:spcPts val="405"/>
+              </a:spcAft>
+              <a:buClr>
+                <a:schemeClr val="accent1"/>
+              </a:buClr>
+              <a:buSzPct val="92000"/>
+              <a:buFont typeface="Wingdings 2" panose="05020102010507070707" pitchFamily="18" charset="2"/>
+              <a:buChar char=""/>
+            </a:pPr>
+            <a:r>
+              <a:rPr lang="en-US" altLang="zh-CN" sz="1600" dirty="0">
+                <a:solidFill>
+                  <a:schemeClr val="tx1">
+                    <a:lumMod val="75000"/>
+                    <a:lumOff val="25000"/>
+                  </a:schemeClr>
+                </a:solidFill>
+              </a:rPr>
+              <a:t>Highlight: “Tracked vs Used satellites”, SNR levels, and constellations (GPS, GLONASS, BeiDou, Galileo).</a:t>
+            </a:r>
+            <a:endParaRPr lang="zh-CN" altLang="en-US" sz="1600" dirty="0">
               <a:solidFill>
-                <a:srgbClr val="7030A0"/>
+                <a:schemeClr val="tx1">
+                  <a:lumMod val="75000"/>
+                  <a:lumOff val="25000"/>
+                </a:schemeClr>
               </a:solidFill>
             </a:endParaRPr>
           </a:p>
         </p:txBody>
       </p:sp>
-      <p:pic>
-        <p:nvPicPr>
-          <p:cNvPr id="7" name="Picture 6" descr="A screenshot of a computer&#10;&#10;AI-generated content may be incorrect.">
-            <a:extLst>
-              <a:ext uri="{FF2B5EF4-FFF2-40B4-BE49-F238E27FC236}">
-                <a16:creationId xmlns:a16="http://schemas.microsoft.com/office/drawing/2014/main" id="{F07DE8F6-AB1D-657E-F8F7-2D12BFFDDE9E}"/>
-              </a:ext>
-            </a:extLst>
-          </p:cNvPr>
-          <p:cNvPicPr>
-            <a:picLocks noChangeAspect="1"/>
-          </p:cNvPicPr>
-          <p:nvPr/>
-        </p:nvPicPr>
-        <p:blipFill>
-          <a:blip r:embed="rId2"/>
-          <a:stretch>
-            <a:fillRect/>
-          </a:stretch>
-        </p:blipFill>
-        <p:spPr>
-          <a:xfrm>
-            <a:off x="5655596" y="830580"/>
-            <a:ext cx="2181701" cy="3878580"/>
-          </a:xfrm>
-          <a:prstGeom prst="rect">
-            <a:avLst/>
-          </a:prstGeom>
-        </p:spPr>
-      </p:pic>
     </p:spTree>
     <p:extLst>
       <p:ext uri="{BB962C8B-B14F-4D97-AF65-F5344CB8AC3E}">
-        <p14:creationId xmlns:p14="http://schemas.microsoft.com/office/powerpoint/2010/main" val="3346982534"/>
+        <p14:creationId xmlns:p14="http://schemas.microsoft.com/office/powerpoint/2010/main" val="2321144453"/>
       </p:ext>
     </p:extLst>
   </p:cSld>
@@ -28642,10 +28110,10 @@
       </p:grpSpPr>
       <p:pic>
         <p:nvPicPr>
-          <p:cNvPr id="6" name="Content Placeholder 5" descr="A screenshot of a graph&#10;&#10;AI-generated content may be incorrect.">
+          <p:cNvPr id="7" name="Content Placeholder 6" descr="A screenshot of a cell phone&#10;&#10;AI-generated content may be incorrect.">
             <a:extLst>
               <a:ext uri="{FF2B5EF4-FFF2-40B4-BE49-F238E27FC236}">
-                <a16:creationId xmlns:a16="http://schemas.microsoft.com/office/drawing/2014/main" id="{5868A7F6-FCAF-81CB-C867-C47B4EA201B4}"/>
+                <a16:creationId xmlns:a16="http://schemas.microsoft.com/office/drawing/2014/main" id="{DE80989D-19AC-0207-776D-DEB9DFADF45C}"/>
               </a:ext>
             </a:extLst>
           </p:cNvPr>
@@ -28664,8 +28132,8 @@
         </p:blipFill>
         <p:spPr>
           <a:xfrm>
-            <a:off x="5436067" y="855890"/>
-            <a:ext cx="2214413" cy="3936736"/>
+            <a:off x="5463540" y="1072549"/>
+            <a:ext cx="2148075" cy="3818801"/>
           </a:xfrm>
         </p:spPr>
       </p:pic>
@@ -28674,7 +28142,7 @@
           <p:cNvPr id="4" name="Slide Number Placeholder 3">
             <a:extLst>
               <a:ext uri="{FF2B5EF4-FFF2-40B4-BE49-F238E27FC236}">
-                <a16:creationId xmlns:a16="http://schemas.microsoft.com/office/drawing/2014/main" id="{BABB1224-F71C-FD78-343D-4929AEBDD738}"/>
+                <a16:creationId xmlns:a16="http://schemas.microsoft.com/office/drawing/2014/main" id="{FC11821D-148B-55FE-43BD-159608F6886D}"/>
               </a:ext>
             </a:extLst>
           </p:cNvPr>
@@ -28701,10 +28169,10 @@
       </p:sp>
       <p:sp>
         <p:nvSpPr>
-          <p:cNvPr id="7" name="Title 1">
+          <p:cNvPr id="5" name="Title 1">
             <a:extLst>
               <a:ext uri="{FF2B5EF4-FFF2-40B4-BE49-F238E27FC236}">
-                <a16:creationId xmlns:a16="http://schemas.microsoft.com/office/drawing/2014/main" id="{5FC29C91-691F-5292-D901-30A0BCAF2169}"/>
+                <a16:creationId xmlns:a16="http://schemas.microsoft.com/office/drawing/2014/main" id="{ED80DDB9-68EA-5F81-A54A-F26E46511FD9}"/>
               </a:ext>
             </a:extLst>
           </p:cNvPr>
@@ -28715,7 +28183,7 @@
         </p:nvSpPr>
         <p:spPr>
           <a:xfrm>
-            <a:off x="392306" y="358977"/>
+            <a:off x="392305" y="526617"/>
             <a:ext cx="7444991" cy="471603"/>
           </a:xfrm>
           <a:prstGeom prst="rect">
@@ -28834,7 +28302,7 @@
           <p:cNvPr id="8" name="TextBox 7">
             <a:extLst>
               <a:ext uri="{FF2B5EF4-FFF2-40B4-BE49-F238E27FC236}">
-                <a16:creationId xmlns:a16="http://schemas.microsoft.com/office/drawing/2014/main" id="{9B3B75D5-2D02-4B4E-3DED-303579A9F17E}"/>
+                <a16:creationId xmlns:a16="http://schemas.microsoft.com/office/drawing/2014/main" id="{5795BA1E-57E6-0652-1E2F-3AEED7AF1557}"/>
               </a:ext>
             </a:extLst>
           </p:cNvPr>
@@ -28843,8 +28311,8 @@
         </p:nvSpPr>
         <p:spPr>
           <a:xfrm>
-            <a:off x="502920" y="1663809"/>
-            <a:ext cx="4297680" cy="1815882"/>
+            <a:off x="287336" y="1367877"/>
+            <a:ext cx="4937760" cy="2556597"/>
           </a:xfrm>
           <a:prstGeom prst="rect">
             <a:avLst/>
@@ -28857,45 +28325,246 @@
           </a:bodyPr>
           <a:lstStyle/>
           <a:p>
-            <a:r>
-              <a:rPr lang="en-US" altLang="zh-CN" sz="1400" dirty="0"/>
-              <a:t>SNR = Signal-to-Noise Ratio</a:t>
-            </a:r>
-          </a:p>
-          <a:p>
-            <a:endParaRPr lang="en-US" altLang="zh-CN" sz="1400" dirty="0"/>
-          </a:p>
-          <a:p>
-            <a:r>
-              <a:rPr lang="en-US" altLang="zh-CN" sz="1400" dirty="0"/>
-              <a:t>SNR measures how strong and clean the satellite’s signal is compared to background noise.</a:t>
-            </a:r>
-          </a:p>
-          <a:p>
-            <a:endParaRPr lang="en-US" altLang="zh-CN" sz="1400" dirty="0"/>
-          </a:p>
-          <a:p>
-            <a:r>
-              <a:rPr lang="en-US" altLang="zh-CN" sz="1400" dirty="0"/>
-              <a:t>Units: dB-Hz (decibels relative to 1 Hz).</a:t>
-            </a:r>
-          </a:p>
-          <a:p>
-            <a:endParaRPr lang="en-US" altLang="zh-CN" sz="1400" dirty="0"/>
-          </a:p>
-          <a:p>
-            <a:r>
-              <a:rPr lang="en-US" altLang="zh-CN" sz="1400" dirty="0"/>
-              <a:t>Higher = better (stronger, clearer signal).</a:t>
-            </a:r>
-            <a:endParaRPr lang="zh-CN" altLang="en-US" sz="1400" dirty="0"/>
+            <a:pPr marL="206550" indent="-206550" defTabSz="308610">
+              <a:spcBef>
+                <a:spcPct val="20000"/>
+              </a:spcBef>
+              <a:spcAft>
+                <a:spcPts val="405"/>
+              </a:spcAft>
+              <a:buClr>
+                <a:schemeClr val="accent1"/>
+              </a:buClr>
+              <a:buSzPct val="92000"/>
+              <a:buFont typeface="Wingdings 2" panose="05020102010507070707" pitchFamily="18" charset="2"/>
+              <a:buChar char=""/>
+            </a:pPr>
+            <a:r>
+              <a:rPr lang="en-US" altLang="zh-CN" sz="1200" dirty="0">
+                <a:solidFill>
+                  <a:schemeClr val="tx1">
+                    <a:lumMod val="75000"/>
+                    <a:lumOff val="25000"/>
+                  </a:schemeClr>
+                </a:solidFill>
+              </a:rPr>
+              <a:t>The polar plot shows the sky overhead, with your device in the center.</a:t>
+            </a:r>
+          </a:p>
+          <a:p>
+            <a:pPr marL="206550" indent="-206550" defTabSz="308610">
+              <a:spcBef>
+                <a:spcPct val="20000"/>
+              </a:spcBef>
+              <a:spcAft>
+                <a:spcPts val="405"/>
+              </a:spcAft>
+              <a:buClr>
+                <a:schemeClr val="accent1"/>
+              </a:buClr>
+              <a:buSzPct val="92000"/>
+              <a:buFont typeface="Wingdings 2" panose="05020102010507070707" pitchFamily="18" charset="2"/>
+              <a:buChar char=""/>
+            </a:pPr>
+            <a:r>
+              <a:rPr lang="en-US" altLang="zh-CN" sz="1200" dirty="0">
+                <a:solidFill>
+                  <a:schemeClr val="tx1">
+                    <a:lumMod val="75000"/>
+                    <a:lumOff val="25000"/>
+                  </a:schemeClr>
+                </a:solidFill>
+              </a:rPr>
+              <a:t>Each dot = a satellite being tracked.</a:t>
+            </a:r>
+          </a:p>
+          <a:p>
+            <a:pPr marL="206550" indent="-206550" defTabSz="308610">
+              <a:spcBef>
+                <a:spcPct val="20000"/>
+              </a:spcBef>
+              <a:spcAft>
+                <a:spcPts val="405"/>
+              </a:spcAft>
+              <a:buClr>
+                <a:schemeClr val="accent1"/>
+              </a:buClr>
+              <a:buSzPct val="92000"/>
+              <a:buFont typeface="Wingdings 2" panose="05020102010507070707" pitchFamily="18" charset="2"/>
+              <a:buChar char=""/>
+            </a:pPr>
+            <a:r>
+              <a:rPr lang="en-US" altLang="zh-CN" sz="1200" dirty="0">
+                <a:solidFill>
+                  <a:schemeClr val="tx1">
+                    <a:lumMod val="75000"/>
+                    <a:lumOff val="25000"/>
+                  </a:schemeClr>
+                </a:solidFill>
+              </a:rPr>
+              <a:t>Numbers inside the circles = satellite PRN numbers (identifiers).</a:t>
+            </a:r>
+          </a:p>
+          <a:p>
+            <a:pPr marL="206550" indent="-206550" defTabSz="308610">
+              <a:spcBef>
+                <a:spcPct val="20000"/>
+              </a:spcBef>
+              <a:spcAft>
+                <a:spcPts val="405"/>
+              </a:spcAft>
+              <a:buClr>
+                <a:schemeClr val="accent1"/>
+              </a:buClr>
+              <a:buSzPct val="92000"/>
+              <a:buFont typeface="Wingdings 2" panose="05020102010507070707" pitchFamily="18" charset="2"/>
+              <a:buChar char=""/>
+            </a:pPr>
+            <a:r>
+              <a:rPr lang="en-US" altLang="zh-CN" sz="1200" dirty="0">
+                <a:solidFill>
+                  <a:schemeClr val="tx1">
+                    <a:lumMod val="75000"/>
+                    <a:lumOff val="25000"/>
+                  </a:schemeClr>
+                </a:solidFill>
+              </a:rPr>
+              <a:t>Position of the dot = where the satellite is in the sky (azimuth &amp; elevation).</a:t>
+            </a:r>
+          </a:p>
+          <a:p>
+            <a:pPr marL="206550" indent="-206550" defTabSz="308610">
+              <a:spcBef>
+                <a:spcPct val="20000"/>
+              </a:spcBef>
+              <a:spcAft>
+                <a:spcPts val="405"/>
+              </a:spcAft>
+              <a:buClr>
+                <a:schemeClr val="accent1"/>
+              </a:buClr>
+              <a:buSzPct val="92000"/>
+              <a:buFont typeface="Wingdings 2" panose="05020102010507070707" pitchFamily="18" charset="2"/>
+              <a:buChar char=""/>
+            </a:pPr>
+            <a:r>
+              <a:rPr lang="en-US" altLang="zh-CN" sz="1200" dirty="0">
+                <a:solidFill>
+                  <a:schemeClr val="tx1">
+                    <a:lumMod val="75000"/>
+                    <a:lumOff val="25000"/>
+                  </a:schemeClr>
+                </a:solidFill>
+              </a:rPr>
+              <a:t>“Tracked: 9 Used: 5” at the bottom means:</a:t>
+            </a:r>
+          </a:p>
+          <a:p>
+            <a:pPr marL="663750" lvl="1" indent="-206550" defTabSz="308610">
+              <a:spcBef>
+                <a:spcPct val="20000"/>
+              </a:spcBef>
+              <a:spcAft>
+                <a:spcPts val="405"/>
+              </a:spcAft>
+              <a:buClr>
+                <a:schemeClr val="accent1"/>
+              </a:buClr>
+              <a:buSzPct val="92000"/>
+              <a:buFont typeface="Wingdings" panose="05000000000000000000" pitchFamily="2" charset="2"/>
+              <a:buChar char="Ø"/>
+            </a:pPr>
+            <a:r>
+              <a:rPr lang="en-US" altLang="zh-CN" sz="1200" dirty="0">
+                <a:solidFill>
+                  <a:schemeClr val="tx1">
+                    <a:lumMod val="75000"/>
+                    <a:lumOff val="25000"/>
+                  </a:schemeClr>
+                </a:solidFill>
+              </a:rPr>
+              <a:t>9 satellites are visible</a:t>
+            </a:r>
+          </a:p>
+          <a:p>
+            <a:pPr marL="663750" lvl="1" indent="-206550" defTabSz="308610">
+              <a:spcBef>
+                <a:spcPct val="20000"/>
+              </a:spcBef>
+              <a:spcAft>
+                <a:spcPts val="405"/>
+              </a:spcAft>
+              <a:buClr>
+                <a:schemeClr val="accent1"/>
+              </a:buClr>
+              <a:buSzPct val="92000"/>
+              <a:buFont typeface="Wingdings" panose="05000000000000000000" pitchFamily="2" charset="2"/>
+              <a:buChar char="Ø"/>
+            </a:pPr>
+            <a:r>
+              <a:rPr lang="en-US" altLang="zh-CN" sz="1200" dirty="0">
+                <a:solidFill>
+                  <a:schemeClr val="tx1">
+                    <a:lumMod val="75000"/>
+                    <a:lumOff val="25000"/>
+                  </a:schemeClr>
+                </a:solidFill>
+              </a:rPr>
+              <a:t>5 are actually being used in your position calculation</a:t>
+            </a:r>
+          </a:p>
+          <a:p>
+            <a:pPr marL="206550" indent="-206550" defTabSz="308610">
+              <a:spcBef>
+                <a:spcPct val="20000"/>
+              </a:spcBef>
+              <a:spcAft>
+                <a:spcPts val="405"/>
+              </a:spcAft>
+              <a:buClr>
+                <a:schemeClr val="accent1"/>
+              </a:buClr>
+              <a:buSzPct val="92000"/>
+              <a:buFont typeface="Wingdings 2" panose="05020102010507070707" pitchFamily="18" charset="2"/>
+              <a:buChar char=""/>
+            </a:pPr>
+            <a:r>
+              <a:rPr lang="zh-CN" altLang="en-US" sz="1200" dirty="0">
+                <a:solidFill>
+                  <a:schemeClr val="tx1">
+                    <a:lumMod val="75000"/>
+                    <a:lumOff val="25000"/>
+                  </a:schemeClr>
+                </a:solidFill>
+              </a:rPr>
+              <a:t>👉 </a:t>
+            </a:r>
+            <a:r>
+              <a:rPr lang="en-US" altLang="zh-CN" sz="1200" dirty="0">
+                <a:solidFill>
+                  <a:schemeClr val="tx1">
+                    <a:lumMod val="75000"/>
+                    <a:lumOff val="25000"/>
+                  </a:schemeClr>
+                </a:solidFill>
+              </a:rPr>
+              <a:t>This tells you how well the antenna is seeing the sky. If many satellites are visible and used, your accuracy improves.</a:t>
+            </a:r>
+            <a:endParaRPr lang="zh-CN" altLang="en-US" sz="1200" dirty="0">
+              <a:solidFill>
+                <a:schemeClr val="tx1">
+                  <a:lumMod val="75000"/>
+                  <a:lumOff val="25000"/>
+                </a:schemeClr>
+              </a:solidFill>
+            </a:endParaRPr>
           </a:p>
         </p:txBody>
       </p:sp>
     </p:spTree>
     <p:extLst>
       <p:ext uri="{BB962C8B-B14F-4D97-AF65-F5344CB8AC3E}">
-        <p14:creationId xmlns:p14="http://schemas.microsoft.com/office/powerpoint/2010/main" val="1294966"/>
+        <p14:creationId xmlns:p14="http://schemas.microsoft.com/office/powerpoint/2010/main" val="3525545515"/>
       </p:ext>
     </p:extLst>
   </p:cSld>
@@ -28924,10 +28593,10 @@
       </p:grpSpPr>
       <p:sp>
         <p:nvSpPr>
-          <p:cNvPr id="2" name="Title 1">
+          <p:cNvPr id="3" name="Content Placeholder 2">
             <a:extLst>
               <a:ext uri="{FF2B5EF4-FFF2-40B4-BE49-F238E27FC236}">
-                <a16:creationId xmlns:a16="http://schemas.microsoft.com/office/drawing/2014/main" id="{179C717D-A1F0-36D1-D8F2-6EB46B16B9CE}"/>
+                <a16:creationId xmlns:a16="http://schemas.microsoft.com/office/drawing/2014/main" id="{C852A89E-24C8-CA12-845C-727631E88812}"/>
               </a:ext>
             </a:extLst>
           </p:cNvPr>
@@ -28935,80 +28604,87 @@
             <a:spLocks noGrp="1"/>
           </p:cNvSpPr>
           <p:nvPr>
-            <p:ph type="title"/>
-          </p:nvPr>
-        </p:nvSpPr>
-        <p:spPr>
-          <a:xfrm>
-            <a:off x="392305" y="526617"/>
-            <a:ext cx="7444991" cy="418263"/>
-          </a:xfrm>
-        </p:spPr>
-        <p:txBody>
-          <a:bodyPr/>
-          <a:lstStyle/>
-          <a:p>
-            <a:r>
-              <a:rPr lang="en-US" altLang="zh-CN" sz="2000" dirty="0">
-                <a:solidFill>
-                  <a:srgbClr val="7030A0"/>
-                </a:solidFill>
-              </a:rPr>
-              <a:t>In class activity</a:t>
-            </a:r>
-            <a:endParaRPr lang="zh-CN" altLang="en-US" sz="2000" dirty="0">
-              <a:solidFill>
-                <a:srgbClr val="7030A0"/>
-              </a:solidFill>
-            </a:endParaRPr>
-          </a:p>
-        </p:txBody>
-      </p:sp>
-      <p:sp>
-        <p:nvSpPr>
-          <p:cNvPr id="3" name="Content Placeholder 2">
-            <a:extLst>
-              <a:ext uri="{FF2B5EF4-FFF2-40B4-BE49-F238E27FC236}">
-                <a16:creationId xmlns:a16="http://schemas.microsoft.com/office/drawing/2014/main" id="{29151E6C-5FB6-5D71-31AA-01A3A2F00797}"/>
-              </a:ext>
-            </a:extLst>
-          </p:cNvPr>
-          <p:cNvSpPr>
-            <a:spLocks noGrp="1"/>
-          </p:cNvSpPr>
-          <p:nvPr>
             <p:ph idx="1"/>
           </p:nvPr>
         </p:nvSpPr>
         <p:spPr>
           <a:xfrm>
-            <a:off x="392307" y="982980"/>
-            <a:ext cx="7444990" cy="2735580"/>
+            <a:off x="253589" y="1255014"/>
+            <a:ext cx="5124575" cy="2633472"/>
           </a:xfrm>
         </p:spPr>
         <p:txBody>
           <a:bodyPr>
-            <a:noAutofit/>
+            <a:normAutofit/>
           </a:bodyPr>
           <a:lstStyle/>
           <a:p>
             <a:r>
-              <a:rPr lang="en-US" altLang="zh-CN" sz="1600" dirty="0"/>
-              <a:t>For optimal GNSS reception, hold the handheld at 15° from horizontal allowing it visibility of the sky. </a:t>
-            </a:r>
-          </a:p>
-          <a:p>
-            <a:r>
-              <a:rPr lang="en-US" altLang="zh-CN" sz="1600" dirty="0"/>
-              <a:t>When collecting point data with a TDC100 handheld, it is recommended that you remain stationary at the point for at least 10 seconds before beginning to log GNSS positions. </a:t>
-            </a:r>
-          </a:p>
-          <a:p>
-            <a:r>
-              <a:rPr lang="en-US" altLang="zh-CN" sz="1600" dirty="0"/>
-              <a:t>This allows the GNSS receiver’s internal algorithms to stabilize, and ensures the best possible point feature accuracy</a:t>
-            </a:r>
-            <a:endParaRPr lang="zh-CN" altLang="en-US" sz="1600" dirty="0"/>
+              <a:rPr lang="en-US" altLang="zh-CN" sz="1200" dirty="0"/>
+              <a:t>NMEA Data (NMEA tab)</a:t>
+            </a:r>
+          </a:p>
+          <a:p>
+            <a:r>
+              <a:rPr lang="en-US" altLang="zh-CN" sz="1200" dirty="0"/>
+              <a:t>NMEA = a standard GPS message format.</a:t>
+            </a:r>
+          </a:p>
+          <a:p>
+            <a:r>
+              <a:rPr lang="en-US" altLang="zh-CN" sz="1200" dirty="0"/>
+              <a:t>Each line starts with $ and a code that tells you what the sentence means. For example:</a:t>
+            </a:r>
+          </a:p>
+          <a:p>
+            <a:pPr lvl="1">
+              <a:buFont typeface="Wingdings" panose="05000000000000000000" pitchFamily="2" charset="2"/>
+              <a:buChar char="Ø"/>
+            </a:pPr>
+            <a:r>
+              <a:rPr lang="en-US" altLang="zh-CN" sz="1200" dirty="0"/>
+              <a:t>$GNGSA → GNSS DOP and active satellites (Dilution of Precision info).</a:t>
+            </a:r>
+          </a:p>
+          <a:p>
+            <a:pPr lvl="1">
+              <a:buFont typeface="Wingdings" panose="05000000000000000000" pitchFamily="2" charset="2"/>
+              <a:buChar char="Ø"/>
+            </a:pPr>
+            <a:r>
+              <a:rPr lang="en-US" altLang="zh-CN" sz="1200" dirty="0"/>
+              <a:t>$GNGGA → Fix data (time, latitude, longitude, altitude, fix quality).</a:t>
+            </a:r>
+          </a:p>
+          <a:p>
+            <a:pPr lvl="1">
+              <a:buFont typeface="Wingdings" panose="05000000000000000000" pitchFamily="2" charset="2"/>
+              <a:buChar char="Ø"/>
+            </a:pPr>
+            <a:r>
+              <a:rPr lang="en-US" altLang="zh-CN" sz="1200" dirty="0"/>
+              <a:t>$GNRMC → Recommended Minimum GPS Data (time, date, position, speed).</a:t>
+            </a:r>
+          </a:p>
+          <a:p>
+            <a:pPr lvl="1">
+              <a:buFont typeface="Wingdings" panose="05000000000000000000" pitchFamily="2" charset="2"/>
+              <a:buChar char="Ø"/>
+            </a:pPr>
+            <a:r>
+              <a:rPr lang="en-US" altLang="zh-CN" sz="1200" dirty="0"/>
+              <a:t>$GLGSV → Satellites in view (from GLONASS).</a:t>
+            </a:r>
+          </a:p>
+          <a:p>
+            <a:pPr>
+              <a:buFont typeface="Wingdings" panose="05000000000000000000" pitchFamily="2" charset="2"/>
+              <a:buChar char="n"/>
+            </a:pPr>
+            <a:r>
+              <a:rPr lang="en-US" altLang="zh-CN" sz="1335" dirty="0"/>
+              <a:t>Explore Start Recording</a:t>
+            </a:r>
           </a:p>
         </p:txBody>
       </p:sp>
@@ -29017,7 +28693,7 @@
           <p:cNvPr id="4" name="Slide Number Placeholder 3">
             <a:extLst>
               <a:ext uri="{FF2B5EF4-FFF2-40B4-BE49-F238E27FC236}">
-                <a16:creationId xmlns:a16="http://schemas.microsoft.com/office/drawing/2014/main" id="{64B62200-57D0-1127-987C-99A7C1BC77D7}"/>
+                <a16:creationId xmlns:a16="http://schemas.microsoft.com/office/drawing/2014/main" id="{BCBA5436-4BDB-3531-4F4E-F2E0E3FD1F7C}"/>
               </a:ext>
             </a:extLst>
           </p:cNvPr>
@@ -29042,10 +28718,170 @@
           </a:p>
         </p:txBody>
       </p:sp>
+      <p:sp>
+        <p:nvSpPr>
+          <p:cNvPr id="5" name="Title 1">
+            <a:extLst>
+              <a:ext uri="{FF2B5EF4-FFF2-40B4-BE49-F238E27FC236}">
+                <a16:creationId xmlns:a16="http://schemas.microsoft.com/office/drawing/2014/main" id="{33A8B8D2-DFB2-A2E9-CCBB-F56433DDBC24}"/>
+              </a:ext>
+            </a:extLst>
+          </p:cNvPr>
+          <p:cNvSpPr txBox="1">
+            <a:spLocks/>
+          </p:cNvSpPr>
+          <p:nvPr/>
+        </p:nvSpPr>
+        <p:spPr>
+          <a:xfrm>
+            <a:off x="392306" y="358977"/>
+            <a:ext cx="7444991" cy="471603"/>
+          </a:xfrm>
+          <a:prstGeom prst="rect">
+            <a:avLst/>
+          </a:prstGeom>
+        </p:spPr>
+        <p:txBody>
+          <a:bodyPr vert="horz" lIns="91440" tIns="45720" rIns="91440" bIns="45720" rtlCol="0" anchor="b">
+            <a:normAutofit/>
+          </a:bodyPr>
+          <a:lstStyle>
+            <a:lvl1pPr algn="l" defTabSz="308610" rtl="0" eaLnBrk="1" latinLnBrk="0" hangingPunct="1">
+              <a:lnSpc>
+                <a:spcPct val="100000"/>
+              </a:lnSpc>
+              <a:spcBef>
+                <a:spcPct val="0"/>
+              </a:spcBef>
+              <a:buNone/>
+              <a:defRPr sz="1890" b="0" kern="1200" cap="all">
+                <a:solidFill>
+                  <a:schemeClr val="tx1">
+                    <a:lumMod val="75000"/>
+                    <a:lumOff val="25000"/>
+                  </a:schemeClr>
+                </a:solidFill>
+                <a:latin typeface="+mj-lt"/>
+                <a:ea typeface="+mj-ea"/>
+                <a:cs typeface="+mj-cs"/>
+              </a:defRPr>
+            </a:lvl1pPr>
+            <a:lvl2pPr eaLnBrk="1" hangingPunct="1">
+              <a:defRPr>
+                <a:solidFill>
+                  <a:schemeClr val="tx2"/>
+                </a:solidFill>
+              </a:defRPr>
+            </a:lvl2pPr>
+            <a:lvl3pPr eaLnBrk="1" hangingPunct="1">
+              <a:defRPr>
+                <a:solidFill>
+                  <a:schemeClr val="tx2"/>
+                </a:solidFill>
+              </a:defRPr>
+            </a:lvl3pPr>
+            <a:lvl4pPr eaLnBrk="1" hangingPunct="1">
+              <a:defRPr>
+                <a:solidFill>
+                  <a:schemeClr val="tx2"/>
+                </a:solidFill>
+              </a:defRPr>
+            </a:lvl4pPr>
+            <a:lvl5pPr eaLnBrk="1" hangingPunct="1">
+              <a:defRPr>
+                <a:solidFill>
+                  <a:schemeClr val="tx2"/>
+                </a:solidFill>
+              </a:defRPr>
+            </a:lvl5pPr>
+            <a:lvl6pPr eaLnBrk="1" hangingPunct="1">
+              <a:defRPr>
+                <a:solidFill>
+                  <a:schemeClr val="tx2"/>
+                </a:solidFill>
+              </a:defRPr>
+            </a:lvl6pPr>
+            <a:lvl7pPr eaLnBrk="1" hangingPunct="1">
+              <a:defRPr>
+                <a:solidFill>
+                  <a:schemeClr val="tx2"/>
+                </a:solidFill>
+              </a:defRPr>
+            </a:lvl7pPr>
+            <a:lvl8pPr eaLnBrk="1" hangingPunct="1">
+              <a:defRPr>
+                <a:solidFill>
+                  <a:schemeClr val="tx2"/>
+                </a:solidFill>
+              </a:defRPr>
+            </a:lvl8pPr>
+            <a:lvl9pPr eaLnBrk="1" hangingPunct="1">
+              <a:defRPr>
+                <a:solidFill>
+                  <a:schemeClr val="tx2"/>
+                </a:solidFill>
+              </a:defRPr>
+            </a:lvl9pPr>
+          </a:lstStyle>
+          <a:p>
+            <a:r>
+              <a:rPr lang="en-US" altLang="zh-CN" sz="2000" dirty="0">
+                <a:solidFill>
+                  <a:srgbClr val="7030A0"/>
+                </a:solidFill>
+              </a:rPr>
+              <a:t>In-Class Activity: Exploring GNSS with </a:t>
+            </a:r>
+            <a:r>
+              <a:rPr lang="en-US" altLang="zh-CN" sz="2000" dirty="0" err="1">
+                <a:solidFill>
+                  <a:srgbClr val="7030A0"/>
+                </a:solidFill>
+              </a:rPr>
+              <a:t>SatLook</a:t>
+            </a:r>
+            <a:endParaRPr lang="zh-CN" altLang="en-US" sz="2000" dirty="0">
+              <a:solidFill>
+                <a:srgbClr val="7030A0"/>
+              </a:solidFill>
+            </a:endParaRPr>
+          </a:p>
+        </p:txBody>
+      </p:sp>
+      <p:pic>
+        <p:nvPicPr>
+          <p:cNvPr id="7" name="Picture 6" descr="A screenshot of a computer&#10;&#10;AI-generated content may be incorrect.">
+            <a:extLst>
+              <a:ext uri="{FF2B5EF4-FFF2-40B4-BE49-F238E27FC236}">
+                <a16:creationId xmlns:a16="http://schemas.microsoft.com/office/drawing/2014/main" id="{F07DE8F6-AB1D-657E-F8F7-2D12BFFDDE9E}"/>
+              </a:ext>
+            </a:extLst>
+          </p:cNvPr>
+          <p:cNvPicPr>
+            <a:picLocks noChangeAspect="1"/>
+          </p:cNvPicPr>
+          <p:nvPr/>
+        </p:nvPicPr>
+        <p:blipFill>
+          <a:blip r:embed="rId2"/>
+          <a:stretch>
+            <a:fillRect/>
+          </a:stretch>
+        </p:blipFill>
+        <p:spPr>
+          <a:xfrm>
+            <a:off x="5655596" y="830580"/>
+            <a:ext cx="2181701" cy="3878580"/>
+          </a:xfrm>
+          <a:prstGeom prst="rect">
+            <a:avLst/>
+          </a:prstGeom>
+        </p:spPr>
+      </p:pic>
     </p:spTree>
     <p:extLst>
       <p:ext uri="{BB962C8B-B14F-4D97-AF65-F5344CB8AC3E}">
-        <p14:creationId xmlns:p14="http://schemas.microsoft.com/office/powerpoint/2010/main" val="1060793755"/>
+        <p14:creationId xmlns:p14="http://schemas.microsoft.com/office/powerpoint/2010/main" val="3346982534"/>
       </p:ext>
     </p:extLst>
   </p:cSld>
@@ -29072,66 +28908,41 @@
           <a:chExt cx="0" cy="0"/>
         </a:xfrm>
       </p:grpSpPr>
-      <p:sp>
-        <p:nvSpPr>
-          <p:cNvPr id="2" name="Title 1">
+      <p:pic>
+        <p:nvPicPr>
+          <p:cNvPr id="6" name="Content Placeholder 5" descr="A screenshot of a graph&#10;&#10;AI-generated content may be incorrect.">
             <a:extLst>
               <a:ext uri="{FF2B5EF4-FFF2-40B4-BE49-F238E27FC236}">
-                <a16:creationId xmlns:a16="http://schemas.microsoft.com/office/drawing/2014/main" id="{0403A4D7-69DC-E1E8-9B73-5C4261EDDAEF}"/>
+                <a16:creationId xmlns:a16="http://schemas.microsoft.com/office/drawing/2014/main" id="{5868A7F6-FCAF-81CB-C867-C47B4EA201B4}"/>
               </a:ext>
             </a:extLst>
           </p:cNvPr>
-          <p:cNvSpPr>
-            <a:spLocks noGrp="1"/>
-          </p:cNvSpPr>
-          <p:nvPr>
-            <p:ph type="title"/>
-          </p:nvPr>
-        </p:nvSpPr>
-        <p:spPr/>
-        <p:txBody>
-          <a:bodyPr/>
-          <a:lstStyle/>
-          <a:p>
-            <a:endParaRPr lang="zh-CN" altLang="en-US"/>
-          </a:p>
-        </p:txBody>
-      </p:sp>
-      <p:sp>
-        <p:nvSpPr>
-          <p:cNvPr id="3" name="Content Placeholder 2">
-            <a:extLst>
-              <a:ext uri="{FF2B5EF4-FFF2-40B4-BE49-F238E27FC236}">
-                <a16:creationId xmlns:a16="http://schemas.microsoft.com/office/drawing/2014/main" id="{71648C00-FC69-5CE5-87DA-9EEAE9836966}"/>
-              </a:ext>
-            </a:extLst>
-          </p:cNvPr>
-          <p:cNvSpPr>
-            <a:spLocks noGrp="1"/>
-          </p:cNvSpPr>
+          <p:cNvPicPr>
+            <a:picLocks noGrp="1" noChangeAspect="1"/>
+          </p:cNvPicPr>
           <p:nvPr>
             <p:ph idx="1"/>
           </p:nvPr>
-        </p:nvSpPr>
-        <p:spPr/>
-        <p:txBody>
-          <a:bodyPr/>
-          <a:lstStyle/>
-          <a:p>
-            <a:r>
-              <a:rPr lang="en-US" altLang="zh-CN" dirty="0"/>
-              <a:t>To use the GNSS receiver: 1. In the Apps screen, tap Settings then tap Location. 2. Slide the Location slider to On. 3. Tap Mode then select the mode you want the device to use to determine your location: l High accuracy. Uses GNSS satellites, WLAN, and cellular networks to determine your location. l Battery saving. Uses WLAN and cellular networks to determine your location. l Device only. Uses GNSS only to determine your location. 4. Tap NMEA output to turn it on or off. 5. Tap SBAS mode to turn it on or off. 6. Tap Location mode then select the Location mode you want the device to use (GPS + BDS; GPS + GLONASS; GPS only). 7. Tap Update rate to modify the update rate of the GNSS solution. Two settings are available; 1s and 2s. By default the receiver is set to 2s but it is recommended that you use 1s to maximize reactivity of any GNSS applications.</a:t>
-            </a:r>
-            <a:endParaRPr lang="zh-CN" altLang="en-US" dirty="0"/>
-          </a:p>
-        </p:txBody>
-      </p:sp>
+        </p:nvPicPr>
+        <p:blipFill>
+          <a:blip r:embed="rId2"/>
+          <a:stretch>
+            <a:fillRect/>
+          </a:stretch>
+        </p:blipFill>
+        <p:spPr>
+          <a:xfrm>
+            <a:off x="5436067" y="855890"/>
+            <a:ext cx="2214413" cy="3936736"/>
+          </a:xfrm>
+        </p:spPr>
+      </p:pic>
       <p:sp>
         <p:nvSpPr>
           <p:cNvPr id="4" name="Slide Number Placeholder 3">
             <a:extLst>
               <a:ext uri="{FF2B5EF4-FFF2-40B4-BE49-F238E27FC236}">
-                <a16:creationId xmlns:a16="http://schemas.microsoft.com/office/drawing/2014/main" id="{44F7B7CF-D1D6-40F9-DC78-CA7321180948}"/>
+                <a16:creationId xmlns:a16="http://schemas.microsoft.com/office/drawing/2014/main" id="{BABB1224-F71C-FD78-343D-4929AEBDD738}"/>
               </a:ext>
             </a:extLst>
           </p:cNvPr>
@@ -29156,10 +28967,203 @@
           </a:p>
         </p:txBody>
       </p:sp>
+      <p:sp>
+        <p:nvSpPr>
+          <p:cNvPr id="7" name="Title 1">
+            <a:extLst>
+              <a:ext uri="{FF2B5EF4-FFF2-40B4-BE49-F238E27FC236}">
+                <a16:creationId xmlns:a16="http://schemas.microsoft.com/office/drawing/2014/main" id="{5FC29C91-691F-5292-D901-30A0BCAF2169}"/>
+              </a:ext>
+            </a:extLst>
+          </p:cNvPr>
+          <p:cNvSpPr txBox="1">
+            <a:spLocks/>
+          </p:cNvSpPr>
+          <p:nvPr/>
+        </p:nvSpPr>
+        <p:spPr>
+          <a:xfrm>
+            <a:off x="392306" y="358977"/>
+            <a:ext cx="7444991" cy="471603"/>
+          </a:xfrm>
+          <a:prstGeom prst="rect">
+            <a:avLst/>
+          </a:prstGeom>
+        </p:spPr>
+        <p:txBody>
+          <a:bodyPr vert="horz" lIns="91440" tIns="45720" rIns="91440" bIns="45720" rtlCol="0" anchor="b">
+            <a:normAutofit/>
+          </a:bodyPr>
+          <a:lstStyle>
+            <a:lvl1pPr algn="l" defTabSz="308610" rtl="0" eaLnBrk="1" latinLnBrk="0" hangingPunct="1">
+              <a:lnSpc>
+                <a:spcPct val="100000"/>
+              </a:lnSpc>
+              <a:spcBef>
+                <a:spcPct val="0"/>
+              </a:spcBef>
+              <a:buNone/>
+              <a:defRPr sz="1890" b="0" kern="1200" cap="all">
+                <a:solidFill>
+                  <a:schemeClr val="tx1">
+                    <a:lumMod val="75000"/>
+                    <a:lumOff val="25000"/>
+                  </a:schemeClr>
+                </a:solidFill>
+                <a:latin typeface="+mj-lt"/>
+                <a:ea typeface="+mj-ea"/>
+                <a:cs typeface="+mj-cs"/>
+              </a:defRPr>
+            </a:lvl1pPr>
+            <a:lvl2pPr eaLnBrk="1" hangingPunct="1">
+              <a:defRPr>
+                <a:solidFill>
+                  <a:schemeClr val="tx2"/>
+                </a:solidFill>
+              </a:defRPr>
+            </a:lvl2pPr>
+            <a:lvl3pPr eaLnBrk="1" hangingPunct="1">
+              <a:defRPr>
+                <a:solidFill>
+                  <a:schemeClr val="tx2"/>
+                </a:solidFill>
+              </a:defRPr>
+            </a:lvl3pPr>
+            <a:lvl4pPr eaLnBrk="1" hangingPunct="1">
+              <a:defRPr>
+                <a:solidFill>
+                  <a:schemeClr val="tx2"/>
+                </a:solidFill>
+              </a:defRPr>
+            </a:lvl4pPr>
+            <a:lvl5pPr eaLnBrk="1" hangingPunct="1">
+              <a:defRPr>
+                <a:solidFill>
+                  <a:schemeClr val="tx2"/>
+                </a:solidFill>
+              </a:defRPr>
+            </a:lvl5pPr>
+            <a:lvl6pPr eaLnBrk="1" hangingPunct="1">
+              <a:defRPr>
+                <a:solidFill>
+                  <a:schemeClr val="tx2"/>
+                </a:solidFill>
+              </a:defRPr>
+            </a:lvl6pPr>
+            <a:lvl7pPr eaLnBrk="1" hangingPunct="1">
+              <a:defRPr>
+                <a:solidFill>
+                  <a:schemeClr val="tx2"/>
+                </a:solidFill>
+              </a:defRPr>
+            </a:lvl7pPr>
+            <a:lvl8pPr eaLnBrk="1" hangingPunct="1">
+              <a:defRPr>
+                <a:solidFill>
+                  <a:schemeClr val="tx2"/>
+                </a:solidFill>
+              </a:defRPr>
+            </a:lvl8pPr>
+            <a:lvl9pPr eaLnBrk="1" hangingPunct="1">
+              <a:defRPr>
+                <a:solidFill>
+                  <a:schemeClr val="tx2"/>
+                </a:solidFill>
+              </a:defRPr>
+            </a:lvl9pPr>
+          </a:lstStyle>
+          <a:p>
+            <a:r>
+              <a:rPr lang="en-US" altLang="zh-CN" sz="2000" dirty="0">
+                <a:solidFill>
+                  <a:srgbClr val="7030A0"/>
+                </a:solidFill>
+              </a:rPr>
+              <a:t>In-Class Activity: Exploring GNSS with </a:t>
+            </a:r>
+            <a:r>
+              <a:rPr lang="en-US" altLang="zh-CN" sz="2000" dirty="0" err="1">
+                <a:solidFill>
+                  <a:srgbClr val="7030A0"/>
+                </a:solidFill>
+              </a:rPr>
+              <a:t>SatLook</a:t>
+            </a:r>
+            <a:endParaRPr lang="zh-CN" altLang="en-US" sz="2000" dirty="0">
+              <a:solidFill>
+                <a:srgbClr val="7030A0"/>
+              </a:solidFill>
+            </a:endParaRPr>
+          </a:p>
+        </p:txBody>
+      </p:sp>
+      <p:sp>
+        <p:nvSpPr>
+          <p:cNvPr id="8" name="TextBox 7">
+            <a:extLst>
+              <a:ext uri="{FF2B5EF4-FFF2-40B4-BE49-F238E27FC236}">
+                <a16:creationId xmlns:a16="http://schemas.microsoft.com/office/drawing/2014/main" id="{9B3B75D5-2D02-4B4E-3DED-303579A9F17E}"/>
+              </a:ext>
+            </a:extLst>
+          </p:cNvPr>
+          <p:cNvSpPr txBox="1"/>
+          <p:nvPr/>
+        </p:nvSpPr>
+        <p:spPr>
+          <a:xfrm>
+            <a:off x="502920" y="1663809"/>
+            <a:ext cx="4297680" cy="1815882"/>
+          </a:xfrm>
+          <a:prstGeom prst="rect">
+            <a:avLst/>
+          </a:prstGeom>
+          <a:noFill/>
+        </p:spPr>
+        <p:txBody>
+          <a:bodyPr wrap="square" rtlCol="0">
+            <a:spAutoFit/>
+          </a:bodyPr>
+          <a:lstStyle/>
+          <a:p>
+            <a:r>
+              <a:rPr lang="en-US" altLang="zh-CN" sz="1400" dirty="0"/>
+              <a:t>SNR = Signal-to-Noise Ratio</a:t>
+            </a:r>
+          </a:p>
+          <a:p>
+            <a:endParaRPr lang="en-US" altLang="zh-CN" sz="1400" dirty="0"/>
+          </a:p>
+          <a:p>
+            <a:r>
+              <a:rPr lang="en-US" altLang="zh-CN" sz="1400" dirty="0"/>
+              <a:t>SNR measures how strong and clean the satellite’s signal is compared to background noise.</a:t>
+            </a:r>
+          </a:p>
+          <a:p>
+            <a:endParaRPr lang="en-US" altLang="zh-CN" sz="1400" dirty="0"/>
+          </a:p>
+          <a:p>
+            <a:r>
+              <a:rPr lang="en-US" altLang="zh-CN" sz="1400" dirty="0"/>
+              <a:t>Units: dB-Hz (decibels relative to 1 Hz).</a:t>
+            </a:r>
+          </a:p>
+          <a:p>
+            <a:endParaRPr lang="en-US" altLang="zh-CN" sz="1400" dirty="0"/>
+          </a:p>
+          <a:p>
+            <a:r>
+              <a:rPr lang="en-US" altLang="zh-CN" sz="1400" dirty="0"/>
+              <a:t>Higher = better (stronger, clearer signal).</a:t>
+            </a:r>
+            <a:endParaRPr lang="zh-CN" altLang="en-US" sz="1400" dirty="0"/>
+          </a:p>
+        </p:txBody>
+      </p:sp>
     </p:spTree>
     <p:extLst>
       <p:ext uri="{BB962C8B-B14F-4D97-AF65-F5344CB8AC3E}">
-        <p14:creationId xmlns:p14="http://schemas.microsoft.com/office/powerpoint/2010/main" val="368391701"/>
+        <p14:creationId xmlns:p14="http://schemas.microsoft.com/office/powerpoint/2010/main" val="1294966"/>
       </p:ext>
     </p:extLst>
   </p:cSld>
@@ -29191,7 +29195,7 @@
           <p:cNvPr id="2" name="Title 1">
             <a:extLst>
               <a:ext uri="{FF2B5EF4-FFF2-40B4-BE49-F238E27FC236}">
-                <a16:creationId xmlns:a16="http://schemas.microsoft.com/office/drawing/2014/main" id="{40DDC8C5-FECA-BD40-2288-90941E0BC430}"/>
+                <a16:creationId xmlns:a16="http://schemas.microsoft.com/office/drawing/2014/main" id="{179C717D-A1F0-36D1-D8F2-6EB46B16B9CE}"/>
               </a:ext>
             </a:extLst>
           </p:cNvPr>
@@ -29202,12 +29206,29 @@
             <p:ph type="title"/>
           </p:nvPr>
         </p:nvSpPr>
-        <p:spPr/>
+        <p:spPr>
+          <a:xfrm>
+            <a:off x="392305" y="526617"/>
+            <a:ext cx="7444991" cy="418263"/>
+          </a:xfrm>
+        </p:spPr>
         <p:txBody>
           <a:bodyPr/>
           <a:lstStyle/>
           <a:p>
-            <a:endParaRPr lang="zh-CN" altLang="en-US"/>
+            <a:r>
+              <a:rPr lang="en-US" altLang="zh-CN" sz="2000" dirty="0">
+                <a:solidFill>
+                  <a:srgbClr val="7030A0"/>
+                </a:solidFill>
+              </a:rPr>
+              <a:t>In class activity</a:t>
+            </a:r>
+            <a:endParaRPr lang="zh-CN" altLang="en-US" sz="2000" dirty="0">
+              <a:solidFill>
+                <a:srgbClr val="7030A0"/>
+              </a:solidFill>
+            </a:endParaRPr>
           </a:p>
         </p:txBody>
       </p:sp>
@@ -29216,7 +29237,7 @@
           <p:cNvPr id="3" name="Content Placeholder 2">
             <a:extLst>
               <a:ext uri="{FF2B5EF4-FFF2-40B4-BE49-F238E27FC236}">
-                <a16:creationId xmlns:a16="http://schemas.microsoft.com/office/drawing/2014/main" id="{4A84AAEF-5F81-5F14-1331-4A618E284901}"/>
+                <a16:creationId xmlns:a16="http://schemas.microsoft.com/office/drawing/2014/main" id="{29151E6C-5FB6-5D71-31AA-01A3A2F00797}"/>
               </a:ext>
             </a:extLst>
           </p:cNvPr>
@@ -29227,24 +29248,35 @@
             <p:ph idx="1"/>
           </p:nvPr>
         </p:nvSpPr>
-        <p:spPr/>
-        <p:txBody>
-          <a:bodyPr/>
-          <a:lstStyle/>
-          <a:p>
-            <a:r>
-              <a:rPr lang="en-US" altLang="zh-CN" dirty="0"/>
-              <a:t>The TDC100 handheld achieves optimal GNSS results when used with the Trimble </a:t>
-            </a:r>
-            <a:r>
-              <a:rPr lang="en-US" altLang="zh-CN" dirty="0" err="1"/>
-              <a:t>TerraFlex</a:t>
-            </a:r>
-            <a:r>
-              <a:rPr lang="en-US" altLang="zh-CN" dirty="0"/>
-              <a:t>™ software (available mid-August 2016).</a:t>
-            </a:r>
-            <a:endParaRPr lang="zh-CN" altLang="en-US" dirty="0"/>
+        <p:spPr>
+          <a:xfrm>
+            <a:off x="392307" y="982980"/>
+            <a:ext cx="7444990" cy="2735580"/>
+          </a:xfrm>
+        </p:spPr>
+        <p:txBody>
+          <a:bodyPr>
+            <a:noAutofit/>
+          </a:bodyPr>
+          <a:lstStyle/>
+          <a:p>
+            <a:r>
+              <a:rPr lang="en-US" altLang="zh-CN" sz="1600" dirty="0"/>
+              <a:t>For optimal GNSS reception, hold the handheld at 15° from horizontal allowing it visibility of the sky. </a:t>
+            </a:r>
+          </a:p>
+          <a:p>
+            <a:r>
+              <a:rPr lang="en-US" altLang="zh-CN" sz="1600" dirty="0"/>
+              <a:t>When collecting point data with a TDC100 handheld, it is recommended that you remain stationary at the point for at least 10 seconds before beginning to log GNSS positions. </a:t>
+            </a:r>
+          </a:p>
+          <a:p>
+            <a:r>
+              <a:rPr lang="en-US" altLang="zh-CN" sz="1600" dirty="0"/>
+              <a:t>This allows the GNSS receiver’s internal algorithms to stabilize, and ensures the best possible point feature accuracy</a:t>
+            </a:r>
+            <a:endParaRPr lang="zh-CN" altLang="en-US" sz="1600" dirty="0"/>
           </a:p>
         </p:txBody>
       </p:sp>
@@ -29253,7 +29285,7 @@
           <p:cNvPr id="4" name="Slide Number Placeholder 3">
             <a:extLst>
               <a:ext uri="{FF2B5EF4-FFF2-40B4-BE49-F238E27FC236}">
-                <a16:creationId xmlns:a16="http://schemas.microsoft.com/office/drawing/2014/main" id="{521D5864-379C-7EB6-0BC5-686D1AD5E3F0}"/>
+                <a16:creationId xmlns:a16="http://schemas.microsoft.com/office/drawing/2014/main" id="{64B62200-57D0-1127-987C-99A7C1BC77D7}"/>
               </a:ext>
             </a:extLst>
           </p:cNvPr>
@@ -29281,7 +29313,7 @@
     </p:spTree>
     <p:extLst>
       <p:ext uri="{BB962C8B-B14F-4D97-AF65-F5344CB8AC3E}">
-        <p14:creationId xmlns:p14="http://schemas.microsoft.com/office/powerpoint/2010/main" val="1626013556"/>
+        <p14:creationId xmlns:p14="http://schemas.microsoft.com/office/powerpoint/2010/main" val="1060793755"/>
       </p:ext>
     </p:extLst>
   </p:cSld>
@@ -29313,6 +29345,242 @@
           <p:cNvPr id="2" name="Title 1">
             <a:extLst>
               <a:ext uri="{FF2B5EF4-FFF2-40B4-BE49-F238E27FC236}">
+                <a16:creationId xmlns:a16="http://schemas.microsoft.com/office/drawing/2014/main" id="{0403A4D7-69DC-E1E8-9B73-5C4261EDDAEF}"/>
+              </a:ext>
+            </a:extLst>
+          </p:cNvPr>
+          <p:cNvSpPr>
+            <a:spLocks noGrp="1"/>
+          </p:cNvSpPr>
+          <p:nvPr>
+            <p:ph type="title"/>
+          </p:nvPr>
+        </p:nvSpPr>
+        <p:spPr/>
+        <p:txBody>
+          <a:bodyPr/>
+          <a:lstStyle/>
+          <a:p>
+            <a:endParaRPr lang="zh-CN" altLang="en-US"/>
+          </a:p>
+        </p:txBody>
+      </p:sp>
+      <p:sp>
+        <p:nvSpPr>
+          <p:cNvPr id="3" name="Content Placeholder 2">
+            <a:extLst>
+              <a:ext uri="{FF2B5EF4-FFF2-40B4-BE49-F238E27FC236}">
+                <a16:creationId xmlns:a16="http://schemas.microsoft.com/office/drawing/2014/main" id="{71648C00-FC69-5CE5-87DA-9EEAE9836966}"/>
+              </a:ext>
+            </a:extLst>
+          </p:cNvPr>
+          <p:cNvSpPr>
+            <a:spLocks noGrp="1"/>
+          </p:cNvSpPr>
+          <p:nvPr>
+            <p:ph idx="1"/>
+          </p:nvPr>
+        </p:nvSpPr>
+        <p:spPr/>
+        <p:txBody>
+          <a:bodyPr/>
+          <a:lstStyle/>
+          <a:p>
+            <a:r>
+              <a:rPr lang="en-US" altLang="zh-CN" dirty="0"/>
+              <a:t>To use the GNSS receiver: 1. In the Apps screen, tap Settings then tap Location. 2. Slide the Location slider to On. 3. Tap Mode then select the mode you want the device to use to determine your location: l High accuracy. Uses GNSS satellites, WLAN, and cellular networks to determine your location. l Battery saving. Uses WLAN and cellular networks to determine your location. l Device only. Uses GNSS only to determine your location. 4. Tap NMEA output to turn it on or off. 5. Tap SBAS mode to turn it on or off. 6. Tap Location mode then select the Location mode you want the device to use (GPS + BDS; GPS + GLONASS; GPS only). 7. Tap Update rate to modify the update rate of the GNSS solution. Two settings are available; 1s and 2s. By default the receiver is set to 2s but it is recommended that you use 1s to maximize reactivity of any GNSS applications.</a:t>
+            </a:r>
+            <a:endParaRPr lang="zh-CN" altLang="en-US" dirty="0"/>
+          </a:p>
+        </p:txBody>
+      </p:sp>
+      <p:sp>
+        <p:nvSpPr>
+          <p:cNvPr id="4" name="Slide Number Placeholder 3">
+            <a:extLst>
+              <a:ext uri="{FF2B5EF4-FFF2-40B4-BE49-F238E27FC236}">
+                <a16:creationId xmlns:a16="http://schemas.microsoft.com/office/drawing/2014/main" id="{44F7B7CF-D1D6-40F9-DC78-CA7321180948}"/>
+              </a:ext>
+            </a:extLst>
+          </p:cNvPr>
+          <p:cNvSpPr>
+            <a:spLocks noGrp="1"/>
+          </p:cNvSpPr>
+          <p:nvPr>
+            <p:ph type="sldNum" sz="quarter" idx="12"/>
+          </p:nvPr>
+        </p:nvSpPr>
+        <p:spPr/>
+        <p:txBody>
+          <a:bodyPr/>
+          <a:lstStyle/>
+          <a:p>
+            <a:fld id="{127DDC20-79C9-9647-820E-6D40A3D210C3}" type="slidenum">
+              <a:rPr lang="en-US" smtClean="0"/>
+              <a:pPr/>
+              <a:t>24</a:t>
+            </a:fld>
+            <a:endParaRPr lang="en-US"/>
+          </a:p>
+        </p:txBody>
+      </p:sp>
+    </p:spTree>
+    <p:extLst>
+      <p:ext uri="{BB962C8B-B14F-4D97-AF65-F5344CB8AC3E}">
+        <p14:creationId xmlns:p14="http://schemas.microsoft.com/office/powerpoint/2010/main" val="368391701"/>
+      </p:ext>
+    </p:extLst>
+  </p:cSld>
+  <p:clrMapOvr>
+    <a:masterClrMapping/>
+  </p:clrMapOvr>
+</p:sld>
+</file>
+
+<file path=ppt/slides/slide25.xml><?xml version="1.0" encoding="utf-8"?>
+<p:sld xmlns:a="http://schemas.openxmlformats.org/drawingml/2006/main" xmlns:r="http://schemas.openxmlformats.org/officeDocument/2006/relationships" xmlns:p="http://schemas.openxmlformats.org/presentationml/2006/main">
+  <p:cSld>
+    <p:spTree>
+      <p:nvGrpSpPr>
+        <p:cNvPr id="1" name=""/>
+        <p:cNvGrpSpPr/>
+        <p:nvPr/>
+      </p:nvGrpSpPr>
+      <p:grpSpPr>
+        <a:xfrm>
+          <a:off x="0" y="0"/>
+          <a:ext cx="0" cy="0"/>
+          <a:chOff x="0" y="0"/>
+          <a:chExt cx="0" cy="0"/>
+        </a:xfrm>
+      </p:grpSpPr>
+      <p:sp>
+        <p:nvSpPr>
+          <p:cNvPr id="2" name="Title 1">
+            <a:extLst>
+              <a:ext uri="{FF2B5EF4-FFF2-40B4-BE49-F238E27FC236}">
+                <a16:creationId xmlns:a16="http://schemas.microsoft.com/office/drawing/2014/main" id="{40DDC8C5-FECA-BD40-2288-90941E0BC430}"/>
+              </a:ext>
+            </a:extLst>
+          </p:cNvPr>
+          <p:cNvSpPr>
+            <a:spLocks noGrp="1"/>
+          </p:cNvSpPr>
+          <p:nvPr>
+            <p:ph type="title"/>
+          </p:nvPr>
+        </p:nvSpPr>
+        <p:spPr/>
+        <p:txBody>
+          <a:bodyPr/>
+          <a:lstStyle/>
+          <a:p>
+            <a:endParaRPr lang="zh-CN" altLang="en-US"/>
+          </a:p>
+        </p:txBody>
+      </p:sp>
+      <p:sp>
+        <p:nvSpPr>
+          <p:cNvPr id="3" name="Content Placeholder 2">
+            <a:extLst>
+              <a:ext uri="{FF2B5EF4-FFF2-40B4-BE49-F238E27FC236}">
+                <a16:creationId xmlns:a16="http://schemas.microsoft.com/office/drawing/2014/main" id="{4A84AAEF-5F81-5F14-1331-4A618E284901}"/>
+              </a:ext>
+            </a:extLst>
+          </p:cNvPr>
+          <p:cNvSpPr>
+            <a:spLocks noGrp="1"/>
+          </p:cNvSpPr>
+          <p:nvPr>
+            <p:ph idx="1"/>
+          </p:nvPr>
+        </p:nvSpPr>
+        <p:spPr/>
+        <p:txBody>
+          <a:bodyPr/>
+          <a:lstStyle/>
+          <a:p>
+            <a:r>
+              <a:rPr lang="en-US" altLang="zh-CN" dirty="0"/>
+              <a:t>The TDC100 handheld achieves optimal GNSS results when used with the Trimble </a:t>
+            </a:r>
+            <a:r>
+              <a:rPr lang="en-US" altLang="zh-CN" dirty="0" err="1"/>
+              <a:t>TerraFlex</a:t>
+            </a:r>
+            <a:r>
+              <a:rPr lang="en-US" altLang="zh-CN" dirty="0"/>
+              <a:t>™ software (available mid-August 2016).</a:t>
+            </a:r>
+            <a:endParaRPr lang="zh-CN" altLang="en-US" dirty="0"/>
+          </a:p>
+        </p:txBody>
+      </p:sp>
+      <p:sp>
+        <p:nvSpPr>
+          <p:cNvPr id="4" name="Slide Number Placeholder 3">
+            <a:extLst>
+              <a:ext uri="{FF2B5EF4-FFF2-40B4-BE49-F238E27FC236}">
+                <a16:creationId xmlns:a16="http://schemas.microsoft.com/office/drawing/2014/main" id="{521D5864-379C-7EB6-0BC5-686D1AD5E3F0}"/>
+              </a:ext>
+            </a:extLst>
+          </p:cNvPr>
+          <p:cNvSpPr>
+            <a:spLocks noGrp="1"/>
+          </p:cNvSpPr>
+          <p:nvPr>
+            <p:ph type="sldNum" sz="quarter" idx="12"/>
+          </p:nvPr>
+        </p:nvSpPr>
+        <p:spPr/>
+        <p:txBody>
+          <a:bodyPr/>
+          <a:lstStyle/>
+          <a:p>
+            <a:fld id="{127DDC20-79C9-9647-820E-6D40A3D210C3}" type="slidenum">
+              <a:rPr lang="en-US" smtClean="0"/>
+              <a:pPr/>
+              <a:t>25</a:t>
+            </a:fld>
+            <a:endParaRPr lang="en-US"/>
+          </a:p>
+        </p:txBody>
+      </p:sp>
+    </p:spTree>
+    <p:extLst>
+      <p:ext uri="{BB962C8B-B14F-4D97-AF65-F5344CB8AC3E}">
+        <p14:creationId xmlns:p14="http://schemas.microsoft.com/office/powerpoint/2010/main" val="1626013556"/>
+      </p:ext>
+    </p:extLst>
+  </p:cSld>
+  <p:clrMapOvr>
+    <a:masterClrMapping/>
+  </p:clrMapOvr>
+</p:sld>
+</file>
+
+<file path=ppt/slides/slide26.xml><?xml version="1.0" encoding="utf-8"?>
+<p:sld xmlns:a="http://schemas.openxmlformats.org/drawingml/2006/main" xmlns:r="http://schemas.openxmlformats.org/officeDocument/2006/relationships" xmlns:p="http://schemas.openxmlformats.org/presentationml/2006/main">
+  <p:cSld>
+    <p:spTree>
+      <p:nvGrpSpPr>
+        <p:cNvPr id="1" name=""/>
+        <p:cNvGrpSpPr/>
+        <p:nvPr/>
+      </p:nvGrpSpPr>
+      <p:grpSpPr>
+        <a:xfrm>
+          <a:off x="0" y="0"/>
+          <a:ext cx="0" cy="0"/>
+          <a:chOff x="0" y="0"/>
+          <a:chExt cx="0" cy="0"/>
+        </a:xfrm>
+      </p:grpSpPr>
+      <p:sp>
+        <p:nvSpPr>
+          <p:cNvPr id="2" name="Title 1">
+            <a:extLst>
+              <a:ext uri="{FF2B5EF4-FFF2-40B4-BE49-F238E27FC236}">
                 <a16:creationId xmlns:a16="http://schemas.microsoft.com/office/drawing/2014/main" id="{2086AC2C-7EC0-AA45-1C3D-58061895B019}"/>
               </a:ext>
             </a:extLst>
@@ -29448,7 +29716,7 @@
             <a:fld id="{127DDC20-79C9-9647-820E-6D40A3D210C3}" type="slidenum">
               <a:rPr lang="en-US" smtClean="0"/>
               <a:pPr/>
-              <a:t>24</a:t>
+              <a:t>26</a:t>
             </a:fld>
             <a:endParaRPr lang="en-US"/>
           </a:p>
@@ -29467,7 +29735,7 @@
 </p:sld>
 </file>
 
-<file path=ppt/slides/slide25.xml><?xml version="1.0" encoding="utf-8"?>
+<file path=ppt/slides/slide27.xml><?xml version="1.0" encoding="utf-8"?>
 <p:sld xmlns:a="http://schemas.openxmlformats.org/drawingml/2006/main" xmlns:r="http://schemas.openxmlformats.org/officeDocument/2006/relationships" xmlns:p="http://schemas.openxmlformats.org/presentationml/2006/main">
   <p:cSld>
     <p:spTree>
@@ -29684,7 +29952,7 @@
             <a:fld id="{127DDC20-79C9-9647-820E-6D40A3D210C3}" type="slidenum">
               <a:rPr lang="en-US" smtClean="0"/>
               <a:pPr/>
-              <a:t>25</a:t>
+              <a:t>27</a:t>
             </a:fld>
             <a:endParaRPr lang="en-US"/>
           </a:p>
@@ -30083,7 +30351,7 @@
 </p:sld>
 </file>
 
-<file path=ppt/slides/slide26.xml><?xml version="1.0" encoding="utf-8"?>
+<file path=ppt/slides/slide28.xml><?xml version="1.0" encoding="utf-8"?>
 <p:sld xmlns:a="http://schemas.openxmlformats.org/drawingml/2006/main" xmlns:r="http://schemas.openxmlformats.org/officeDocument/2006/relationships" xmlns:p="http://schemas.openxmlformats.org/presentationml/2006/main">
   <p:cSld>
     <p:spTree>
@@ -30174,7 +30442,7 @@
             <a:fld id="{127DDC20-79C9-9647-820E-6D40A3D210C3}" type="slidenum">
               <a:rPr lang="en-US" smtClean="0"/>
               <a:pPr/>
-              <a:t>26</a:t>
+              <a:t>28</a:t>
             </a:fld>
             <a:endParaRPr lang="en-US"/>
           </a:p>
@@ -30298,13 +30566,13 @@
         </p:nvSpPr>
         <p:spPr>
           <a:xfrm>
-            <a:off x="302741" y="1029961"/>
-            <a:ext cx="7679724" cy="4011145"/>
+            <a:off x="2467850" y="913841"/>
+            <a:ext cx="5685550" cy="4011145"/>
           </a:xfrm>
         </p:spPr>
         <p:txBody>
           <a:bodyPr>
-            <a:normAutofit fontScale="47500" lnSpcReduction="20000"/>
+            <a:normAutofit/>
           </a:bodyPr>
           <a:lstStyle/>
           <a:p>
@@ -30314,6 +30582,16 @@
             </a:pPr>
             <a:r>
               <a:rPr lang="en-US" altLang="zh-CN" sz="2600" dirty="0"/>
+              <a:t>GNSS Systems</a:t>
+            </a:r>
+          </a:p>
+          <a:p>
+            <a:pPr>
+              <a:buFont typeface="Courier New" panose="02070309020205020404" pitchFamily="49" charset="0"/>
+              <a:buChar char="o"/>
+            </a:pPr>
+            <a:r>
+              <a:rPr lang="en-US" altLang="zh-CN" sz="2600" dirty="0"/>
               <a:t>GPS receiver</a:t>
             </a:r>
           </a:p>
@@ -30348,129 +30626,24 @@
             </a:r>
           </a:p>
           <a:p>
-            <a:pPr lvl="1">
-              <a:buFont typeface="Wingdings" panose="05000000000000000000" pitchFamily="2" charset="2"/>
-              <a:buChar char="ü"/>
-            </a:pPr>
-            <a:r>
-              <a:rPr lang="en-US" altLang="en-US" sz="2600" dirty="0"/>
-              <a:t>GPS Receiver types</a:t>
-            </a:r>
-          </a:p>
-          <a:p>
-            <a:pPr lvl="2">
-              <a:buFont typeface="Arial" panose="020B0604020202020204" pitchFamily="34" charset="0"/>
-              <a:buChar char="•"/>
-            </a:pPr>
-            <a:r>
-              <a:rPr lang="en-US" altLang="en-US" sz="1880" dirty="0"/>
-              <a:t>Code Receivers</a:t>
-            </a:r>
-          </a:p>
-          <a:p>
-            <a:pPr lvl="2">
-              <a:buFont typeface="Arial" panose="020B0604020202020204" pitchFamily="34" charset="0"/>
-              <a:buChar char="•"/>
-            </a:pPr>
-            <a:r>
-              <a:rPr lang="en-US" altLang="en-US" sz="2240" dirty="0"/>
-              <a:t>Frequency Receivers</a:t>
-            </a:r>
-          </a:p>
-          <a:p>
-            <a:pPr lvl="1">
-              <a:buFont typeface="Wingdings" panose="05000000000000000000" pitchFamily="2" charset="2"/>
-              <a:buChar char="ü"/>
-            </a:pPr>
-            <a:r>
-              <a:rPr lang="en-US" altLang="zh-CN" sz="2600" dirty="0"/>
-              <a:t>GPS receiver limitation</a:t>
-            </a:r>
-          </a:p>
-          <a:p>
             <a:pPr>
               <a:buFont typeface="Courier New" panose="02070309020205020404" pitchFamily="49" charset="0"/>
               <a:buChar char="o"/>
             </a:pPr>
             <a:r>
               <a:rPr lang="en-US" altLang="en-US" sz="2600" dirty="0"/>
-              <a:t>Assisted GPS</a:t>
-            </a:r>
-          </a:p>
-          <a:p>
-            <a:pPr lvl="1">
-              <a:buFont typeface="Wingdings" panose="05000000000000000000" pitchFamily="2" charset="2"/>
-              <a:buChar char="ü"/>
-            </a:pPr>
-            <a:r>
-              <a:rPr lang="en-US" altLang="en-US" sz="2600" dirty="0"/>
-              <a:t>Information send to cellular device</a:t>
-            </a:r>
-          </a:p>
-          <a:p>
-            <a:pPr lvl="1">
-              <a:buFont typeface="Wingdings" panose="05000000000000000000" pitchFamily="2" charset="2"/>
-              <a:buChar char="ü"/>
-            </a:pPr>
-            <a:r>
-              <a:rPr lang="en-US" altLang="en-US" sz="2600" dirty="0"/>
-              <a:t>A-GPS mode</a:t>
-            </a:r>
-          </a:p>
-          <a:p>
-            <a:pPr lvl="2">
-              <a:buFont typeface="Arial" panose="020B0604020202020204" pitchFamily="34" charset="0"/>
-              <a:buChar char="•"/>
-            </a:pPr>
-            <a:r>
-              <a:rPr lang="en-US" altLang="en-US" sz="1880" dirty="0"/>
-              <a:t>UE-assisted</a:t>
-            </a:r>
-          </a:p>
-          <a:p>
-            <a:pPr lvl="2">
-              <a:buFont typeface="Arial" panose="020B0604020202020204" pitchFamily="34" charset="0"/>
-              <a:buChar char="•"/>
-            </a:pPr>
-            <a:r>
-              <a:rPr lang="en-US" altLang="en-US" sz="1900" dirty="0"/>
-              <a:t>UE-based</a:t>
-            </a:r>
-          </a:p>
-          <a:p>
-            <a:pPr marL="308610" lvl="2" indent="-308610">
+              <a:t>How GPS Work</a:t>
+            </a:r>
+          </a:p>
+          <a:p>
+            <a:pPr>
               <a:buFont typeface="Courier New" panose="02070309020205020404" pitchFamily="49" charset="0"/>
               <a:buChar char="o"/>
             </a:pPr>
             <a:r>
               <a:rPr lang="en-US" altLang="en-US" sz="2600" dirty="0"/>
-              <a:t>Differential GPS</a:t>
-            </a:r>
-          </a:p>
-          <a:p>
-            <a:pPr marL="308610" lvl="2" indent="-308610">
-              <a:buFont typeface="Courier New" panose="02070309020205020404" pitchFamily="49" charset="0"/>
-              <a:buChar char="o"/>
-            </a:pPr>
-            <a:r>
-              <a:rPr lang="en-US" altLang="en-US" sz="2600" dirty="0"/>
-              <a:t>WAAS</a:t>
-            </a:r>
-          </a:p>
-          <a:p>
-            <a:pPr marL="308610" lvl="2" indent="-308610">
-              <a:buFont typeface="Courier New" panose="02070309020205020404" pitchFamily="49" charset="0"/>
-              <a:buChar char="o"/>
-            </a:pPr>
-            <a:r>
-              <a:rPr lang="en-US" altLang="en-US" sz="2600" dirty="0"/>
-              <a:t>RTK</a:t>
-            </a:r>
-          </a:p>
-          <a:p>
-            <a:pPr marL="411480" lvl="1" indent="0">
-              <a:buNone/>
-            </a:pPr>
+              <a:t>Explore function of TDC 100</a:t>
+            </a:r>
             <a:endParaRPr lang="en-US" altLang="en-US" sz="2240" dirty="0"/>
           </a:p>
         </p:txBody>
@@ -30638,54 +30811,139 @@
           <a:chExt cx="0" cy="0"/>
         </a:xfrm>
       </p:grpSpPr>
-      <p:cxnSp>
-        <p:nvCxnSpPr>
-          <p:cNvPr id="4" name="Straight Connector 3">
+      <p:sp>
+        <p:nvSpPr>
+          <p:cNvPr id="3" name="Content Placeholder 2">
             <a:extLst>
               <a:ext uri="{FF2B5EF4-FFF2-40B4-BE49-F238E27FC236}">
-                <a16:creationId xmlns:a16="http://schemas.microsoft.com/office/drawing/2014/main" id="{D4EB9696-B2DB-43F4-B52A-F64A3152234F}"/>
+                <a16:creationId xmlns:a16="http://schemas.microsoft.com/office/drawing/2014/main" id="{B476F85B-3409-DC0C-1B45-3BA9AC89E974}"/>
               </a:ext>
             </a:extLst>
           </p:cNvPr>
-          <p:cNvCxnSpPr/>
-          <p:nvPr/>
-        </p:nvCxnSpPr>
-        <p:spPr>
-          <a:xfrm>
-            <a:off x="152400" y="922910"/>
-            <a:ext cx="8001000" cy="0"/>
-          </a:xfrm>
-          <a:prstGeom prst="line">
-            <a:avLst/>
-          </a:prstGeom>
-          <a:ln>
-            <a:solidFill>
-              <a:schemeClr val="tx1"/>
-            </a:solidFill>
-          </a:ln>
-          <a:effectLst/>
-        </p:spPr>
-        <p:style>
-          <a:lnRef idx="2">
-            <a:schemeClr val="accent1"/>
-          </a:lnRef>
-          <a:fillRef idx="0">
-            <a:schemeClr val="accent1"/>
-          </a:fillRef>
-          <a:effectRef idx="1">
-            <a:schemeClr val="accent1"/>
-          </a:effectRef>
-          <a:fontRef idx="minor">
-            <a:schemeClr val="tx1"/>
-          </a:fontRef>
-        </p:style>
-      </p:cxnSp>
+          <p:cNvSpPr>
+            <a:spLocks noGrp="1"/>
+          </p:cNvSpPr>
+          <p:nvPr>
+            <p:ph idx="1"/>
+          </p:nvPr>
+        </p:nvSpPr>
+        <p:spPr>
+          <a:xfrm>
+            <a:off x="302741" y="1141476"/>
+            <a:ext cx="7444990" cy="3258312"/>
+          </a:xfrm>
+        </p:spPr>
+        <p:txBody>
+          <a:bodyPr>
+            <a:noAutofit/>
+          </a:bodyPr>
+          <a:lstStyle/>
+          <a:p>
+            <a:r>
+              <a:rPr lang="en-US" sz="2000" dirty="0"/>
+              <a:t>How to know my location precisely ? </a:t>
+            </a:r>
+          </a:p>
+          <a:p>
+            <a:pPr lvl="1">
+              <a:buFont typeface="Wingdings" panose="05000000000000000000" pitchFamily="2" charset="2"/>
+              <a:buChar char="Ø"/>
+            </a:pPr>
+            <a:r>
+              <a:rPr lang="en-US" sz="2000" dirty="0"/>
+              <a:t>At anytime</a:t>
+            </a:r>
+          </a:p>
+          <a:p>
+            <a:pPr lvl="1">
+              <a:buFont typeface="Wingdings" panose="05000000000000000000" pitchFamily="2" charset="2"/>
+              <a:buChar char="Ø"/>
+            </a:pPr>
+            <a:r>
+              <a:rPr lang="en-US" sz="2000" dirty="0"/>
+              <a:t>In any condition</a:t>
+            </a:r>
+          </a:p>
+          <a:p>
+            <a:pPr lvl="1">
+              <a:buFont typeface="Wingdings" panose="05000000000000000000" pitchFamily="2" charset="2"/>
+              <a:buChar char="Ø"/>
+            </a:pPr>
+            <a:r>
+              <a:rPr lang="en-US" sz="2000" dirty="0"/>
+              <a:t>Anywhere</a:t>
+            </a:r>
+          </a:p>
+          <a:p>
+            <a:r>
+              <a:rPr lang="en-US" sz="2000" dirty="0"/>
+              <a:t>How to navigate to the destination? </a:t>
+            </a:r>
+          </a:p>
+          <a:p>
+            <a:pPr lvl="1">
+              <a:buFont typeface="Wingdings" panose="05000000000000000000" pitchFamily="2" charset="2"/>
+              <a:buChar char="Ø"/>
+            </a:pPr>
+            <a:r>
+              <a:rPr lang="en-US" sz="2000" dirty="0"/>
+              <a:t>Guidance or Navigation </a:t>
+            </a:r>
+          </a:p>
+          <a:p>
+            <a:r>
+              <a:rPr lang="en-US" sz="2000" dirty="0"/>
+              <a:t> How to synchronize time globally? </a:t>
+            </a:r>
+          </a:p>
+          <a:p>
+            <a:pPr lvl="1">
+              <a:buFont typeface="Wingdings" panose="05000000000000000000" pitchFamily="2" charset="2"/>
+              <a:buChar char="Ø"/>
+            </a:pPr>
+            <a:r>
+              <a:rPr lang="en-US" sz="2000" dirty="0"/>
+              <a:t>Mobile phones  Financial Institutes</a:t>
+            </a:r>
+          </a:p>
+        </p:txBody>
+      </p:sp>
+      <p:sp>
+        <p:nvSpPr>
+          <p:cNvPr id="4" name="Slide Number Placeholder 3">
+            <a:extLst>
+              <a:ext uri="{FF2B5EF4-FFF2-40B4-BE49-F238E27FC236}">
+                <a16:creationId xmlns:a16="http://schemas.microsoft.com/office/drawing/2014/main" id="{832F9AAB-3FE5-F74C-9559-21372B0C7540}"/>
+              </a:ext>
+            </a:extLst>
+          </p:cNvPr>
+          <p:cNvSpPr>
+            <a:spLocks noGrp="1"/>
+          </p:cNvSpPr>
+          <p:nvPr>
+            <p:ph type="sldNum" sz="quarter" idx="12"/>
+          </p:nvPr>
+        </p:nvSpPr>
+        <p:spPr/>
+        <p:txBody>
+          <a:bodyPr/>
+          <a:lstStyle/>
+          <a:p>
+            <a:fld id="{127DDC20-79C9-9647-820E-6D40A3D210C3}" type="slidenum">
+              <a:rPr lang="en-US" smtClean="0"/>
+              <a:pPr/>
+              <a:t>4</a:t>
+            </a:fld>
+            <a:endParaRPr lang="en-US"/>
+          </a:p>
+        </p:txBody>
+      </p:sp>
       <p:sp>
         <p:nvSpPr>
           <p:cNvPr id="5" name="Title 1">
             <a:extLst>
               <a:ext uri="{FF2B5EF4-FFF2-40B4-BE49-F238E27FC236}">
-                <a16:creationId xmlns:a16="http://schemas.microsoft.com/office/drawing/2014/main" id="{9D7B9A9B-3B1A-4D8A-8275-AAA1205C7D4E}"/>
+                <a16:creationId xmlns:a16="http://schemas.microsoft.com/office/drawing/2014/main" id="{FB708FD1-507D-438A-826D-12A341013189}"/>
               </a:ext>
             </a:extLst>
           </p:cNvPr>
@@ -30696,8 +30954,8 @@
         </p:nvSpPr>
         <p:spPr>
           <a:xfrm>
-            <a:off x="118533" y="43082"/>
-            <a:ext cx="8077200" cy="857250"/>
+            <a:off x="302741" y="426719"/>
+            <a:ext cx="5221759" cy="603241"/>
           </a:xfrm>
           <a:prstGeom prst="rect">
             <a:avLst/>
@@ -30725,7 +30983,15 @@
           </a:lstStyle>
           <a:p>
             <a:pPr algn="l"/>
-            <a:endParaRPr lang="en-US" sz="2600" dirty="0">
+            <a:r>
+              <a:rPr lang="en-US" sz="3200" dirty="0">
+                <a:solidFill>
+                  <a:srgbClr val="7030A0"/>
+                </a:solidFill>
+              </a:rPr>
+              <a:t>Overview</a:t>
+            </a:r>
+            <a:endParaRPr lang="en-US" sz="2600" i="1" dirty="0">
               <a:solidFill>
                 <a:srgbClr val="7030A0"/>
               </a:solidFill>
@@ -30733,124 +30999,42 @@
           </a:p>
         </p:txBody>
       </p:sp>
-      <p:sp>
-        <p:nvSpPr>
-          <p:cNvPr id="9" name="Content Placeholder 2">
+      <p:pic>
+        <p:nvPicPr>
+          <p:cNvPr id="9" name="Picture 8">
             <a:extLst>
               <a:ext uri="{FF2B5EF4-FFF2-40B4-BE49-F238E27FC236}">
-                <a16:creationId xmlns:a16="http://schemas.microsoft.com/office/drawing/2014/main" id="{32CDBEE1-9601-4263-A365-F3F6F0E987D2}"/>
+                <a16:creationId xmlns:a16="http://schemas.microsoft.com/office/drawing/2014/main" id="{66C86FDF-7E6C-AC77-462B-0A66255E9116}"/>
               </a:ext>
             </a:extLst>
           </p:cNvPr>
-          <p:cNvSpPr>
-            <a:spLocks noGrp="1"/>
-          </p:cNvSpPr>
-          <p:nvPr>
-            <p:ph idx="1"/>
-          </p:nvPr>
-        </p:nvSpPr>
-        <p:spPr>
-          <a:xfrm>
-            <a:off x="118533" y="1030151"/>
-            <a:ext cx="7825317" cy="1362530"/>
-          </a:xfrm>
-        </p:spPr>
-        <p:txBody>
-          <a:bodyPr>
-            <a:normAutofit/>
-          </a:bodyPr>
-          <a:lstStyle/>
-          <a:p>
-            <a:pPr>
-              <a:spcBef>
-                <a:spcPts val="0"/>
-              </a:spcBef>
-              <a:buFont typeface="Courier New" panose="02070309020205020404" pitchFamily="49" charset="0"/>
-              <a:buChar char="o"/>
-            </a:pPr>
-            <a:r>
-              <a:rPr lang="en-US" sz="1600" dirty="0"/>
-              <a:t>GPS receiver</a:t>
-            </a:r>
-            <a:endParaRPr lang="en-US" sz="1600" b="0" dirty="0"/>
-          </a:p>
-          <a:p>
-            <a:pPr lvl="1">
-              <a:spcBef>
-                <a:spcPts val="0"/>
-              </a:spcBef>
-              <a:buFont typeface="Wingdings" panose="05000000000000000000" pitchFamily="2" charset="2"/>
-              <a:buChar char="ü"/>
-            </a:pPr>
-            <a:r>
-              <a:rPr lang="en-US" sz="1600" dirty="0"/>
-              <a:t>An electronic instrument</a:t>
-            </a:r>
-          </a:p>
-          <a:p>
-            <a:pPr lvl="1">
-              <a:spcBef>
-                <a:spcPts val="0"/>
-              </a:spcBef>
-              <a:buFont typeface="Wingdings" panose="05000000000000000000" pitchFamily="2" charset="2"/>
-              <a:buChar char="ü"/>
-            </a:pPr>
-            <a:r>
-              <a:rPr lang="en-US" sz="1600" dirty="0"/>
-              <a:t>Consists: an antenna, a hardware receiver, and a controller</a:t>
-            </a:r>
-          </a:p>
-          <a:p>
-            <a:pPr lvl="1">
-              <a:spcBef>
-                <a:spcPts val="0"/>
-              </a:spcBef>
-              <a:buFont typeface="Wingdings" panose="05000000000000000000" pitchFamily="2" charset="2"/>
-              <a:buChar char="ü"/>
-            </a:pPr>
-            <a:r>
-              <a:rPr lang="en-US" sz="1600" dirty="0"/>
-              <a:t>GPS signals are extremely low in power and get masked with interference </a:t>
-            </a:r>
-          </a:p>
-        </p:txBody>
-      </p:sp>
-      <p:sp>
-        <p:nvSpPr>
-          <p:cNvPr id="2" name="Slide Number Placeholder 1">
+          <p:cNvPicPr>
+            <a:picLocks noChangeAspect="1"/>
+          </p:cNvPicPr>
+          <p:nvPr/>
+        </p:nvPicPr>
+        <p:blipFill>
+          <a:blip r:embed="rId2"/>
+          <a:stretch>
+            <a:fillRect/>
+          </a:stretch>
+        </p:blipFill>
+        <p:spPr>
+          <a:xfrm>
+            <a:off x="4602147" y="976560"/>
+            <a:ext cx="3324712" cy="1991430"/>
+          </a:xfrm>
+          <a:prstGeom prst="rect">
+            <a:avLst/>
+          </a:prstGeom>
+        </p:spPr>
+      </p:pic>
+      <p:pic>
+        <p:nvPicPr>
+          <p:cNvPr id="11" name="Picture 10">
             <a:extLst>
               <a:ext uri="{FF2B5EF4-FFF2-40B4-BE49-F238E27FC236}">
-                <a16:creationId xmlns:a16="http://schemas.microsoft.com/office/drawing/2014/main" id="{6EDBF9BC-B3FC-4D00-B7E0-B2749A88364A}"/>
-              </a:ext>
-            </a:extLst>
-          </p:cNvPr>
-          <p:cNvSpPr>
-            <a:spLocks noGrp="1"/>
-          </p:cNvSpPr>
-          <p:nvPr>
-            <p:ph type="sldNum" sz="quarter" idx="12"/>
-          </p:nvPr>
-        </p:nvSpPr>
-        <p:spPr/>
-        <p:txBody>
-          <a:bodyPr/>
-          <a:lstStyle/>
-          <a:p>
-            <a:fld id="{127DDC20-79C9-9647-820E-6D40A3D210C3}" type="slidenum">
-              <a:rPr lang="en-US" smtClean="0"/>
-              <a:pPr/>
-              <a:t>4</a:t>
-            </a:fld>
-            <a:endParaRPr lang="en-US"/>
-          </a:p>
-        </p:txBody>
-      </p:sp>
-      <p:pic>
-        <p:nvPicPr>
-          <p:cNvPr id="6" name="Picture 5">
-            <a:extLst>
-              <a:ext uri="{FF2B5EF4-FFF2-40B4-BE49-F238E27FC236}">
-                <a16:creationId xmlns:a16="http://schemas.microsoft.com/office/drawing/2014/main" id="{5599F066-7780-4AAB-B6A5-821267D0FA41}"/>
+                <a16:creationId xmlns:a16="http://schemas.microsoft.com/office/drawing/2014/main" id="{8E11FADB-9A14-5373-D6A9-5E88F32F2A8E}"/>
               </a:ext>
             </a:extLst>
           </p:cNvPr>
@@ -30867,8 +31051,8 @@
         </p:blipFill>
         <p:spPr>
           <a:xfrm>
-            <a:off x="2782016" y="2693773"/>
-            <a:ext cx="3951335" cy="2242495"/>
+            <a:off x="6775249" y="1391821"/>
+            <a:ext cx="547572" cy="1272052"/>
           </a:xfrm>
           <a:prstGeom prst="rect">
             <a:avLst/>
@@ -30877,39 +31061,49 @@
       </p:pic>
       <p:sp>
         <p:nvSpPr>
-          <p:cNvPr id="8" name="TextBox 7">
+          <p:cNvPr id="12" name="Cloud 11">
             <a:extLst>
               <a:ext uri="{FF2B5EF4-FFF2-40B4-BE49-F238E27FC236}">
-                <a16:creationId xmlns:a16="http://schemas.microsoft.com/office/drawing/2014/main" id="{C5D297AC-838D-456B-92C5-131C84C4273B}"/>
+                <a16:creationId xmlns:a16="http://schemas.microsoft.com/office/drawing/2014/main" id="{B2C86F54-E04A-983F-9C9E-36D3F3956183}"/>
               </a:ext>
             </a:extLst>
           </p:cNvPr>
-          <p:cNvSpPr txBox="1"/>
+          <p:cNvSpPr/>
           <p:nvPr/>
         </p:nvSpPr>
         <p:spPr>
           <a:xfrm>
-            <a:off x="5233686" y="4850571"/>
-            <a:ext cx="1587244" cy="246221"/>
-          </a:xfrm>
-          <a:prstGeom prst="rect">
+            <a:off x="4740175" y="827173"/>
+            <a:ext cx="1668780" cy="1127760"/>
+          </a:xfrm>
+          <a:prstGeom prst="cloud">
             <a:avLst/>
           </a:prstGeom>
-          <a:noFill/>
-        </p:spPr>
-        <p:txBody>
-          <a:bodyPr wrap="square" rtlCol="0">
-            <a:spAutoFit/>
-          </a:bodyPr>
-          <a:lstStyle/>
-          <a:p>
-            <a:r>
-              <a:rPr lang="en-US" sz="1000" dirty="0">
-                <a:solidFill>
-                  <a:srgbClr val="7030A0"/>
-                </a:solidFill>
-              </a:rPr>
-              <a:t>Kaplan &amp; Hegarty, 2006</a:t>
+        </p:spPr>
+        <p:style>
+          <a:lnRef idx="2">
+            <a:schemeClr val="accent1">
+              <a:shade val="15000"/>
+            </a:schemeClr>
+          </a:lnRef>
+          <a:fillRef idx="1">
+            <a:schemeClr val="accent1"/>
+          </a:fillRef>
+          <a:effectRef idx="0">
+            <a:schemeClr val="accent1"/>
+          </a:effectRef>
+          <a:fontRef idx="minor">
+            <a:schemeClr val="lt1"/>
+          </a:fontRef>
+        </p:style>
+        <p:txBody>
+          <a:bodyPr rtlCol="0" anchor="ctr"/>
+          <a:lstStyle/>
+          <a:p>
+            <a:pPr algn="ctr"/>
+            <a:r>
+              <a:rPr lang="en-US" dirty="0"/>
+              <a:t>Where am I?</a:t>
             </a:r>
           </a:p>
         </p:txBody>
@@ -30917,7 +31111,7 @@
     </p:spTree>
     <p:extLst>
       <p:ext uri="{BB962C8B-B14F-4D97-AF65-F5344CB8AC3E}">
-        <p14:creationId xmlns:p14="http://schemas.microsoft.com/office/powerpoint/2010/main" val="4962173"/>
+        <p14:creationId xmlns:p14="http://schemas.microsoft.com/office/powerpoint/2010/main" val="98476765"/>
       </p:ext>
     </p:extLst>
   </p:cSld>
@@ -30944,54 +31138,118 @@
           <a:chExt cx="0" cy="0"/>
         </a:xfrm>
       </p:grpSpPr>
-      <p:cxnSp>
-        <p:nvCxnSpPr>
-          <p:cNvPr id="4" name="Straight Connector 3">
+      <p:sp>
+        <p:nvSpPr>
+          <p:cNvPr id="3" name="Content Placeholder 2">
             <a:extLst>
               <a:ext uri="{FF2B5EF4-FFF2-40B4-BE49-F238E27FC236}">
-                <a16:creationId xmlns:a16="http://schemas.microsoft.com/office/drawing/2014/main" id="{D4EB9696-B2DB-43F4-B52A-F64A3152234F}"/>
+                <a16:creationId xmlns:a16="http://schemas.microsoft.com/office/drawing/2014/main" id="{6ABE0EDA-0324-BD55-C0DB-EC52BC3B528A}"/>
               </a:ext>
             </a:extLst>
           </p:cNvPr>
-          <p:cNvCxnSpPr/>
-          <p:nvPr/>
-        </p:nvCxnSpPr>
-        <p:spPr>
-          <a:xfrm>
-            <a:off x="152400" y="922910"/>
-            <a:ext cx="8001000" cy="0"/>
-          </a:xfrm>
-          <a:prstGeom prst="line">
-            <a:avLst/>
-          </a:prstGeom>
-          <a:ln>
-            <a:solidFill>
-              <a:schemeClr val="tx1"/>
-            </a:solidFill>
-          </a:ln>
-          <a:effectLst/>
-        </p:spPr>
-        <p:style>
-          <a:lnRef idx="2">
-            <a:schemeClr val="accent1"/>
-          </a:lnRef>
-          <a:fillRef idx="0">
-            <a:schemeClr val="accent1"/>
-          </a:fillRef>
-          <a:effectRef idx="1">
-            <a:schemeClr val="accent1"/>
-          </a:effectRef>
-          <a:fontRef idx="minor">
-            <a:schemeClr val="tx1"/>
-          </a:fontRef>
-        </p:style>
-      </p:cxnSp>
+          <p:cNvSpPr>
+            <a:spLocks noGrp="1"/>
+          </p:cNvSpPr>
+          <p:nvPr>
+            <p:ph idx="1"/>
+          </p:nvPr>
+        </p:nvSpPr>
+        <p:spPr>
+          <a:xfrm>
+            <a:off x="392305" y="1041390"/>
+            <a:ext cx="7444990" cy="2067570"/>
+          </a:xfrm>
+        </p:spPr>
+        <p:txBody>
+          <a:bodyPr>
+            <a:normAutofit/>
+          </a:bodyPr>
+          <a:lstStyle/>
+          <a:p>
+            <a:r>
+              <a:rPr lang="en-US" sz="2000" dirty="0"/>
+              <a:t>W</a:t>
+            </a:r>
+            <a:r>
+              <a:rPr lang="en-US" altLang="zh-CN" sz="2000" dirty="0"/>
+              <a:t>hat is Global Positioning System (GPS)?</a:t>
+            </a:r>
+          </a:p>
+          <a:p>
+            <a:pPr fontAlgn="base"/>
+            <a:r>
+              <a:rPr lang="en-US" sz="1400" dirty="0"/>
+              <a:t>GPS is a system. It’s made up of three parts: satellites, ground stations, and receivers.</a:t>
+            </a:r>
+          </a:p>
+          <a:p>
+            <a:pPr marL="561600" lvl="1" indent="-342900" fontAlgn="base">
+              <a:buFont typeface="+mj-lt"/>
+              <a:buAutoNum type="arabicPeriod"/>
+            </a:pPr>
+            <a:r>
+              <a:rPr lang="en-US" sz="1265" dirty="0"/>
+              <a:t>Satellites act like the stars in constellations—we know where they are supposed to be at any given time.</a:t>
+            </a:r>
+          </a:p>
+          <a:p>
+            <a:pPr marL="561600" lvl="1" indent="-342900" fontAlgn="base">
+              <a:buFont typeface="+mj-lt"/>
+              <a:buAutoNum type="arabicPeriod"/>
+            </a:pPr>
+            <a:r>
+              <a:rPr lang="en-US" sz="1265" dirty="0"/>
+              <a:t>The ground stations use radar to make sure they are actually where we think they are.</a:t>
+            </a:r>
+          </a:p>
+          <a:p>
+            <a:pPr marL="561600" lvl="1" indent="-342900" fontAlgn="base">
+              <a:buFont typeface="+mj-lt"/>
+              <a:buAutoNum type="arabicPeriod"/>
+            </a:pPr>
+            <a:r>
+              <a:rPr lang="en-US" sz="1265" dirty="0"/>
+              <a:t>A receiver, like you might find in your phone or in your parents car, is constantly listening for a signal from these satellites. The receiver figures out how far away they are from some of them.</a:t>
+            </a:r>
+          </a:p>
+        </p:txBody>
+      </p:sp>
+      <p:sp>
+        <p:nvSpPr>
+          <p:cNvPr id="4" name="Slide Number Placeholder 3">
+            <a:extLst>
+              <a:ext uri="{FF2B5EF4-FFF2-40B4-BE49-F238E27FC236}">
+                <a16:creationId xmlns:a16="http://schemas.microsoft.com/office/drawing/2014/main" id="{325F5B1E-5A8D-1512-B50A-9CB835932B1B}"/>
+              </a:ext>
+            </a:extLst>
+          </p:cNvPr>
+          <p:cNvSpPr>
+            <a:spLocks noGrp="1"/>
+          </p:cNvSpPr>
+          <p:nvPr>
+            <p:ph type="sldNum" sz="quarter" idx="12"/>
+          </p:nvPr>
+        </p:nvSpPr>
+        <p:spPr/>
+        <p:txBody>
+          <a:bodyPr/>
+          <a:lstStyle/>
+          <a:p>
+            <a:fld id="{127DDC20-79C9-9647-820E-6D40A3D210C3}" type="slidenum">
+              <a:rPr lang="en-US" smtClean="0"/>
+              <a:pPr/>
+              <a:t>5</a:t>
+            </a:fld>
+            <a:endParaRPr lang="en-US"/>
+          </a:p>
+        </p:txBody>
+      </p:sp>
       <p:sp>
         <p:nvSpPr>
           <p:cNvPr id="5" name="Title 1">
             <a:extLst>
               <a:ext uri="{FF2B5EF4-FFF2-40B4-BE49-F238E27FC236}">
-                <a16:creationId xmlns:a16="http://schemas.microsoft.com/office/drawing/2014/main" id="{9D7B9A9B-3B1A-4D8A-8275-AAA1205C7D4E}"/>
+                <a16:creationId xmlns:a16="http://schemas.microsoft.com/office/drawing/2014/main" id="{6EC3E898-F980-25D9-E1AB-CBABAA3E4F94}"/>
               </a:ext>
             </a:extLst>
           </p:cNvPr>
@@ -31002,8 +31260,8 @@
         </p:nvSpPr>
         <p:spPr>
           <a:xfrm>
-            <a:off x="285750" y="172900"/>
-            <a:ext cx="8077200" cy="857250"/>
+            <a:off x="302741" y="426719"/>
+            <a:ext cx="5221759" cy="603241"/>
           </a:xfrm>
           <a:prstGeom prst="rect">
             <a:avLst/>
@@ -31037,9 +31295,9 @@
                   <a:srgbClr val="7030A0"/>
                 </a:solidFill>
               </a:rPr>
-              <a:t>Antenna</a:t>
-            </a:r>
-            <a:endParaRPr lang="en-US" sz="2600" dirty="0">
+              <a:t>Overview</a:t>
+            </a:r>
+            <a:endParaRPr lang="en-US" sz="2600" i="1" dirty="0">
               <a:solidFill>
                 <a:srgbClr val="7030A0"/>
               </a:solidFill>
@@ -31047,125 +31305,40 @@
           </a:p>
         </p:txBody>
       </p:sp>
-      <p:sp>
-        <p:nvSpPr>
-          <p:cNvPr id="8" name="Content Placeholder 2">
+      <p:pic>
+        <p:nvPicPr>
+          <p:cNvPr id="7" name="Picture 6">
             <a:extLst>
               <a:ext uri="{FF2B5EF4-FFF2-40B4-BE49-F238E27FC236}">
-                <a16:creationId xmlns:a16="http://schemas.microsoft.com/office/drawing/2014/main" id="{B39E6661-3EBE-4587-AE2F-09CE39F6F0DD}"/>
+                <a16:creationId xmlns:a16="http://schemas.microsoft.com/office/drawing/2014/main" id="{F42EC421-09FC-CF90-482E-FE1E5A519648}"/>
               </a:ext>
             </a:extLst>
           </p:cNvPr>
-          <p:cNvSpPr>
-            <a:spLocks noGrp="1"/>
-          </p:cNvSpPr>
-          <p:nvPr>
-            <p:ph idx="1"/>
-          </p:nvPr>
-        </p:nvSpPr>
-        <p:spPr>
-          <a:xfrm>
-            <a:off x="118533" y="1030151"/>
-            <a:ext cx="7825317" cy="2421710"/>
-          </a:xfrm>
-        </p:spPr>
-        <p:txBody>
-          <a:bodyPr>
-            <a:normAutofit/>
-          </a:bodyPr>
-          <a:lstStyle/>
-          <a:p>
-            <a:pPr>
-              <a:spcBef>
-                <a:spcPts val="0"/>
-              </a:spcBef>
-              <a:buFont typeface="Courier New" panose="02070309020205020404" pitchFamily="49" charset="0"/>
-              <a:buChar char="o"/>
-            </a:pPr>
-            <a:r>
-              <a:rPr lang="en-US" sz="2000" dirty="0"/>
-              <a:t>Gathers GNSS/GPS signals from satellite and transform into guided wave</a:t>
-            </a:r>
-          </a:p>
-          <a:p>
-            <a:pPr>
-              <a:spcBef>
-                <a:spcPts val="0"/>
-              </a:spcBef>
-              <a:buFont typeface="Courier New" panose="02070309020205020404" pitchFamily="49" charset="0"/>
-              <a:buChar char="o"/>
-            </a:pPr>
-            <a:r>
-              <a:rPr lang="en-US" sz="2000" b="0" dirty="0"/>
-              <a:t>Quality of GNSS/GPS observation primarily depends on the antenna</a:t>
-            </a:r>
-          </a:p>
-          <a:p>
-            <a:pPr>
-              <a:spcBef>
-                <a:spcPts val="0"/>
-              </a:spcBef>
-              <a:buFont typeface="Courier New" panose="02070309020205020404" pitchFamily="49" charset="0"/>
-              <a:buChar char="o"/>
-            </a:pPr>
-            <a:r>
-              <a:rPr lang="en-US" sz="2000" b="0" dirty="0"/>
-              <a:t>A</a:t>
-            </a:r>
-            <a:r>
-              <a:rPr lang="en-US" sz="2000" dirty="0"/>
-              <a:t>ntenna remains integrated with the receiver electronics and all are kept in a single rugged case</a:t>
-            </a:r>
-          </a:p>
-          <a:p>
-            <a:pPr>
-              <a:spcBef>
-                <a:spcPts val="0"/>
-              </a:spcBef>
-              <a:buFont typeface="Courier New" panose="02070309020205020404" pitchFamily="49" charset="0"/>
-              <a:buChar char="o"/>
-            </a:pPr>
-            <a:r>
-              <a:rPr lang="en-US" sz="2000" b="0" dirty="0"/>
-              <a:t>Antenna can also present as an independent unit.</a:t>
-            </a:r>
-          </a:p>
-        </p:txBody>
-      </p:sp>
-      <p:sp>
-        <p:nvSpPr>
-          <p:cNvPr id="2" name="Slide Number Placeholder 1">
-            <a:extLst>
-              <a:ext uri="{FF2B5EF4-FFF2-40B4-BE49-F238E27FC236}">
-                <a16:creationId xmlns:a16="http://schemas.microsoft.com/office/drawing/2014/main" id="{6EDBF9BC-B3FC-4D00-B7E0-B2749A88364A}"/>
-              </a:ext>
-            </a:extLst>
-          </p:cNvPr>
-          <p:cNvSpPr>
-            <a:spLocks noGrp="1"/>
-          </p:cNvSpPr>
-          <p:nvPr>
-            <p:ph type="sldNum" sz="quarter" idx="12"/>
-          </p:nvPr>
-        </p:nvSpPr>
-        <p:spPr/>
-        <p:txBody>
-          <a:bodyPr/>
-          <a:lstStyle/>
-          <a:p>
-            <a:fld id="{127DDC20-79C9-9647-820E-6D40A3D210C3}" type="slidenum">
-              <a:rPr lang="en-US" smtClean="0"/>
-              <a:pPr/>
-              <a:t>5</a:t>
-            </a:fld>
-            <a:endParaRPr lang="en-US"/>
-          </a:p>
-        </p:txBody>
-      </p:sp>
+          <p:cNvPicPr>
+            <a:picLocks noChangeAspect="1"/>
+          </p:cNvPicPr>
+          <p:nvPr/>
+        </p:nvPicPr>
+        <p:blipFill>
+          <a:blip r:embed="rId2"/>
+          <a:stretch>
+            <a:fillRect/>
+          </a:stretch>
+        </p:blipFill>
+        <p:spPr>
+          <a:xfrm>
+            <a:off x="3116789" y="3108960"/>
+            <a:ext cx="1851451" cy="1798853"/>
+          </a:xfrm>
+          <a:prstGeom prst="rect">
+            <a:avLst/>
+          </a:prstGeom>
+        </p:spPr>
+      </p:pic>
     </p:spTree>
     <p:extLst>
       <p:ext uri="{BB962C8B-B14F-4D97-AF65-F5344CB8AC3E}">
-        <p14:creationId xmlns:p14="http://schemas.microsoft.com/office/powerpoint/2010/main" val="1482322159"/>
+        <p14:creationId xmlns:p14="http://schemas.microsoft.com/office/powerpoint/2010/main" val="4214411694"/>
       </p:ext>
     </p:extLst>
   </p:cSld>
@@ -31244,7 +31417,7 @@
         </p:nvSpPr>
         <p:spPr>
           <a:xfrm>
-            <a:off x="476125" y="1161289"/>
+            <a:off x="476125" y="1116616"/>
             <a:ext cx="7444990" cy="1772411"/>
           </a:xfrm>
         </p:spPr>
@@ -31298,7 +31471,7 @@
             </a:r>
             <a:r>
               <a:rPr lang="en-US" altLang="zh-CN" sz="1600" b="1" dirty="0"/>
-              <a:t>31 active satellites</a:t>
+              <a:t>24 active satellites</a:t>
             </a:r>
             <a:r>
               <a:rPr lang="en-US" altLang="zh-CN" sz="1600" dirty="0"/>
@@ -31404,7 +31577,7 @@
         <p:spPr>
           <a:xfrm>
             <a:off x="392308" y="899161"/>
-            <a:ext cx="7444990" cy="2202179"/>
+            <a:ext cx="7444990" cy="2887979"/>
           </a:xfrm>
         </p:spPr>
         <p:txBody>
@@ -31414,33 +31587,36 @@
           <a:lstStyle/>
           <a:p>
             <a:r>
-              <a:rPr lang="en-US" altLang="zh-CN" sz="1600" b="1" dirty="0"/>
+              <a:rPr lang="en-US" altLang="zh-CN" sz="1800" b="1" dirty="0"/>
               <a:t>GLONASS (</a:t>
             </a:r>
             <a:r>
-              <a:rPr lang="en-US" altLang="zh-CN" sz="1600" b="1" dirty="0" err="1"/>
+              <a:rPr lang="en-US" altLang="zh-CN" sz="1800" b="1" dirty="0" err="1"/>
               <a:t>Globalnaya</a:t>
             </a:r>
             <a:r>
-              <a:rPr lang="en-US" altLang="zh-CN" sz="1600" b="1" dirty="0"/>
+              <a:rPr lang="en-US" altLang="zh-CN" sz="1800" b="1" dirty="0"/>
               <a:t> </a:t>
             </a:r>
             <a:r>
-              <a:rPr lang="en-US" altLang="zh-CN" sz="1600" b="1" dirty="0" err="1"/>
+              <a:rPr lang="en-US" altLang="zh-CN" sz="1800" b="1" dirty="0" err="1"/>
               <a:t>Navigatsionnaya</a:t>
             </a:r>
             <a:r>
-              <a:rPr lang="en-US" altLang="zh-CN" sz="1600" b="1" dirty="0"/>
+              <a:rPr lang="en-US" altLang="zh-CN" sz="1800" b="1" dirty="0"/>
               <a:t> </a:t>
             </a:r>
             <a:r>
-              <a:rPr lang="en-US" altLang="zh-CN" sz="1600" b="1" dirty="0" err="1"/>
+              <a:rPr lang="en-US" altLang="zh-CN" sz="1800" b="1" dirty="0" err="1"/>
               <a:t>Sputnikovaya</a:t>
             </a:r>
             <a:r>
-              <a:rPr lang="en-US" altLang="zh-CN" sz="1600" b="1" dirty="0"/>
+              <a:rPr lang="en-US" altLang="zh-CN" sz="1800" b="1" dirty="0"/>
               <a:t> Sistema – Russia)</a:t>
             </a:r>
+          </a:p>
+          <a:p>
+            <a:endParaRPr lang="en-US" altLang="zh-CN" sz="1800" b="1" dirty="0"/>
           </a:p>
           <a:p>
             <a:pPr lvl="1">
@@ -31448,15 +31624,15 @@
               <a:buChar char="Ø"/>
             </a:pPr>
             <a:r>
-              <a:rPr lang="en-US" altLang="zh-CN" sz="1465" dirty="0"/>
+              <a:rPr lang="en-US" altLang="zh-CN" sz="1800" dirty="0"/>
               <a:t>Operated by the </a:t>
             </a:r>
             <a:r>
-              <a:rPr lang="en-US" altLang="zh-CN" sz="1465" b="1" dirty="0"/>
+              <a:rPr lang="en-US" altLang="zh-CN" sz="1800" b="1" dirty="0"/>
               <a:t>Russian Federation</a:t>
             </a:r>
             <a:r>
-              <a:rPr lang="en-US" altLang="zh-CN" sz="1465" dirty="0"/>
+              <a:rPr lang="en-US" altLang="zh-CN" sz="1800" dirty="0"/>
               <a:t>.</a:t>
             </a:r>
           </a:p>
@@ -31466,15 +31642,15 @@
               <a:buChar char="Ø"/>
             </a:pPr>
             <a:r>
-              <a:rPr lang="en-US" altLang="zh-CN" sz="1465" dirty="0"/>
+              <a:rPr lang="en-US" altLang="zh-CN" sz="1800" dirty="0"/>
               <a:t>Constellation: about </a:t>
             </a:r>
             <a:r>
-              <a:rPr lang="en-US" altLang="zh-CN" sz="1465" b="1" dirty="0"/>
-              <a:t>24 satellites</a:t>
-            </a:r>
-            <a:r>
-              <a:rPr lang="en-US" altLang="zh-CN" sz="1465" dirty="0"/>
+              <a:rPr lang="en-US" altLang="zh-CN" sz="1800" b="1" dirty="0"/>
+              <a:t>21 satellites</a:t>
+            </a:r>
+            <a:r>
+              <a:rPr lang="en-US" altLang="zh-CN" sz="1800" dirty="0"/>
               <a:t>.</a:t>
             </a:r>
           </a:p>
@@ -31484,7 +31660,7 @@
               <a:buChar char="Ø"/>
             </a:pPr>
             <a:r>
-              <a:rPr lang="en-US" altLang="zh-CN" sz="1465" dirty="0"/>
+              <a:rPr lang="en-US" altLang="zh-CN" sz="1800" dirty="0"/>
               <a:t>Provides global coverage similar to GPS.</a:t>
             </a:r>
           </a:p>
@@ -31494,7 +31670,7 @@
               <a:buChar char="Ø"/>
             </a:pPr>
             <a:r>
-              <a:rPr lang="en-US" altLang="zh-CN" sz="1465" dirty="0"/>
+              <a:rPr lang="en-US" altLang="zh-CN" sz="1800" dirty="0"/>
               <a:t>Often used together with GPS for better accuracy and reliability, especially in northern latitudes.</a:t>
             </a:r>
           </a:p>
@@ -31692,8 +31868,8 @@
         </p:nvSpPr>
         <p:spPr>
           <a:xfrm>
-            <a:off x="460885" y="986029"/>
-            <a:ext cx="7444990" cy="1894331"/>
+            <a:off x="460885" y="1115569"/>
+            <a:ext cx="7444990" cy="2602991"/>
           </a:xfrm>
         </p:spPr>
         <p:txBody>
@@ -31703,7 +31879,7 @@
           <a:lstStyle/>
           <a:p>
             <a:r>
-              <a:rPr lang="en-US" altLang="zh-CN" sz="1400" b="1" dirty="0"/>
+              <a:rPr lang="en-US" altLang="zh-CN" sz="1800" b="1" dirty="0"/>
               <a:t>Galileo (European Union)</a:t>
             </a:r>
           </a:p>
@@ -31713,15 +31889,15 @@
               <a:buChar char="Ø"/>
             </a:pPr>
             <a:r>
-              <a:rPr lang="en-US" altLang="zh-CN" sz="1400" dirty="0"/>
+              <a:rPr lang="en-US" altLang="zh-CN" sz="1800" dirty="0"/>
               <a:t>Developed by the </a:t>
             </a:r>
             <a:r>
-              <a:rPr lang="en-US" altLang="zh-CN" sz="1400" b="1" dirty="0"/>
+              <a:rPr lang="en-US" altLang="zh-CN" sz="1800" b="1" dirty="0"/>
               <a:t>European Union &amp; European Space Agency</a:t>
             </a:r>
             <a:r>
-              <a:rPr lang="en-US" altLang="zh-CN" sz="1400" dirty="0"/>
+              <a:rPr lang="en-US" altLang="zh-CN" sz="1800" dirty="0"/>
               <a:t>.</a:t>
             </a:r>
           </a:p>
@@ -31731,15 +31907,15 @@
               <a:buChar char="Ø"/>
             </a:pPr>
             <a:r>
-              <a:rPr lang="en-US" altLang="zh-CN" sz="1400" dirty="0"/>
+              <a:rPr lang="en-US" altLang="zh-CN" sz="1800" dirty="0"/>
               <a:t>Fully operational since </a:t>
             </a:r>
             <a:r>
-              <a:rPr lang="en-US" altLang="zh-CN" sz="1400" b="1" dirty="0"/>
+              <a:rPr lang="en-US" altLang="zh-CN" sz="1800" b="1" dirty="0"/>
               <a:t>2016</a:t>
             </a:r>
             <a:r>
-              <a:rPr lang="en-US" altLang="zh-CN" sz="1400" dirty="0"/>
+              <a:rPr lang="en-US" altLang="zh-CN" sz="1800" dirty="0"/>
               <a:t>.</a:t>
             </a:r>
           </a:p>
@@ -31749,15 +31925,15 @@
               <a:buChar char="Ø"/>
             </a:pPr>
             <a:r>
-              <a:rPr lang="en-US" altLang="zh-CN" sz="1400" dirty="0"/>
+              <a:rPr lang="en-US" altLang="zh-CN" sz="1800" dirty="0"/>
               <a:t>Constellation: about </a:t>
             </a:r>
             <a:r>
-              <a:rPr lang="en-US" altLang="zh-CN" sz="1400" b="1" dirty="0"/>
-              <a:t>30 satellites</a:t>
-            </a:r>
-            <a:r>
-              <a:rPr lang="en-US" altLang="zh-CN" sz="1400" dirty="0"/>
+              <a:rPr lang="en-US" altLang="zh-CN" sz="1800" b="1" dirty="0"/>
+              <a:t>27 satellites</a:t>
+            </a:r>
+            <a:r>
+              <a:rPr lang="en-US" altLang="zh-CN" sz="1800" dirty="0"/>
               <a:t>.</a:t>
             </a:r>
           </a:p>
@@ -31767,15 +31943,15 @@
               <a:buChar char="Ø"/>
             </a:pPr>
             <a:r>
-              <a:rPr lang="en-US" altLang="zh-CN" sz="1400" dirty="0"/>
+              <a:rPr lang="en-US" altLang="zh-CN" sz="1800" dirty="0"/>
               <a:t>Known for </a:t>
             </a:r>
             <a:r>
-              <a:rPr lang="en-US" altLang="zh-CN" sz="1400" b="1" dirty="0"/>
+              <a:rPr lang="en-US" altLang="zh-CN" sz="1800" b="1" dirty="0"/>
               <a:t>high accuracy</a:t>
             </a:r>
             <a:r>
-              <a:rPr lang="en-US" altLang="zh-CN" sz="1400" dirty="0"/>
+              <a:rPr lang="en-US" altLang="zh-CN" sz="1800" dirty="0"/>
               <a:t> — open service aims for 1 meter, with encrypted services for safety-critical use.</a:t>
             </a:r>
           </a:p>
@@ -31980,7 +32156,7 @@
         <p:spPr>
           <a:xfrm>
             <a:off x="460885" y="986029"/>
-            <a:ext cx="7444990" cy="2084831"/>
+            <a:ext cx="7444990" cy="2724911"/>
           </a:xfrm>
         </p:spPr>
         <p:txBody>
@@ -31990,7 +32166,7 @@
           <a:lstStyle/>
           <a:p>
             <a:r>
-              <a:rPr lang="en-US" altLang="zh-CN" sz="1400" dirty="0"/>
+              <a:rPr lang="en-US" altLang="zh-CN" sz="2000" dirty="0"/>
               <a:t>BeiDou ( China)</a:t>
             </a:r>
           </a:p>
@@ -32000,15 +32176,15 @@
               <a:buChar char="Ø"/>
             </a:pPr>
             <a:r>
-              <a:rPr lang="en-US" altLang="zh-CN" sz="1400" dirty="0"/>
+              <a:rPr lang="en-US" altLang="zh-CN" sz="2000" dirty="0"/>
               <a:t>Built and operated by </a:t>
             </a:r>
             <a:r>
-              <a:rPr lang="en-US" altLang="zh-CN" sz="1400" b="1" dirty="0"/>
+              <a:rPr lang="en-US" altLang="zh-CN" sz="2000" b="1" dirty="0"/>
               <a:t>China</a:t>
             </a:r>
             <a:r>
-              <a:rPr lang="en-US" altLang="zh-CN" sz="1400" dirty="0"/>
+              <a:rPr lang="en-US" altLang="zh-CN" sz="2000" dirty="0"/>
               <a:t>.</a:t>
             </a:r>
           </a:p>
@@ -32018,15 +32194,15 @@
               <a:buChar char="Ø"/>
             </a:pPr>
             <a:r>
-              <a:rPr lang="en-US" altLang="zh-CN" sz="1400" dirty="0"/>
+              <a:rPr lang="en-US" altLang="zh-CN" sz="2000" dirty="0"/>
               <a:t>Third generation (BeiDou-3) became fully global in </a:t>
             </a:r>
             <a:r>
-              <a:rPr lang="en-US" altLang="zh-CN" sz="1400" b="1" dirty="0"/>
+              <a:rPr lang="en-US" altLang="zh-CN" sz="2000" b="1" dirty="0"/>
               <a:t>2020</a:t>
             </a:r>
             <a:r>
-              <a:rPr lang="en-US" altLang="zh-CN" sz="1400" dirty="0"/>
+              <a:rPr lang="en-US" altLang="zh-CN" sz="2000" dirty="0"/>
               <a:t>.</a:t>
             </a:r>
           </a:p>
@@ -32036,15 +32212,15 @@
               <a:buChar char="Ø"/>
             </a:pPr>
             <a:r>
-              <a:rPr lang="en-US" altLang="zh-CN" sz="1400" dirty="0"/>
+              <a:rPr lang="en-US" altLang="zh-CN" sz="2000" dirty="0"/>
               <a:t>Constellation: about </a:t>
             </a:r>
             <a:r>
-              <a:rPr lang="en-US" altLang="zh-CN" sz="1400" b="1" dirty="0"/>
+              <a:rPr lang="en-US" altLang="zh-CN" sz="2000" b="1" dirty="0"/>
               <a:t>35 satellites</a:t>
             </a:r>
             <a:r>
-              <a:rPr lang="en-US" altLang="zh-CN" sz="1400" dirty="0"/>
+              <a:rPr lang="en-US" altLang="zh-CN" sz="2000" dirty="0"/>
               <a:t>.</a:t>
             </a:r>
           </a:p>
@@ -32054,7 +32230,7 @@
               <a:buChar char="Ø"/>
             </a:pPr>
             <a:r>
-              <a:rPr lang="en-US" altLang="zh-CN" sz="1400" dirty="0"/>
+              <a:rPr lang="en-US" altLang="zh-CN" sz="2000" dirty="0"/>
               <a:t>Provides regional and global services, with navigation, timing, and even short message communication.</a:t>
             </a:r>
           </a:p>

--- a/docs/Lectures/Week06/Lecture05_GEOG3319_Receivers.pptx
+++ b/docs/Lectures/Week06/Lecture05_GEOG3319_Receivers.pptx
@@ -8,39 +8,37 @@
     <p:sldMasterId id="2147483696" r:id="rId4"/>
     <p:sldMasterId id="2147483709" r:id="rId5"/>
     <p:sldMasterId id="2147483721" r:id="rId6"/>
+    <p:sldMasterId id="2147483734" r:id="rId7"/>
   </p:sldMasterIdLst>
   <p:notesMasterIdLst>
-    <p:notesMasterId r:id="rId35"/>
+    <p:notesMasterId r:id="rId33"/>
   </p:notesMasterIdLst>
   <p:sldIdLst>
-    <p:sldId id="914" r:id="rId7"/>
-    <p:sldId id="1647" r:id="rId8"/>
-    <p:sldId id="677" r:id="rId9"/>
-    <p:sldId id="1667" r:id="rId10"/>
-    <p:sldId id="1665" r:id="rId11"/>
-    <p:sldId id="1648" r:id="rId12"/>
-    <p:sldId id="1649" r:id="rId13"/>
-    <p:sldId id="1650" r:id="rId14"/>
-    <p:sldId id="1651" r:id="rId15"/>
-    <p:sldId id="1666" r:id="rId16"/>
-    <p:sldId id="654" r:id="rId17"/>
-    <p:sldId id="655" r:id="rId18"/>
-    <p:sldId id="678" r:id="rId19"/>
-    <p:sldId id="687" r:id="rId20"/>
-    <p:sldId id="1653" r:id="rId21"/>
-    <p:sldId id="1654" r:id="rId22"/>
-    <p:sldId id="1655" r:id="rId23"/>
-    <p:sldId id="1664" r:id="rId24"/>
-    <p:sldId id="1660" r:id="rId25"/>
-    <p:sldId id="1661" r:id="rId26"/>
-    <p:sldId id="1662" r:id="rId27"/>
-    <p:sldId id="1663" r:id="rId28"/>
-    <p:sldId id="1656" r:id="rId29"/>
-    <p:sldId id="1657" r:id="rId30"/>
-    <p:sldId id="1658" r:id="rId31"/>
-    <p:sldId id="1659" r:id="rId32"/>
-    <p:sldId id="685" r:id="rId33"/>
-    <p:sldId id="270" r:id="rId34"/>
+    <p:sldId id="914" r:id="rId8"/>
+    <p:sldId id="1647" r:id="rId9"/>
+    <p:sldId id="677" r:id="rId10"/>
+    <p:sldId id="1667" r:id="rId11"/>
+    <p:sldId id="1665" r:id="rId12"/>
+    <p:sldId id="1648" r:id="rId13"/>
+    <p:sldId id="1649" r:id="rId14"/>
+    <p:sldId id="1650" r:id="rId15"/>
+    <p:sldId id="1651" r:id="rId16"/>
+    <p:sldId id="1666" r:id="rId17"/>
+    <p:sldId id="654" r:id="rId18"/>
+    <p:sldId id="655" r:id="rId19"/>
+    <p:sldId id="678" r:id="rId20"/>
+    <p:sldId id="687" r:id="rId21"/>
+    <p:sldId id="1653" r:id="rId22"/>
+    <p:sldId id="1654" r:id="rId23"/>
+    <p:sldId id="1655" r:id="rId24"/>
+    <p:sldId id="277" r:id="rId25"/>
+    <p:sldId id="1664" r:id="rId26"/>
+    <p:sldId id="1660" r:id="rId27"/>
+    <p:sldId id="1661" r:id="rId28"/>
+    <p:sldId id="1662" r:id="rId29"/>
+    <p:sldId id="1663" r:id="rId30"/>
+    <p:sldId id="1656" r:id="rId31"/>
+    <p:sldId id="270" r:id="rId32"/>
   </p:sldIdLst>
   <p:sldSz cx="8229600" cy="5143500"/>
   <p:notesSz cx="7010400" cy="9296400"/>
@@ -241,7 +239,7 @@
             <a:fld id="{66C520B4-85AA-9542-8CF7-3D2DDCE6041D}" type="datetimeFigureOut">
               <a:rPr lang="en-US" smtClean="0"/>
               <a:pPr/>
-              <a:t>9/22/2025</a:t>
+              <a:t>9/23/2025</a:t>
             </a:fld>
             <a:endParaRPr lang="en-US"/>
           </a:p>
@@ -1214,108 +1212,129 @@
       </p:grpSpPr>
       <p:sp>
         <p:nvSpPr>
-          <p:cNvPr id="7" name="Rectangle 5">
-            <a:extLst>
-              <a:ext uri="{FF2B5EF4-FFF2-40B4-BE49-F238E27FC236}">
-                <a16:creationId xmlns:a16="http://schemas.microsoft.com/office/drawing/2014/main" id="{C7E09E1C-40D2-46F9-9F20-07EA588B3A3A}"/>
-              </a:ext>
-            </a:extLst>
-          </p:cNvPr>
-          <p:cNvSpPr>
-            <a:spLocks noGrp="1" noChangeArrowheads="1"/>
-          </p:cNvSpPr>
-          <p:nvPr>
-            <p:ph type="sldNum" sz="quarter" idx="5"/>
-          </p:nvPr>
-        </p:nvSpPr>
-        <p:spPr>
-          <a:ln/>
-        </p:spPr>
+          <p:cNvPr id="2" name="Slide Image Placeholder 1"/>
+          <p:cNvSpPr>
+            <a:spLocks noGrp="1" noRot="1" noChangeAspect="1"/>
+          </p:cNvSpPr>
+          <p:nvPr>
+            <p:ph type="sldImg"/>
+          </p:nvPr>
+        </p:nvSpPr>
+        <p:spPr/>
+      </p:sp>
+      <p:sp>
+        <p:nvSpPr>
+          <p:cNvPr id="3" name="Notes Placeholder 2"/>
+          <p:cNvSpPr>
+            <a:spLocks noGrp="1"/>
+          </p:cNvSpPr>
+          <p:nvPr>
+            <p:ph type="body" idx="1"/>
+          </p:nvPr>
+        </p:nvSpPr>
+        <p:spPr/>
         <p:txBody>
           <a:bodyPr/>
           <a:lstStyle/>
           <a:p>
-            <a:fld id="{0CE062E2-CA43-4035-9E13-AD9908C25B62}" type="slidenum">
-              <a:rPr lang="en-US" altLang="en-US"/>
-              <a:pPr/>
-              <a:t>27</a:t>
-            </a:fld>
-            <a:endParaRPr lang="en-US" altLang="en-US"/>
-          </a:p>
-        </p:txBody>
-      </p:sp>
-      <p:sp>
-        <p:nvSpPr>
-          <p:cNvPr id="124930" name="Rectangle 2">
-            <a:extLst>
-              <a:ext uri="{FF2B5EF4-FFF2-40B4-BE49-F238E27FC236}">
-                <a16:creationId xmlns:a16="http://schemas.microsoft.com/office/drawing/2014/main" id="{DFA605D2-F657-4B1A-895E-09BF5F2A3B65}"/>
-              </a:ext>
-            </a:extLst>
-          </p:cNvPr>
-          <p:cNvSpPr>
-            <a:spLocks noGrp="1" noRot="1" noChangeAspect="1" noChangeArrowheads="1" noTextEdit="1"/>
-          </p:cNvSpPr>
-          <p:nvPr>
-            <p:ph type="sldImg"/>
-          </p:nvPr>
-        </p:nvSpPr>
-        <p:spPr>
-          <a:ln/>
-        </p:spPr>
-      </p:sp>
-      <p:sp>
-        <p:nvSpPr>
-          <p:cNvPr id="124931" name="Rectangle 3">
-            <a:extLst>
-              <a:ext uri="{FF2B5EF4-FFF2-40B4-BE49-F238E27FC236}">
-                <a16:creationId xmlns:a16="http://schemas.microsoft.com/office/drawing/2014/main" id="{4302226F-D9D5-4ED4-8280-5A95D5D61DC0}"/>
-              </a:ext>
-            </a:extLst>
-          </p:cNvPr>
-          <p:cNvSpPr>
-            <a:spLocks noGrp="1" noChangeArrowheads="1"/>
-          </p:cNvSpPr>
-          <p:nvPr>
-            <p:ph type="body" idx="1"/>
-          </p:nvPr>
-        </p:nvSpPr>
-        <p:spPr/>
-        <p:txBody>
-          <a:bodyPr/>
-          <a:lstStyle/>
-          <a:p>
-            <a:pPr algn="l"/>
-            <a:r>
-              <a:rPr lang="en-US" altLang="en-US" dirty="0"/>
-              <a:t>GPS signals are very low in power, as well as it get merged with interference from the higher powerful signals. So we need to improve the power or in the signal as well as we need to filter the interference as well as we need to for the process the signal to get our desire parameters. In order to get those things the GPS receiver hardware contains filters, amplifiers, frequency unity, digital signal, processing unit.</a:t>
-            </a:r>
-          </a:p>
-          <a:p>
-            <a:pPr algn="l"/>
-            <a:endParaRPr lang="en-US" altLang="en-US" dirty="0"/>
-          </a:p>
-          <a:p>
-            <a:pPr algn="l"/>
-            <a:r>
-              <a:rPr lang="en-US" altLang="en-US" dirty="0"/>
-              <a:t>We wanted at an intermediate frequency a lower frequency than one and a half </a:t>
-            </a:r>
-            <a:r>
-              <a:rPr lang="en-US" altLang="en-US" dirty="0" err="1"/>
-              <a:t>gighertz</a:t>
-            </a:r>
-            <a:r>
-              <a:rPr lang="en-US" altLang="en-US" dirty="0"/>
-              <a:t> so we can sample and digitally store the signal.</a:t>
-            </a:r>
-          </a:p>
-          <a:p>
-            <a:pPr algn="l"/>
-            <a:r>
-              <a:rPr lang="en-US" altLang="en-US" dirty="0"/>
-              <a:t>IF: intermediate frequency, in which  </a:t>
-            </a:r>
+            <a:r>
+              <a:rPr lang="en-US" dirty="0"/>
+              <a:t>WAAS,</a:t>
+            </a:r>
+            <a:r>
+              <a:rPr lang="en-US" baseline="0" dirty="0"/>
+              <a:t> or the Wide Area Augmentation System, is a type of SBAS, or Satellite-Based Augmentation System. </a:t>
+            </a:r>
+          </a:p>
+          <a:p>
+            <a:endParaRPr lang="en-US" baseline="0" dirty="0"/>
+          </a:p>
+          <a:p>
+            <a:r>
+              <a:rPr lang="en-US" baseline="0" dirty="0"/>
+              <a:t>It was originally developed by the US Federal Aviation Administration for aviation and air traffic control purposes and provides real-time corrections, which is very important for air traffic control.</a:t>
+            </a:r>
+          </a:p>
+          <a:p>
+            <a:endParaRPr lang="en-US" baseline="0" dirty="0"/>
+          </a:p>
+          <a:p>
+            <a:r>
+              <a:rPr lang="en-US" baseline="0" dirty="0"/>
+              <a:t>Precision can be increased to 4 to 7 meters using this method. Note that some sources will suggest less than 4 meters. </a:t>
+            </a:r>
+          </a:p>
+          <a:p>
+            <a:endParaRPr lang="en-US" baseline="0" dirty="0"/>
+          </a:p>
+          <a:p>
+            <a:r>
+              <a:rPr lang="en-US" baseline="0" dirty="0"/>
+              <a:t>It works by collecting error information at ground control stations. This error information is then transmitted to satellites that then re-broadcast the correction information. </a:t>
+            </a:r>
+          </a:p>
+          <a:p>
+            <a:endParaRPr lang="en-US" baseline="0" dirty="0"/>
+          </a:p>
+          <a:p>
+            <a:r>
+              <a:rPr lang="en-US" baseline="0" dirty="0"/>
+              <a:t>WAAS-enable receivers can collect this information and use it to correct GNSS measurements in real time. </a:t>
+            </a:r>
+          </a:p>
+          <a:p>
+            <a:endParaRPr lang="en-US" baseline="0" dirty="0"/>
+          </a:p>
+          <a:p>
+            <a:r>
+              <a:rPr lang="en-US" baseline="0" dirty="0"/>
+              <a:t>Currently, WAAS is only designed to work with the NAVSTAR system. However, other SBAS systems are available. </a:t>
+            </a:r>
+          </a:p>
+          <a:p>
+            <a:endParaRPr lang="en-US" baseline="0" dirty="0"/>
+          </a:p>
+          <a:p>
+            <a:pPr marL="0" marR="0" lvl="0" indent="0" algn="l" defTabSz="457200" rtl="0" eaLnBrk="1" fontAlgn="auto" latinLnBrk="0" hangingPunct="1">
+              <a:lnSpc>
+                <a:spcPct val="100000"/>
+              </a:lnSpc>
+              <a:spcBef>
+                <a:spcPts val="0"/>
+              </a:spcBef>
+              <a:spcAft>
+                <a:spcPts val="0"/>
+              </a:spcAft>
+              <a:buClrTx/>
+              <a:buSzTx/>
+              <a:buFontTx/>
+              <a:buNone/>
+              <a:tabLst/>
+              <a:defRPr/>
+            </a:pPr>
+            <a:r>
+              <a:rPr lang="en-US" baseline="0" dirty="0"/>
+              <a:t>Most handheld units, especially those designed for use with NAVSTAR, are WAAS-enabled, </a:t>
+            </a:r>
+            <a:r>
+              <a:rPr lang="en-US" dirty="0"/>
+              <a:t>Satellite-Based Augmentation System (SBAS)</a:t>
+            </a:r>
+            <a:endParaRPr lang="en-US" baseline="0" dirty="0"/>
+          </a:p>
+          <a:p>
+            <a:endParaRPr lang="en-US" baseline="0" dirty="0"/>
+          </a:p>
+          <a:p>
+            <a:r>
+              <a:rPr lang="en-US" baseline="0" dirty="0"/>
+              <a:t>WAAS is generally used if there is a need for real-time correction; however, post-processing can provide better results. </a:t>
+            </a:r>
+          </a:p>
+          <a:p>
+            <a:endParaRPr lang="en-US" baseline="0" dirty="0"/>
+          </a:p>
+          <a:p>
             <a:r>
               <a:rPr lang="en-US" b="0" i="0" dirty="0">
                 <a:solidFill>
@@ -1324,49 +1343,758 @@
                 <a:effectLst/>
                 <a:latin typeface="Arial" panose="020B0604020202020204" pitchFamily="34" charset="0"/>
               </a:rPr>
-              <a:t>incoming signal is shifted to an IF for </a:t>
-            </a:r>
-            <a:r>
-              <a:rPr lang="en-US" b="0" i="0" u="none" strike="noStrike" dirty="0">
-                <a:solidFill>
-                  <a:srgbClr val="0B0080"/>
+              <a:t>Measurements from the reference stations are routed to master stations, which queue the received Deviation Correction (DC) and send the correction messages to geostationary WAAS satellites in a timely manner (every 5 seconds or better). Those satellites broadcast the correction messages back to Earth, where WAAS-enabled GPS receivers use the corrections while computing their positions to improve accuracy.</a:t>
+            </a:r>
+          </a:p>
+          <a:p>
+            <a:endParaRPr lang="en-US" b="0" i="0" baseline="0" dirty="0">
+              <a:solidFill>
+                <a:srgbClr val="202122"/>
+              </a:solidFill>
+              <a:effectLst/>
+              <a:latin typeface="Arial" panose="020B0604020202020204" pitchFamily="34" charset="0"/>
+            </a:endParaRPr>
+          </a:p>
+          <a:p>
+            <a:r>
+              <a:rPr lang="en-US" sz="1200" dirty="0"/>
+              <a:t>European Geostationary Navigation Overlay Service (EGNOS). </a:t>
+            </a:r>
+            <a:r>
+              <a:rPr lang="en-US" b="0" i="0" dirty="0">
+                <a:solidFill>
+                  <a:srgbClr val="202122"/>
                 </a:solidFill>
                 <a:effectLst/>
                 <a:latin typeface="Arial" panose="020B0604020202020204" pitchFamily="34" charset="0"/>
-                <a:hlinkClick r:id="rId3"/>
               </a:rPr>
-              <a:t>amplification</a:t>
+              <a:t>Currently, </a:t>
+            </a:r>
+            <a:r>
+              <a:rPr lang="en-US" sz="1200" dirty="0"/>
+              <a:t>EGNOS</a:t>
+            </a:r>
+            <a:r>
+              <a:rPr lang="en-US" b="0" i="0" dirty="0">
+                <a:solidFill>
+                  <a:srgbClr val="202122"/>
+                </a:solidFill>
+                <a:effectLst/>
+                <a:latin typeface="Arial" panose="020B0604020202020204" pitchFamily="34" charset="0"/>
+              </a:rPr>
+              <a:t> supplements the </a:t>
             </a:r>
             <a:r>
               <a:rPr lang="en-US" b="0" i="0" u="none" strike="noStrike" dirty="0">
                 <a:solidFill>
-                  <a:srgbClr val="0B0080"/>
+                  <a:srgbClr val="0645AD"/>
+                </a:solidFill>
+                <a:effectLst/>
+                <a:latin typeface="Arial" panose="020B0604020202020204" pitchFamily="34" charset="0"/>
+                <a:hlinkClick r:id="rId3" tooltip="GPS"/>
+              </a:rPr>
+              <a:t>GPS</a:t>
+            </a:r>
+            <a:r>
+              <a:rPr lang="en-US" b="0" i="0" dirty="0">
+                <a:solidFill>
+                  <a:srgbClr val="202122"/>
+                </a:solidFill>
+                <a:effectLst/>
+                <a:latin typeface="Arial" panose="020B0604020202020204" pitchFamily="34" charset="0"/>
+              </a:rPr>
+              <a:t> by reporting on the reliability and accuracy of their positioning data and sending out corrections. The system will supplement </a:t>
+            </a:r>
+            <a:r>
+              <a:rPr lang="en-US" b="0" i="0" u="none" strike="noStrike" dirty="0">
+                <a:solidFill>
+                  <a:srgbClr val="0645AD"/>
+                </a:solidFill>
+                <a:effectLst/>
+                <a:latin typeface="Arial" panose="020B0604020202020204" pitchFamily="34" charset="0"/>
+                <a:hlinkClick r:id="rId4" tooltip="Galileo (satellite navigation)"/>
+              </a:rPr>
+              <a:t>Galileo</a:t>
+            </a:r>
+            <a:r>
+              <a:rPr lang="en-US" b="0" i="0" dirty="0">
+                <a:solidFill>
+                  <a:srgbClr val="202122"/>
+                </a:solidFill>
+                <a:effectLst/>
+                <a:latin typeface="Arial" panose="020B0604020202020204" pitchFamily="34" charset="0"/>
+              </a:rPr>
+              <a:t> in a future version.</a:t>
+            </a:r>
+          </a:p>
+          <a:p>
+            <a:endParaRPr lang="en-US" b="0" i="0" baseline="0" dirty="0">
+              <a:solidFill>
+                <a:srgbClr val="202122"/>
+              </a:solidFill>
+              <a:effectLst/>
+              <a:latin typeface="Arial" panose="020B0604020202020204" pitchFamily="34" charset="0"/>
+            </a:endParaRPr>
+          </a:p>
+          <a:p>
+            <a:r>
+              <a:rPr lang="en-US" b="0" i="0" dirty="0">
+                <a:solidFill>
+                  <a:srgbClr val="222222"/>
+                </a:solidFill>
+                <a:effectLst/>
+                <a:latin typeface="Arial" panose="020B0604020202020204" pitchFamily="34" charset="0"/>
+              </a:rPr>
+              <a:t>The MTSAT (Multi-functional Transport Satellites) Satellite Augmentation System (MSAS) is the Japanese </a:t>
+            </a:r>
+            <a:r>
+              <a:rPr lang="en-US" b="0" i="0" u="none" strike="noStrike" dirty="0">
+                <a:solidFill>
+                  <a:srgbClr val="0645AD"/>
+                </a:solidFill>
+                <a:effectLst/>
+                <a:latin typeface="Arial" panose="020B0604020202020204" pitchFamily="34" charset="0"/>
+                <a:hlinkClick r:id="rId5" tooltip="SBAS General Introduction"/>
+              </a:rPr>
+              <a:t>Satellite Based Augmentation System (SBAS)</a:t>
+            </a:r>
+            <a:r>
+              <a:rPr lang="en-US" b="0" i="0" dirty="0">
+                <a:solidFill>
+                  <a:srgbClr val="222222"/>
+                </a:solidFill>
+                <a:effectLst/>
+                <a:latin typeface="Arial" panose="020B0604020202020204" pitchFamily="34" charset="0"/>
+              </a:rPr>
+              <a:t> System:</a:t>
+            </a:r>
+            <a:r>
+              <a:rPr lang="en-US" b="0" i="0" u="none" strike="noStrike" baseline="30000" dirty="0">
+                <a:solidFill>
+                  <a:srgbClr val="0645AD"/>
+                </a:solidFill>
+                <a:effectLst/>
+                <a:latin typeface="Arial" panose="020B0604020202020204" pitchFamily="34" charset="0"/>
+                <a:hlinkClick r:id="rId6"/>
+              </a:rPr>
+              <a:t>[1]</a:t>
+            </a:r>
+            <a:r>
+              <a:rPr lang="en-US" b="0" i="0" dirty="0">
+                <a:solidFill>
+                  <a:srgbClr val="222222"/>
+                </a:solidFill>
+                <a:effectLst/>
+                <a:latin typeface="Arial" panose="020B0604020202020204" pitchFamily="34" charset="0"/>
+              </a:rPr>
+              <a:t> a GPS Augmentation system with the goal of improving its accuracy, integrity, and availability.</a:t>
+            </a:r>
+          </a:p>
+          <a:p>
+            <a:endParaRPr lang="en-US" b="0" i="0" dirty="0">
+              <a:solidFill>
+                <a:srgbClr val="222222"/>
+              </a:solidFill>
+              <a:effectLst/>
+              <a:latin typeface="Arial" panose="020B0604020202020204" pitchFamily="34" charset="0"/>
+            </a:endParaRPr>
+          </a:p>
+          <a:p>
+            <a:r>
+              <a:rPr lang="en-US" b="0" i="0" dirty="0">
+                <a:solidFill>
+                  <a:srgbClr val="202122"/>
+                </a:solidFill>
+                <a:effectLst/>
+                <a:latin typeface="Arial" panose="020B0604020202020204" pitchFamily="34" charset="0"/>
+              </a:rPr>
+              <a:t>The </a:t>
+            </a:r>
+            <a:r>
+              <a:rPr lang="en-US" b="1" i="0" dirty="0">
+                <a:solidFill>
+                  <a:srgbClr val="202122"/>
+                </a:solidFill>
+                <a:effectLst/>
+                <a:latin typeface="Arial" panose="020B0604020202020204" pitchFamily="34" charset="0"/>
+              </a:rPr>
+              <a:t>Quasi-Zenith Satellite System</a:t>
+            </a:r>
+            <a:r>
+              <a:rPr lang="en-US" b="0" i="0" dirty="0">
+                <a:solidFill>
+                  <a:srgbClr val="202122"/>
+                </a:solidFill>
+                <a:effectLst/>
+                <a:latin typeface="Arial" panose="020B0604020202020204" pitchFamily="34" charset="0"/>
+              </a:rPr>
+              <a:t> (</a:t>
+            </a:r>
+            <a:r>
+              <a:rPr lang="en-US" b="1" i="0" dirty="0">
+                <a:solidFill>
+                  <a:srgbClr val="202122"/>
+                </a:solidFill>
+                <a:effectLst/>
+                <a:latin typeface="Arial" panose="020B0604020202020204" pitchFamily="34" charset="0"/>
+              </a:rPr>
+              <a:t>QZSS</a:t>
+            </a:r>
+            <a:r>
+              <a:rPr lang="en-US" b="0" i="0" dirty="0">
+                <a:solidFill>
+                  <a:srgbClr val="202122"/>
+                </a:solidFill>
+                <a:effectLst/>
+                <a:latin typeface="Arial" panose="020B0604020202020204" pitchFamily="34" charset="0"/>
+              </a:rPr>
+              <a:t>), also known as </a:t>
+            </a:r>
+            <a:r>
+              <a:rPr lang="en-US" b="1" i="0" dirty="0" err="1">
+                <a:solidFill>
+                  <a:srgbClr val="202122"/>
+                </a:solidFill>
+                <a:effectLst/>
+                <a:latin typeface="Arial" panose="020B0604020202020204" pitchFamily="34" charset="0"/>
+              </a:rPr>
+              <a:t>Michibiki</a:t>
+            </a:r>
+            <a:r>
+              <a:rPr lang="en-US" b="0" i="0" dirty="0">
+                <a:solidFill>
+                  <a:srgbClr val="202122"/>
+                </a:solidFill>
+                <a:effectLst/>
+                <a:latin typeface="Arial" panose="020B0604020202020204" pitchFamily="34" charset="0"/>
+              </a:rPr>
+              <a:t> (</a:t>
+            </a:r>
+            <a:r>
+              <a:rPr lang="ja-JP" altLang="en-US" b="0" i="0" dirty="0">
+                <a:solidFill>
+                  <a:srgbClr val="202122"/>
+                </a:solidFill>
+                <a:effectLst/>
+                <a:latin typeface="Arial" panose="020B0604020202020204" pitchFamily="34" charset="0"/>
+              </a:rPr>
+              <a:t>みちびき</a:t>
+            </a:r>
+            <a:r>
+              <a:rPr lang="en-US" altLang="ja-JP" b="0" i="0" dirty="0">
+                <a:solidFill>
+                  <a:srgbClr val="202122"/>
+                </a:solidFill>
+                <a:effectLst/>
+                <a:latin typeface="Arial" panose="020B0604020202020204" pitchFamily="34" charset="0"/>
+              </a:rPr>
+              <a:t>), </a:t>
+            </a:r>
+            <a:r>
+              <a:rPr lang="en-US" b="0" i="0" dirty="0">
+                <a:solidFill>
+                  <a:srgbClr val="202122"/>
+                </a:solidFill>
+                <a:effectLst/>
+                <a:latin typeface="Arial" panose="020B0604020202020204" pitchFamily="34" charset="0"/>
+              </a:rPr>
+              <a:t>is a four-satellite regional </a:t>
+            </a:r>
+            <a:r>
+              <a:rPr lang="en-US" b="0" i="0" u="none" strike="noStrike" dirty="0">
+                <a:solidFill>
+                  <a:srgbClr val="0645AD"/>
+                </a:solidFill>
+                <a:effectLst/>
+                <a:latin typeface="Arial" panose="020B0604020202020204" pitchFamily="34" charset="0"/>
+                <a:hlinkClick r:id="rId7" tooltip="Time transfer"/>
+              </a:rPr>
+              <a:t>time transfer</a:t>
+            </a:r>
+            <a:r>
+              <a:rPr lang="en-US" b="0" i="0" dirty="0">
+                <a:solidFill>
+                  <a:srgbClr val="202122"/>
+                </a:solidFill>
+                <a:effectLst/>
+                <a:latin typeface="Arial" panose="020B0604020202020204" pitchFamily="34" charset="0"/>
+              </a:rPr>
+              <a:t> system and a </a:t>
+            </a:r>
+            <a:r>
+              <a:rPr lang="en-US" b="0" i="0" u="none" strike="noStrike" dirty="0">
+                <a:solidFill>
+                  <a:srgbClr val="0645AD"/>
+                </a:solidFill>
+                <a:effectLst/>
+                <a:latin typeface="Arial" panose="020B0604020202020204" pitchFamily="34" charset="0"/>
+                <a:hlinkClick r:id="rId8" tooltip="GNSS augmentation"/>
+              </a:rPr>
+              <a:t>satellite-based augmentation system</a:t>
+            </a:r>
+            <a:r>
+              <a:rPr lang="en-US" b="0" i="0" dirty="0">
+                <a:solidFill>
+                  <a:srgbClr val="202122"/>
+                </a:solidFill>
+                <a:effectLst/>
+                <a:latin typeface="Arial" panose="020B0604020202020204" pitchFamily="34" charset="0"/>
+              </a:rPr>
+              <a:t> development by the </a:t>
+            </a:r>
+            <a:r>
+              <a:rPr lang="en-US" b="0" i="0" u="none" strike="noStrike" dirty="0">
+                <a:solidFill>
+                  <a:srgbClr val="0645AD"/>
+                </a:solidFill>
+                <a:effectLst/>
+                <a:latin typeface="Arial" panose="020B0604020202020204" pitchFamily="34" charset="0"/>
+                <a:hlinkClick r:id="rId9" tooltip="Japanese government"/>
+              </a:rPr>
+              <a:t>Japanese government</a:t>
+            </a:r>
+            <a:r>
+              <a:rPr lang="en-US" b="0" i="0" dirty="0">
+                <a:solidFill>
+                  <a:srgbClr val="202122"/>
+                </a:solidFill>
+                <a:effectLst/>
+                <a:latin typeface="Arial" panose="020B0604020202020204" pitchFamily="34" charset="0"/>
+              </a:rPr>
+              <a:t> to enhance the United States-operated </a:t>
+            </a:r>
+            <a:r>
+              <a:rPr lang="en-US" b="0" i="0" u="none" strike="noStrike" dirty="0">
+                <a:solidFill>
+                  <a:srgbClr val="0645AD"/>
+                </a:solidFill>
+                <a:effectLst/>
+                <a:latin typeface="Arial" panose="020B0604020202020204" pitchFamily="34" charset="0"/>
+                <a:hlinkClick r:id="rId10" tooltip="Global Positioning System"/>
+              </a:rPr>
+              <a:t>Global Positioning System</a:t>
+            </a:r>
+            <a:r>
+              <a:rPr lang="en-US" b="0" i="0" dirty="0">
+                <a:solidFill>
+                  <a:srgbClr val="202122"/>
+                </a:solidFill>
+                <a:effectLst/>
+                <a:latin typeface="Arial" panose="020B0604020202020204" pitchFamily="34" charset="0"/>
+              </a:rPr>
+              <a:t> (GPS) in the </a:t>
+            </a:r>
+            <a:r>
+              <a:rPr lang="en-US" b="0" i="0" u="none" strike="noStrike" dirty="0">
+                <a:solidFill>
+                  <a:srgbClr val="0645AD"/>
+                </a:solidFill>
+                <a:effectLst/>
+                <a:latin typeface="Arial" panose="020B0604020202020204" pitchFamily="34" charset="0"/>
+                <a:hlinkClick r:id="rId11" tooltip="Asia-Pacific"/>
+              </a:rPr>
+              <a:t>Asia-Oceania</a:t>
+            </a:r>
+            <a:r>
+              <a:rPr lang="en-US" b="0" i="0" dirty="0">
+                <a:solidFill>
+                  <a:srgbClr val="202122"/>
+                </a:solidFill>
+                <a:effectLst/>
+                <a:latin typeface="Arial" panose="020B0604020202020204" pitchFamily="34" charset="0"/>
+              </a:rPr>
+              <a:t> regions, with a focus on </a:t>
+            </a:r>
+            <a:r>
+              <a:rPr lang="en-US" b="0" i="0" u="none" strike="noStrike" dirty="0">
+                <a:solidFill>
+                  <a:srgbClr val="0645AD"/>
+                </a:solidFill>
+                <a:effectLst/>
+                <a:latin typeface="Arial" panose="020B0604020202020204" pitchFamily="34" charset="0"/>
+                <a:hlinkClick r:id="rId12" tooltip="Japan"/>
+              </a:rPr>
+              <a:t>Japan</a:t>
+            </a:r>
+            <a:r>
+              <a:rPr lang="en-US" b="0" i="0" dirty="0">
+                <a:solidFill>
+                  <a:srgbClr val="202122"/>
                 </a:solidFill>
                 <a:effectLst/>
                 <a:latin typeface="Arial" panose="020B0604020202020204" pitchFamily="34" charset="0"/>
               </a:rPr>
               <a:t>.</a:t>
             </a:r>
-          </a:p>
-          <a:p>
-            <a:pPr algn="l"/>
-            <a:r>
-              <a:rPr lang="en-US" altLang="en-US" b="0" i="0" u="none" strike="noStrike" dirty="0">
-                <a:solidFill>
-                  <a:srgbClr val="0B0080"/>
+            <a:r>
+              <a:rPr lang="en-US" b="0" i="0" u="none" strike="noStrike" baseline="30000" dirty="0">
+                <a:solidFill>
+                  <a:srgbClr val="0645AD"/>
+                </a:solidFill>
+                <a:effectLst/>
+                <a:latin typeface="Arial" panose="020B0604020202020204" pitchFamily="34" charset="0"/>
+                <a:hlinkClick r:id="rId13"/>
+              </a:rPr>
+              <a:t>[1]</a:t>
+            </a:r>
+            <a:endParaRPr lang="en-US" b="0" i="0" dirty="0">
+              <a:solidFill>
+                <a:srgbClr val="222222"/>
+              </a:solidFill>
+              <a:effectLst/>
+              <a:latin typeface="Arial" panose="020B0604020202020204" pitchFamily="34" charset="0"/>
+            </a:endParaRPr>
+          </a:p>
+          <a:p>
+            <a:endParaRPr lang="en-US" b="0" i="0" baseline="0" dirty="0">
+              <a:solidFill>
+                <a:srgbClr val="222222"/>
+              </a:solidFill>
+              <a:effectLst/>
+              <a:latin typeface="Arial" panose="020B0604020202020204" pitchFamily="34" charset="0"/>
+            </a:endParaRPr>
+          </a:p>
+          <a:p>
+            <a:r>
+              <a:rPr lang="en-US" b="0" i="0" dirty="0">
+                <a:solidFill>
+                  <a:srgbClr val="222222"/>
                 </a:solidFill>
                 <a:effectLst/>
                 <a:latin typeface="Arial" panose="020B0604020202020204" pitchFamily="34" charset="0"/>
               </a:rPr>
-              <a:t>Converted it to intermediate frequency signal, that means the signal will be possible to be processed through digital signal processor. </a:t>
-            </a:r>
+              <a:t>The System for Differential Corrections and Monitoring (SDCM) is the SBAS currently being developed in the Russian Federation</a:t>
+            </a:r>
+            <a:r>
+              <a:rPr lang="en-US" b="0" i="0" u="none" strike="noStrike" baseline="30000" dirty="0">
+                <a:solidFill>
+                  <a:srgbClr val="0645AD"/>
+                </a:solidFill>
+                <a:effectLst/>
+                <a:latin typeface="Arial" panose="020B0604020202020204" pitchFamily="34" charset="0"/>
+                <a:hlinkClick r:id="rId14"/>
+              </a:rPr>
+              <a:t>[1]</a:t>
+            </a:r>
+            <a:r>
+              <a:rPr lang="en-US" b="0" i="0" u="none" strike="noStrike" baseline="30000" dirty="0">
+                <a:solidFill>
+                  <a:srgbClr val="0645AD"/>
+                </a:solidFill>
+                <a:effectLst/>
+                <a:latin typeface="Arial" panose="020B0604020202020204" pitchFamily="34" charset="0"/>
+                <a:hlinkClick r:id="rId15"/>
+              </a:rPr>
+              <a:t>[2]</a:t>
+            </a:r>
+            <a:r>
+              <a:rPr lang="en-US" b="0" i="0" dirty="0">
+                <a:solidFill>
+                  <a:srgbClr val="222222"/>
+                </a:solidFill>
+                <a:effectLst/>
+                <a:latin typeface="Arial" panose="020B0604020202020204" pitchFamily="34" charset="0"/>
+              </a:rPr>
+              <a:t> as a component of GLONASS</a:t>
+            </a:r>
+          </a:p>
+          <a:p>
+            <a:endParaRPr lang="en-US" b="0" i="0" baseline="0" dirty="0">
+              <a:solidFill>
+                <a:srgbClr val="222222"/>
+              </a:solidFill>
+              <a:effectLst/>
+              <a:latin typeface="Arial" panose="020B0604020202020204" pitchFamily="34" charset="0"/>
+            </a:endParaRPr>
+          </a:p>
+          <a:p>
+            <a:r>
+              <a:rPr lang="en-US" b="0" i="0" dirty="0">
+                <a:solidFill>
+                  <a:srgbClr val="484848"/>
+                </a:solidFill>
+                <a:effectLst/>
+                <a:latin typeface="Lucida Grande"/>
+              </a:rPr>
+              <a:t>GAGAN is an acronym for </a:t>
+            </a:r>
+            <a:r>
+              <a:rPr lang="en-US" b="0" i="0" dirty="0">
+                <a:solidFill>
+                  <a:srgbClr val="FF4800"/>
+                </a:solidFill>
+                <a:effectLst/>
+                <a:latin typeface="Lucida Grande"/>
+              </a:rPr>
+              <a:t>G</a:t>
+            </a:r>
+            <a:r>
+              <a:rPr lang="en-US" b="0" i="0" dirty="0">
+                <a:solidFill>
+                  <a:srgbClr val="484848"/>
+                </a:solidFill>
+                <a:effectLst/>
+                <a:latin typeface="Lucida Grande"/>
+              </a:rPr>
+              <a:t>PS </a:t>
+            </a:r>
+            <a:r>
+              <a:rPr lang="en-US" b="0" i="0" dirty="0">
+                <a:solidFill>
+                  <a:srgbClr val="FF4800"/>
+                </a:solidFill>
+                <a:effectLst/>
+                <a:latin typeface="Lucida Grande"/>
+              </a:rPr>
+              <a:t>A</a:t>
+            </a:r>
+            <a:r>
+              <a:rPr lang="en-US" b="0" i="0" dirty="0">
+                <a:solidFill>
+                  <a:srgbClr val="484848"/>
+                </a:solidFill>
+                <a:effectLst/>
+                <a:latin typeface="Lucida Grande"/>
+              </a:rPr>
+              <a:t>ided </a:t>
+            </a:r>
+            <a:r>
+              <a:rPr lang="en-US" b="0" i="0" dirty="0">
+                <a:solidFill>
+                  <a:srgbClr val="FF4800"/>
+                </a:solidFill>
+                <a:effectLst/>
+                <a:latin typeface="Lucida Grande"/>
+              </a:rPr>
+              <a:t>G</a:t>
+            </a:r>
+            <a:r>
+              <a:rPr lang="en-US" b="0" i="0" dirty="0">
+                <a:solidFill>
+                  <a:srgbClr val="484848"/>
+                </a:solidFill>
+                <a:effectLst/>
+                <a:latin typeface="Lucida Grande"/>
+              </a:rPr>
+              <a:t>EO </a:t>
+            </a:r>
+            <a:r>
+              <a:rPr lang="en-US" b="0" i="0" dirty="0">
+                <a:solidFill>
+                  <a:srgbClr val="FF4800"/>
+                </a:solidFill>
+                <a:effectLst/>
+                <a:latin typeface="Lucida Grande"/>
+              </a:rPr>
+              <a:t>A</a:t>
+            </a:r>
+            <a:r>
+              <a:rPr lang="en-US" b="0" i="0" dirty="0">
+                <a:solidFill>
+                  <a:srgbClr val="484848"/>
+                </a:solidFill>
+                <a:effectLst/>
+                <a:latin typeface="Lucida Grande"/>
+              </a:rPr>
+              <a:t>ugmented </a:t>
+            </a:r>
+            <a:r>
+              <a:rPr lang="en-US" b="0" i="0" dirty="0">
+                <a:solidFill>
+                  <a:srgbClr val="FF4800"/>
+                </a:solidFill>
+                <a:effectLst/>
+                <a:latin typeface="Lucida Grande"/>
+              </a:rPr>
+              <a:t>N</a:t>
+            </a:r>
+            <a:r>
+              <a:rPr lang="en-US" b="0" i="0" dirty="0">
+                <a:solidFill>
+                  <a:srgbClr val="484848"/>
+                </a:solidFill>
+                <a:effectLst/>
+                <a:latin typeface="Lucida Grande"/>
+              </a:rPr>
+              <a:t>avigation. It is a Space Based Augmentation  System (</a:t>
+            </a:r>
+            <a:r>
+              <a:rPr lang="en-US" b="0" i="0" dirty="0">
+                <a:solidFill>
+                  <a:srgbClr val="0066FF"/>
+                </a:solidFill>
+                <a:effectLst/>
+                <a:latin typeface="Lucida Grande"/>
+              </a:rPr>
+              <a:t>SBAS</a:t>
+            </a:r>
+            <a:r>
+              <a:rPr lang="en-US" b="0" i="0" dirty="0">
+                <a:solidFill>
+                  <a:srgbClr val="484848"/>
+                </a:solidFill>
+                <a:effectLst/>
+                <a:latin typeface="Lucida Grande"/>
+              </a:rPr>
+              <a:t>) jointly developed by </a:t>
+            </a:r>
+            <a:r>
+              <a:rPr lang="en-US" b="0" i="0" dirty="0">
+                <a:solidFill>
+                  <a:srgbClr val="0066FF"/>
+                </a:solidFill>
+                <a:effectLst/>
+                <a:latin typeface="Lucida Grande"/>
+              </a:rPr>
+              <a:t>ISRO </a:t>
+            </a:r>
+            <a:r>
+              <a:rPr lang="en-US" b="0" i="0" dirty="0">
+                <a:solidFill>
+                  <a:srgbClr val="484848"/>
+                </a:solidFill>
+                <a:effectLst/>
+                <a:latin typeface="Lucida Grande"/>
+              </a:rPr>
+              <a:t>and </a:t>
+            </a:r>
+            <a:r>
+              <a:rPr lang="en-US" b="0" i="0" dirty="0">
+                <a:solidFill>
+                  <a:srgbClr val="0066FF"/>
+                </a:solidFill>
+                <a:effectLst/>
+                <a:latin typeface="Lucida Grande"/>
+              </a:rPr>
+              <a:t>AAI </a:t>
+            </a:r>
+            <a:r>
+              <a:rPr lang="en-US" b="0" i="0" dirty="0">
+                <a:solidFill>
+                  <a:srgbClr val="484848"/>
+                </a:solidFill>
+                <a:effectLst/>
+                <a:latin typeface="Lucida Grande"/>
+              </a:rPr>
+              <a:t>to provide the best possible navigational services over Indian FIR (Flight Information Region) with the capability of expanding to </a:t>
+            </a:r>
+            <a:r>
+              <a:rPr lang="en-US" b="0" i="0" dirty="0" err="1">
+                <a:solidFill>
+                  <a:srgbClr val="484848"/>
+                </a:solidFill>
+                <a:effectLst/>
+                <a:latin typeface="Lucida Grande"/>
+              </a:rPr>
+              <a:t>neighbouring</a:t>
+            </a:r>
+            <a:r>
+              <a:rPr lang="en-US" b="0" i="0" dirty="0">
+                <a:solidFill>
+                  <a:srgbClr val="484848"/>
+                </a:solidFill>
+                <a:effectLst/>
+                <a:latin typeface="Lucida Grande"/>
+              </a:rPr>
+              <a:t> FIRs.</a:t>
+            </a:r>
+            <a:br>
+              <a:rPr lang="en-US" baseline="0" dirty="0"/>
+            </a:br>
+            <a:endParaRPr lang="en-US" baseline="0" dirty="0"/>
+          </a:p>
+          <a:p>
+            <a:endParaRPr lang="en-US" dirty="0"/>
+          </a:p>
+        </p:txBody>
+      </p:sp>
+      <p:sp>
+        <p:nvSpPr>
+          <p:cNvPr id="4" name="Slide Number Placeholder 3"/>
+          <p:cNvSpPr>
+            <a:spLocks noGrp="1"/>
+          </p:cNvSpPr>
+          <p:nvPr>
+            <p:ph type="sldNum" sz="quarter" idx="10"/>
+          </p:nvPr>
+        </p:nvSpPr>
+        <p:spPr/>
+        <p:txBody>
+          <a:bodyPr/>
+          <a:lstStyle/>
+          <a:p>
+            <a:pPr marL="0" marR="0" lvl="0" indent="0" algn="r" defTabSz="457200" rtl="0" eaLnBrk="1" fontAlgn="auto" latinLnBrk="0" hangingPunct="1">
+              <a:lnSpc>
+                <a:spcPct val="100000"/>
+              </a:lnSpc>
+              <a:spcBef>
+                <a:spcPts val="0"/>
+              </a:spcBef>
+              <a:spcAft>
+                <a:spcPts val="0"/>
+              </a:spcAft>
+              <a:buClrTx/>
+              <a:buSzTx/>
+              <a:buFontTx/>
+              <a:buNone/>
+              <a:tabLst/>
+              <a:defRPr/>
+            </a:pPr>
+            <a:fld id="{01F2A70B-78F2-4DCF-B53B-C990D2FAFB8A}" type="slidenum">
+              <a:rPr kumimoji="0" lang="en-US" sz="1200" b="0" i="0" u="none" strike="noStrike" kern="1200" cap="none" spc="0" normalizeH="0" baseline="0" noProof="0" smtClean="0">
+                <a:ln>
+                  <a:noFill/>
+                </a:ln>
+                <a:solidFill>
+                  <a:prstClr val="black"/>
+                </a:solidFill>
+                <a:effectLst/>
+                <a:uLnTx/>
+                <a:uFillTx/>
+                <a:latin typeface="Calibri"/>
+                <a:ea typeface="+mn-ea"/>
+                <a:cs typeface="+mn-cs"/>
+              </a:rPr>
+              <a:pPr marL="0" marR="0" lvl="0" indent="0" algn="r" defTabSz="457200" rtl="0" eaLnBrk="1" fontAlgn="auto" latinLnBrk="0" hangingPunct="1">
+                <a:lnSpc>
+                  <a:spcPct val="100000"/>
+                </a:lnSpc>
+                <a:spcBef>
+                  <a:spcPts val="0"/>
+                </a:spcBef>
+                <a:spcAft>
+                  <a:spcPts val="0"/>
+                </a:spcAft>
+                <a:buClrTx/>
+                <a:buSzTx/>
+                <a:buFontTx/>
+                <a:buNone/>
+                <a:tabLst/>
+                <a:defRPr/>
+              </a:pPr>
+              <a:t>18</a:t>
+            </a:fld>
+            <a:endParaRPr kumimoji="0" lang="en-US" sz="1200" b="0" i="0" u="none" strike="noStrike" kern="1200" cap="none" spc="0" normalizeH="0" baseline="0" noProof="0">
+              <a:ln>
+                <a:noFill/>
+              </a:ln>
+              <a:solidFill>
+                <a:prstClr val="black"/>
+              </a:solidFill>
+              <a:effectLst/>
+              <a:uLnTx/>
+              <a:uFillTx/>
+              <a:latin typeface="Calibri"/>
+              <a:ea typeface="+mn-ea"/>
+              <a:cs typeface="+mn-cs"/>
+            </a:endParaRPr>
           </a:p>
         </p:txBody>
       </p:sp>
     </p:spTree>
     <p:extLst>
       <p:ext uri="{BB962C8B-B14F-4D97-AF65-F5344CB8AC3E}">
-        <p14:creationId xmlns:p14="http://schemas.microsoft.com/office/powerpoint/2010/main" val="631713570"/>
+        <p14:creationId xmlns:p14="http://schemas.microsoft.com/office/powerpoint/2010/main" val="1991058580"/>
       </p:ext>
     </p:extLst>
   </p:cSld>
@@ -1442,7 +2170,7 @@
             <a:fld id="{56507943-197E-CE46-82F0-5A323A24AE7A}" type="slidenum">
               <a:rPr lang="en-US" smtClean="0"/>
               <a:pPr/>
-              <a:t>28</a:t>
+              <a:t>25</a:t>
             </a:fld>
             <a:endParaRPr lang="en-US"/>
           </a:p>
@@ -1699,7 +2427,7 @@
           <a:p>
             <a:fld id="{7D00F9BB-97E2-4F5E-A9A6-FAC40A4E9E52}" type="datetime1">
               <a:rPr lang="en-US" smtClean="0"/>
-              <a:t>9/22/2025</a:t>
+              <a:t>9/23/2025</a:t>
             </a:fld>
             <a:endParaRPr lang="en-US"/>
           </a:p>
@@ -1903,7 +2631,7 @@
           <a:p>
             <a:fld id="{0B66B1A4-BA96-45DD-B69E-04FB88AA18D4}" type="datetime1">
               <a:rPr lang="en-US" smtClean="0"/>
-              <a:t>9/22/2025</a:t>
+              <a:t>9/23/2025</a:t>
             </a:fld>
             <a:endParaRPr lang="en-US"/>
           </a:p>
@@ -2266,7 +2994,7 @@
           <a:p>
             <a:fld id="{A986499E-7FB9-4175-B5CC-46A07FADF573}" type="datetime1">
               <a:rPr lang="en-US" smtClean="0"/>
-              <a:t>9/22/2025</a:t>
+              <a:t>9/23/2025</a:t>
             </a:fld>
             <a:endParaRPr lang="en-US"/>
           </a:p>
@@ -2578,7 +3306,7 @@
           <a:p>
             <a:fld id="{562C3EF4-AD61-48A1-B51C-86BBC26A07EE}" type="datetime1">
               <a:rPr lang="en-US" smtClean="0"/>
-              <a:t>9/22/2025</a:t>
+              <a:t>9/23/2025</a:t>
             </a:fld>
             <a:endParaRPr lang="en-US"/>
           </a:p>
@@ -2777,7 +3505,7 @@
           <a:p>
             <a:fld id="{BB3E9FF5-A3A3-421D-9FE4-C97ACA9B4B66}" type="datetime1">
               <a:rPr lang="en-US" smtClean="0"/>
-              <a:t>9/22/2025</a:t>
+              <a:t>9/23/2025</a:t>
             </a:fld>
             <a:endParaRPr lang="en-US"/>
           </a:p>
@@ -3090,7 +3818,7 @@
           <a:p>
             <a:fld id="{36E74F4B-9A6E-4B50-BE3E-090D5038F3B5}" type="datetime1">
               <a:rPr lang="en-US" smtClean="0"/>
-              <a:t>9/22/2025</a:t>
+              <a:t>9/23/2025</a:t>
             </a:fld>
             <a:endParaRPr lang="en-US"/>
           </a:p>
@@ -3344,7 +4072,7 @@
           <a:p>
             <a:fld id="{B009AE4F-ECA9-4391-85A0-0BDC121BC912}" type="datetime1">
               <a:rPr lang="en-US" smtClean="0"/>
-              <a:t>9/22/2025</a:t>
+              <a:t>9/23/2025</a:t>
             </a:fld>
             <a:endParaRPr lang="en-US"/>
           </a:p>
@@ -3767,7 +4495,7 @@
           <a:p>
             <a:fld id="{4D8F0038-C403-4E4E-A358-F4B6321C12F5}" type="datetime1">
               <a:rPr lang="en-US" smtClean="0"/>
-              <a:t>9/22/2025</a:t>
+              <a:t>9/23/2025</a:t>
             </a:fld>
             <a:endParaRPr lang="en-US"/>
           </a:p>
@@ -3891,7 +4619,7 @@
           <a:p>
             <a:fld id="{28152514-E107-4B51-A0E4-6CCBE2731D63}" type="datetime1">
               <a:rPr lang="en-US" smtClean="0"/>
-              <a:t>9/22/2025</a:t>
+              <a:t>9/23/2025</a:t>
             </a:fld>
             <a:endParaRPr lang="en-US"/>
           </a:p>
@@ -3987,7 +4715,7 @@
           <a:p>
             <a:fld id="{D075C0F4-646D-457B-9990-7D4E2FD4A597}" type="datetime1">
               <a:rPr lang="en-US" smtClean="0"/>
-              <a:t>9/22/2025</a:t>
+              <a:t>9/23/2025</a:t>
             </a:fld>
             <a:endParaRPr lang="en-US"/>
           </a:p>
@@ -4365,7 +5093,7 @@
           <a:p>
             <a:fld id="{8E4477A8-A506-4192-A810-B96D85416BE8}" type="datetime1">
               <a:rPr lang="en-US" smtClean="0"/>
-              <a:t>9/22/2025</a:t>
+              <a:t>9/23/2025</a:t>
             </a:fld>
             <a:endParaRPr lang="en-US"/>
           </a:p>
@@ -4574,7 +5302,7 @@
           <a:p>
             <a:fld id="{DFA16EE0-F357-46ED-94FA-906C52536BC8}" type="datetime1">
               <a:rPr lang="en-US" smtClean="0"/>
-              <a:t>9/22/2025</a:t>
+              <a:t>9/23/2025</a:t>
             </a:fld>
             <a:endParaRPr lang="en-US"/>
           </a:p>
@@ -4857,7 +5585,7 @@
           <a:p>
             <a:fld id="{C8901744-7364-4EA9-A9E9-43D8A126DBDD}" type="datetime1">
               <a:rPr lang="en-US" smtClean="0"/>
-              <a:t>9/22/2025</a:t>
+              <a:t>9/23/2025</a:t>
             </a:fld>
             <a:endParaRPr lang="en-US"/>
           </a:p>
@@ -5049,7 +5777,7 @@
           <a:p>
             <a:fld id="{0C8992A1-5616-4927-9B49-E60372E9FC72}" type="datetime1">
               <a:rPr lang="en-US" smtClean="0"/>
-              <a:t>9/22/2025</a:t>
+              <a:t>9/23/2025</a:t>
             </a:fld>
             <a:endParaRPr lang="en-US"/>
           </a:p>
@@ -5412,7 +6140,7 @@
           <a:p>
             <a:fld id="{A74DECA2-35DB-4F3A-8A04-28A5742D3AB4}" type="datetime1">
               <a:rPr lang="en-US" smtClean="0"/>
-              <a:t>9/22/2025</a:t>
+              <a:t>9/23/2025</a:t>
             </a:fld>
             <a:endParaRPr lang="en-US"/>
           </a:p>
@@ -5724,7 +6452,7 @@
           <a:p>
             <a:fld id="{562C3EF4-AD61-48A1-B51C-86BBC26A07EE}" type="datetime1">
               <a:rPr lang="en-US" smtClean="0"/>
-              <a:t>9/22/2025</a:t>
+              <a:t>9/23/2025</a:t>
             </a:fld>
             <a:endParaRPr lang="en-US"/>
           </a:p>
@@ -5923,7 +6651,7 @@
           <a:p>
             <a:fld id="{BB3E9FF5-A3A3-421D-9FE4-C97ACA9B4B66}" type="datetime1">
               <a:rPr lang="en-US" smtClean="0"/>
-              <a:t>9/22/2025</a:t>
+              <a:t>9/23/2025</a:t>
             </a:fld>
             <a:endParaRPr lang="en-US"/>
           </a:p>
@@ -6236,7 +6964,7 @@
           <a:p>
             <a:fld id="{36E74F4B-9A6E-4B50-BE3E-090D5038F3B5}" type="datetime1">
               <a:rPr lang="en-US" smtClean="0"/>
-              <a:t>9/22/2025</a:t>
+              <a:t>9/23/2025</a:t>
             </a:fld>
             <a:endParaRPr lang="en-US"/>
           </a:p>
@@ -6490,7 +7218,7 @@
           <a:p>
             <a:fld id="{B009AE4F-ECA9-4391-85A0-0BDC121BC912}" type="datetime1">
               <a:rPr lang="en-US" smtClean="0"/>
-              <a:t>9/22/2025</a:t>
+              <a:t>9/23/2025</a:t>
             </a:fld>
             <a:endParaRPr lang="en-US"/>
           </a:p>
@@ -6913,7 +7641,7 @@
           <a:p>
             <a:fld id="{4D8F0038-C403-4E4E-A358-F4B6321C12F5}" type="datetime1">
               <a:rPr lang="en-US" smtClean="0"/>
-              <a:t>9/22/2025</a:t>
+              <a:t>9/23/2025</a:t>
             </a:fld>
             <a:endParaRPr lang="en-US"/>
           </a:p>
@@ -7037,7 +7765,7 @@
           <a:p>
             <a:fld id="{28152514-E107-4B51-A0E4-6CCBE2731D63}" type="datetime1">
               <a:rPr lang="en-US" smtClean="0"/>
-              <a:t>9/22/2025</a:t>
+              <a:t>9/23/2025</a:t>
             </a:fld>
             <a:endParaRPr lang="en-US"/>
           </a:p>
@@ -7133,7 +7861,7 @@
           <a:p>
             <a:fld id="{D075C0F4-646D-457B-9990-7D4E2FD4A597}" type="datetime1">
               <a:rPr lang="en-US" smtClean="0"/>
-              <a:t>9/22/2025</a:t>
+              <a:t>9/23/2025</a:t>
             </a:fld>
             <a:endParaRPr lang="en-US"/>
           </a:p>
@@ -7434,7 +8162,7 @@
           <a:p>
             <a:fld id="{70A555F4-0623-4308-89A4-2EF3C67F970E}" type="datetime1">
               <a:rPr lang="en-US" smtClean="0"/>
-              <a:t>9/22/2025</a:t>
+              <a:t>9/23/2025</a:t>
             </a:fld>
             <a:endParaRPr lang="en-US"/>
           </a:p>
@@ -7824,7 +8552,7 @@
           <a:p>
             <a:fld id="{8E4477A8-A506-4192-A810-B96D85416BE8}" type="datetime1">
               <a:rPr lang="en-US" smtClean="0"/>
-              <a:t>9/22/2025</a:t>
+              <a:t>9/23/2025</a:t>
             </a:fld>
             <a:endParaRPr lang="en-US"/>
           </a:p>
@@ -8117,7 +8845,7 @@
           <a:p>
             <a:fld id="{C8901744-7364-4EA9-A9E9-43D8A126DBDD}" type="datetime1">
               <a:rPr lang="en-US" smtClean="0"/>
-              <a:t>9/22/2025</a:t>
+              <a:t>9/23/2025</a:t>
             </a:fld>
             <a:endParaRPr lang="en-US"/>
           </a:p>
@@ -8309,7 +9037,7 @@
           <a:p>
             <a:fld id="{0C8992A1-5616-4927-9B49-E60372E9FC72}" type="datetime1">
               <a:rPr lang="en-US" smtClean="0"/>
-              <a:t>9/22/2025</a:t>
+              <a:t>9/23/2025</a:t>
             </a:fld>
             <a:endParaRPr lang="en-US"/>
           </a:p>
@@ -8672,7 +9400,7 @@
           <a:p>
             <a:fld id="{A74DECA2-35DB-4F3A-8A04-28A5742D3AB4}" type="datetime1">
               <a:rPr lang="en-US" smtClean="0"/>
-              <a:t>9/22/2025</a:t>
+              <a:t>9/23/2025</a:t>
             </a:fld>
             <a:endParaRPr lang="en-US"/>
           </a:p>
@@ -8984,7 +9712,7 @@
           <a:p>
             <a:fld id="{ED291B17-9318-49DB-B28B-6E5994AE9581}" type="datetime1">
               <a:rPr lang="en-US" smtClean="0"/>
-              <a:t>9/22/2025</a:t>
+              <a:t>9/23/2025</a:t>
             </a:fld>
             <a:endParaRPr lang="en-US" dirty="0"/>
           </a:p>
@@ -9182,7 +9910,7 @@
           <a:p>
             <a:fld id="{78DD82B9-B8EE-4375-B6FF-88FA6ABB15D9}" type="datetime1">
               <a:rPr lang="en-US" smtClean="0"/>
-              <a:t>9/22/2025</a:t>
+              <a:t>9/23/2025</a:t>
             </a:fld>
             <a:endParaRPr lang="en-US" dirty="0"/>
           </a:p>
@@ -9494,7 +10222,7 @@
           <a:p>
             <a:fld id="{B2497495-0637-405E-AE64-5CC7506D51F5}" type="datetime1">
               <a:rPr lang="en-US" smtClean="0"/>
-              <a:t>9/22/2025</a:t>
+              <a:t>9/23/2025</a:t>
             </a:fld>
             <a:endParaRPr lang="en-US" dirty="0"/>
           </a:p>
@@ -9747,7 +10475,7 @@
           <a:p>
             <a:fld id="{7BFFD690-9426-415D-8B65-26881E07B2D4}" type="datetime1">
               <a:rPr lang="en-US" smtClean="0"/>
-              <a:t>9/22/2025</a:t>
+              <a:t>9/23/2025</a:t>
             </a:fld>
             <a:endParaRPr lang="en-US" dirty="0"/>
           </a:p>
@@ -10169,7 +10897,7 @@
           <a:p>
             <a:fld id="{04C4989A-474C-40DE-95B9-011C28B71673}" type="datetime1">
               <a:rPr lang="en-US" smtClean="0"/>
-              <a:t>9/22/2025</a:t>
+              <a:t>9/23/2025</a:t>
             </a:fld>
             <a:endParaRPr lang="en-US" dirty="0"/>
           </a:p>
@@ -10292,7 +11020,7 @@
           <a:p>
             <a:fld id="{5DB4ED54-5B5E-4A04-93D3-5772E3CE3818}" type="datetime1">
               <a:rPr lang="en-US" smtClean="0"/>
-              <a:t>9/22/2025</a:t>
+              <a:t>9/23/2025</a:t>
             </a:fld>
             <a:endParaRPr lang="en-US" dirty="0"/>
           </a:p>
@@ -10533,7 +11261,7 @@
           <a:p>
             <a:fld id="{6C2C25ED-83A1-4E27-9E45-CB4ECD4F0BBC}" type="datetime1">
               <a:rPr lang="en-US" smtClean="0"/>
-              <a:t>9/22/2025</a:t>
+              <a:t>9/23/2025</a:t>
             </a:fld>
             <a:endParaRPr lang="en-US"/>
           </a:p>
@@ -10629,7 +11357,7 @@
           <a:p>
             <a:fld id="{4EDE50D6-574B-40AF-946F-D52A04ADE379}" type="datetime1">
               <a:rPr lang="en-US" smtClean="0"/>
-              <a:t>9/22/2025</a:t>
+              <a:t>9/23/2025</a:t>
             </a:fld>
             <a:endParaRPr lang="en-US" dirty="0"/>
           </a:p>
@@ -11006,7 +11734,7 @@
           <a:p>
             <a:fld id="{D82884F1-FFEA-405F-9602-3DCA865EDA4E}" type="datetime1">
               <a:rPr lang="en-US" smtClean="0"/>
-              <a:t>9/22/2025</a:t>
+              <a:t>9/23/2025</a:t>
             </a:fld>
             <a:endParaRPr lang="en-US" dirty="0"/>
           </a:p>
@@ -11299,7 +12027,7 @@
           <a:p>
             <a:fld id="{7E18DB4A-8810-4A10-AD5C-D5E2C667F5B3}" type="datetime1">
               <a:rPr lang="en-US" smtClean="0"/>
-              <a:t>9/22/2025</a:t>
+              <a:t>9/23/2025</a:t>
             </a:fld>
             <a:endParaRPr lang="en-US" dirty="0"/>
           </a:p>
@@ -11491,7 +12219,7 @@
           <a:p>
             <a:fld id="{2CED4963-E985-44C4-B8C4-FDD613B7C2F8}" type="datetime1">
               <a:rPr lang="en-US" smtClean="0"/>
-              <a:t>9/22/2025</a:t>
+              <a:t>9/23/2025</a:t>
             </a:fld>
             <a:endParaRPr lang="en-US" dirty="0"/>
           </a:p>
@@ -11853,7 +12581,7 @@
           <a:p>
             <a:fld id="{ED291B17-9318-49DB-B28B-6E5994AE9581}" type="datetime1">
               <a:rPr lang="en-US" smtClean="0"/>
-              <a:t>9/22/2025</a:t>
+              <a:t>9/23/2025</a:t>
             </a:fld>
             <a:endParaRPr lang="en-US" dirty="0"/>
           </a:p>
@@ -12340,7 +13068,7 @@
           <a:p>
             <a:fld id="{ED291B17-9318-49DB-B28B-6E5994AE9581}" type="datetime1">
               <a:rPr lang="en-US" smtClean="0"/>
-              <a:t>9/22/2025</a:t>
+              <a:t>9/23/2025</a:t>
             </a:fld>
             <a:endParaRPr lang="en-US" dirty="0"/>
           </a:p>
@@ -12536,7 +13264,7 @@
           <a:p>
             <a:fld id="{78DD82B9-B8EE-4375-B6FF-88FA6ABB15D9}" type="datetime1">
               <a:rPr lang="en-US" smtClean="0"/>
-              <a:t>9/22/2025</a:t>
+              <a:t>9/23/2025</a:t>
             </a:fld>
             <a:endParaRPr lang="en-US" dirty="0"/>
           </a:p>
@@ -12847,7 +13575,7 @@
           <a:p>
             <a:fld id="{B2497495-0637-405E-AE64-5CC7506D51F5}" type="datetime1">
               <a:rPr lang="en-US" smtClean="0"/>
-              <a:t>9/22/2025</a:t>
+              <a:t>9/23/2025</a:t>
             </a:fld>
             <a:endParaRPr lang="en-US" dirty="0"/>
           </a:p>
@@ -13098,7 +13826,7 @@
           <a:p>
             <a:fld id="{7BFFD690-9426-415D-8B65-26881E07B2D4}" type="datetime1">
               <a:rPr lang="en-US" smtClean="0"/>
-              <a:t>9/22/2025</a:t>
+              <a:t>9/23/2025</a:t>
             </a:fld>
             <a:endParaRPr lang="en-US" dirty="0"/>
           </a:p>
@@ -13520,7 +14248,7 @@
           <a:p>
             <a:fld id="{FBC24F89-8A4A-4667-ACA3-D44E384795DF}" type="datetime1">
               <a:rPr lang="en-US" smtClean="0"/>
-              <a:t>9/22/2025</a:t>
+              <a:t>9/23/2025</a:t>
             </a:fld>
             <a:endParaRPr lang="en-US"/>
           </a:p>
@@ -13941,7 +14669,7 @@
           <a:p>
             <a:fld id="{04C4989A-474C-40DE-95B9-011C28B71673}" type="datetime1">
               <a:rPr lang="en-US" smtClean="0"/>
-              <a:t>9/22/2025</a:t>
+              <a:t>9/23/2025</a:t>
             </a:fld>
             <a:endParaRPr lang="en-US" dirty="0"/>
           </a:p>
@@ -14064,7 +14792,7 @@
           <a:p>
             <a:fld id="{5DB4ED54-5B5E-4A04-93D3-5772E3CE3818}" type="datetime1">
               <a:rPr lang="en-US" smtClean="0"/>
-              <a:t>9/22/2025</a:t>
+              <a:t>9/23/2025</a:t>
             </a:fld>
             <a:endParaRPr lang="en-US" dirty="0"/>
           </a:p>
@@ -14159,7 +14887,7 @@
           <a:p>
             <a:fld id="{4EDE50D6-574B-40AF-946F-D52A04ADE379}" type="datetime1">
               <a:rPr lang="en-US" smtClean="0"/>
-              <a:t>9/22/2025</a:t>
+              <a:t>9/23/2025</a:t>
             </a:fld>
             <a:endParaRPr lang="en-US" dirty="0"/>
           </a:p>
@@ -14535,7 +15263,7 @@
           <a:p>
             <a:fld id="{D82884F1-FFEA-405F-9602-3DCA865EDA4E}" type="datetime1">
               <a:rPr lang="en-US" smtClean="0"/>
-              <a:t>9/22/2025</a:t>
+              <a:t>9/23/2025</a:t>
             </a:fld>
             <a:endParaRPr lang="en-US" dirty="0"/>
           </a:p>
@@ -14828,7 +15556,7 @@
           <a:p>
             <a:fld id="{7E18DB4A-8810-4A10-AD5C-D5E2C667F5B3}" type="datetime1">
               <a:rPr lang="en-US" smtClean="0"/>
-              <a:t>9/22/2025</a:t>
+              <a:t>9/23/2025</a:t>
             </a:fld>
             <a:endParaRPr lang="en-US" dirty="0"/>
           </a:p>
@@ -15020,7 +15748,7 @@
           <a:p>
             <a:fld id="{2CED4963-E985-44C4-B8C4-FDD613B7C2F8}" type="datetime1">
               <a:rPr lang="en-US" smtClean="0"/>
-              <a:t>9/22/2025</a:t>
+              <a:t>9/23/2025</a:t>
             </a:fld>
             <a:endParaRPr lang="en-US" dirty="0"/>
           </a:p>
@@ -15382,7 +16110,7 @@
           <a:p>
             <a:fld id="{ED291B17-9318-49DB-B28B-6E5994AE9581}" type="datetime1">
               <a:rPr lang="en-US" smtClean="0"/>
-              <a:t>9/22/2025</a:t>
+              <a:t>9/23/2025</a:t>
             </a:fld>
             <a:endParaRPr lang="en-US" dirty="0"/>
           </a:p>
@@ -15693,7 +16421,7 @@
           <a:p>
             <a:fld id="{ED291B17-9318-49DB-B28B-6E5994AE9581}" type="datetime1">
               <a:rPr lang="en-US" smtClean="0"/>
-              <a:t>9/22/2025</a:t>
+              <a:t>9/23/2025</a:t>
             </a:fld>
             <a:endParaRPr lang="en-US" dirty="0"/>
           </a:p>
@@ -15891,7 +16619,7 @@
           <a:p>
             <a:fld id="{78DD82B9-B8EE-4375-B6FF-88FA6ABB15D9}" type="datetime1">
               <a:rPr lang="en-US" smtClean="0"/>
-              <a:t>9/22/2025</a:t>
+              <a:t>9/23/2025</a:t>
             </a:fld>
             <a:endParaRPr lang="en-US" dirty="0"/>
           </a:p>
@@ -16203,7 +16931,7 @@
           <a:p>
             <a:fld id="{B2497495-0637-405E-AE64-5CC7506D51F5}" type="datetime1">
               <a:rPr lang="en-US" smtClean="0"/>
-              <a:t>9/22/2025</a:t>
+              <a:t>9/23/2025</a:t>
             </a:fld>
             <a:endParaRPr lang="en-US" dirty="0"/>
           </a:p>
@@ -16338,7 +17066,7 @@
           <a:p>
             <a:fld id="{8A613FE4-A8B1-43D2-900A-0789A75D843A}" type="datetime1">
               <a:rPr lang="en-US" smtClean="0"/>
-              <a:t>9/22/2025</a:t>
+              <a:t>9/23/2025</a:t>
             </a:fld>
             <a:endParaRPr lang="en-US"/>
           </a:p>
@@ -16580,7 +17308,7 @@
           <a:p>
             <a:fld id="{7BFFD690-9426-415D-8B65-26881E07B2D4}" type="datetime1">
               <a:rPr lang="en-US" smtClean="0"/>
-              <a:t>9/22/2025</a:t>
+              <a:t>9/23/2025</a:t>
             </a:fld>
             <a:endParaRPr lang="en-US" dirty="0"/>
           </a:p>
@@ -17002,7 +17730,7 @@
           <a:p>
             <a:fld id="{04C4989A-474C-40DE-95B9-011C28B71673}" type="datetime1">
               <a:rPr lang="en-US" smtClean="0"/>
-              <a:t>9/22/2025</a:t>
+              <a:t>9/23/2025</a:t>
             </a:fld>
             <a:endParaRPr lang="en-US" dirty="0"/>
           </a:p>
@@ -17125,7 +17853,7 @@
           <a:p>
             <a:fld id="{5DB4ED54-5B5E-4A04-93D3-5772E3CE3818}" type="datetime1">
               <a:rPr lang="en-US" smtClean="0"/>
-              <a:t>9/22/2025</a:t>
+              <a:t>9/23/2025</a:t>
             </a:fld>
             <a:endParaRPr lang="en-US" dirty="0"/>
           </a:p>
@@ -17220,7 +17948,7 @@
           <a:p>
             <a:fld id="{4EDE50D6-574B-40AF-946F-D52A04ADE379}" type="datetime1">
               <a:rPr lang="en-US" smtClean="0"/>
-              <a:t>9/22/2025</a:t>
+              <a:t>9/23/2025</a:t>
             </a:fld>
             <a:endParaRPr lang="en-US" dirty="0"/>
           </a:p>
@@ -17597,7 +18325,7 @@
           <a:p>
             <a:fld id="{D82884F1-FFEA-405F-9602-3DCA865EDA4E}" type="datetime1">
               <a:rPr lang="en-US" smtClean="0"/>
-              <a:t>9/22/2025</a:t>
+              <a:t>9/23/2025</a:t>
             </a:fld>
             <a:endParaRPr lang="en-US" dirty="0"/>
           </a:p>
@@ -17890,7 +18618,7 @@
           <a:p>
             <a:fld id="{7E18DB4A-8810-4A10-AD5C-D5E2C667F5B3}" type="datetime1">
               <a:rPr lang="en-US" smtClean="0"/>
-              <a:t>9/22/2025</a:t>
+              <a:t>9/23/2025</a:t>
             </a:fld>
             <a:endParaRPr lang="en-US" dirty="0"/>
           </a:p>
@@ -18082,7 +18810,7 @@
           <a:p>
             <a:fld id="{2CED4963-E985-44C4-B8C4-FDD613B7C2F8}" type="datetime1">
               <a:rPr lang="en-US" smtClean="0"/>
-              <a:t>9/22/2025</a:t>
+              <a:t>9/23/2025</a:t>
             </a:fld>
             <a:endParaRPr lang="en-US" dirty="0"/>
           </a:p>
@@ -18444,7 +19172,7 @@
           <a:p>
             <a:fld id="{ED291B17-9318-49DB-B28B-6E5994AE9581}" type="datetime1">
               <a:rPr lang="en-US" smtClean="0"/>
-              <a:t>9/22/2025</a:t>
+              <a:t>9/23/2025</a:t>
             </a:fld>
             <a:endParaRPr lang="en-US" dirty="0"/>
           </a:p>
@@ -18686,6 +19414,247 @@
 </p:sldLayout>
 </file>
 
+<file path=ppt/slideLayouts/slideLayout69.xml><?xml version="1.0" encoding="utf-8"?>
+<p:sldLayout xmlns:a="http://schemas.openxmlformats.org/drawingml/2006/main" xmlns:r="http://schemas.openxmlformats.org/officeDocument/2006/relationships" xmlns:p="http://schemas.openxmlformats.org/presentationml/2006/main" type="title" preserve="1">
+  <p:cSld name="Title Slide">
+    <p:spTree>
+      <p:nvGrpSpPr>
+        <p:cNvPr id="1" name=""/>
+        <p:cNvGrpSpPr/>
+        <p:nvPr/>
+      </p:nvGrpSpPr>
+      <p:grpSpPr>
+        <a:xfrm>
+          <a:off x="0" y="0"/>
+          <a:ext cx="0" cy="0"/>
+          <a:chOff x="0" y="0"/>
+          <a:chExt cx="0" cy="0"/>
+        </a:xfrm>
+      </p:grpSpPr>
+      <p:sp>
+        <p:nvSpPr>
+          <p:cNvPr id="2" name="Title 1"/>
+          <p:cNvSpPr>
+            <a:spLocks noGrp="1"/>
+          </p:cNvSpPr>
+          <p:nvPr>
+            <p:ph type="ctrTitle"/>
+          </p:nvPr>
+        </p:nvSpPr>
+        <p:spPr>
+          <a:xfrm>
+            <a:off x="617220" y="1597820"/>
+            <a:ext cx="6995160" cy="1102519"/>
+          </a:xfrm>
+        </p:spPr>
+        <p:txBody>
+          <a:bodyPr/>
+          <a:lstStyle/>
+          <a:p>
+            <a:r>
+              <a:rPr lang="en-US"/>
+              <a:t>Click to edit Master title style</a:t>
+            </a:r>
+          </a:p>
+        </p:txBody>
+      </p:sp>
+      <p:sp>
+        <p:nvSpPr>
+          <p:cNvPr id="3" name="Subtitle 2"/>
+          <p:cNvSpPr>
+            <a:spLocks noGrp="1"/>
+          </p:cNvSpPr>
+          <p:nvPr>
+            <p:ph type="subTitle" idx="1"/>
+          </p:nvPr>
+        </p:nvSpPr>
+        <p:spPr>
+          <a:xfrm>
+            <a:off x="1234440" y="2914650"/>
+            <a:ext cx="5760720" cy="1314450"/>
+          </a:xfrm>
+        </p:spPr>
+        <p:txBody>
+          <a:bodyPr/>
+          <a:lstStyle>
+            <a:lvl1pPr marL="0" indent="0" algn="ctr">
+              <a:buNone/>
+              <a:defRPr>
+                <a:solidFill>
+                  <a:schemeClr val="tx1">
+                    <a:tint val="75000"/>
+                  </a:schemeClr>
+                </a:solidFill>
+              </a:defRPr>
+            </a:lvl1pPr>
+            <a:lvl2pPr marL="411480" indent="0" algn="ctr">
+              <a:buNone/>
+              <a:defRPr>
+                <a:solidFill>
+                  <a:schemeClr val="tx1">
+                    <a:tint val="75000"/>
+                  </a:schemeClr>
+                </a:solidFill>
+              </a:defRPr>
+            </a:lvl2pPr>
+            <a:lvl3pPr marL="822960" indent="0" algn="ctr">
+              <a:buNone/>
+              <a:defRPr>
+                <a:solidFill>
+                  <a:schemeClr val="tx1">
+                    <a:tint val="75000"/>
+                  </a:schemeClr>
+                </a:solidFill>
+              </a:defRPr>
+            </a:lvl3pPr>
+            <a:lvl4pPr marL="1234440" indent="0" algn="ctr">
+              <a:buNone/>
+              <a:defRPr>
+                <a:solidFill>
+                  <a:schemeClr val="tx1">
+                    <a:tint val="75000"/>
+                  </a:schemeClr>
+                </a:solidFill>
+              </a:defRPr>
+            </a:lvl4pPr>
+            <a:lvl5pPr marL="1645920" indent="0" algn="ctr">
+              <a:buNone/>
+              <a:defRPr>
+                <a:solidFill>
+                  <a:schemeClr val="tx1">
+                    <a:tint val="75000"/>
+                  </a:schemeClr>
+                </a:solidFill>
+              </a:defRPr>
+            </a:lvl5pPr>
+            <a:lvl6pPr marL="2057400" indent="0" algn="ctr">
+              <a:buNone/>
+              <a:defRPr>
+                <a:solidFill>
+                  <a:schemeClr val="tx1">
+                    <a:tint val="75000"/>
+                  </a:schemeClr>
+                </a:solidFill>
+              </a:defRPr>
+            </a:lvl6pPr>
+            <a:lvl7pPr marL="2468880" indent="0" algn="ctr">
+              <a:buNone/>
+              <a:defRPr>
+                <a:solidFill>
+                  <a:schemeClr val="tx1">
+                    <a:tint val="75000"/>
+                  </a:schemeClr>
+                </a:solidFill>
+              </a:defRPr>
+            </a:lvl7pPr>
+            <a:lvl8pPr marL="2880360" indent="0" algn="ctr">
+              <a:buNone/>
+              <a:defRPr>
+                <a:solidFill>
+                  <a:schemeClr val="tx1">
+                    <a:tint val="75000"/>
+                  </a:schemeClr>
+                </a:solidFill>
+              </a:defRPr>
+            </a:lvl8pPr>
+            <a:lvl9pPr marL="3291840" indent="0" algn="ctr">
+              <a:buNone/>
+              <a:defRPr>
+                <a:solidFill>
+                  <a:schemeClr val="tx1">
+                    <a:tint val="75000"/>
+                  </a:schemeClr>
+                </a:solidFill>
+              </a:defRPr>
+            </a:lvl9pPr>
+          </a:lstStyle>
+          <a:p>
+            <a:r>
+              <a:rPr lang="en-US"/>
+              <a:t>Click to edit Master subtitle style</a:t>
+            </a:r>
+          </a:p>
+        </p:txBody>
+      </p:sp>
+      <p:sp>
+        <p:nvSpPr>
+          <p:cNvPr id="4" name="Date Placeholder 3"/>
+          <p:cNvSpPr>
+            <a:spLocks noGrp="1"/>
+          </p:cNvSpPr>
+          <p:nvPr>
+            <p:ph type="dt" sz="half" idx="10"/>
+          </p:nvPr>
+        </p:nvSpPr>
+        <p:spPr/>
+        <p:txBody>
+          <a:bodyPr/>
+          <a:lstStyle/>
+          <a:p>
+            <a:fld id="{7D00F9BB-97E2-4F5E-A9A6-FAC40A4E9E52}" type="datetime1">
+              <a:rPr lang="en-US" smtClean="0"/>
+              <a:t>9/23/2025</a:t>
+            </a:fld>
+            <a:endParaRPr lang="en-US"/>
+          </a:p>
+        </p:txBody>
+      </p:sp>
+      <p:sp>
+        <p:nvSpPr>
+          <p:cNvPr id="5" name="Footer Placeholder 4"/>
+          <p:cNvSpPr>
+            <a:spLocks noGrp="1"/>
+          </p:cNvSpPr>
+          <p:nvPr>
+            <p:ph type="ftr" sz="quarter" idx="11"/>
+          </p:nvPr>
+        </p:nvSpPr>
+        <p:spPr/>
+        <p:txBody>
+          <a:bodyPr/>
+          <a:lstStyle/>
+          <a:p>
+            <a:endParaRPr lang="en-US"/>
+          </a:p>
+        </p:txBody>
+      </p:sp>
+      <p:sp>
+        <p:nvSpPr>
+          <p:cNvPr id="6" name="Slide Number Placeholder 5"/>
+          <p:cNvSpPr>
+            <a:spLocks noGrp="1"/>
+          </p:cNvSpPr>
+          <p:nvPr>
+            <p:ph type="sldNum" sz="quarter" idx="12"/>
+          </p:nvPr>
+        </p:nvSpPr>
+        <p:spPr/>
+        <p:txBody>
+          <a:bodyPr/>
+          <a:lstStyle/>
+          <a:p>
+            <a:fld id="{127DDC20-79C9-9647-820E-6D40A3D210C3}" type="slidenum">
+              <a:rPr lang="en-US" smtClean="0"/>
+              <a:pPr/>
+              <a:t>‹#›</a:t>
+            </a:fld>
+            <a:endParaRPr lang="en-US"/>
+          </a:p>
+        </p:txBody>
+      </p:sp>
+    </p:spTree>
+    <p:extLst>
+      <p:ext uri="{BB962C8B-B14F-4D97-AF65-F5344CB8AC3E}">
+        <p14:creationId xmlns:p14="http://schemas.microsoft.com/office/powerpoint/2010/main" val="1307944737"/>
+      </p:ext>
+    </p:extLst>
+  </p:cSld>
+  <p:clrMapOvr>
+    <a:masterClrMapping/>
+  </p:clrMapOvr>
+</p:sldLayout>
+</file>
+
 <file path=ppt/slideLayouts/slideLayout7.xml><?xml version="1.0" encoding="utf-8"?>
 <p:sldLayout xmlns:a="http://schemas.openxmlformats.org/drawingml/2006/main" xmlns:r="http://schemas.openxmlformats.org/officeDocument/2006/relationships" xmlns:p="http://schemas.openxmlformats.org/presentationml/2006/main" type="blank" preserve="1">
   <p:cSld name="Blank">
@@ -18720,7 +19689,7 @@
           <a:p>
             <a:fld id="{F5E2B1E2-CA70-4E33-B1AB-E13FFAB976F0}" type="datetime1">
               <a:rPr lang="en-US" smtClean="0"/>
-              <a:t>9/22/2025</a:t>
+              <a:t>9/23/2025</a:t>
             </a:fld>
             <a:endParaRPr lang="en-US"/>
           </a:p>
@@ -18773,6 +19742,2218 @@
     <p:extLst>
       <p:ext uri="{BB962C8B-B14F-4D97-AF65-F5344CB8AC3E}">
         <p14:creationId xmlns:p14="http://schemas.microsoft.com/office/powerpoint/2010/main" val="1400861420"/>
+      </p:ext>
+    </p:extLst>
+  </p:cSld>
+  <p:clrMapOvr>
+    <a:masterClrMapping/>
+  </p:clrMapOvr>
+</p:sldLayout>
+</file>
+
+<file path=ppt/slideLayouts/slideLayout70.xml><?xml version="1.0" encoding="utf-8"?>
+<p:sldLayout xmlns:a="http://schemas.openxmlformats.org/drawingml/2006/main" xmlns:r="http://schemas.openxmlformats.org/officeDocument/2006/relationships" xmlns:p="http://schemas.openxmlformats.org/presentationml/2006/main" type="obj" preserve="1">
+  <p:cSld name="Title and Content">
+    <p:spTree>
+      <p:nvGrpSpPr>
+        <p:cNvPr id="1" name=""/>
+        <p:cNvGrpSpPr/>
+        <p:nvPr/>
+      </p:nvGrpSpPr>
+      <p:grpSpPr>
+        <a:xfrm>
+          <a:off x="0" y="0"/>
+          <a:ext cx="0" cy="0"/>
+          <a:chOff x="0" y="0"/>
+          <a:chExt cx="0" cy="0"/>
+        </a:xfrm>
+      </p:grpSpPr>
+      <p:sp>
+        <p:nvSpPr>
+          <p:cNvPr id="2" name="Title 1"/>
+          <p:cNvSpPr>
+            <a:spLocks noGrp="1"/>
+          </p:cNvSpPr>
+          <p:nvPr>
+            <p:ph type="title"/>
+          </p:nvPr>
+        </p:nvSpPr>
+        <p:spPr/>
+        <p:txBody>
+          <a:bodyPr/>
+          <a:lstStyle/>
+          <a:p>
+            <a:r>
+              <a:rPr lang="en-US"/>
+              <a:t>Click to edit Master title style</a:t>
+            </a:r>
+          </a:p>
+        </p:txBody>
+      </p:sp>
+      <p:sp>
+        <p:nvSpPr>
+          <p:cNvPr id="3" name="Content Placeholder 2"/>
+          <p:cNvSpPr>
+            <a:spLocks noGrp="1"/>
+          </p:cNvSpPr>
+          <p:nvPr>
+            <p:ph idx="1"/>
+          </p:nvPr>
+        </p:nvSpPr>
+        <p:spPr/>
+        <p:txBody>
+          <a:bodyPr/>
+          <a:lstStyle/>
+          <a:p>
+            <a:pPr lvl="0"/>
+            <a:r>
+              <a:rPr lang="en-US"/>
+              <a:t>Click to edit Master text styles</a:t>
+            </a:r>
+          </a:p>
+          <a:p>
+            <a:pPr lvl="1"/>
+            <a:r>
+              <a:rPr lang="en-US"/>
+              <a:t>Second level</a:t>
+            </a:r>
+          </a:p>
+          <a:p>
+            <a:pPr lvl="2"/>
+            <a:r>
+              <a:rPr lang="en-US"/>
+              <a:t>Third level</a:t>
+            </a:r>
+          </a:p>
+          <a:p>
+            <a:pPr lvl="3"/>
+            <a:r>
+              <a:rPr lang="en-US"/>
+              <a:t>Fourth level</a:t>
+            </a:r>
+          </a:p>
+          <a:p>
+            <a:pPr lvl="4"/>
+            <a:r>
+              <a:rPr lang="en-US"/>
+              <a:t>Fifth level</a:t>
+            </a:r>
+          </a:p>
+        </p:txBody>
+      </p:sp>
+      <p:sp>
+        <p:nvSpPr>
+          <p:cNvPr id="4" name="Date Placeholder 3"/>
+          <p:cNvSpPr>
+            <a:spLocks noGrp="1"/>
+          </p:cNvSpPr>
+          <p:nvPr>
+            <p:ph type="dt" sz="half" idx="10"/>
+          </p:nvPr>
+        </p:nvSpPr>
+        <p:spPr/>
+        <p:txBody>
+          <a:bodyPr/>
+          <a:lstStyle/>
+          <a:p>
+            <a:fld id="{DFA16EE0-F357-46ED-94FA-906C52536BC8}" type="datetime1">
+              <a:rPr lang="en-US" smtClean="0"/>
+              <a:t>9/23/2025</a:t>
+            </a:fld>
+            <a:endParaRPr lang="en-US"/>
+          </a:p>
+        </p:txBody>
+      </p:sp>
+      <p:sp>
+        <p:nvSpPr>
+          <p:cNvPr id="5" name="Footer Placeholder 4"/>
+          <p:cNvSpPr>
+            <a:spLocks noGrp="1"/>
+          </p:cNvSpPr>
+          <p:nvPr>
+            <p:ph type="ftr" sz="quarter" idx="11"/>
+          </p:nvPr>
+        </p:nvSpPr>
+        <p:spPr/>
+        <p:txBody>
+          <a:bodyPr/>
+          <a:lstStyle/>
+          <a:p>
+            <a:endParaRPr lang="en-US"/>
+          </a:p>
+        </p:txBody>
+      </p:sp>
+      <p:sp>
+        <p:nvSpPr>
+          <p:cNvPr id="6" name="Slide Number Placeholder 5"/>
+          <p:cNvSpPr>
+            <a:spLocks noGrp="1"/>
+          </p:cNvSpPr>
+          <p:nvPr>
+            <p:ph type="sldNum" sz="quarter" idx="12"/>
+          </p:nvPr>
+        </p:nvSpPr>
+        <p:spPr/>
+        <p:txBody>
+          <a:bodyPr/>
+          <a:lstStyle/>
+          <a:p>
+            <a:fld id="{127DDC20-79C9-9647-820E-6D40A3D210C3}" type="slidenum">
+              <a:rPr lang="en-US" smtClean="0"/>
+              <a:pPr/>
+              <a:t>‹#›</a:t>
+            </a:fld>
+            <a:endParaRPr lang="en-US"/>
+          </a:p>
+        </p:txBody>
+      </p:sp>
+    </p:spTree>
+    <p:extLst>
+      <p:ext uri="{BB962C8B-B14F-4D97-AF65-F5344CB8AC3E}">
+        <p14:creationId xmlns:p14="http://schemas.microsoft.com/office/powerpoint/2010/main" val="2074637776"/>
+      </p:ext>
+    </p:extLst>
+  </p:cSld>
+  <p:clrMapOvr>
+    <a:masterClrMapping/>
+  </p:clrMapOvr>
+</p:sldLayout>
+</file>
+
+<file path=ppt/slideLayouts/slideLayout71.xml><?xml version="1.0" encoding="utf-8"?>
+<p:sldLayout xmlns:a="http://schemas.openxmlformats.org/drawingml/2006/main" xmlns:r="http://schemas.openxmlformats.org/officeDocument/2006/relationships" xmlns:p="http://schemas.openxmlformats.org/presentationml/2006/main" type="secHead" preserve="1">
+  <p:cSld name="Section Header">
+    <p:spTree>
+      <p:nvGrpSpPr>
+        <p:cNvPr id="1" name=""/>
+        <p:cNvGrpSpPr/>
+        <p:nvPr/>
+      </p:nvGrpSpPr>
+      <p:grpSpPr>
+        <a:xfrm>
+          <a:off x="0" y="0"/>
+          <a:ext cx="0" cy="0"/>
+          <a:chOff x="0" y="0"/>
+          <a:chExt cx="0" cy="0"/>
+        </a:xfrm>
+      </p:grpSpPr>
+      <p:sp>
+        <p:nvSpPr>
+          <p:cNvPr id="2" name="Title 1"/>
+          <p:cNvSpPr>
+            <a:spLocks noGrp="1"/>
+          </p:cNvSpPr>
+          <p:nvPr>
+            <p:ph type="title"/>
+          </p:nvPr>
+        </p:nvSpPr>
+        <p:spPr>
+          <a:xfrm>
+            <a:off x="650082" y="3305176"/>
+            <a:ext cx="6995160" cy="1021556"/>
+          </a:xfrm>
+        </p:spPr>
+        <p:txBody>
+          <a:bodyPr anchor="t"/>
+          <a:lstStyle>
+            <a:lvl1pPr algn="l">
+              <a:defRPr sz="3600" b="1" cap="all"/>
+            </a:lvl1pPr>
+          </a:lstStyle>
+          <a:p>
+            <a:r>
+              <a:rPr lang="en-US"/>
+              <a:t>Click to edit Master title style</a:t>
+            </a:r>
+          </a:p>
+        </p:txBody>
+      </p:sp>
+      <p:sp>
+        <p:nvSpPr>
+          <p:cNvPr id="3" name="Text Placeholder 2"/>
+          <p:cNvSpPr>
+            <a:spLocks noGrp="1"/>
+          </p:cNvSpPr>
+          <p:nvPr>
+            <p:ph type="body" idx="1"/>
+          </p:nvPr>
+        </p:nvSpPr>
+        <p:spPr>
+          <a:xfrm>
+            <a:off x="650082" y="2180035"/>
+            <a:ext cx="6995160" cy="1125140"/>
+          </a:xfrm>
+        </p:spPr>
+        <p:txBody>
+          <a:bodyPr anchor="b"/>
+          <a:lstStyle>
+            <a:lvl1pPr marL="0" indent="0">
+              <a:buNone/>
+              <a:defRPr sz="1800">
+                <a:solidFill>
+                  <a:schemeClr val="tx1">
+                    <a:tint val="75000"/>
+                  </a:schemeClr>
+                </a:solidFill>
+              </a:defRPr>
+            </a:lvl1pPr>
+            <a:lvl2pPr marL="411480" indent="0">
+              <a:buNone/>
+              <a:defRPr sz="1620">
+                <a:solidFill>
+                  <a:schemeClr val="tx1">
+                    <a:tint val="75000"/>
+                  </a:schemeClr>
+                </a:solidFill>
+              </a:defRPr>
+            </a:lvl2pPr>
+            <a:lvl3pPr marL="822960" indent="0">
+              <a:buNone/>
+              <a:defRPr sz="1440">
+                <a:solidFill>
+                  <a:schemeClr val="tx1">
+                    <a:tint val="75000"/>
+                  </a:schemeClr>
+                </a:solidFill>
+              </a:defRPr>
+            </a:lvl3pPr>
+            <a:lvl4pPr marL="1234440" indent="0">
+              <a:buNone/>
+              <a:defRPr sz="1260">
+                <a:solidFill>
+                  <a:schemeClr val="tx1">
+                    <a:tint val="75000"/>
+                  </a:schemeClr>
+                </a:solidFill>
+              </a:defRPr>
+            </a:lvl4pPr>
+            <a:lvl5pPr marL="1645920" indent="0">
+              <a:buNone/>
+              <a:defRPr sz="1260">
+                <a:solidFill>
+                  <a:schemeClr val="tx1">
+                    <a:tint val="75000"/>
+                  </a:schemeClr>
+                </a:solidFill>
+              </a:defRPr>
+            </a:lvl5pPr>
+            <a:lvl6pPr marL="2057400" indent="0">
+              <a:buNone/>
+              <a:defRPr sz="1260">
+                <a:solidFill>
+                  <a:schemeClr val="tx1">
+                    <a:tint val="75000"/>
+                  </a:schemeClr>
+                </a:solidFill>
+              </a:defRPr>
+            </a:lvl6pPr>
+            <a:lvl7pPr marL="2468880" indent="0">
+              <a:buNone/>
+              <a:defRPr sz="1260">
+                <a:solidFill>
+                  <a:schemeClr val="tx1">
+                    <a:tint val="75000"/>
+                  </a:schemeClr>
+                </a:solidFill>
+              </a:defRPr>
+            </a:lvl7pPr>
+            <a:lvl8pPr marL="2880360" indent="0">
+              <a:buNone/>
+              <a:defRPr sz="1260">
+                <a:solidFill>
+                  <a:schemeClr val="tx1">
+                    <a:tint val="75000"/>
+                  </a:schemeClr>
+                </a:solidFill>
+              </a:defRPr>
+            </a:lvl8pPr>
+            <a:lvl9pPr marL="3291840" indent="0">
+              <a:buNone/>
+              <a:defRPr sz="1260">
+                <a:solidFill>
+                  <a:schemeClr val="tx1">
+                    <a:tint val="75000"/>
+                  </a:schemeClr>
+                </a:solidFill>
+              </a:defRPr>
+            </a:lvl9pPr>
+          </a:lstStyle>
+          <a:p>
+            <a:pPr lvl="0"/>
+            <a:r>
+              <a:rPr lang="en-US"/>
+              <a:t>Click to edit Master text styles</a:t>
+            </a:r>
+          </a:p>
+        </p:txBody>
+      </p:sp>
+      <p:sp>
+        <p:nvSpPr>
+          <p:cNvPr id="4" name="Date Placeholder 3"/>
+          <p:cNvSpPr>
+            <a:spLocks noGrp="1"/>
+          </p:cNvSpPr>
+          <p:nvPr>
+            <p:ph type="dt" sz="half" idx="10"/>
+          </p:nvPr>
+        </p:nvSpPr>
+        <p:spPr/>
+        <p:txBody>
+          <a:bodyPr/>
+          <a:lstStyle/>
+          <a:p>
+            <a:fld id="{70A555F4-0623-4308-89A4-2EF3C67F970E}" type="datetime1">
+              <a:rPr lang="en-US" smtClean="0"/>
+              <a:t>9/23/2025</a:t>
+            </a:fld>
+            <a:endParaRPr lang="en-US"/>
+          </a:p>
+        </p:txBody>
+      </p:sp>
+      <p:sp>
+        <p:nvSpPr>
+          <p:cNvPr id="5" name="Footer Placeholder 4"/>
+          <p:cNvSpPr>
+            <a:spLocks noGrp="1"/>
+          </p:cNvSpPr>
+          <p:nvPr>
+            <p:ph type="ftr" sz="quarter" idx="11"/>
+          </p:nvPr>
+        </p:nvSpPr>
+        <p:spPr/>
+        <p:txBody>
+          <a:bodyPr/>
+          <a:lstStyle/>
+          <a:p>
+            <a:endParaRPr lang="en-US"/>
+          </a:p>
+        </p:txBody>
+      </p:sp>
+      <p:sp>
+        <p:nvSpPr>
+          <p:cNvPr id="6" name="Slide Number Placeholder 5"/>
+          <p:cNvSpPr>
+            <a:spLocks noGrp="1"/>
+          </p:cNvSpPr>
+          <p:nvPr>
+            <p:ph type="sldNum" sz="quarter" idx="12"/>
+          </p:nvPr>
+        </p:nvSpPr>
+        <p:spPr/>
+        <p:txBody>
+          <a:bodyPr/>
+          <a:lstStyle/>
+          <a:p>
+            <a:fld id="{127DDC20-79C9-9647-820E-6D40A3D210C3}" type="slidenum">
+              <a:rPr lang="en-US" smtClean="0"/>
+              <a:pPr/>
+              <a:t>‹#›</a:t>
+            </a:fld>
+            <a:endParaRPr lang="en-US"/>
+          </a:p>
+        </p:txBody>
+      </p:sp>
+    </p:spTree>
+    <p:extLst>
+      <p:ext uri="{BB962C8B-B14F-4D97-AF65-F5344CB8AC3E}">
+        <p14:creationId xmlns:p14="http://schemas.microsoft.com/office/powerpoint/2010/main" val="3944266959"/>
+      </p:ext>
+    </p:extLst>
+  </p:cSld>
+  <p:clrMapOvr>
+    <a:masterClrMapping/>
+  </p:clrMapOvr>
+</p:sldLayout>
+</file>
+
+<file path=ppt/slideLayouts/slideLayout72.xml><?xml version="1.0" encoding="utf-8"?>
+<p:sldLayout xmlns:a="http://schemas.openxmlformats.org/drawingml/2006/main" xmlns:r="http://schemas.openxmlformats.org/officeDocument/2006/relationships" xmlns:p="http://schemas.openxmlformats.org/presentationml/2006/main" type="twoObj" preserve="1">
+  <p:cSld name="Two Content">
+    <p:spTree>
+      <p:nvGrpSpPr>
+        <p:cNvPr id="1" name=""/>
+        <p:cNvGrpSpPr/>
+        <p:nvPr/>
+      </p:nvGrpSpPr>
+      <p:grpSpPr>
+        <a:xfrm>
+          <a:off x="0" y="0"/>
+          <a:ext cx="0" cy="0"/>
+          <a:chOff x="0" y="0"/>
+          <a:chExt cx="0" cy="0"/>
+        </a:xfrm>
+      </p:grpSpPr>
+      <p:sp>
+        <p:nvSpPr>
+          <p:cNvPr id="2" name="Title 1"/>
+          <p:cNvSpPr>
+            <a:spLocks noGrp="1"/>
+          </p:cNvSpPr>
+          <p:nvPr>
+            <p:ph type="title"/>
+          </p:nvPr>
+        </p:nvSpPr>
+        <p:spPr/>
+        <p:txBody>
+          <a:bodyPr/>
+          <a:lstStyle/>
+          <a:p>
+            <a:r>
+              <a:rPr lang="en-US"/>
+              <a:t>Click to edit Master title style</a:t>
+            </a:r>
+          </a:p>
+        </p:txBody>
+      </p:sp>
+      <p:sp>
+        <p:nvSpPr>
+          <p:cNvPr id="3" name="Content Placeholder 2"/>
+          <p:cNvSpPr>
+            <a:spLocks noGrp="1"/>
+          </p:cNvSpPr>
+          <p:nvPr>
+            <p:ph sz="half" idx="1"/>
+          </p:nvPr>
+        </p:nvSpPr>
+        <p:spPr>
+          <a:xfrm>
+            <a:off x="411480" y="1200151"/>
+            <a:ext cx="3634740" cy="3394472"/>
+          </a:xfrm>
+        </p:spPr>
+        <p:txBody>
+          <a:bodyPr/>
+          <a:lstStyle>
+            <a:lvl1pPr>
+              <a:defRPr sz="2520"/>
+            </a:lvl1pPr>
+            <a:lvl2pPr>
+              <a:defRPr sz="2160"/>
+            </a:lvl2pPr>
+            <a:lvl3pPr>
+              <a:defRPr sz="1800"/>
+            </a:lvl3pPr>
+            <a:lvl4pPr>
+              <a:defRPr sz="1620"/>
+            </a:lvl4pPr>
+            <a:lvl5pPr>
+              <a:defRPr sz="1620"/>
+            </a:lvl5pPr>
+            <a:lvl6pPr>
+              <a:defRPr sz="1620"/>
+            </a:lvl6pPr>
+            <a:lvl7pPr>
+              <a:defRPr sz="1620"/>
+            </a:lvl7pPr>
+            <a:lvl8pPr>
+              <a:defRPr sz="1620"/>
+            </a:lvl8pPr>
+            <a:lvl9pPr>
+              <a:defRPr sz="1620"/>
+            </a:lvl9pPr>
+          </a:lstStyle>
+          <a:p>
+            <a:pPr lvl="0"/>
+            <a:r>
+              <a:rPr lang="en-US"/>
+              <a:t>Click to edit Master text styles</a:t>
+            </a:r>
+          </a:p>
+          <a:p>
+            <a:pPr lvl="1"/>
+            <a:r>
+              <a:rPr lang="en-US"/>
+              <a:t>Second level</a:t>
+            </a:r>
+          </a:p>
+          <a:p>
+            <a:pPr lvl="2"/>
+            <a:r>
+              <a:rPr lang="en-US"/>
+              <a:t>Third level</a:t>
+            </a:r>
+          </a:p>
+          <a:p>
+            <a:pPr lvl="3"/>
+            <a:r>
+              <a:rPr lang="en-US"/>
+              <a:t>Fourth level</a:t>
+            </a:r>
+          </a:p>
+          <a:p>
+            <a:pPr lvl="4"/>
+            <a:r>
+              <a:rPr lang="en-US"/>
+              <a:t>Fifth level</a:t>
+            </a:r>
+          </a:p>
+        </p:txBody>
+      </p:sp>
+      <p:sp>
+        <p:nvSpPr>
+          <p:cNvPr id="4" name="Content Placeholder 3"/>
+          <p:cNvSpPr>
+            <a:spLocks noGrp="1"/>
+          </p:cNvSpPr>
+          <p:nvPr>
+            <p:ph sz="half" idx="2"/>
+          </p:nvPr>
+        </p:nvSpPr>
+        <p:spPr>
+          <a:xfrm>
+            <a:off x="4183380" y="1200151"/>
+            <a:ext cx="3634740" cy="3394472"/>
+          </a:xfrm>
+        </p:spPr>
+        <p:txBody>
+          <a:bodyPr/>
+          <a:lstStyle>
+            <a:lvl1pPr>
+              <a:defRPr sz="2520"/>
+            </a:lvl1pPr>
+            <a:lvl2pPr>
+              <a:defRPr sz="2160"/>
+            </a:lvl2pPr>
+            <a:lvl3pPr>
+              <a:defRPr sz="1800"/>
+            </a:lvl3pPr>
+            <a:lvl4pPr>
+              <a:defRPr sz="1620"/>
+            </a:lvl4pPr>
+            <a:lvl5pPr>
+              <a:defRPr sz="1620"/>
+            </a:lvl5pPr>
+            <a:lvl6pPr>
+              <a:defRPr sz="1620"/>
+            </a:lvl6pPr>
+            <a:lvl7pPr>
+              <a:defRPr sz="1620"/>
+            </a:lvl7pPr>
+            <a:lvl8pPr>
+              <a:defRPr sz="1620"/>
+            </a:lvl8pPr>
+            <a:lvl9pPr>
+              <a:defRPr sz="1620"/>
+            </a:lvl9pPr>
+          </a:lstStyle>
+          <a:p>
+            <a:pPr lvl="0"/>
+            <a:r>
+              <a:rPr lang="en-US"/>
+              <a:t>Click to edit Master text styles</a:t>
+            </a:r>
+          </a:p>
+          <a:p>
+            <a:pPr lvl="1"/>
+            <a:r>
+              <a:rPr lang="en-US"/>
+              <a:t>Second level</a:t>
+            </a:r>
+          </a:p>
+          <a:p>
+            <a:pPr lvl="2"/>
+            <a:r>
+              <a:rPr lang="en-US"/>
+              <a:t>Third level</a:t>
+            </a:r>
+          </a:p>
+          <a:p>
+            <a:pPr lvl="3"/>
+            <a:r>
+              <a:rPr lang="en-US"/>
+              <a:t>Fourth level</a:t>
+            </a:r>
+          </a:p>
+          <a:p>
+            <a:pPr lvl="4"/>
+            <a:r>
+              <a:rPr lang="en-US"/>
+              <a:t>Fifth level</a:t>
+            </a:r>
+          </a:p>
+        </p:txBody>
+      </p:sp>
+      <p:sp>
+        <p:nvSpPr>
+          <p:cNvPr id="5" name="Date Placeholder 4"/>
+          <p:cNvSpPr>
+            <a:spLocks noGrp="1"/>
+          </p:cNvSpPr>
+          <p:nvPr>
+            <p:ph type="dt" sz="half" idx="10"/>
+          </p:nvPr>
+        </p:nvSpPr>
+        <p:spPr/>
+        <p:txBody>
+          <a:bodyPr/>
+          <a:lstStyle/>
+          <a:p>
+            <a:fld id="{6C2C25ED-83A1-4E27-9E45-CB4ECD4F0BBC}" type="datetime1">
+              <a:rPr lang="en-US" smtClean="0"/>
+              <a:t>9/23/2025</a:t>
+            </a:fld>
+            <a:endParaRPr lang="en-US"/>
+          </a:p>
+        </p:txBody>
+      </p:sp>
+      <p:sp>
+        <p:nvSpPr>
+          <p:cNvPr id="6" name="Footer Placeholder 5"/>
+          <p:cNvSpPr>
+            <a:spLocks noGrp="1"/>
+          </p:cNvSpPr>
+          <p:nvPr>
+            <p:ph type="ftr" sz="quarter" idx="11"/>
+          </p:nvPr>
+        </p:nvSpPr>
+        <p:spPr/>
+        <p:txBody>
+          <a:bodyPr/>
+          <a:lstStyle/>
+          <a:p>
+            <a:endParaRPr lang="en-US"/>
+          </a:p>
+        </p:txBody>
+      </p:sp>
+      <p:sp>
+        <p:nvSpPr>
+          <p:cNvPr id="7" name="Slide Number Placeholder 6"/>
+          <p:cNvSpPr>
+            <a:spLocks noGrp="1"/>
+          </p:cNvSpPr>
+          <p:nvPr>
+            <p:ph type="sldNum" sz="quarter" idx="12"/>
+          </p:nvPr>
+        </p:nvSpPr>
+        <p:spPr/>
+        <p:txBody>
+          <a:bodyPr/>
+          <a:lstStyle/>
+          <a:p>
+            <a:fld id="{127DDC20-79C9-9647-820E-6D40A3D210C3}" type="slidenum">
+              <a:rPr lang="en-US" smtClean="0"/>
+              <a:pPr/>
+              <a:t>‹#›</a:t>
+            </a:fld>
+            <a:endParaRPr lang="en-US"/>
+          </a:p>
+        </p:txBody>
+      </p:sp>
+    </p:spTree>
+    <p:extLst>
+      <p:ext uri="{BB962C8B-B14F-4D97-AF65-F5344CB8AC3E}">
+        <p14:creationId xmlns:p14="http://schemas.microsoft.com/office/powerpoint/2010/main" val="1575392317"/>
+      </p:ext>
+    </p:extLst>
+  </p:cSld>
+  <p:clrMapOvr>
+    <a:masterClrMapping/>
+  </p:clrMapOvr>
+</p:sldLayout>
+</file>
+
+<file path=ppt/slideLayouts/slideLayout73.xml><?xml version="1.0" encoding="utf-8"?>
+<p:sldLayout xmlns:a="http://schemas.openxmlformats.org/drawingml/2006/main" xmlns:r="http://schemas.openxmlformats.org/officeDocument/2006/relationships" xmlns:p="http://schemas.openxmlformats.org/presentationml/2006/main" type="twoTxTwoObj" preserve="1">
+  <p:cSld name="Comparison">
+    <p:spTree>
+      <p:nvGrpSpPr>
+        <p:cNvPr id="1" name=""/>
+        <p:cNvGrpSpPr/>
+        <p:nvPr/>
+      </p:nvGrpSpPr>
+      <p:grpSpPr>
+        <a:xfrm>
+          <a:off x="0" y="0"/>
+          <a:ext cx="0" cy="0"/>
+          <a:chOff x="0" y="0"/>
+          <a:chExt cx="0" cy="0"/>
+        </a:xfrm>
+      </p:grpSpPr>
+      <p:sp>
+        <p:nvSpPr>
+          <p:cNvPr id="2" name="Title 1"/>
+          <p:cNvSpPr>
+            <a:spLocks noGrp="1"/>
+          </p:cNvSpPr>
+          <p:nvPr>
+            <p:ph type="title"/>
+          </p:nvPr>
+        </p:nvSpPr>
+        <p:spPr/>
+        <p:txBody>
+          <a:bodyPr/>
+          <a:lstStyle>
+            <a:lvl1pPr>
+              <a:defRPr/>
+            </a:lvl1pPr>
+          </a:lstStyle>
+          <a:p>
+            <a:r>
+              <a:rPr lang="en-US"/>
+              <a:t>Click to edit Master title style</a:t>
+            </a:r>
+          </a:p>
+        </p:txBody>
+      </p:sp>
+      <p:sp>
+        <p:nvSpPr>
+          <p:cNvPr id="3" name="Text Placeholder 2"/>
+          <p:cNvSpPr>
+            <a:spLocks noGrp="1"/>
+          </p:cNvSpPr>
+          <p:nvPr>
+            <p:ph type="body" idx="1"/>
+          </p:nvPr>
+        </p:nvSpPr>
+        <p:spPr>
+          <a:xfrm>
+            <a:off x="411480" y="1151335"/>
+            <a:ext cx="3636169" cy="479822"/>
+          </a:xfrm>
+        </p:spPr>
+        <p:txBody>
+          <a:bodyPr anchor="b"/>
+          <a:lstStyle>
+            <a:lvl1pPr marL="0" indent="0">
+              <a:buNone/>
+              <a:defRPr sz="2160" b="1"/>
+            </a:lvl1pPr>
+            <a:lvl2pPr marL="411480" indent="0">
+              <a:buNone/>
+              <a:defRPr sz="1800" b="1"/>
+            </a:lvl2pPr>
+            <a:lvl3pPr marL="822960" indent="0">
+              <a:buNone/>
+              <a:defRPr sz="1620" b="1"/>
+            </a:lvl3pPr>
+            <a:lvl4pPr marL="1234440" indent="0">
+              <a:buNone/>
+              <a:defRPr sz="1440" b="1"/>
+            </a:lvl4pPr>
+            <a:lvl5pPr marL="1645920" indent="0">
+              <a:buNone/>
+              <a:defRPr sz="1440" b="1"/>
+            </a:lvl5pPr>
+            <a:lvl6pPr marL="2057400" indent="0">
+              <a:buNone/>
+              <a:defRPr sz="1440" b="1"/>
+            </a:lvl6pPr>
+            <a:lvl7pPr marL="2468880" indent="0">
+              <a:buNone/>
+              <a:defRPr sz="1440" b="1"/>
+            </a:lvl7pPr>
+            <a:lvl8pPr marL="2880360" indent="0">
+              <a:buNone/>
+              <a:defRPr sz="1440" b="1"/>
+            </a:lvl8pPr>
+            <a:lvl9pPr marL="3291840" indent="0">
+              <a:buNone/>
+              <a:defRPr sz="1440" b="1"/>
+            </a:lvl9pPr>
+          </a:lstStyle>
+          <a:p>
+            <a:pPr lvl="0"/>
+            <a:r>
+              <a:rPr lang="en-US"/>
+              <a:t>Click to edit Master text styles</a:t>
+            </a:r>
+          </a:p>
+        </p:txBody>
+      </p:sp>
+      <p:sp>
+        <p:nvSpPr>
+          <p:cNvPr id="4" name="Content Placeholder 3"/>
+          <p:cNvSpPr>
+            <a:spLocks noGrp="1"/>
+          </p:cNvSpPr>
+          <p:nvPr>
+            <p:ph sz="half" idx="2"/>
+          </p:nvPr>
+        </p:nvSpPr>
+        <p:spPr>
+          <a:xfrm>
+            <a:off x="411480" y="1631156"/>
+            <a:ext cx="3636169" cy="2963466"/>
+          </a:xfrm>
+        </p:spPr>
+        <p:txBody>
+          <a:bodyPr/>
+          <a:lstStyle>
+            <a:lvl1pPr>
+              <a:defRPr sz="2160"/>
+            </a:lvl1pPr>
+            <a:lvl2pPr>
+              <a:defRPr sz="1800"/>
+            </a:lvl2pPr>
+            <a:lvl3pPr>
+              <a:defRPr sz="1620"/>
+            </a:lvl3pPr>
+            <a:lvl4pPr>
+              <a:defRPr sz="1440"/>
+            </a:lvl4pPr>
+            <a:lvl5pPr>
+              <a:defRPr sz="1440"/>
+            </a:lvl5pPr>
+            <a:lvl6pPr>
+              <a:defRPr sz="1440"/>
+            </a:lvl6pPr>
+            <a:lvl7pPr>
+              <a:defRPr sz="1440"/>
+            </a:lvl7pPr>
+            <a:lvl8pPr>
+              <a:defRPr sz="1440"/>
+            </a:lvl8pPr>
+            <a:lvl9pPr>
+              <a:defRPr sz="1440"/>
+            </a:lvl9pPr>
+          </a:lstStyle>
+          <a:p>
+            <a:pPr lvl="0"/>
+            <a:r>
+              <a:rPr lang="en-US"/>
+              <a:t>Click to edit Master text styles</a:t>
+            </a:r>
+          </a:p>
+          <a:p>
+            <a:pPr lvl="1"/>
+            <a:r>
+              <a:rPr lang="en-US"/>
+              <a:t>Second level</a:t>
+            </a:r>
+          </a:p>
+          <a:p>
+            <a:pPr lvl="2"/>
+            <a:r>
+              <a:rPr lang="en-US"/>
+              <a:t>Third level</a:t>
+            </a:r>
+          </a:p>
+          <a:p>
+            <a:pPr lvl="3"/>
+            <a:r>
+              <a:rPr lang="en-US"/>
+              <a:t>Fourth level</a:t>
+            </a:r>
+          </a:p>
+          <a:p>
+            <a:pPr lvl="4"/>
+            <a:r>
+              <a:rPr lang="en-US"/>
+              <a:t>Fifth level</a:t>
+            </a:r>
+          </a:p>
+        </p:txBody>
+      </p:sp>
+      <p:sp>
+        <p:nvSpPr>
+          <p:cNvPr id="5" name="Text Placeholder 4"/>
+          <p:cNvSpPr>
+            <a:spLocks noGrp="1"/>
+          </p:cNvSpPr>
+          <p:nvPr>
+            <p:ph type="body" sz="quarter" idx="3"/>
+          </p:nvPr>
+        </p:nvSpPr>
+        <p:spPr>
+          <a:xfrm>
+            <a:off x="4180524" y="1151335"/>
+            <a:ext cx="3637598" cy="479822"/>
+          </a:xfrm>
+        </p:spPr>
+        <p:txBody>
+          <a:bodyPr anchor="b"/>
+          <a:lstStyle>
+            <a:lvl1pPr marL="0" indent="0">
+              <a:buNone/>
+              <a:defRPr sz="2160" b="1"/>
+            </a:lvl1pPr>
+            <a:lvl2pPr marL="411480" indent="0">
+              <a:buNone/>
+              <a:defRPr sz="1800" b="1"/>
+            </a:lvl2pPr>
+            <a:lvl3pPr marL="822960" indent="0">
+              <a:buNone/>
+              <a:defRPr sz="1620" b="1"/>
+            </a:lvl3pPr>
+            <a:lvl4pPr marL="1234440" indent="0">
+              <a:buNone/>
+              <a:defRPr sz="1440" b="1"/>
+            </a:lvl4pPr>
+            <a:lvl5pPr marL="1645920" indent="0">
+              <a:buNone/>
+              <a:defRPr sz="1440" b="1"/>
+            </a:lvl5pPr>
+            <a:lvl6pPr marL="2057400" indent="0">
+              <a:buNone/>
+              <a:defRPr sz="1440" b="1"/>
+            </a:lvl6pPr>
+            <a:lvl7pPr marL="2468880" indent="0">
+              <a:buNone/>
+              <a:defRPr sz="1440" b="1"/>
+            </a:lvl7pPr>
+            <a:lvl8pPr marL="2880360" indent="0">
+              <a:buNone/>
+              <a:defRPr sz="1440" b="1"/>
+            </a:lvl8pPr>
+            <a:lvl9pPr marL="3291840" indent="0">
+              <a:buNone/>
+              <a:defRPr sz="1440" b="1"/>
+            </a:lvl9pPr>
+          </a:lstStyle>
+          <a:p>
+            <a:pPr lvl="0"/>
+            <a:r>
+              <a:rPr lang="en-US"/>
+              <a:t>Click to edit Master text styles</a:t>
+            </a:r>
+          </a:p>
+        </p:txBody>
+      </p:sp>
+      <p:sp>
+        <p:nvSpPr>
+          <p:cNvPr id="6" name="Content Placeholder 5"/>
+          <p:cNvSpPr>
+            <a:spLocks noGrp="1"/>
+          </p:cNvSpPr>
+          <p:nvPr>
+            <p:ph sz="quarter" idx="4"/>
+          </p:nvPr>
+        </p:nvSpPr>
+        <p:spPr>
+          <a:xfrm>
+            <a:off x="4180524" y="1631156"/>
+            <a:ext cx="3637598" cy="2963466"/>
+          </a:xfrm>
+        </p:spPr>
+        <p:txBody>
+          <a:bodyPr/>
+          <a:lstStyle>
+            <a:lvl1pPr>
+              <a:defRPr sz="2160"/>
+            </a:lvl1pPr>
+            <a:lvl2pPr>
+              <a:defRPr sz="1800"/>
+            </a:lvl2pPr>
+            <a:lvl3pPr>
+              <a:defRPr sz="1620"/>
+            </a:lvl3pPr>
+            <a:lvl4pPr>
+              <a:defRPr sz="1440"/>
+            </a:lvl4pPr>
+            <a:lvl5pPr>
+              <a:defRPr sz="1440"/>
+            </a:lvl5pPr>
+            <a:lvl6pPr>
+              <a:defRPr sz="1440"/>
+            </a:lvl6pPr>
+            <a:lvl7pPr>
+              <a:defRPr sz="1440"/>
+            </a:lvl7pPr>
+            <a:lvl8pPr>
+              <a:defRPr sz="1440"/>
+            </a:lvl8pPr>
+            <a:lvl9pPr>
+              <a:defRPr sz="1440"/>
+            </a:lvl9pPr>
+          </a:lstStyle>
+          <a:p>
+            <a:pPr lvl="0"/>
+            <a:r>
+              <a:rPr lang="en-US"/>
+              <a:t>Click to edit Master text styles</a:t>
+            </a:r>
+          </a:p>
+          <a:p>
+            <a:pPr lvl="1"/>
+            <a:r>
+              <a:rPr lang="en-US"/>
+              <a:t>Second level</a:t>
+            </a:r>
+          </a:p>
+          <a:p>
+            <a:pPr lvl="2"/>
+            <a:r>
+              <a:rPr lang="en-US"/>
+              <a:t>Third level</a:t>
+            </a:r>
+          </a:p>
+          <a:p>
+            <a:pPr lvl="3"/>
+            <a:r>
+              <a:rPr lang="en-US"/>
+              <a:t>Fourth level</a:t>
+            </a:r>
+          </a:p>
+          <a:p>
+            <a:pPr lvl="4"/>
+            <a:r>
+              <a:rPr lang="en-US"/>
+              <a:t>Fifth level</a:t>
+            </a:r>
+          </a:p>
+        </p:txBody>
+      </p:sp>
+      <p:sp>
+        <p:nvSpPr>
+          <p:cNvPr id="7" name="Date Placeholder 6"/>
+          <p:cNvSpPr>
+            <a:spLocks noGrp="1"/>
+          </p:cNvSpPr>
+          <p:nvPr>
+            <p:ph type="dt" sz="half" idx="10"/>
+          </p:nvPr>
+        </p:nvSpPr>
+        <p:spPr/>
+        <p:txBody>
+          <a:bodyPr/>
+          <a:lstStyle/>
+          <a:p>
+            <a:fld id="{FBC24F89-8A4A-4667-ACA3-D44E384795DF}" type="datetime1">
+              <a:rPr lang="en-US" smtClean="0"/>
+              <a:t>9/23/2025</a:t>
+            </a:fld>
+            <a:endParaRPr lang="en-US"/>
+          </a:p>
+        </p:txBody>
+      </p:sp>
+      <p:sp>
+        <p:nvSpPr>
+          <p:cNvPr id="8" name="Footer Placeholder 7"/>
+          <p:cNvSpPr>
+            <a:spLocks noGrp="1"/>
+          </p:cNvSpPr>
+          <p:nvPr>
+            <p:ph type="ftr" sz="quarter" idx="11"/>
+          </p:nvPr>
+        </p:nvSpPr>
+        <p:spPr/>
+        <p:txBody>
+          <a:bodyPr/>
+          <a:lstStyle/>
+          <a:p>
+            <a:endParaRPr lang="en-US"/>
+          </a:p>
+        </p:txBody>
+      </p:sp>
+      <p:sp>
+        <p:nvSpPr>
+          <p:cNvPr id="9" name="Slide Number Placeholder 8"/>
+          <p:cNvSpPr>
+            <a:spLocks noGrp="1"/>
+          </p:cNvSpPr>
+          <p:nvPr>
+            <p:ph type="sldNum" sz="quarter" idx="12"/>
+          </p:nvPr>
+        </p:nvSpPr>
+        <p:spPr/>
+        <p:txBody>
+          <a:bodyPr/>
+          <a:lstStyle/>
+          <a:p>
+            <a:fld id="{127DDC20-79C9-9647-820E-6D40A3D210C3}" type="slidenum">
+              <a:rPr lang="en-US" smtClean="0"/>
+              <a:pPr/>
+              <a:t>‹#›</a:t>
+            </a:fld>
+            <a:endParaRPr lang="en-US"/>
+          </a:p>
+        </p:txBody>
+      </p:sp>
+    </p:spTree>
+    <p:extLst>
+      <p:ext uri="{BB962C8B-B14F-4D97-AF65-F5344CB8AC3E}">
+        <p14:creationId xmlns:p14="http://schemas.microsoft.com/office/powerpoint/2010/main" val="342269881"/>
+      </p:ext>
+    </p:extLst>
+  </p:cSld>
+  <p:clrMapOvr>
+    <a:masterClrMapping/>
+  </p:clrMapOvr>
+</p:sldLayout>
+</file>
+
+<file path=ppt/slideLayouts/slideLayout74.xml><?xml version="1.0" encoding="utf-8"?>
+<p:sldLayout xmlns:a="http://schemas.openxmlformats.org/drawingml/2006/main" xmlns:r="http://schemas.openxmlformats.org/officeDocument/2006/relationships" xmlns:p="http://schemas.openxmlformats.org/presentationml/2006/main" type="titleOnly" preserve="1">
+  <p:cSld name="Title Only">
+    <p:spTree>
+      <p:nvGrpSpPr>
+        <p:cNvPr id="1" name=""/>
+        <p:cNvGrpSpPr/>
+        <p:nvPr/>
+      </p:nvGrpSpPr>
+      <p:grpSpPr>
+        <a:xfrm>
+          <a:off x="0" y="0"/>
+          <a:ext cx="0" cy="0"/>
+          <a:chOff x="0" y="0"/>
+          <a:chExt cx="0" cy="0"/>
+        </a:xfrm>
+      </p:grpSpPr>
+      <p:sp>
+        <p:nvSpPr>
+          <p:cNvPr id="2" name="Title 1"/>
+          <p:cNvSpPr>
+            <a:spLocks noGrp="1"/>
+          </p:cNvSpPr>
+          <p:nvPr>
+            <p:ph type="title"/>
+          </p:nvPr>
+        </p:nvSpPr>
+        <p:spPr/>
+        <p:txBody>
+          <a:bodyPr/>
+          <a:lstStyle/>
+          <a:p>
+            <a:r>
+              <a:rPr lang="en-US"/>
+              <a:t>Click to edit Master title style</a:t>
+            </a:r>
+          </a:p>
+        </p:txBody>
+      </p:sp>
+      <p:sp>
+        <p:nvSpPr>
+          <p:cNvPr id="3" name="Date Placeholder 2"/>
+          <p:cNvSpPr>
+            <a:spLocks noGrp="1"/>
+          </p:cNvSpPr>
+          <p:nvPr>
+            <p:ph type="dt" sz="half" idx="10"/>
+          </p:nvPr>
+        </p:nvSpPr>
+        <p:spPr/>
+        <p:txBody>
+          <a:bodyPr/>
+          <a:lstStyle/>
+          <a:p>
+            <a:fld id="{8A613FE4-A8B1-43D2-900A-0789A75D843A}" type="datetime1">
+              <a:rPr lang="en-US" smtClean="0"/>
+              <a:t>9/23/2025</a:t>
+            </a:fld>
+            <a:endParaRPr lang="en-US"/>
+          </a:p>
+        </p:txBody>
+      </p:sp>
+      <p:sp>
+        <p:nvSpPr>
+          <p:cNvPr id="4" name="Footer Placeholder 3"/>
+          <p:cNvSpPr>
+            <a:spLocks noGrp="1"/>
+          </p:cNvSpPr>
+          <p:nvPr>
+            <p:ph type="ftr" sz="quarter" idx="11"/>
+          </p:nvPr>
+        </p:nvSpPr>
+        <p:spPr/>
+        <p:txBody>
+          <a:bodyPr/>
+          <a:lstStyle/>
+          <a:p>
+            <a:endParaRPr lang="en-US"/>
+          </a:p>
+        </p:txBody>
+      </p:sp>
+      <p:sp>
+        <p:nvSpPr>
+          <p:cNvPr id="5" name="Slide Number Placeholder 4"/>
+          <p:cNvSpPr>
+            <a:spLocks noGrp="1"/>
+          </p:cNvSpPr>
+          <p:nvPr>
+            <p:ph type="sldNum" sz="quarter" idx="12"/>
+          </p:nvPr>
+        </p:nvSpPr>
+        <p:spPr/>
+        <p:txBody>
+          <a:bodyPr/>
+          <a:lstStyle/>
+          <a:p>
+            <a:fld id="{127DDC20-79C9-9647-820E-6D40A3D210C3}" type="slidenum">
+              <a:rPr lang="en-US" smtClean="0"/>
+              <a:pPr/>
+              <a:t>‹#›</a:t>
+            </a:fld>
+            <a:endParaRPr lang="en-US"/>
+          </a:p>
+        </p:txBody>
+      </p:sp>
+    </p:spTree>
+    <p:extLst>
+      <p:ext uri="{BB962C8B-B14F-4D97-AF65-F5344CB8AC3E}">
+        <p14:creationId xmlns:p14="http://schemas.microsoft.com/office/powerpoint/2010/main" val="2907688996"/>
+      </p:ext>
+    </p:extLst>
+  </p:cSld>
+  <p:clrMapOvr>
+    <a:masterClrMapping/>
+  </p:clrMapOvr>
+</p:sldLayout>
+</file>
+
+<file path=ppt/slideLayouts/slideLayout75.xml><?xml version="1.0" encoding="utf-8"?>
+<p:sldLayout xmlns:a="http://schemas.openxmlformats.org/drawingml/2006/main" xmlns:r="http://schemas.openxmlformats.org/officeDocument/2006/relationships" xmlns:p="http://schemas.openxmlformats.org/presentationml/2006/main" type="blank" preserve="1">
+  <p:cSld name="Blank">
+    <p:spTree>
+      <p:nvGrpSpPr>
+        <p:cNvPr id="1" name=""/>
+        <p:cNvGrpSpPr/>
+        <p:nvPr/>
+      </p:nvGrpSpPr>
+      <p:grpSpPr>
+        <a:xfrm>
+          <a:off x="0" y="0"/>
+          <a:ext cx="0" cy="0"/>
+          <a:chOff x="0" y="0"/>
+          <a:chExt cx="0" cy="0"/>
+        </a:xfrm>
+      </p:grpSpPr>
+      <p:sp>
+        <p:nvSpPr>
+          <p:cNvPr id="2" name="Date Placeholder 1"/>
+          <p:cNvSpPr>
+            <a:spLocks noGrp="1"/>
+          </p:cNvSpPr>
+          <p:nvPr>
+            <p:ph type="dt" sz="half" idx="10"/>
+          </p:nvPr>
+        </p:nvSpPr>
+        <p:spPr/>
+        <p:txBody>
+          <a:bodyPr/>
+          <a:lstStyle/>
+          <a:p>
+            <a:fld id="{F5E2B1E2-CA70-4E33-B1AB-E13FFAB976F0}" type="datetime1">
+              <a:rPr lang="en-US" smtClean="0"/>
+              <a:t>9/23/2025</a:t>
+            </a:fld>
+            <a:endParaRPr lang="en-US"/>
+          </a:p>
+        </p:txBody>
+      </p:sp>
+      <p:sp>
+        <p:nvSpPr>
+          <p:cNvPr id="3" name="Footer Placeholder 2"/>
+          <p:cNvSpPr>
+            <a:spLocks noGrp="1"/>
+          </p:cNvSpPr>
+          <p:nvPr>
+            <p:ph type="ftr" sz="quarter" idx="11"/>
+          </p:nvPr>
+        </p:nvSpPr>
+        <p:spPr/>
+        <p:txBody>
+          <a:bodyPr/>
+          <a:lstStyle/>
+          <a:p>
+            <a:endParaRPr lang="en-US"/>
+          </a:p>
+        </p:txBody>
+      </p:sp>
+      <p:sp>
+        <p:nvSpPr>
+          <p:cNvPr id="4" name="Slide Number Placeholder 3"/>
+          <p:cNvSpPr>
+            <a:spLocks noGrp="1"/>
+          </p:cNvSpPr>
+          <p:nvPr>
+            <p:ph type="sldNum" sz="quarter" idx="12"/>
+          </p:nvPr>
+        </p:nvSpPr>
+        <p:spPr/>
+        <p:txBody>
+          <a:bodyPr/>
+          <a:lstStyle/>
+          <a:p>
+            <a:fld id="{127DDC20-79C9-9647-820E-6D40A3D210C3}" type="slidenum">
+              <a:rPr lang="en-US" smtClean="0"/>
+              <a:pPr/>
+              <a:t>‹#›</a:t>
+            </a:fld>
+            <a:endParaRPr lang="en-US"/>
+          </a:p>
+        </p:txBody>
+      </p:sp>
+    </p:spTree>
+    <p:extLst>
+      <p:ext uri="{BB962C8B-B14F-4D97-AF65-F5344CB8AC3E}">
+        <p14:creationId xmlns:p14="http://schemas.microsoft.com/office/powerpoint/2010/main" val="762683531"/>
+      </p:ext>
+    </p:extLst>
+  </p:cSld>
+  <p:clrMapOvr>
+    <a:masterClrMapping/>
+  </p:clrMapOvr>
+</p:sldLayout>
+</file>
+
+<file path=ppt/slideLayouts/slideLayout76.xml><?xml version="1.0" encoding="utf-8"?>
+<p:sldLayout xmlns:a="http://schemas.openxmlformats.org/drawingml/2006/main" xmlns:r="http://schemas.openxmlformats.org/officeDocument/2006/relationships" xmlns:p="http://schemas.openxmlformats.org/presentationml/2006/main" type="objTx" preserve="1">
+  <p:cSld name="Content with Caption">
+    <p:spTree>
+      <p:nvGrpSpPr>
+        <p:cNvPr id="1" name=""/>
+        <p:cNvGrpSpPr/>
+        <p:nvPr/>
+      </p:nvGrpSpPr>
+      <p:grpSpPr>
+        <a:xfrm>
+          <a:off x="0" y="0"/>
+          <a:ext cx="0" cy="0"/>
+          <a:chOff x="0" y="0"/>
+          <a:chExt cx="0" cy="0"/>
+        </a:xfrm>
+      </p:grpSpPr>
+      <p:sp>
+        <p:nvSpPr>
+          <p:cNvPr id="2" name="Title 1"/>
+          <p:cNvSpPr>
+            <a:spLocks noGrp="1"/>
+          </p:cNvSpPr>
+          <p:nvPr>
+            <p:ph type="title"/>
+          </p:nvPr>
+        </p:nvSpPr>
+        <p:spPr>
+          <a:xfrm>
+            <a:off x="411481" y="204787"/>
+            <a:ext cx="2707482" cy="871538"/>
+          </a:xfrm>
+        </p:spPr>
+        <p:txBody>
+          <a:bodyPr anchor="b"/>
+          <a:lstStyle>
+            <a:lvl1pPr algn="l">
+              <a:defRPr sz="1800" b="1"/>
+            </a:lvl1pPr>
+          </a:lstStyle>
+          <a:p>
+            <a:r>
+              <a:rPr lang="en-US"/>
+              <a:t>Click to edit Master title style</a:t>
+            </a:r>
+          </a:p>
+        </p:txBody>
+      </p:sp>
+      <p:sp>
+        <p:nvSpPr>
+          <p:cNvPr id="3" name="Content Placeholder 2"/>
+          <p:cNvSpPr>
+            <a:spLocks noGrp="1"/>
+          </p:cNvSpPr>
+          <p:nvPr>
+            <p:ph idx="1"/>
+          </p:nvPr>
+        </p:nvSpPr>
+        <p:spPr>
+          <a:xfrm>
+            <a:off x="3217545" y="204789"/>
+            <a:ext cx="4600575" cy="4389835"/>
+          </a:xfrm>
+        </p:spPr>
+        <p:txBody>
+          <a:bodyPr/>
+          <a:lstStyle>
+            <a:lvl1pPr>
+              <a:defRPr sz="2880"/>
+            </a:lvl1pPr>
+            <a:lvl2pPr>
+              <a:defRPr sz="2520"/>
+            </a:lvl2pPr>
+            <a:lvl3pPr>
+              <a:defRPr sz="2160"/>
+            </a:lvl3pPr>
+            <a:lvl4pPr>
+              <a:defRPr sz="1800"/>
+            </a:lvl4pPr>
+            <a:lvl5pPr>
+              <a:defRPr sz="1800"/>
+            </a:lvl5pPr>
+            <a:lvl6pPr>
+              <a:defRPr sz="1800"/>
+            </a:lvl6pPr>
+            <a:lvl7pPr>
+              <a:defRPr sz="1800"/>
+            </a:lvl7pPr>
+            <a:lvl8pPr>
+              <a:defRPr sz="1800"/>
+            </a:lvl8pPr>
+            <a:lvl9pPr>
+              <a:defRPr sz="1800"/>
+            </a:lvl9pPr>
+          </a:lstStyle>
+          <a:p>
+            <a:pPr lvl="0"/>
+            <a:r>
+              <a:rPr lang="en-US"/>
+              <a:t>Click to edit Master text styles</a:t>
+            </a:r>
+          </a:p>
+          <a:p>
+            <a:pPr lvl="1"/>
+            <a:r>
+              <a:rPr lang="en-US"/>
+              <a:t>Second level</a:t>
+            </a:r>
+          </a:p>
+          <a:p>
+            <a:pPr lvl="2"/>
+            <a:r>
+              <a:rPr lang="en-US"/>
+              <a:t>Third level</a:t>
+            </a:r>
+          </a:p>
+          <a:p>
+            <a:pPr lvl="3"/>
+            <a:r>
+              <a:rPr lang="en-US"/>
+              <a:t>Fourth level</a:t>
+            </a:r>
+          </a:p>
+          <a:p>
+            <a:pPr lvl="4"/>
+            <a:r>
+              <a:rPr lang="en-US"/>
+              <a:t>Fifth level</a:t>
+            </a:r>
+          </a:p>
+        </p:txBody>
+      </p:sp>
+      <p:sp>
+        <p:nvSpPr>
+          <p:cNvPr id="4" name="Text Placeholder 3"/>
+          <p:cNvSpPr>
+            <a:spLocks noGrp="1"/>
+          </p:cNvSpPr>
+          <p:nvPr>
+            <p:ph type="body" sz="half" idx="2"/>
+          </p:nvPr>
+        </p:nvSpPr>
+        <p:spPr>
+          <a:xfrm>
+            <a:off x="411481" y="1076327"/>
+            <a:ext cx="2707482" cy="3518297"/>
+          </a:xfrm>
+        </p:spPr>
+        <p:txBody>
+          <a:bodyPr/>
+          <a:lstStyle>
+            <a:lvl1pPr marL="0" indent="0">
+              <a:buNone/>
+              <a:defRPr sz="1260"/>
+            </a:lvl1pPr>
+            <a:lvl2pPr marL="411480" indent="0">
+              <a:buNone/>
+              <a:defRPr sz="1080"/>
+            </a:lvl2pPr>
+            <a:lvl3pPr marL="822960" indent="0">
+              <a:buNone/>
+              <a:defRPr sz="900"/>
+            </a:lvl3pPr>
+            <a:lvl4pPr marL="1234440" indent="0">
+              <a:buNone/>
+              <a:defRPr sz="810"/>
+            </a:lvl4pPr>
+            <a:lvl5pPr marL="1645920" indent="0">
+              <a:buNone/>
+              <a:defRPr sz="810"/>
+            </a:lvl5pPr>
+            <a:lvl6pPr marL="2057400" indent="0">
+              <a:buNone/>
+              <a:defRPr sz="810"/>
+            </a:lvl6pPr>
+            <a:lvl7pPr marL="2468880" indent="0">
+              <a:buNone/>
+              <a:defRPr sz="810"/>
+            </a:lvl7pPr>
+            <a:lvl8pPr marL="2880360" indent="0">
+              <a:buNone/>
+              <a:defRPr sz="810"/>
+            </a:lvl8pPr>
+            <a:lvl9pPr marL="3291840" indent="0">
+              <a:buNone/>
+              <a:defRPr sz="810"/>
+            </a:lvl9pPr>
+          </a:lstStyle>
+          <a:p>
+            <a:pPr lvl="0"/>
+            <a:r>
+              <a:rPr lang="en-US"/>
+              <a:t>Click to edit Master text styles</a:t>
+            </a:r>
+          </a:p>
+        </p:txBody>
+      </p:sp>
+      <p:sp>
+        <p:nvSpPr>
+          <p:cNvPr id="5" name="Date Placeholder 4"/>
+          <p:cNvSpPr>
+            <a:spLocks noGrp="1"/>
+          </p:cNvSpPr>
+          <p:nvPr>
+            <p:ph type="dt" sz="half" idx="10"/>
+          </p:nvPr>
+        </p:nvSpPr>
+        <p:spPr/>
+        <p:txBody>
+          <a:bodyPr/>
+          <a:lstStyle/>
+          <a:p>
+            <a:fld id="{3E20A27F-A940-4DB1-BFA3-6B00386BFBB8}" type="datetime1">
+              <a:rPr lang="en-US" smtClean="0"/>
+              <a:t>9/23/2025</a:t>
+            </a:fld>
+            <a:endParaRPr lang="en-US"/>
+          </a:p>
+        </p:txBody>
+      </p:sp>
+      <p:sp>
+        <p:nvSpPr>
+          <p:cNvPr id="6" name="Footer Placeholder 5"/>
+          <p:cNvSpPr>
+            <a:spLocks noGrp="1"/>
+          </p:cNvSpPr>
+          <p:nvPr>
+            <p:ph type="ftr" sz="quarter" idx="11"/>
+          </p:nvPr>
+        </p:nvSpPr>
+        <p:spPr/>
+        <p:txBody>
+          <a:bodyPr/>
+          <a:lstStyle/>
+          <a:p>
+            <a:endParaRPr lang="en-US"/>
+          </a:p>
+        </p:txBody>
+      </p:sp>
+      <p:sp>
+        <p:nvSpPr>
+          <p:cNvPr id="7" name="Slide Number Placeholder 6"/>
+          <p:cNvSpPr>
+            <a:spLocks noGrp="1"/>
+          </p:cNvSpPr>
+          <p:nvPr>
+            <p:ph type="sldNum" sz="quarter" idx="12"/>
+          </p:nvPr>
+        </p:nvSpPr>
+        <p:spPr/>
+        <p:txBody>
+          <a:bodyPr/>
+          <a:lstStyle/>
+          <a:p>
+            <a:fld id="{127DDC20-79C9-9647-820E-6D40A3D210C3}" type="slidenum">
+              <a:rPr lang="en-US" smtClean="0"/>
+              <a:pPr/>
+              <a:t>‹#›</a:t>
+            </a:fld>
+            <a:endParaRPr lang="en-US"/>
+          </a:p>
+        </p:txBody>
+      </p:sp>
+    </p:spTree>
+    <p:extLst>
+      <p:ext uri="{BB962C8B-B14F-4D97-AF65-F5344CB8AC3E}">
+        <p14:creationId xmlns:p14="http://schemas.microsoft.com/office/powerpoint/2010/main" val="4142487038"/>
+      </p:ext>
+    </p:extLst>
+  </p:cSld>
+  <p:clrMapOvr>
+    <a:masterClrMapping/>
+  </p:clrMapOvr>
+</p:sldLayout>
+</file>
+
+<file path=ppt/slideLayouts/slideLayout77.xml><?xml version="1.0" encoding="utf-8"?>
+<p:sldLayout xmlns:a="http://schemas.openxmlformats.org/drawingml/2006/main" xmlns:r="http://schemas.openxmlformats.org/officeDocument/2006/relationships" xmlns:p="http://schemas.openxmlformats.org/presentationml/2006/main" type="picTx" preserve="1">
+  <p:cSld name="Picture with Caption">
+    <p:spTree>
+      <p:nvGrpSpPr>
+        <p:cNvPr id="1" name=""/>
+        <p:cNvGrpSpPr/>
+        <p:nvPr/>
+      </p:nvGrpSpPr>
+      <p:grpSpPr>
+        <a:xfrm>
+          <a:off x="0" y="0"/>
+          <a:ext cx="0" cy="0"/>
+          <a:chOff x="0" y="0"/>
+          <a:chExt cx="0" cy="0"/>
+        </a:xfrm>
+      </p:grpSpPr>
+      <p:sp>
+        <p:nvSpPr>
+          <p:cNvPr id="2" name="Title 1"/>
+          <p:cNvSpPr>
+            <a:spLocks noGrp="1"/>
+          </p:cNvSpPr>
+          <p:nvPr>
+            <p:ph type="title"/>
+          </p:nvPr>
+        </p:nvSpPr>
+        <p:spPr>
+          <a:xfrm>
+            <a:off x="1613059" y="3600450"/>
+            <a:ext cx="4937760" cy="425054"/>
+          </a:xfrm>
+        </p:spPr>
+        <p:txBody>
+          <a:bodyPr anchor="b"/>
+          <a:lstStyle>
+            <a:lvl1pPr algn="l">
+              <a:defRPr sz="1800" b="1"/>
+            </a:lvl1pPr>
+          </a:lstStyle>
+          <a:p>
+            <a:r>
+              <a:rPr lang="en-US"/>
+              <a:t>Click to edit Master title style</a:t>
+            </a:r>
+          </a:p>
+        </p:txBody>
+      </p:sp>
+      <p:sp>
+        <p:nvSpPr>
+          <p:cNvPr id="3" name="Picture Placeholder 2"/>
+          <p:cNvSpPr>
+            <a:spLocks noGrp="1"/>
+          </p:cNvSpPr>
+          <p:nvPr>
+            <p:ph type="pic" idx="1"/>
+          </p:nvPr>
+        </p:nvSpPr>
+        <p:spPr>
+          <a:xfrm>
+            <a:off x="1613059" y="459581"/>
+            <a:ext cx="4937760" cy="3086100"/>
+          </a:xfrm>
+        </p:spPr>
+        <p:txBody>
+          <a:bodyPr/>
+          <a:lstStyle>
+            <a:lvl1pPr marL="0" indent="0">
+              <a:buNone/>
+              <a:defRPr sz="2880"/>
+            </a:lvl1pPr>
+            <a:lvl2pPr marL="411480" indent="0">
+              <a:buNone/>
+              <a:defRPr sz="2520"/>
+            </a:lvl2pPr>
+            <a:lvl3pPr marL="822960" indent="0">
+              <a:buNone/>
+              <a:defRPr sz="2160"/>
+            </a:lvl3pPr>
+            <a:lvl4pPr marL="1234440" indent="0">
+              <a:buNone/>
+              <a:defRPr sz="1800"/>
+            </a:lvl4pPr>
+            <a:lvl5pPr marL="1645920" indent="0">
+              <a:buNone/>
+              <a:defRPr sz="1800"/>
+            </a:lvl5pPr>
+            <a:lvl6pPr marL="2057400" indent="0">
+              <a:buNone/>
+              <a:defRPr sz="1800"/>
+            </a:lvl6pPr>
+            <a:lvl7pPr marL="2468880" indent="0">
+              <a:buNone/>
+              <a:defRPr sz="1800"/>
+            </a:lvl7pPr>
+            <a:lvl8pPr marL="2880360" indent="0">
+              <a:buNone/>
+              <a:defRPr sz="1800"/>
+            </a:lvl8pPr>
+            <a:lvl9pPr marL="3291840" indent="0">
+              <a:buNone/>
+              <a:defRPr sz="1800"/>
+            </a:lvl9pPr>
+          </a:lstStyle>
+          <a:p>
+            <a:endParaRPr lang="en-US"/>
+          </a:p>
+        </p:txBody>
+      </p:sp>
+      <p:sp>
+        <p:nvSpPr>
+          <p:cNvPr id="4" name="Text Placeholder 3"/>
+          <p:cNvSpPr>
+            <a:spLocks noGrp="1"/>
+          </p:cNvSpPr>
+          <p:nvPr>
+            <p:ph type="body" sz="half" idx="2"/>
+          </p:nvPr>
+        </p:nvSpPr>
+        <p:spPr>
+          <a:xfrm>
+            <a:off x="1613059" y="4025504"/>
+            <a:ext cx="4937760" cy="603647"/>
+          </a:xfrm>
+        </p:spPr>
+        <p:txBody>
+          <a:bodyPr/>
+          <a:lstStyle>
+            <a:lvl1pPr marL="0" indent="0">
+              <a:buNone/>
+              <a:defRPr sz="1260"/>
+            </a:lvl1pPr>
+            <a:lvl2pPr marL="411480" indent="0">
+              <a:buNone/>
+              <a:defRPr sz="1080"/>
+            </a:lvl2pPr>
+            <a:lvl3pPr marL="822960" indent="0">
+              <a:buNone/>
+              <a:defRPr sz="900"/>
+            </a:lvl3pPr>
+            <a:lvl4pPr marL="1234440" indent="0">
+              <a:buNone/>
+              <a:defRPr sz="810"/>
+            </a:lvl4pPr>
+            <a:lvl5pPr marL="1645920" indent="0">
+              <a:buNone/>
+              <a:defRPr sz="810"/>
+            </a:lvl5pPr>
+            <a:lvl6pPr marL="2057400" indent="0">
+              <a:buNone/>
+              <a:defRPr sz="810"/>
+            </a:lvl6pPr>
+            <a:lvl7pPr marL="2468880" indent="0">
+              <a:buNone/>
+              <a:defRPr sz="810"/>
+            </a:lvl7pPr>
+            <a:lvl8pPr marL="2880360" indent="0">
+              <a:buNone/>
+              <a:defRPr sz="810"/>
+            </a:lvl8pPr>
+            <a:lvl9pPr marL="3291840" indent="0">
+              <a:buNone/>
+              <a:defRPr sz="810"/>
+            </a:lvl9pPr>
+          </a:lstStyle>
+          <a:p>
+            <a:pPr lvl="0"/>
+            <a:r>
+              <a:rPr lang="en-US"/>
+              <a:t>Click to edit Master text styles</a:t>
+            </a:r>
+          </a:p>
+        </p:txBody>
+      </p:sp>
+      <p:sp>
+        <p:nvSpPr>
+          <p:cNvPr id="5" name="Date Placeholder 4"/>
+          <p:cNvSpPr>
+            <a:spLocks noGrp="1"/>
+          </p:cNvSpPr>
+          <p:nvPr>
+            <p:ph type="dt" sz="half" idx="10"/>
+          </p:nvPr>
+        </p:nvSpPr>
+        <p:spPr/>
+        <p:txBody>
+          <a:bodyPr/>
+          <a:lstStyle/>
+          <a:p>
+            <a:fld id="{7FC8B4FF-525C-4739-8620-1BBEF31D3000}" type="datetime1">
+              <a:rPr lang="en-US" smtClean="0"/>
+              <a:t>9/23/2025</a:t>
+            </a:fld>
+            <a:endParaRPr lang="en-US"/>
+          </a:p>
+        </p:txBody>
+      </p:sp>
+      <p:sp>
+        <p:nvSpPr>
+          <p:cNvPr id="6" name="Footer Placeholder 5"/>
+          <p:cNvSpPr>
+            <a:spLocks noGrp="1"/>
+          </p:cNvSpPr>
+          <p:nvPr>
+            <p:ph type="ftr" sz="quarter" idx="11"/>
+          </p:nvPr>
+        </p:nvSpPr>
+        <p:spPr/>
+        <p:txBody>
+          <a:bodyPr/>
+          <a:lstStyle/>
+          <a:p>
+            <a:endParaRPr lang="en-US"/>
+          </a:p>
+        </p:txBody>
+      </p:sp>
+      <p:sp>
+        <p:nvSpPr>
+          <p:cNvPr id="7" name="Slide Number Placeholder 6"/>
+          <p:cNvSpPr>
+            <a:spLocks noGrp="1"/>
+          </p:cNvSpPr>
+          <p:nvPr>
+            <p:ph type="sldNum" sz="quarter" idx="12"/>
+          </p:nvPr>
+        </p:nvSpPr>
+        <p:spPr/>
+        <p:txBody>
+          <a:bodyPr/>
+          <a:lstStyle/>
+          <a:p>
+            <a:fld id="{127DDC20-79C9-9647-820E-6D40A3D210C3}" type="slidenum">
+              <a:rPr lang="en-US" smtClean="0"/>
+              <a:pPr/>
+              <a:t>‹#›</a:t>
+            </a:fld>
+            <a:endParaRPr lang="en-US"/>
+          </a:p>
+        </p:txBody>
+      </p:sp>
+    </p:spTree>
+    <p:extLst>
+      <p:ext uri="{BB962C8B-B14F-4D97-AF65-F5344CB8AC3E}">
+        <p14:creationId xmlns:p14="http://schemas.microsoft.com/office/powerpoint/2010/main" val="135138061"/>
+      </p:ext>
+    </p:extLst>
+  </p:cSld>
+  <p:clrMapOvr>
+    <a:masterClrMapping/>
+  </p:clrMapOvr>
+</p:sldLayout>
+</file>
+
+<file path=ppt/slideLayouts/slideLayout78.xml><?xml version="1.0" encoding="utf-8"?>
+<p:sldLayout xmlns:a="http://schemas.openxmlformats.org/drawingml/2006/main" xmlns:r="http://schemas.openxmlformats.org/officeDocument/2006/relationships" xmlns:p="http://schemas.openxmlformats.org/presentationml/2006/main" type="vertTx" preserve="1">
+  <p:cSld name="Title and Vertical Text">
+    <p:spTree>
+      <p:nvGrpSpPr>
+        <p:cNvPr id="1" name=""/>
+        <p:cNvGrpSpPr/>
+        <p:nvPr/>
+      </p:nvGrpSpPr>
+      <p:grpSpPr>
+        <a:xfrm>
+          <a:off x="0" y="0"/>
+          <a:ext cx="0" cy="0"/>
+          <a:chOff x="0" y="0"/>
+          <a:chExt cx="0" cy="0"/>
+        </a:xfrm>
+      </p:grpSpPr>
+      <p:sp>
+        <p:nvSpPr>
+          <p:cNvPr id="2" name="Title 1"/>
+          <p:cNvSpPr>
+            <a:spLocks noGrp="1"/>
+          </p:cNvSpPr>
+          <p:nvPr>
+            <p:ph type="title"/>
+          </p:nvPr>
+        </p:nvSpPr>
+        <p:spPr/>
+        <p:txBody>
+          <a:bodyPr/>
+          <a:lstStyle/>
+          <a:p>
+            <a:r>
+              <a:rPr lang="en-US"/>
+              <a:t>Click to edit Master title style</a:t>
+            </a:r>
+          </a:p>
+        </p:txBody>
+      </p:sp>
+      <p:sp>
+        <p:nvSpPr>
+          <p:cNvPr id="3" name="Vertical Text Placeholder 2"/>
+          <p:cNvSpPr>
+            <a:spLocks noGrp="1"/>
+          </p:cNvSpPr>
+          <p:nvPr>
+            <p:ph type="body" orient="vert" idx="1"/>
+          </p:nvPr>
+        </p:nvSpPr>
+        <p:spPr/>
+        <p:txBody>
+          <a:bodyPr vert="eaVert"/>
+          <a:lstStyle/>
+          <a:p>
+            <a:pPr lvl="0"/>
+            <a:r>
+              <a:rPr lang="en-US"/>
+              <a:t>Click to edit Master text styles</a:t>
+            </a:r>
+          </a:p>
+          <a:p>
+            <a:pPr lvl="1"/>
+            <a:r>
+              <a:rPr lang="en-US"/>
+              <a:t>Second level</a:t>
+            </a:r>
+          </a:p>
+          <a:p>
+            <a:pPr lvl="2"/>
+            <a:r>
+              <a:rPr lang="en-US"/>
+              <a:t>Third level</a:t>
+            </a:r>
+          </a:p>
+          <a:p>
+            <a:pPr lvl="3"/>
+            <a:r>
+              <a:rPr lang="en-US"/>
+              <a:t>Fourth level</a:t>
+            </a:r>
+          </a:p>
+          <a:p>
+            <a:pPr lvl="4"/>
+            <a:r>
+              <a:rPr lang="en-US"/>
+              <a:t>Fifth level</a:t>
+            </a:r>
+          </a:p>
+        </p:txBody>
+      </p:sp>
+      <p:sp>
+        <p:nvSpPr>
+          <p:cNvPr id="4" name="Date Placeholder 3"/>
+          <p:cNvSpPr>
+            <a:spLocks noGrp="1"/>
+          </p:cNvSpPr>
+          <p:nvPr>
+            <p:ph type="dt" sz="half" idx="10"/>
+          </p:nvPr>
+        </p:nvSpPr>
+        <p:spPr/>
+        <p:txBody>
+          <a:bodyPr/>
+          <a:lstStyle/>
+          <a:p>
+            <a:fld id="{0B66B1A4-BA96-45DD-B69E-04FB88AA18D4}" type="datetime1">
+              <a:rPr lang="en-US" smtClean="0"/>
+              <a:t>9/23/2025</a:t>
+            </a:fld>
+            <a:endParaRPr lang="en-US"/>
+          </a:p>
+        </p:txBody>
+      </p:sp>
+      <p:sp>
+        <p:nvSpPr>
+          <p:cNvPr id="5" name="Footer Placeholder 4"/>
+          <p:cNvSpPr>
+            <a:spLocks noGrp="1"/>
+          </p:cNvSpPr>
+          <p:nvPr>
+            <p:ph type="ftr" sz="quarter" idx="11"/>
+          </p:nvPr>
+        </p:nvSpPr>
+        <p:spPr/>
+        <p:txBody>
+          <a:bodyPr/>
+          <a:lstStyle/>
+          <a:p>
+            <a:endParaRPr lang="en-US"/>
+          </a:p>
+        </p:txBody>
+      </p:sp>
+      <p:sp>
+        <p:nvSpPr>
+          <p:cNvPr id="6" name="Slide Number Placeholder 5"/>
+          <p:cNvSpPr>
+            <a:spLocks noGrp="1"/>
+          </p:cNvSpPr>
+          <p:nvPr>
+            <p:ph type="sldNum" sz="quarter" idx="12"/>
+          </p:nvPr>
+        </p:nvSpPr>
+        <p:spPr/>
+        <p:txBody>
+          <a:bodyPr/>
+          <a:lstStyle/>
+          <a:p>
+            <a:fld id="{127DDC20-79C9-9647-820E-6D40A3D210C3}" type="slidenum">
+              <a:rPr lang="en-US" smtClean="0"/>
+              <a:pPr/>
+              <a:t>‹#›</a:t>
+            </a:fld>
+            <a:endParaRPr lang="en-US"/>
+          </a:p>
+        </p:txBody>
+      </p:sp>
+    </p:spTree>
+    <p:extLst>
+      <p:ext uri="{BB962C8B-B14F-4D97-AF65-F5344CB8AC3E}">
+        <p14:creationId xmlns:p14="http://schemas.microsoft.com/office/powerpoint/2010/main" val="2242576454"/>
+      </p:ext>
+    </p:extLst>
+  </p:cSld>
+  <p:clrMapOvr>
+    <a:masterClrMapping/>
+  </p:clrMapOvr>
+</p:sldLayout>
+</file>
+
+<file path=ppt/slideLayouts/slideLayout79.xml><?xml version="1.0" encoding="utf-8"?>
+<p:sldLayout xmlns:a="http://schemas.openxmlformats.org/drawingml/2006/main" xmlns:r="http://schemas.openxmlformats.org/officeDocument/2006/relationships" xmlns:p="http://schemas.openxmlformats.org/presentationml/2006/main" type="vertTitleAndTx" preserve="1">
+  <p:cSld name="Vertical Title and Text">
+    <p:spTree>
+      <p:nvGrpSpPr>
+        <p:cNvPr id="1" name=""/>
+        <p:cNvGrpSpPr/>
+        <p:nvPr/>
+      </p:nvGrpSpPr>
+      <p:grpSpPr>
+        <a:xfrm>
+          <a:off x="0" y="0"/>
+          <a:ext cx="0" cy="0"/>
+          <a:chOff x="0" y="0"/>
+          <a:chExt cx="0" cy="0"/>
+        </a:xfrm>
+      </p:grpSpPr>
+      <p:sp>
+        <p:nvSpPr>
+          <p:cNvPr id="2" name="Vertical Title 1"/>
+          <p:cNvSpPr>
+            <a:spLocks noGrp="1"/>
+          </p:cNvSpPr>
+          <p:nvPr>
+            <p:ph type="title" orient="vert"/>
+          </p:nvPr>
+        </p:nvSpPr>
+        <p:spPr>
+          <a:xfrm>
+            <a:off x="5966460" y="205979"/>
+            <a:ext cx="1851660" cy="4388644"/>
+          </a:xfrm>
+        </p:spPr>
+        <p:txBody>
+          <a:bodyPr vert="eaVert"/>
+          <a:lstStyle/>
+          <a:p>
+            <a:r>
+              <a:rPr lang="en-US"/>
+              <a:t>Click to edit Master title style</a:t>
+            </a:r>
+          </a:p>
+        </p:txBody>
+      </p:sp>
+      <p:sp>
+        <p:nvSpPr>
+          <p:cNvPr id="3" name="Vertical Text Placeholder 2"/>
+          <p:cNvSpPr>
+            <a:spLocks noGrp="1"/>
+          </p:cNvSpPr>
+          <p:nvPr>
+            <p:ph type="body" orient="vert" idx="1"/>
+          </p:nvPr>
+        </p:nvSpPr>
+        <p:spPr>
+          <a:xfrm>
+            <a:off x="411480" y="205979"/>
+            <a:ext cx="5417820" cy="4388644"/>
+          </a:xfrm>
+        </p:spPr>
+        <p:txBody>
+          <a:bodyPr vert="eaVert"/>
+          <a:lstStyle/>
+          <a:p>
+            <a:pPr lvl="0"/>
+            <a:r>
+              <a:rPr lang="en-US"/>
+              <a:t>Click to edit Master text styles</a:t>
+            </a:r>
+          </a:p>
+          <a:p>
+            <a:pPr lvl="1"/>
+            <a:r>
+              <a:rPr lang="en-US"/>
+              <a:t>Second level</a:t>
+            </a:r>
+          </a:p>
+          <a:p>
+            <a:pPr lvl="2"/>
+            <a:r>
+              <a:rPr lang="en-US"/>
+              <a:t>Third level</a:t>
+            </a:r>
+          </a:p>
+          <a:p>
+            <a:pPr lvl="3"/>
+            <a:r>
+              <a:rPr lang="en-US"/>
+              <a:t>Fourth level</a:t>
+            </a:r>
+          </a:p>
+          <a:p>
+            <a:pPr lvl="4"/>
+            <a:r>
+              <a:rPr lang="en-US"/>
+              <a:t>Fifth level</a:t>
+            </a:r>
+          </a:p>
+        </p:txBody>
+      </p:sp>
+      <p:sp>
+        <p:nvSpPr>
+          <p:cNvPr id="4" name="Date Placeholder 3"/>
+          <p:cNvSpPr>
+            <a:spLocks noGrp="1"/>
+          </p:cNvSpPr>
+          <p:nvPr>
+            <p:ph type="dt" sz="half" idx="10"/>
+          </p:nvPr>
+        </p:nvSpPr>
+        <p:spPr/>
+        <p:txBody>
+          <a:bodyPr/>
+          <a:lstStyle/>
+          <a:p>
+            <a:fld id="{A986499E-7FB9-4175-B5CC-46A07FADF573}" type="datetime1">
+              <a:rPr lang="en-US" smtClean="0"/>
+              <a:t>9/23/2025</a:t>
+            </a:fld>
+            <a:endParaRPr lang="en-US"/>
+          </a:p>
+        </p:txBody>
+      </p:sp>
+      <p:sp>
+        <p:nvSpPr>
+          <p:cNvPr id="5" name="Footer Placeholder 4"/>
+          <p:cNvSpPr>
+            <a:spLocks noGrp="1"/>
+          </p:cNvSpPr>
+          <p:nvPr>
+            <p:ph type="ftr" sz="quarter" idx="11"/>
+          </p:nvPr>
+        </p:nvSpPr>
+        <p:spPr/>
+        <p:txBody>
+          <a:bodyPr/>
+          <a:lstStyle/>
+          <a:p>
+            <a:endParaRPr lang="en-US"/>
+          </a:p>
+        </p:txBody>
+      </p:sp>
+      <p:sp>
+        <p:nvSpPr>
+          <p:cNvPr id="6" name="Slide Number Placeholder 5"/>
+          <p:cNvSpPr>
+            <a:spLocks noGrp="1"/>
+          </p:cNvSpPr>
+          <p:nvPr>
+            <p:ph type="sldNum" sz="quarter" idx="12"/>
+          </p:nvPr>
+        </p:nvSpPr>
+        <p:spPr/>
+        <p:txBody>
+          <a:bodyPr/>
+          <a:lstStyle/>
+          <a:p>
+            <a:fld id="{127DDC20-79C9-9647-820E-6D40A3D210C3}" type="slidenum">
+              <a:rPr lang="en-US" smtClean="0"/>
+              <a:pPr/>
+              <a:t>‹#›</a:t>
+            </a:fld>
+            <a:endParaRPr lang="en-US"/>
+          </a:p>
+        </p:txBody>
+      </p:sp>
+    </p:spTree>
+    <p:extLst>
+      <p:ext uri="{BB962C8B-B14F-4D97-AF65-F5344CB8AC3E}">
+        <p14:creationId xmlns:p14="http://schemas.microsoft.com/office/powerpoint/2010/main" val="4071208030"/>
       </p:ext>
     </p:extLst>
   </p:cSld>
@@ -19098,7 +22279,7 @@
           <a:p>
             <a:fld id="{3E20A27F-A940-4DB1-BFA3-6B00386BFBB8}" type="datetime1">
               <a:rPr lang="en-US" smtClean="0"/>
-              <a:t>9/22/2025</a:t>
+              <a:t>9/23/2025</a:t>
             </a:fld>
             <a:endParaRPr lang="en-US"/>
           </a:p>
@@ -19391,7 +22572,7 @@
           <a:p>
             <a:fld id="{7FC8B4FF-525C-4739-8620-1BBEF31D3000}" type="datetime1">
               <a:rPr lang="en-US" smtClean="0"/>
-              <a:t>9/22/2025</a:t>
+              <a:t>9/23/2025</a:t>
             </a:fld>
             <a:endParaRPr lang="en-US"/>
           </a:p>
@@ -19606,7 +22787,7 @@
           <a:p>
             <a:fld id="{31E1391E-2A44-4376-9A8A-15039D79744E}" type="datetime1">
               <a:rPr lang="en-US" smtClean="0"/>
-              <a:t>9/22/2025</a:t>
+              <a:t>9/23/2025</a:t>
             </a:fld>
             <a:endParaRPr lang="en-US"/>
           </a:p>
@@ -20408,7 +23589,7 @@
           <a:p>
             <a:fld id="{53D9F797-665E-490A-B876-3E21189284AA}" type="datetime1">
               <a:rPr lang="en-US" smtClean="0"/>
-              <a:t>9/22/2025</a:t>
+              <a:t>9/23/2025</a:t>
             </a:fld>
             <a:endParaRPr lang="en-US"/>
           </a:p>
@@ -21210,7 +24391,7 @@
           <a:p>
             <a:fld id="{53D9F797-665E-490A-B876-3E21189284AA}" type="datetime1">
               <a:rPr lang="en-US" smtClean="0"/>
-              <a:t>9/22/2025</a:t>
+              <a:t>9/23/2025</a:t>
             </a:fld>
             <a:endParaRPr lang="en-US"/>
           </a:p>
@@ -22012,7 +25193,7 @@
           <a:p>
             <a:fld id="{ED291B17-9318-49DB-B28B-6E5994AE9581}" type="datetime1">
               <a:rPr lang="en-US" smtClean="0"/>
-              <a:t>9/22/2025</a:t>
+              <a:t>9/23/2025</a:t>
             </a:fld>
             <a:endParaRPr lang="en-US" dirty="0"/>
           </a:p>
@@ -22814,7 +25995,7 @@
           <a:p>
             <a:fld id="{ED291B17-9318-49DB-B28B-6E5994AE9581}" type="datetime1">
               <a:rPr lang="en-US" smtClean="0"/>
-              <a:t>9/22/2025</a:t>
+              <a:t>9/23/2025</a:t>
             </a:fld>
             <a:endParaRPr lang="en-US" dirty="0"/>
           </a:p>
@@ -23615,7 +26796,7 @@
           <a:p>
             <a:fld id="{ED291B17-9318-49DB-B28B-6E5994AE9581}" type="datetime1">
               <a:rPr lang="en-US" smtClean="0"/>
-              <a:t>9/22/2025</a:t>
+              <a:t>9/23/2025</a:t>
             </a:fld>
             <a:endParaRPr lang="en-US" dirty="0"/>
           </a:p>
@@ -24264,6 +27445,516 @@
 </p:sldMaster>
 </file>
 
+<file path=ppt/slideMasters/slideMaster7.xml><?xml version="1.0" encoding="utf-8"?>
+<p:sldMaster xmlns:a="http://schemas.openxmlformats.org/drawingml/2006/main" xmlns:r="http://schemas.openxmlformats.org/officeDocument/2006/relationships" xmlns:p="http://schemas.openxmlformats.org/presentationml/2006/main">
+  <p:cSld>
+    <p:bg>
+      <p:bgRef idx="1001">
+        <a:schemeClr val="bg1"/>
+      </p:bgRef>
+    </p:bg>
+    <p:spTree>
+      <p:nvGrpSpPr>
+        <p:cNvPr id="1" name=""/>
+        <p:cNvGrpSpPr/>
+        <p:nvPr/>
+      </p:nvGrpSpPr>
+      <p:grpSpPr>
+        <a:xfrm>
+          <a:off x="0" y="0"/>
+          <a:ext cx="0" cy="0"/>
+          <a:chOff x="0" y="0"/>
+          <a:chExt cx="0" cy="0"/>
+        </a:xfrm>
+      </p:grpSpPr>
+      <p:sp>
+        <p:nvSpPr>
+          <p:cNvPr id="2" name="Title Placeholder 1"/>
+          <p:cNvSpPr>
+            <a:spLocks noGrp="1"/>
+          </p:cNvSpPr>
+          <p:nvPr>
+            <p:ph type="title"/>
+          </p:nvPr>
+        </p:nvSpPr>
+        <p:spPr>
+          <a:xfrm>
+            <a:off x="411480" y="205979"/>
+            <a:ext cx="7406640" cy="857250"/>
+          </a:xfrm>
+          <a:prstGeom prst="rect">
+            <a:avLst/>
+          </a:prstGeom>
+        </p:spPr>
+        <p:txBody>
+          <a:bodyPr vert="horz" lIns="91440" tIns="45720" rIns="91440" bIns="45720" rtlCol="0" anchor="ctr">
+            <a:normAutofit/>
+          </a:bodyPr>
+          <a:lstStyle/>
+          <a:p>
+            <a:r>
+              <a:rPr lang="en-US"/>
+              <a:t>Click to edit Master title style</a:t>
+            </a:r>
+          </a:p>
+        </p:txBody>
+      </p:sp>
+      <p:sp>
+        <p:nvSpPr>
+          <p:cNvPr id="3" name="Text Placeholder 2"/>
+          <p:cNvSpPr>
+            <a:spLocks noGrp="1"/>
+          </p:cNvSpPr>
+          <p:nvPr>
+            <p:ph type="body" idx="1"/>
+          </p:nvPr>
+        </p:nvSpPr>
+        <p:spPr>
+          <a:xfrm>
+            <a:off x="411480" y="1200151"/>
+            <a:ext cx="7406640" cy="3394472"/>
+          </a:xfrm>
+          <a:prstGeom prst="rect">
+            <a:avLst/>
+          </a:prstGeom>
+        </p:spPr>
+        <p:txBody>
+          <a:bodyPr vert="horz" lIns="91440" tIns="45720" rIns="91440" bIns="45720" rtlCol="0">
+            <a:normAutofit/>
+          </a:bodyPr>
+          <a:lstStyle/>
+          <a:p>
+            <a:pPr lvl="0"/>
+            <a:r>
+              <a:rPr lang="en-US"/>
+              <a:t>Click to edit Master text styles</a:t>
+            </a:r>
+          </a:p>
+          <a:p>
+            <a:pPr lvl="1"/>
+            <a:r>
+              <a:rPr lang="en-US"/>
+              <a:t>Second level</a:t>
+            </a:r>
+          </a:p>
+          <a:p>
+            <a:pPr lvl="2"/>
+            <a:r>
+              <a:rPr lang="en-US"/>
+              <a:t>Third level</a:t>
+            </a:r>
+          </a:p>
+          <a:p>
+            <a:pPr lvl="3"/>
+            <a:r>
+              <a:rPr lang="en-US"/>
+              <a:t>Fourth level</a:t>
+            </a:r>
+          </a:p>
+          <a:p>
+            <a:pPr lvl="4"/>
+            <a:r>
+              <a:rPr lang="en-US"/>
+              <a:t>Fifth level</a:t>
+            </a:r>
+          </a:p>
+        </p:txBody>
+      </p:sp>
+      <p:sp>
+        <p:nvSpPr>
+          <p:cNvPr id="4" name="Date Placeholder 3"/>
+          <p:cNvSpPr>
+            <a:spLocks noGrp="1"/>
+          </p:cNvSpPr>
+          <p:nvPr>
+            <p:ph type="dt" sz="half" idx="2"/>
+          </p:nvPr>
+        </p:nvSpPr>
+        <p:spPr>
+          <a:xfrm>
+            <a:off x="411480" y="4767263"/>
+            <a:ext cx="1920240" cy="273844"/>
+          </a:xfrm>
+          <a:prstGeom prst="rect">
+            <a:avLst/>
+          </a:prstGeom>
+        </p:spPr>
+        <p:txBody>
+          <a:bodyPr vert="horz" lIns="91440" tIns="45720" rIns="91440" bIns="45720" rtlCol="0" anchor="ctr"/>
+          <a:lstStyle>
+            <a:lvl1pPr algn="l">
+              <a:defRPr sz="1080">
+                <a:solidFill>
+                  <a:schemeClr val="tx1">
+                    <a:tint val="75000"/>
+                  </a:schemeClr>
+                </a:solidFill>
+              </a:defRPr>
+            </a:lvl1pPr>
+          </a:lstStyle>
+          <a:p>
+            <a:fld id="{31E1391E-2A44-4376-9A8A-15039D79744E}" type="datetime1">
+              <a:rPr lang="en-US" smtClean="0"/>
+              <a:t>9/23/2025</a:t>
+            </a:fld>
+            <a:endParaRPr lang="en-US"/>
+          </a:p>
+        </p:txBody>
+      </p:sp>
+      <p:sp>
+        <p:nvSpPr>
+          <p:cNvPr id="5" name="Footer Placeholder 4"/>
+          <p:cNvSpPr>
+            <a:spLocks noGrp="1"/>
+          </p:cNvSpPr>
+          <p:nvPr>
+            <p:ph type="ftr" sz="quarter" idx="3"/>
+          </p:nvPr>
+        </p:nvSpPr>
+        <p:spPr>
+          <a:xfrm>
+            <a:off x="2811780" y="4767263"/>
+            <a:ext cx="2606040" cy="273844"/>
+          </a:xfrm>
+          <a:prstGeom prst="rect">
+            <a:avLst/>
+          </a:prstGeom>
+        </p:spPr>
+        <p:txBody>
+          <a:bodyPr vert="horz" lIns="91440" tIns="45720" rIns="91440" bIns="45720" rtlCol="0" anchor="ctr"/>
+          <a:lstStyle>
+            <a:lvl1pPr algn="ctr">
+              <a:defRPr sz="1080">
+                <a:solidFill>
+                  <a:schemeClr val="tx1">
+                    <a:tint val="75000"/>
+                  </a:schemeClr>
+                </a:solidFill>
+              </a:defRPr>
+            </a:lvl1pPr>
+          </a:lstStyle>
+          <a:p>
+            <a:endParaRPr lang="en-US"/>
+          </a:p>
+        </p:txBody>
+      </p:sp>
+      <p:sp>
+        <p:nvSpPr>
+          <p:cNvPr id="6" name="Slide Number Placeholder 5"/>
+          <p:cNvSpPr>
+            <a:spLocks noGrp="1"/>
+          </p:cNvSpPr>
+          <p:nvPr>
+            <p:ph type="sldNum" sz="quarter" idx="4"/>
+          </p:nvPr>
+        </p:nvSpPr>
+        <p:spPr>
+          <a:xfrm>
+            <a:off x="5897880" y="4767263"/>
+            <a:ext cx="1920240" cy="273844"/>
+          </a:xfrm>
+          <a:prstGeom prst="rect">
+            <a:avLst/>
+          </a:prstGeom>
+        </p:spPr>
+        <p:txBody>
+          <a:bodyPr vert="horz" lIns="91440" tIns="45720" rIns="91440" bIns="45720" rtlCol="0" anchor="ctr"/>
+          <a:lstStyle>
+            <a:lvl1pPr algn="r">
+              <a:defRPr sz="1080">
+                <a:solidFill>
+                  <a:schemeClr val="tx1">
+                    <a:tint val="75000"/>
+                  </a:schemeClr>
+                </a:solidFill>
+              </a:defRPr>
+            </a:lvl1pPr>
+          </a:lstStyle>
+          <a:p>
+            <a:fld id="{127DDC20-79C9-9647-820E-6D40A3D210C3}" type="slidenum">
+              <a:rPr lang="en-US" smtClean="0"/>
+              <a:pPr/>
+              <a:t>‹#›</a:t>
+            </a:fld>
+            <a:endParaRPr lang="en-US"/>
+          </a:p>
+        </p:txBody>
+      </p:sp>
+    </p:spTree>
+    <p:extLst>
+      <p:ext uri="{BB962C8B-B14F-4D97-AF65-F5344CB8AC3E}">
+        <p14:creationId xmlns:p14="http://schemas.microsoft.com/office/powerpoint/2010/main" val="2563539560"/>
+      </p:ext>
+    </p:extLst>
+  </p:cSld>
+  <p:clrMap bg1="lt1" tx1="dk1" bg2="lt2" tx2="dk2" accent1="accent1" accent2="accent2" accent3="accent3" accent4="accent4" accent5="accent5" accent6="accent6" hlink="hlink" folHlink="folHlink"/>
+  <p:sldLayoutIdLst>
+    <p:sldLayoutId id="2147483735" r:id="rId1"/>
+    <p:sldLayoutId id="2147483736" r:id="rId2"/>
+    <p:sldLayoutId id="2147483737" r:id="rId3"/>
+    <p:sldLayoutId id="2147483738" r:id="rId4"/>
+    <p:sldLayoutId id="2147483739" r:id="rId5"/>
+    <p:sldLayoutId id="2147483740" r:id="rId6"/>
+    <p:sldLayoutId id="2147483741" r:id="rId7"/>
+    <p:sldLayoutId id="2147483742" r:id="rId8"/>
+    <p:sldLayoutId id="2147483743" r:id="rId9"/>
+    <p:sldLayoutId id="2147483744" r:id="rId10"/>
+    <p:sldLayoutId id="2147483745" r:id="rId11"/>
+  </p:sldLayoutIdLst>
+  <p:hf hdr="0" ftr="0" dt="0"/>
+  <p:txStyles>
+    <p:titleStyle>
+      <a:lvl1pPr algn="ctr" defTabSz="411480" rtl="0" eaLnBrk="1" latinLnBrk="0" hangingPunct="1">
+        <a:spcBef>
+          <a:spcPct val="0"/>
+        </a:spcBef>
+        <a:buNone/>
+        <a:defRPr sz="3960" kern="1200">
+          <a:solidFill>
+            <a:schemeClr val="tx1"/>
+          </a:solidFill>
+          <a:latin typeface="+mj-lt"/>
+          <a:ea typeface="+mj-ea"/>
+          <a:cs typeface="+mj-cs"/>
+        </a:defRPr>
+      </a:lvl1pPr>
+    </p:titleStyle>
+    <p:bodyStyle>
+      <a:lvl1pPr marL="308610" indent="-308610" algn="l" defTabSz="411480" rtl="0" eaLnBrk="1" latinLnBrk="0" hangingPunct="1">
+        <a:spcBef>
+          <a:spcPct val="20000"/>
+        </a:spcBef>
+        <a:buFont typeface="Arial"/>
+        <a:buChar char="•"/>
+        <a:defRPr sz="2880" kern="1200">
+          <a:solidFill>
+            <a:schemeClr val="tx1"/>
+          </a:solidFill>
+          <a:latin typeface="+mn-lt"/>
+          <a:ea typeface="+mn-ea"/>
+          <a:cs typeface="+mn-cs"/>
+        </a:defRPr>
+      </a:lvl1pPr>
+      <a:lvl2pPr marL="668655" indent="-257175" algn="l" defTabSz="411480" rtl="0" eaLnBrk="1" latinLnBrk="0" hangingPunct="1">
+        <a:spcBef>
+          <a:spcPct val="20000"/>
+        </a:spcBef>
+        <a:buFont typeface="Arial"/>
+        <a:buChar char="–"/>
+        <a:defRPr sz="2520" kern="1200">
+          <a:solidFill>
+            <a:schemeClr val="tx1"/>
+          </a:solidFill>
+          <a:latin typeface="+mn-lt"/>
+          <a:ea typeface="+mn-ea"/>
+          <a:cs typeface="+mn-cs"/>
+        </a:defRPr>
+      </a:lvl2pPr>
+      <a:lvl3pPr marL="1028700" indent="-205740" algn="l" defTabSz="411480" rtl="0" eaLnBrk="1" latinLnBrk="0" hangingPunct="1">
+        <a:spcBef>
+          <a:spcPct val="20000"/>
+        </a:spcBef>
+        <a:buFont typeface="Arial"/>
+        <a:buChar char="•"/>
+        <a:defRPr sz="2160" kern="1200">
+          <a:solidFill>
+            <a:schemeClr val="tx1"/>
+          </a:solidFill>
+          <a:latin typeface="+mn-lt"/>
+          <a:ea typeface="+mn-ea"/>
+          <a:cs typeface="+mn-cs"/>
+        </a:defRPr>
+      </a:lvl3pPr>
+      <a:lvl4pPr marL="1440180" indent="-205740" algn="l" defTabSz="411480" rtl="0" eaLnBrk="1" latinLnBrk="0" hangingPunct="1">
+        <a:spcBef>
+          <a:spcPct val="20000"/>
+        </a:spcBef>
+        <a:buFont typeface="Arial"/>
+        <a:buChar char="–"/>
+        <a:defRPr sz="1800" kern="1200">
+          <a:solidFill>
+            <a:schemeClr val="tx1"/>
+          </a:solidFill>
+          <a:latin typeface="+mn-lt"/>
+          <a:ea typeface="+mn-ea"/>
+          <a:cs typeface="+mn-cs"/>
+        </a:defRPr>
+      </a:lvl4pPr>
+      <a:lvl5pPr marL="1851660" indent="-205740" algn="l" defTabSz="411480" rtl="0" eaLnBrk="1" latinLnBrk="0" hangingPunct="1">
+        <a:spcBef>
+          <a:spcPct val="20000"/>
+        </a:spcBef>
+        <a:buFont typeface="Arial"/>
+        <a:buChar char="»"/>
+        <a:defRPr sz="1800" kern="1200">
+          <a:solidFill>
+            <a:schemeClr val="tx1"/>
+          </a:solidFill>
+          <a:latin typeface="+mn-lt"/>
+          <a:ea typeface="+mn-ea"/>
+          <a:cs typeface="+mn-cs"/>
+        </a:defRPr>
+      </a:lvl5pPr>
+      <a:lvl6pPr marL="2263140" indent="-205740" algn="l" defTabSz="411480" rtl="0" eaLnBrk="1" latinLnBrk="0" hangingPunct="1">
+        <a:spcBef>
+          <a:spcPct val="20000"/>
+        </a:spcBef>
+        <a:buFont typeface="Arial"/>
+        <a:buChar char="•"/>
+        <a:defRPr sz="1800" kern="1200">
+          <a:solidFill>
+            <a:schemeClr val="tx1"/>
+          </a:solidFill>
+          <a:latin typeface="+mn-lt"/>
+          <a:ea typeface="+mn-ea"/>
+          <a:cs typeface="+mn-cs"/>
+        </a:defRPr>
+      </a:lvl6pPr>
+      <a:lvl7pPr marL="2674620" indent="-205740" algn="l" defTabSz="411480" rtl="0" eaLnBrk="1" latinLnBrk="0" hangingPunct="1">
+        <a:spcBef>
+          <a:spcPct val="20000"/>
+        </a:spcBef>
+        <a:buFont typeface="Arial"/>
+        <a:buChar char="•"/>
+        <a:defRPr sz="1800" kern="1200">
+          <a:solidFill>
+            <a:schemeClr val="tx1"/>
+          </a:solidFill>
+          <a:latin typeface="+mn-lt"/>
+          <a:ea typeface="+mn-ea"/>
+          <a:cs typeface="+mn-cs"/>
+        </a:defRPr>
+      </a:lvl7pPr>
+      <a:lvl8pPr marL="3086100" indent="-205740" algn="l" defTabSz="411480" rtl="0" eaLnBrk="1" latinLnBrk="0" hangingPunct="1">
+        <a:spcBef>
+          <a:spcPct val="20000"/>
+        </a:spcBef>
+        <a:buFont typeface="Arial"/>
+        <a:buChar char="•"/>
+        <a:defRPr sz="1800" kern="1200">
+          <a:solidFill>
+            <a:schemeClr val="tx1"/>
+          </a:solidFill>
+          <a:latin typeface="+mn-lt"/>
+          <a:ea typeface="+mn-ea"/>
+          <a:cs typeface="+mn-cs"/>
+        </a:defRPr>
+      </a:lvl8pPr>
+      <a:lvl9pPr marL="3497580" indent="-205740" algn="l" defTabSz="411480" rtl="0" eaLnBrk="1" latinLnBrk="0" hangingPunct="1">
+        <a:spcBef>
+          <a:spcPct val="20000"/>
+        </a:spcBef>
+        <a:buFont typeface="Arial"/>
+        <a:buChar char="•"/>
+        <a:defRPr sz="1800" kern="1200">
+          <a:solidFill>
+            <a:schemeClr val="tx1"/>
+          </a:solidFill>
+          <a:latin typeface="+mn-lt"/>
+          <a:ea typeface="+mn-ea"/>
+          <a:cs typeface="+mn-cs"/>
+        </a:defRPr>
+      </a:lvl9pPr>
+    </p:bodyStyle>
+    <p:otherStyle>
+      <a:defPPr>
+        <a:defRPr lang="en-US"/>
+      </a:defPPr>
+      <a:lvl1pPr marL="0" algn="l" defTabSz="411480" rtl="0" eaLnBrk="1" latinLnBrk="0" hangingPunct="1">
+        <a:defRPr sz="1620" kern="1200">
+          <a:solidFill>
+            <a:schemeClr val="tx1"/>
+          </a:solidFill>
+          <a:latin typeface="+mn-lt"/>
+          <a:ea typeface="+mn-ea"/>
+          <a:cs typeface="+mn-cs"/>
+        </a:defRPr>
+      </a:lvl1pPr>
+      <a:lvl2pPr marL="411480" algn="l" defTabSz="411480" rtl="0" eaLnBrk="1" latinLnBrk="0" hangingPunct="1">
+        <a:defRPr sz="1620" kern="1200">
+          <a:solidFill>
+            <a:schemeClr val="tx1"/>
+          </a:solidFill>
+          <a:latin typeface="+mn-lt"/>
+          <a:ea typeface="+mn-ea"/>
+          <a:cs typeface="+mn-cs"/>
+        </a:defRPr>
+      </a:lvl2pPr>
+      <a:lvl3pPr marL="822960" algn="l" defTabSz="411480" rtl="0" eaLnBrk="1" latinLnBrk="0" hangingPunct="1">
+        <a:defRPr sz="1620" kern="1200">
+          <a:solidFill>
+            <a:schemeClr val="tx1"/>
+          </a:solidFill>
+          <a:latin typeface="+mn-lt"/>
+          <a:ea typeface="+mn-ea"/>
+          <a:cs typeface="+mn-cs"/>
+        </a:defRPr>
+      </a:lvl3pPr>
+      <a:lvl4pPr marL="1234440" algn="l" defTabSz="411480" rtl="0" eaLnBrk="1" latinLnBrk="0" hangingPunct="1">
+        <a:defRPr sz="1620" kern="1200">
+          <a:solidFill>
+            <a:schemeClr val="tx1"/>
+          </a:solidFill>
+          <a:latin typeface="+mn-lt"/>
+          <a:ea typeface="+mn-ea"/>
+          <a:cs typeface="+mn-cs"/>
+        </a:defRPr>
+      </a:lvl4pPr>
+      <a:lvl5pPr marL="1645920" algn="l" defTabSz="411480" rtl="0" eaLnBrk="1" latinLnBrk="0" hangingPunct="1">
+        <a:defRPr sz="1620" kern="1200">
+          <a:solidFill>
+            <a:schemeClr val="tx1"/>
+          </a:solidFill>
+          <a:latin typeface="+mn-lt"/>
+          <a:ea typeface="+mn-ea"/>
+          <a:cs typeface="+mn-cs"/>
+        </a:defRPr>
+      </a:lvl5pPr>
+      <a:lvl6pPr marL="2057400" algn="l" defTabSz="411480" rtl="0" eaLnBrk="1" latinLnBrk="0" hangingPunct="1">
+        <a:defRPr sz="1620" kern="1200">
+          <a:solidFill>
+            <a:schemeClr val="tx1"/>
+          </a:solidFill>
+          <a:latin typeface="+mn-lt"/>
+          <a:ea typeface="+mn-ea"/>
+          <a:cs typeface="+mn-cs"/>
+        </a:defRPr>
+      </a:lvl6pPr>
+      <a:lvl7pPr marL="2468880" algn="l" defTabSz="411480" rtl="0" eaLnBrk="1" latinLnBrk="0" hangingPunct="1">
+        <a:defRPr sz="1620" kern="1200">
+          <a:solidFill>
+            <a:schemeClr val="tx1"/>
+          </a:solidFill>
+          <a:latin typeface="+mn-lt"/>
+          <a:ea typeface="+mn-ea"/>
+          <a:cs typeface="+mn-cs"/>
+        </a:defRPr>
+      </a:lvl7pPr>
+      <a:lvl8pPr marL="2880360" algn="l" defTabSz="411480" rtl="0" eaLnBrk="1" latinLnBrk="0" hangingPunct="1">
+        <a:defRPr sz="1620" kern="1200">
+          <a:solidFill>
+            <a:schemeClr val="tx1"/>
+          </a:solidFill>
+          <a:latin typeface="+mn-lt"/>
+          <a:ea typeface="+mn-ea"/>
+          <a:cs typeface="+mn-cs"/>
+        </a:defRPr>
+      </a:lvl8pPr>
+      <a:lvl9pPr marL="3291840" algn="l" defTabSz="411480" rtl="0" eaLnBrk="1" latinLnBrk="0" hangingPunct="1">
+        <a:defRPr sz="1620" kern="1200">
+          <a:solidFill>
+            <a:schemeClr val="tx1"/>
+          </a:solidFill>
+          <a:latin typeface="+mn-lt"/>
+          <a:ea typeface="+mn-ea"/>
+          <a:cs typeface="+mn-cs"/>
+        </a:defRPr>
+      </a:lvl9pPr>
+    </p:otherStyle>
+  </p:txStyles>
+</p:sldMaster>
+</file>
+
 <file path=ppt/slides/slide1.xml><?xml version="1.0" encoding="utf-8"?>
 <p:sld xmlns:a="http://schemas.openxmlformats.org/drawingml/2006/main" xmlns:r="http://schemas.openxmlformats.org/officeDocument/2006/relationships" xmlns:p="http://schemas.openxmlformats.org/presentationml/2006/main">
   <p:cSld>
@@ -26695,120 +30386,438 @@
       </p:grpSpPr>
       <p:sp>
         <p:nvSpPr>
-          <p:cNvPr id="2" name="Title 1">
+          <p:cNvPr id="4" name="Content Placeholder 3"/>
+          <p:cNvSpPr>
+            <a:spLocks noGrp="1"/>
+          </p:cNvSpPr>
+          <p:nvPr>
+            <p:ph idx="1"/>
+          </p:nvPr>
+        </p:nvSpPr>
+        <p:spPr>
+          <a:xfrm>
+            <a:off x="0" y="1052732"/>
+            <a:ext cx="4470556" cy="4090768"/>
+          </a:xfrm>
+        </p:spPr>
+        <p:txBody>
+          <a:bodyPr>
+            <a:normAutofit fontScale="55000" lnSpcReduction="20000"/>
+          </a:bodyPr>
+          <a:lstStyle/>
+          <a:p>
+            <a:pPr>
+              <a:buFont typeface="Courier New" panose="02070309020205020404" pitchFamily="49" charset="0"/>
+              <a:buChar char="o"/>
+            </a:pPr>
+            <a:r>
+              <a:rPr lang="en-US" sz="4200" b="1" dirty="0">
+                <a:solidFill>
+                  <a:srgbClr val="E3874F"/>
+                </a:solidFill>
+                <a:hlinkClick r:id="rId3"/>
+              </a:rPr>
+              <a:t>W</a:t>
+            </a:r>
+            <a:r>
+              <a:rPr lang="en-US" altLang="zh-CN" sz="4200" b="1" dirty="0">
+                <a:solidFill>
+                  <a:srgbClr val="E3874F"/>
+                </a:solidFill>
+                <a:hlinkClick r:id="rId3"/>
+              </a:rPr>
+              <a:t>ide Area Augmentation System (WAAS)</a:t>
+            </a:r>
+            <a:endParaRPr lang="en-US" sz="4200" b="1" dirty="0">
+              <a:solidFill>
+                <a:srgbClr val="E3874F"/>
+              </a:solidFill>
+            </a:endParaRPr>
+          </a:p>
+          <a:p>
+            <a:pPr lvl="1">
+              <a:buFont typeface="Wingdings" panose="05000000000000000000" pitchFamily="2" charset="2"/>
+              <a:buChar char="ü"/>
+            </a:pPr>
+            <a:r>
+              <a:rPr lang="en-US" sz="2940" dirty="0"/>
+              <a:t>Satellite-Based Augmentation System (SBAS)</a:t>
+            </a:r>
+          </a:p>
+          <a:p>
+            <a:pPr lvl="1">
+              <a:buFont typeface="Wingdings" panose="05000000000000000000" pitchFamily="2" charset="2"/>
+              <a:buChar char="ü"/>
+            </a:pPr>
+            <a:r>
+              <a:rPr lang="en-US" sz="2940" dirty="0"/>
+              <a:t>U.S. Federal Aviation Administration</a:t>
+            </a:r>
+          </a:p>
+          <a:p>
+            <a:pPr lvl="1">
+              <a:buFont typeface="Wingdings" panose="05000000000000000000" pitchFamily="2" charset="2"/>
+              <a:buChar char="ü"/>
+            </a:pPr>
+            <a:r>
+              <a:rPr lang="en-US" sz="2940" dirty="0"/>
+              <a:t>Real-time accuracies for single fixes within 4-7 meters</a:t>
+            </a:r>
+          </a:p>
+          <a:p>
+            <a:pPr lvl="1">
+              <a:buFont typeface="Wingdings" panose="05000000000000000000" pitchFamily="2" charset="2"/>
+              <a:buChar char="ü"/>
+            </a:pPr>
+            <a:r>
+              <a:rPr lang="en-US" sz="2940" dirty="0"/>
+              <a:t>Can average multiple fixes for increased accuracy</a:t>
+            </a:r>
+          </a:p>
+          <a:p>
+            <a:pPr lvl="1">
+              <a:buFont typeface="Wingdings" panose="05000000000000000000" pitchFamily="2" charset="2"/>
+              <a:buChar char="ü"/>
+            </a:pPr>
+            <a:r>
+              <a:rPr lang="en-US" sz="2940" dirty="0"/>
+              <a:t>Broadcasted correction data from ground stations</a:t>
+            </a:r>
+          </a:p>
+          <a:p>
+            <a:pPr lvl="1">
+              <a:buFont typeface="Wingdings" panose="05000000000000000000" pitchFamily="2" charset="2"/>
+              <a:buChar char="ü"/>
+            </a:pPr>
+            <a:r>
+              <a:rPr lang="en-US" sz="2940" dirty="0"/>
+              <a:t>Only for NAVSTAR GPS (US System)</a:t>
+            </a:r>
+          </a:p>
+          <a:p>
+            <a:pPr lvl="1">
+              <a:buFont typeface="Wingdings" panose="05000000000000000000" pitchFamily="2" charset="2"/>
+              <a:buChar char="ü"/>
+            </a:pPr>
+            <a:r>
+              <a:rPr lang="en-US" sz="2940" dirty="0"/>
+              <a:t>Most handheld units are WAAS enabled</a:t>
+            </a:r>
+          </a:p>
+          <a:p>
+            <a:pPr lvl="1">
+              <a:buFont typeface="Wingdings" panose="05000000000000000000" pitchFamily="2" charset="2"/>
+              <a:buChar char="ü"/>
+            </a:pPr>
+            <a:r>
+              <a:rPr lang="en-US" sz="2940" dirty="0"/>
+              <a:t>For real-time needs</a:t>
+            </a:r>
+          </a:p>
+          <a:p>
+            <a:pPr lvl="1">
+              <a:buFont typeface="Wingdings" panose="05000000000000000000" pitchFamily="2" charset="2"/>
+              <a:buChar char="ü"/>
+            </a:pPr>
+            <a:r>
+              <a:rPr lang="en-US" sz="2940" dirty="0"/>
+              <a:t>Others: European: EGNOS , Japan: MSAS and QZSS, India: GAGAN, Russia: SDCM </a:t>
+            </a:r>
+          </a:p>
+        </p:txBody>
+      </p:sp>
+      <p:pic>
+        <p:nvPicPr>
+          <p:cNvPr id="5122" name="Picture 2" descr="WAAS - Step 3"/>
+          <p:cNvPicPr>
+            <a:picLocks noChangeAspect="1" noChangeArrowheads="1"/>
+          </p:cNvPicPr>
+          <p:nvPr/>
+        </p:nvPicPr>
+        <p:blipFill>
+          <a:blip r:embed="rId4">
+            <a:extLst>
+              <a:ext uri="{28A0092B-C50C-407E-A947-70E740481C1C}">
+                <a14:useLocalDpi xmlns:a14="http://schemas.microsoft.com/office/drawing/2010/main" val="0"/>
+              </a:ext>
+            </a:extLst>
+          </a:blip>
+          <a:srcRect/>
+          <a:stretch>
+            <a:fillRect/>
+          </a:stretch>
+        </p:blipFill>
+        <p:spPr bwMode="auto">
+          <a:xfrm>
+            <a:off x="4470555" y="1388437"/>
+            <a:ext cx="3495129" cy="2702331"/>
+          </a:xfrm>
+          <a:prstGeom prst="rect">
+            <a:avLst/>
+          </a:prstGeom>
+          <a:noFill/>
+          <a:extLst>
+            <a:ext uri="{909E8E84-426E-40DD-AFC4-6F175D3DCCD1}">
+              <a14:hiddenFill xmlns:a14="http://schemas.microsoft.com/office/drawing/2010/main">
+                <a:solidFill>
+                  <a:srgbClr val="FFFFFF"/>
+                </a:solidFill>
+              </a14:hiddenFill>
+            </a:ext>
+          </a:extLst>
+        </p:spPr>
+      </p:pic>
+      <p:sp>
+        <p:nvSpPr>
+          <p:cNvPr id="3" name="Rectangle 2"/>
+          <p:cNvSpPr/>
+          <p:nvPr/>
+        </p:nvSpPr>
+        <p:spPr>
+          <a:xfrm>
+            <a:off x="4361733" y="4343744"/>
+            <a:ext cx="3867867" cy="587084"/>
+          </a:xfrm>
+          <a:prstGeom prst="rect">
+            <a:avLst/>
+          </a:prstGeom>
+        </p:spPr>
+        <p:txBody>
+          <a:bodyPr wrap="square">
+            <a:spAutoFit/>
+          </a:bodyPr>
+          <a:lstStyle/>
+          <a:p>
+            <a:pPr marL="0" marR="0" lvl="0" indent="0" algn="l" defTabSz="457200" rtl="0" eaLnBrk="1" fontAlgn="auto" latinLnBrk="0" hangingPunct="1">
+              <a:lnSpc>
+                <a:spcPct val="100000"/>
+              </a:lnSpc>
+              <a:spcBef>
+                <a:spcPts val="0"/>
+              </a:spcBef>
+              <a:spcAft>
+                <a:spcPts val="0"/>
+              </a:spcAft>
+              <a:buClrTx/>
+              <a:buSzTx/>
+              <a:buFontTx/>
+              <a:buNone/>
+              <a:tabLst/>
+              <a:defRPr/>
+            </a:pPr>
+            <a:r>
+              <a:rPr kumimoji="0" lang="en-US" sz="1000" b="0" i="0" u="none" strike="noStrike" kern="1200" cap="none" spc="0" normalizeH="0" baseline="0" noProof="0" dirty="0">
+                <a:ln>
+                  <a:noFill/>
+                </a:ln>
+                <a:solidFill>
+                  <a:prstClr val="black"/>
+                </a:solidFill>
+                <a:effectLst/>
+                <a:uLnTx/>
+                <a:uFillTx/>
+                <a:latin typeface="Calibri"/>
+                <a:ea typeface="+mn-ea"/>
+                <a:cs typeface="+mn-cs"/>
+                <a:hlinkClick r:id="rId5"/>
+              </a:rPr>
+              <a:t>https://www.faa.gov/about/office_org/headquarters_offices/ato/service_units/techops/navservices/gnss/waas/howitworks/</a:t>
+            </a:r>
+            <a:endParaRPr kumimoji="0" lang="en-US" sz="1000" b="0" i="0" u="none" strike="noStrike" kern="1200" cap="none" spc="0" normalizeH="0" baseline="0" noProof="0" dirty="0">
+              <a:ln>
+                <a:noFill/>
+              </a:ln>
+              <a:solidFill>
+                <a:prstClr val="black"/>
+              </a:solidFill>
+              <a:effectLst/>
+              <a:uLnTx/>
+              <a:uFillTx/>
+              <a:latin typeface="Calibri"/>
+              <a:ea typeface="+mn-ea"/>
+              <a:cs typeface="+mn-cs"/>
+            </a:endParaRPr>
+          </a:p>
+          <a:p>
+            <a:pPr marL="0" marR="0" lvl="0" indent="0" algn="l" defTabSz="457200" rtl="0" eaLnBrk="1" fontAlgn="auto" latinLnBrk="0" hangingPunct="1">
+              <a:lnSpc>
+                <a:spcPct val="100000"/>
+              </a:lnSpc>
+              <a:spcBef>
+                <a:spcPts val="0"/>
+              </a:spcBef>
+              <a:spcAft>
+                <a:spcPts val="0"/>
+              </a:spcAft>
+              <a:buClrTx/>
+              <a:buSzTx/>
+              <a:buFontTx/>
+              <a:buNone/>
+              <a:tabLst/>
+              <a:defRPr/>
+            </a:pPr>
+            <a:endParaRPr kumimoji="0" lang="en-US" sz="1215" b="0" i="0" u="none" strike="noStrike" kern="1200" cap="none" spc="0" normalizeH="0" baseline="0" noProof="0" dirty="0">
+              <a:ln>
+                <a:noFill/>
+              </a:ln>
+              <a:solidFill>
+                <a:prstClr val="black"/>
+              </a:solidFill>
+              <a:effectLst/>
+              <a:uLnTx/>
+              <a:uFillTx/>
+              <a:latin typeface="Calibri"/>
+              <a:ea typeface="+mn-ea"/>
+              <a:cs typeface="+mn-cs"/>
+            </a:endParaRPr>
+          </a:p>
+        </p:txBody>
+      </p:sp>
+      <p:cxnSp>
+        <p:nvCxnSpPr>
+          <p:cNvPr id="7" name="Straight Connector 6">
             <a:extLst>
               <a:ext uri="{FF2B5EF4-FFF2-40B4-BE49-F238E27FC236}">
-                <a16:creationId xmlns:a16="http://schemas.microsoft.com/office/drawing/2014/main" id="{D466FC72-7A82-0650-B29F-648E094CC979}"/>
+                <a16:creationId xmlns:a16="http://schemas.microsoft.com/office/drawing/2014/main" id="{80465FAB-3351-4BE0-96E0-4690D4973666}"/>
               </a:ext>
             </a:extLst>
           </p:cNvPr>
-          <p:cNvSpPr>
-            <a:spLocks noGrp="1"/>
-          </p:cNvSpPr>
-          <p:nvPr>
-            <p:ph type="title"/>
-          </p:nvPr>
-        </p:nvSpPr>
+          <p:cNvCxnSpPr/>
+          <p:nvPr/>
+        </p:nvCxnSpPr>
         <p:spPr>
           <a:xfrm>
-            <a:off x="392305" y="526617"/>
-            <a:ext cx="7444991" cy="403023"/>
+            <a:off x="152400" y="922910"/>
+            <a:ext cx="8001000" cy="0"/>
           </a:xfrm>
-        </p:spPr>
-        <p:txBody>
-          <a:bodyPr/>
-          <a:lstStyle/>
-          <a:p>
-            <a:r>
-              <a:rPr lang="en-US" altLang="zh-CN" dirty="0"/>
-              <a:t>Trimble </a:t>
-            </a:r>
-            <a:r>
-              <a:rPr lang="en-US" altLang="zh-CN" dirty="0" err="1"/>
-              <a:t>tdc</a:t>
-            </a:r>
-            <a:r>
-              <a:rPr lang="en-US" altLang="zh-CN" dirty="0"/>
-              <a:t> 100 series handheld overview</a:t>
-            </a:r>
-            <a:endParaRPr lang="zh-CN" altLang="en-US" dirty="0"/>
-          </a:p>
-        </p:txBody>
-      </p:sp>
-      <p:sp>
-        <p:nvSpPr>
-          <p:cNvPr id="3" name="Content Placeholder 2">
+          <a:prstGeom prst="line">
+            <a:avLst/>
+          </a:prstGeom>
+          <a:ln>
+            <a:solidFill>
+              <a:schemeClr val="tx1"/>
+            </a:solidFill>
+          </a:ln>
+          <a:effectLst/>
+        </p:spPr>
+        <p:style>
+          <a:lnRef idx="2">
+            <a:schemeClr val="accent1"/>
+          </a:lnRef>
+          <a:fillRef idx="0">
+            <a:schemeClr val="accent1"/>
+          </a:fillRef>
+          <a:effectRef idx="1">
+            <a:schemeClr val="accent1"/>
+          </a:effectRef>
+          <a:fontRef idx="minor">
+            <a:schemeClr val="tx1"/>
+          </a:fontRef>
+        </p:style>
+      </p:cxnSp>
+      <p:sp>
+        <p:nvSpPr>
+          <p:cNvPr id="8" name="Title 1">
             <a:extLst>
               <a:ext uri="{FF2B5EF4-FFF2-40B4-BE49-F238E27FC236}">
-                <a16:creationId xmlns:a16="http://schemas.microsoft.com/office/drawing/2014/main" id="{6FBA0C13-FAE7-8733-9A05-C4962EFD46C6}"/>
+                <a16:creationId xmlns:a16="http://schemas.microsoft.com/office/drawing/2014/main" id="{B5C674F2-25AB-4539-BD1D-8B93BAB89E13}"/>
               </a:ext>
             </a:extLst>
           </p:cNvPr>
-          <p:cNvSpPr>
-            <a:spLocks noGrp="1"/>
-          </p:cNvSpPr>
-          <p:nvPr>
-            <p:ph idx="1"/>
-          </p:nvPr>
+          <p:cNvSpPr txBox="1">
+            <a:spLocks/>
+          </p:cNvSpPr>
+          <p:nvPr/>
         </p:nvSpPr>
         <p:spPr>
           <a:xfrm>
-            <a:off x="392304" y="1118617"/>
-            <a:ext cx="7444990" cy="637032"/>
+            <a:off x="270933" y="195482"/>
+            <a:ext cx="8077200" cy="857250"/>
           </a:xfrm>
-        </p:spPr>
-        <p:txBody>
-          <a:bodyPr/>
-          <a:lstStyle/>
-          <a:p>
-            <a:r>
-              <a:rPr lang="en-US" altLang="zh-CN" dirty="0"/>
-              <a:t>https://www.youtube.com/watch?v=fimWxYMRiF8</a:t>
-            </a:r>
-            <a:endParaRPr lang="zh-CN" altLang="en-US" dirty="0"/>
-          </a:p>
-        </p:txBody>
-      </p:sp>
-      <p:sp>
-        <p:nvSpPr>
-          <p:cNvPr id="4" name="Slide Number Placeholder 3">
-            <a:extLst>
-              <a:ext uri="{FF2B5EF4-FFF2-40B4-BE49-F238E27FC236}">
-                <a16:creationId xmlns:a16="http://schemas.microsoft.com/office/drawing/2014/main" id="{64AA36AD-947B-43ED-804C-08693D83D8A8}"/>
-              </a:ext>
-            </a:extLst>
-          </p:cNvPr>
-          <p:cNvSpPr>
-            <a:spLocks noGrp="1"/>
-          </p:cNvSpPr>
-          <p:nvPr>
-            <p:ph type="sldNum" sz="quarter" idx="12"/>
-          </p:nvPr>
-        </p:nvSpPr>
-        <p:spPr/>
-        <p:txBody>
-          <a:bodyPr/>
-          <a:lstStyle/>
-          <a:p>
-            <a:fld id="{127DDC20-79C9-9647-820E-6D40A3D210C3}" type="slidenum">
-              <a:rPr lang="en-US" smtClean="0"/>
-              <a:pPr/>
-              <a:t>18</a:t>
-            </a:fld>
-            <a:endParaRPr lang="en-US"/>
+          <a:prstGeom prst="rect">
+            <a:avLst/>
+          </a:prstGeom>
+        </p:spPr>
+        <p:txBody>
+          <a:bodyPr vert="horz" lIns="91440" tIns="45720" rIns="91440" bIns="45720" rtlCol="0" anchor="ctr">
+            <a:normAutofit/>
+          </a:bodyPr>
+          <a:lstStyle>
+            <a:lvl1pPr algn="ctr" defTabSz="411480" rtl="0" eaLnBrk="1" latinLnBrk="0" hangingPunct="1">
+              <a:spcBef>
+                <a:spcPct val="0"/>
+              </a:spcBef>
+              <a:buNone/>
+              <a:defRPr sz="3960" kern="1200">
+                <a:solidFill>
+                  <a:schemeClr val="tx1"/>
+                </a:solidFill>
+                <a:latin typeface="+mj-lt"/>
+                <a:ea typeface="+mj-ea"/>
+                <a:cs typeface="+mj-cs"/>
+              </a:defRPr>
+            </a:lvl1pPr>
+          </a:lstStyle>
+          <a:p>
+            <a:pPr marL="0" marR="0" lvl="0" indent="0" algn="l" defTabSz="411480" rtl="0" eaLnBrk="1" fontAlgn="auto" latinLnBrk="0" hangingPunct="1">
+              <a:lnSpc>
+                <a:spcPct val="100000"/>
+              </a:lnSpc>
+              <a:spcBef>
+                <a:spcPct val="0"/>
+              </a:spcBef>
+              <a:spcAft>
+                <a:spcPts val="0"/>
+              </a:spcAft>
+              <a:buClrTx/>
+              <a:buSzTx/>
+              <a:buFontTx/>
+              <a:buNone/>
+              <a:tabLst/>
+              <a:defRPr/>
+            </a:pPr>
+            <a:r>
+              <a:rPr kumimoji="0" lang="en-US" altLang="en-US" sz="3200" b="0" i="0" u="none" strike="noStrike" kern="1200" cap="none" spc="0" normalizeH="0" baseline="0" noProof="0" dirty="0">
+                <a:ln>
+                  <a:noFill/>
+                </a:ln>
+                <a:solidFill>
+                  <a:srgbClr val="7030A0"/>
+                </a:solidFill>
+                <a:effectLst/>
+                <a:uLnTx/>
+                <a:uFillTx/>
+                <a:latin typeface="Calibri"/>
+                <a:ea typeface="+mj-ea"/>
+                <a:cs typeface="+mj-cs"/>
+              </a:rPr>
+              <a:t>Wide Area Augmentation System</a:t>
+            </a:r>
           </a:p>
         </p:txBody>
       </p:sp>
     </p:spTree>
     <p:extLst>
       <p:ext uri="{BB962C8B-B14F-4D97-AF65-F5344CB8AC3E}">
-        <p14:creationId xmlns:p14="http://schemas.microsoft.com/office/powerpoint/2010/main" val="4168480455"/>
+        <p14:creationId xmlns:p14="http://schemas.microsoft.com/office/powerpoint/2010/main" val="3057761233"/>
       </p:ext>
     </p:extLst>
   </p:cSld>
   <p:clrMapOvr>
     <a:masterClrMapping/>
   </p:clrMapOvr>
+  <mc:AlternateContent xmlns:mc="http://schemas.openxmlformats.org/markup-compatibility/2006" xmlns:p14="http://schemas.microsoft.com/office/powerpoint/2010/main">
+    <mc:Choice Requires="p14">
+      <p:transition spd="med" p14:dur="700">
+        <p:fade/>
+      </p:transition>
+    </mc:Choice>
+    <mc:Fallback xmlns="">
+      <p:transition spd="med">
+        <p:fade/>
+      </p:transition>
+    </mc:Fallback>
+  </mc:AlternateContent>
 </p:sld>
 </file>
 
@@ -26834,7 +30843,7 @@
           <p:cNvPr id="2" name="Title 1">
             <a:extLst>
               <a:ext uri="{FF2B5EF4-FFF2-40B4-BE49-F238E27FC236}">
-                <a16:creationId xmlns:a16="http://schemas.microsoft.com/office/drawing/2014/main" id="{BECF46BF-B5CD-D6E7-49F8-2846B90E2FF5}"/>
+                <a16:creationId xmlns:a16="http://schemas.microsoft.com/office/drawing/2014/main" id="{D466FC72-7A82-0650-B29F-648E094CC979}"/>
               </a:ext>
             </a:extLst>
           </p:cNvPr>
@@ -26848,7 +30857,7 @@
         <p:spPr>
           <a:xfrm>
             <a:off x="392305" y="526617"/>
-            <a:ext cx="7444991" cy="471603"/>
+            <a:ext cx="7444991" cy="403023"/>
           </a:xfrm>
         </p:spPr>
         <p:txBody>
@@ -26856,26 +30865,18 @@
           <a:lstStyle/>
           <a:p>
             <a:r>
-              <a:rPr lang="en-US" altLang="zh-CN" sz="2000" dirty="0">
-                <a:solidFill>
-                  <a:srgbClr val="7030A0"/>
-                </a:solidFill>
-              </a:rPr>
-              <a:t>In-Class Activity: Exploring GNSS with </a:t>
-            </a:r>
-            <a:r>
-              <a:rPr lang="en-US" altLang="zh-CN" sz="2000" dirty="0" err="1">
-                <a:solidFill>
-                  <a:srgbClr val="7030A0"/>
-                </a:solidFill>
-              </a:rPr>
-              <a:t>SatLook</a:t>
-            </a:r>
-            <a:endParaRPr lang="zh-CN" altLang="en-US" sz="2000" dirty="0">
-              <a:solidFill>
-                <a:srgbClr val="7030A0"/>
-              </a:solidFill>
-            </a:endParaRPr>
+              <a:rPr lang="en-US" altLang="zh-CN" dirty="0"/>
+              <a:t>Trimble </a:t>
+            </a:r>
+            <a:r>
+              <a:rPr lang="en-US" altLang="zh-CN" dirty="0" err="1"/>
+              <a:t>tdc</a:t>
+            </a:r>
+            <a:r>
+              <a:rPr lang="en-US" altLang="zh-CN" dirty="0"/>
+              <a:t> 100 series handheld overview</a:t>
+            </a:r>
+            <a:endParaRPr lang="zh-CN" altLang="en-US" dirty="0"/>
           </a:p>
         </p:txBody>
       </p:sp>
@@ -26884,7 +30885,7 @@
           <p:cNvPr id="3" name="Content Placeholder 2">
             <a:extLst>
               <a:ext uri="{FF2B5EF4-FFF2-40B4-BE49-F238E27FC236}">
-                <a16:creationId xmlns:a16="http://schemas.microsoft.com/office/drawing/2014/main" id="{830E38D9-98D2-F45D-B01B-0A676B492622}"/>
+                <a16:creationId xmlns:a16="http://schemas.microsoft.com/office/drawing/2014/main" id="{6FBA0C13-FAE7-8733-9A05-C4962EFD46C6}"/>
               </a:ext>
             </a:extLst>
           </p:cNvPr>
@@ -26897,21 +30898,19 @@
         </p:nvSpPr>
         <p:spPr>
           <a:xfrm>
-            <a:off x="392307" y="1060700"/>
-            <a:ext cx="7444990" cy="621792"/>
+            <a:off x="392304" y="1118617"/>
+            <a:ext cx="7444990" cy="637032"/>
           </a:xfrm>
         </p:spPr>
         <p:txBody>
-          <a:bodyPr>
-            <a:normAutofit/>
-          </a:bodyPr>
-          <a:lstStyle/>
-          <a:p>
-            <a:r>
-              <a:rPr lang="en-US" altLang="zh-CN" sz="1600" dirty="0"/>
-              <a:t>What do you think affects GPS accuracy?</a:t>
-            </a:r>
-            <a:endParaRPr lang="zh-CN" altLang="en-US" sz="1600" dirty="0"/>
+          <a:bodyPr/>
+          <a:lstStyle/>
+          <a:p>
+            <a:r>
+              <a:rPr lang="en-US" altLang="zh-CN" dirty="0"/>
+              <a:t>https://www.youtube.com/watch?v=fimWxYMRiF8</a:t>
+            </a:r>
+            <a:endParaRPr lang="zh-CN" altLang="en-US" dirty="0"/>
           </a:p>
         </p:txBody>
       </p:sp>
@@ -26920,7 +30919,7 @@
           <p:cNvPr id="4" name="Slide Number Placeholder 3">
             <a:extLst>
               <a:ext uri="{FF2B5EF4-FFF2-40B4-BE49-F238E27FC236}">
-                <a16:creationId xmlns:a16="http://schemas.microsoft.com/office/drawing/2014/main" id="{87AFF3DF-1D5B-444D-13A9-F9F72ADF32FA}"/>
+                <a16:creationId xmlns:a16="http://schemas.microsoft.com/office/drawing/2014/main" id="{64AA36AD-947B-43ED-804C-08693D83D8A8}"/>
               </a:ext>
             </a:extLst>
           </p:cNvPr>
@@ -26945,231 +30944,10 @@
           </a:p>
         </p:txBody>
       </p:sp>
-      <p:sp>
-        <p:nvSpPr>
-          <p:cNvPr id="6" name="TextBox 5">
-            <a:extLst>
-              <a:ext uri="{FF2B5EF4-FFF2-40B4-BE49-F238E27FC236}">
-                <a16:creationId xmlns:a16="http://schemas.microsoft.com/office/drawing/2014/main" id="{9A06EE18-841C-473C-E877-255939906159}"/>
-              </a:ext>
-            </a:extLst>
-          </p:cNvPr>
-          <p:cNvSpPr txBox="1"/>
-          <p:nvPr/>
-        </p:nvSpPr>
-        <p:spPr>
-          <a:xfrm>
-            <a:off x="1085977" y="1752601"/>
-            <a:ext cx="6751320" cy="2318583"/>
-          </a:xfrm>
-          <a:prstGeom prst="rect">
-            <a:avLst/>
-          </a:prstGeom>
-          <a:noFill/>
-        </p:spPr>
-        <p:txBody>
-          <a:bodyPr wrap="square" rtlCol="0">
-            <a:spAutoFit/>
-          </a:bodyPr>
-          <a:lstStyle/>
-          <a:p>
-            <a:pPr marL="342900" indent="-342900" defTabSz="308610">
-              <a:spcBef>
-                <a:spcPct val="20000"/>
-              </a:spcBef>
-              <a:spcAft>
-                <a:spcPts val="405"/>
-              </a:spcAft>
-              <a:buClr>
-                <a:schemeClr val="accent1"/>
-              </a:buClr>
-              <a:buSzPct val="92000"/>
-              <a:buFont typeface="+mj-lt"/>
-              <a:buAutoNum type="arabicPeriod"/>
-            </a:pPr>
-            <a:r>
-              <a:rPr lang="en-US" altLang="zh-CN" sz="1600" dirty="0">
-                <a:solidFill>
-                  <a:schemeClr val="tx1">
-                    <a:lumMod val="75000"/>
-                    <a:lumOff val="25000"/>
-                  </a:schemeClr>
-                </a:solidFill>
-              </a:rPr>
-              <a:t>Open </a:t>
-            </a:r>
-            <a:r>
-              <a:rPr lang="en-US" altLang="zh-CN" sz="1600" dirty="0" err="1">
-                <a:solidFill>
-                  <a:schemeClr val="tx1">
-                    <a:lumMod val="75000"/>
-                    <a:lumOff val="25000"/>
-                  </a:schemeClr>
-                </a:solidFill>
-              </a:rPr>
-              <a:t>SatLook</a:t>
-            </a:r>
-            <a:r>
-              <a:rPr lang="en-US" altLang="zh-CN" sz="1600" dirty="0">
-                <a:solidFill>
-                  <a:schemeClr val="tx1">
-                    <a:lumMod val="75000"/>
-                    <a:lumOff val="25000"/>
-                  </a:schemeClr>
-                </a:solidFill>
-              </a:rPr>
-              <a:t> on your TDC100.</a:t>
-            </a:r>
-          </a:p>
-          <a:p>
-            <a:pPr marL="342900" indent="-342900" defTabSz="308610">
-              <a:spcBef>
-                <a:spcPct val="20000"/>
-              </a:spcBef>
-              <a:spcAft>
-                <a:spcPts val="405"/>
-              </a:spcAft>
-              <a:buClr>
-                <a:schemeClr val="accent1"/>
-              </a:buClr>
-              <a:buSzPct val="92000"/>
-              <a:buFont typeface="+mj-lt"/>
-              <a:buAutoNum type="arabicPeriod"/>
-            </a:pPr>
-            <a:r>
-              <a:rPr lang="en-US" altLang="zh-CN" sz="1600" dirty="0">
-                <a:solidFill>
-                  <a:schemeClr val="tx1">
-                    <a:lumMod val="75000"/>
-                    <a:lumOff val="25000"/>
-                  </a:schemeClr>
-                </a:solidFill>
-              </a:rPr>
-              <a:t>Show the 3 tabs:</a:t>
-            </a:r>
-          </a:p>
-          <a:p>
-            <a:pPr marL="663750" lvl="1" indent="-206550" defTabSz="308610">
-              <a:spcBef>
-                <a:spcPct val="20000"/>
-              </a:spcBef>
-              <a:spcAft>
-                <a:spcPts val="405"/>
-              </a:spcAft>
-              <a:buClr>
-                <a:schemeClr val="accent1"/>
-              </a:buClr>
-              <a:buSzPct val="92000"/>
-              <a:buFont typeface="Wingdings 2" panose="05020102010507070707" pitchFamily="18" charset="2"/>
-              <a:buChar char=""/>
-            </a:pPr>
-            <a:r>
-              <a:rPr lang="en-US" altLang="zh-CN" sz="1600" dirty="0">
-                <a:solidFill>
-                  <a:schemeClr val="tx1">
-                    <a:lumMod val="75000"/>
-                    <a:lumOff val="25000"/>
-                  </a:schemeClr>
-                </a:solidFill>
-              </a:rPr>
-              <a:t>Sky Plot → Satellites in the sky (constellation + geometry).</a:t>
-            </a:r>
-          </a:p>
-          <a:p>
-            <a:pPr marL="663750" lvl="1" indent="-206550" defTabSz="308610">
-              <a:spcBef>
-                <a:spcPct val="20000"/>
-              </a:spcBef>
-              <a:spcAft>
-                <a:spcPts val="405"/>
-              </a:spcAft>
-              <a:buClr>
-                <a:schemeClr val="accent1"/>
-              </a:buClr>
-              <a:buSzPct val="92000"/>
-              <a:buFont typeface="Wingdings 2" panose="05020102010507070707" pitchFamily="18" charset="2"/>
-              <a:buChar char=""/>
-            </a:pPr>
-            <a:r>
-              <a:rPr lang="en-US" altLang="zh-CN" sz="1600" dirty="0">
-                <a:solidFill>
-                  <a:schemeClr val="tx1">
-                    <a:lumMod val="75000"/>
-                    <a:lumOff val="25000"/>
-                  </a:schemeClr>
-                </a:solidFill>
-              </a:rPr>
-              <a:t>NMEA → Raw GNSS data (for advanced logging).</a:t>
-            </a:r>
-          </a:p>
-          <a:p>
-            <a:pPr marL="663750" lvl="1" indent="-206550" defTabSz="308610">
-              <a:spcBef>
-                <a:spcPct val="20000"/>
-              </a:spcBef>
-              <a:spcAft>
-                <a:spcPts val="405"/>
-              </a:spcAft>
-              <a:buClr>
-                <a:schemeClr val="accent1"/>
-              </a:buClr>
-              <a:buSzPct val="92000"/>
-              <a:buFont typeface="Wingdings 2" panose="05020102010507070707" pitchFamily="18" charset="2"/>
-              <a:buChar char=""/>
-            </a:pPr>
-            <a:r>
-              <a:rPr lang="en-US" altLang="zh-CN" sz="1600" dirty="0">
-                <a:solidFill>
-                  <a:schemeClr val="tx1">
-                    <a:lumMod val="75000"/>
-                    <a:lumOff val="25000"/>
-                  </a:schemeClr>
-                </a:solidFill>
-              </a:rPr>
-              <a:t>SNR → Signal strength for each satellite.</a:t>
-            </a:r>
-          </a:p>
-          <a:p>
-            <a:pPr marL="663750" lvl="1" indent="-206550" defTabSz="308610">
-              <a:spcBef>
-                <a:spcPct val="20000"/>
-              </a:spcBef>
-              <a:spcAft>
-                <a:spcPts val="405"/>
-              </a:spcAft>
-              <a:buClr>
-                <a:schemeClr val="accent1"/>
-              </a:buClr>
-              <a:buSzPct val="92000"/>
-              <a:buFont typeface="Wingdings 2" panose="05020102010507070707" pitchFamily="18" charset="2"/>
-              <a:buChar char=""/>
-            </a:pPr>
-            <a:r>
-              <a:rPr lang="en-US" altLang="zh-CN" sz="1600" dirty="0">
-                <a:solidFill>
-                  <a:schemeClr val="tx1">
-                    <a:lumMod val="75000"/>
-                    <a:lumOff val="25000"/>
-                  </a:schemeClr>
-                </a:solidFill>
-              </a:rPr>
-              <a:t>Highlight: “Tracked vs Used satellites”, SNR levels, and constellations (GPS, GLONASS, BeiDou, Galileo).</a:t>
-            </a:r>
-            <a:endParaRPr lang="zh-CN" altLang="en-US" sz="1600" dirty="0">
-              <a:solidFill>
-                <a:schemeClr val="tx1">
-                  <a:lumMod val="75000"/>
-                  <a:lumOff val="25000"/>
-                </a:schemeClr>
-              </a:solidFill>
-            </a:endParaRPr>
-          </a:p>
-        </p:txBody>
-      </p:sp>
     </p:spTree>
     <p:extLst>
       <p:ext uri="{BB962C8B-B14F-4D97-AF65-F5344CB8AC3E}">
-        <p14:creationId xmlns:p14="http://schemas.microsoft.com/office/powerpoint/2010/main" val="2321144453"/>
+        <p14:creationId xmlns:p14="http://schemas.microsoft.com/office/powerpoint/2010/main" val="4168480455"/>
       </p:ext>
     </p:extLst>
   </p:cSld>
@@ -27888,7 +31666,7 @@
                   <a:srgbClr val="FFFFFF"/>
                 </a:solidFill>
               </a:rPr>
-              <a:t>Attribute table</a:t>
+              <a:t>GPS</a:t>
             </a:r>
           </a:p>
         </p:txBody>
@@ -28108,41 +31886,98 @@
           <a:chExt cx="0" cy="0"/>
         </a:xfrm>
       </p:grpSpPr>
-      <p:pic>
-        <p:nvPicPr>
-          <p:cNvPr id="7" name="Content Placeholder 6" descr="A screenshot of a cell phone&#10;&#10;AI-generated content may be incorrect.">
+      <p:sp>
+        <p:nvSpPr>
+          <p:cNvPr id="2" name="Title 1">
             <a:extLst>
               <a:ext uri="{FF2B5EF4-FFF2-40B4-BE49-F238E27FC236}">
-                <a16:creationId xmlns:a16="http://schemas.microsoft.com/office/drawing/2014/main" id="{DE80989D-19AC-0207-776D-DEB9DFADF45C}"/>
+                <a16:creationId xmlns:a16="http://schemas.microsoft.com/office/drawing/2014/main" id="{BECF46BF-B5CD-D6E7-49F8-2846B90E2FF5}"/>
               </a:ext>
             </a:extLst>
           </p:cNvPr>
-          <p:cNvPicPr>
-            <a:picLocks noGrp="1" noChangeAspect="1"/>
-          </p:cNvPicPr>
-          <p:nvPr>
-            <p:ph idx="1"/>
-          </p:nvPr>
-        </p:nvPicPr>
-        <p:blipFill>
-          <a:blip r:embed="rId2"/>
-          <a:stretch>
-            <a:fillRect/>
-          </a:stretch>
-        </p:blipFill>
+          <p:cNvSpPr>
+            <a:spLocks noGrp="1"/>
+          </p:cNvSpPr>
+          <p:nvPr>
+            <p:ph type="title"/>
+          </p:nvPr>
+        </p:nvSpPr>
         <p:spPr>
           <a:xfrm>
-            <a:off x="5463540" y="1072549"/>
-            <a:ext cx="2148075" cy="3818801"/>
+            <a:off x="392305" y="526617"/>
+            <a:ext cx="7444991" cy="471603"/>
           </a:xfrm>
         </p:spPr>
-      </p:pic>
+        <p:txBody>
+          <a:bodyPr/>
+          <a:lstStyle/>
+          <a:p>
+            <a:r>
+              <a:rPr lang="en-US" altLang="zh-CN" sz="2000" dirty="0">
+                <a:solidFill>
+                  <a:srgbClr val="7030A0"/>
+                </a:solidFill>
+              </a:rPr>
+              <a:t>In-Class Activity: Exploring GNSS with </a:t>
+            </a:r>
+            <a:r>
+              <a:rPr lang="en-US" altLang="zh-CN" sz="2000" dirty="0" err="1">
+                <a:solidFill>
+                  <a:srgbClr val="7030A0"/>
+                </a:solidFill>
+              </a:rPr>
+              <a:t>SatLook</a:t>
+            </a:r>
+            <a:endParaRPr lang="zh-CN" altLang="en-US" sz="2000" dirty="0">
+              <a:solidFill>
+                <a:srgbClr val="7030A0"/>
+              </a:solidFill>
+            </a:endParaRPr>
+          </a:p>
+        </p:txBody>
+      </p:sp>
+      <p:sp>
+        <p:nvSpPr>
+          <p:cNvPr id="3" name="Content Placeholder 2">
+            <a:extLst>
+              <a:ext uri="{FF2B5EF4-FFF2-40B4-BE49-F238E27FC236}">
+                <a16:creationId xmlns:a16="http://schemas.microsoft.com/office/drawing/2014/main" id="{830E38D9-98D2-F45D-B01B-0A676B492622}"/>
+              </a:ext>
+            </a:extLst>
+          </p:cNvPr>
+          <p:cNvSpPr>
+            <a:spLocks noGrp="1"/>
+          </p:cNvSpPr>
+          <p:nvPr>
+            <p:ph idx="1"/>
+          </p:nvPr>
+        </p:nvSpPr>
+        <p:spPr>
+          <a:xfrm>
+            <a:off x="392307" y="1060700"/>
+            <a:ext cx="7444990" cy="621792"/>
+          </a:xfrm>
+        </p:spPr>
+        <p:txBody>
+          <a:bodyPr>
+            <a:normAutofit/>
+          </a:bodyPr>
+          <a:lstStyle/>
+          <a:p>
+            <a:r>
+              <a:rPr lang="en-US" altLang="zh-CN" sz="1600" dirty="0"/>
+              <a:t>What do you think affects GPS accuracy?</a:t>
+            </a:r>
+            <a:endParaRPr lang="zh-CN" altLang="en-US" sz="1600" dirty="0"/>
+          </a:p>
+        </p:txBody>
+      </p:sp>
       <p:sp>
         <p:nvSpPr>
           <p:cNvPr id="4" name="Slide Number Placeholder 3">
             <a:extLst>
               <a:ext uri="{FF2B5EF4-FFF2-40B4-BE49-F238E27FC236}">
-                <a16:creationId xmlns:a16="http://schemas.microsoft.com/office/drawing/2014/main" id="{FC11821D-148B-55FE-43BD-159608F6886D}"/>
+                <a16:creationId xmlns:a16="http://schemas.microsoft.com/office/drawing/2014/main" id="{87AFF3DF-1D5B-444D-13A9-F9F72ADF32FA}"/>
               </a:ext>
             </a:extLst>
           </p:cNvPr>
@@ -28169,140 +32004,10 @@
       </p:sp>
       <p:sp>
         <p:nvSpPr>
-          <p:cNvPr id="5" name="Title 1">
+          <p:cNvPr id="6" name="TextBox 5">
             <a:extLst>
               <a:ext uri="{FF2B5EF4-FFF2-40B4-BE49-F238E27FC236}">
-                <a16:creationId xmlns:a16="http://schemas.microsoft.com/office/drawing/2014/main" id="{ED80DDB9-68EA-5F81-A54A-F26E46511FD9}"/>
-              </a:ext>
-            </a:extLst>
-          </p:cNvPr>
-          <p:cNvSpPr txBox="1">
-            <a:spLocks/>
-          </p:cNvSpPr>
-          <p:nvPr/>
-        </p:nvSpPr>
-        <p:spPr>
-          <a:xfrm>
-            <a:off x="392305" y="526617"/>
-            <a:ext cx="7444991" cy="471603"/>
-          </a:xfrm>
-          <a:prstGeom prst="rect">
-            <a:avLst/>
-          </a:prstGeom>
-        </p:spPr>
-        <p:txBody>
-          <a:bodyPr vert="horz" lIns="91440" tIns="45720" rIns="91440" bIns="45720" rtlCol="0" anchor="b">
-            <a:normAutofit/>
-          </a:bodyPr>
-          <a:lstStyle>
-            <a:lvl1pPr algn="l" defTabSz="308610" rtl="0" eaLnBrk="1" latinLnBrk="0" hangingPunct="1">
-              <a:lnSpc>
-                <a:spcPct val="100000"/>
-              </a:lnSpc>
-              <a:spcBef>
-                <a:spcPct val="0"/>
-              </a:spcBef>
-              <a:buNone/>
-              <a:defRPr sz="1890" b="0" kern="1200" cap="all">
-                <a:solidFill>
-                  <a:schemeClr val="tx1">
-                    <a:lumMod val="75000"/>
-                    <a:lumOff val="25000"/>
-                  </a:schemeClr>
-                </a:solidFill>
-                <a:latin typeface="+mj-lt"/>
-                <a:ea typeface="+mj-ea"/>
-                <a:cs typeface="+mj-cs"/>
-              </a:defRPr>
-            </a:lvl1pPr>
-            <a:lvl2pPr eaLnBrk="1" hangingPunct="1">
-              <a:defRPr>
-                <a:solidFill>
-                  <a:schemeClr val="tx2"/>
-                </a:solidFill>
-              </a:defRPr>
-            </a:lvl2pPr>
-            <a:lvl3pPr eaLnBrk="1" hangingPunct="1">
-              <a:defRPr>
-                <a:solidFill>
-                  <a:schemeClr val="tx2"/>
-                </a:solidFill>
-              </a:defRPr>
-            </a:lvl3pPr>
-            <a:lvl4pPr eaLnBrk="1" hangingPunct="1">
-              <a:defRPr>
-                <a:solidFill>
-                  <a:schemeClr val="tx2"/>
-                </a:solidFill>
-              </a:defRPr>
-            </a:lvl4pPr>
-            <a:lvl5pPr eaLnBrk="1" hangingPunct="1">
-              <a:defRPr>
-                <a:solidFill>
-                  <a:schemeClr val="tx2"/>
-                </a:solidFill>
-              </a:defRPr>
-            </a:lvl5pPr>
-            <a:lvl6pPr eaLnBrk="1" hangingPunct="1">
-              <a:defRPr>
-                <a:solidFill>
-                  <a:schemeClr val="tx2"/>
-                </a:solidFill>
-              </a:defRPr>
-            </a:lvl6pPr>
-            <a:lvl7pPr eaLnBrk="1" hangingPunct="1">
-              <a:defRPr>
-                <a:solidFill>
-                  <a:schemeClr val="tx2"/>
-                </a:solidFill>
-              </a:defRPr>
-            </a:lvl7pPr>
-            <a:lvl8pPr eaLnBrk="1" hangingPunct="1">
-              <a:defRPr>
-                <a:solidFill>
-                  <a:schemeClr val="tx2"/>
-                </a:solidFill>
-              </a:defRPr>
-            </a:lvl8pPr>
-            <a:lvl9pPr eaLnBrk="1" hangingPunct="1">
-              <a:defRPr>
-                <a:solidFill>
-                  <a:schemeClr val="tx2"/>
-                </a:solidFill>
-              </a:defRPr>
-            </a:lvl9pPr>
-          </a:lstStyle>
-          <a:p>
-            <a:r>
-              <a:rPr lang="en-US" altLang="zh-CN" sz="2000" dirty="0">
-                <a:solidFill>
-                  <a:srgbClr val="7030A0"/>
-                </a:solidFill>
-              </a:rPr>
-              <a:t>In-Class Activity: Exploring GNSS with </a:t>
-            </a:r>
-            <a:r>
-              <a:rPr lang="en-US" altLang="zh-CN" sz="2000" dirty="0" err="1">
-                <a:solidFill>
-                  <a:srgbClr val="7030A0"/>
-                </a:solidFill>
-              </a:rPr>
-              <a:t>SatLook</a:t>
-            </a:r>
-            <a:endParaRPr lang="zh-CN" altLang="en-US" sz="2000" dirty="0">
-              <a:solidFill>
-                <a:srgbClr val="7030A0"/>
-              </a:solidFill>
-            </a:endParaRPr>
-          </a:p>
-        </p:txBody>
-      </p:sp>
-      <p:sp>
-        <p:nvSpPr>
-          <p:cNvPr id="8" name="TextBox 7">
-            <a:extLst>
-              <a:ext uri="{FF2B5EF4-FFF2-40B4-BE49-F238E27FC236}">
-                <a16:creationId xmlns:a16="http://schemas.microsoft.com/office/drawing/2014/main" id="{5795BA1E-57E6-0652-1E2F-3AEED7AF1557}"/>
+                <a16:creationId xmlns:a16="http://schemas.microsoft.com/office/drawing/2014/main" id="{9A06EE18-841C-473C-E877-255939906159}"/>
               </a:ext>
             </a:extLst>
           </p:cNvPr>
@@ -28311,8 +32016,8 @@
         </p:nvSpPr>
         <p:spPr>
           <a:xfrm>
-            <a:off x="287336" y="1367877"/>
-            <a:ext cx="4937760" cy="2556597"/>
+            <a:off x="1085977" y="1752601"/>
+            <a:ext cx="6751320" cy="2318583"/>
           </a:xfrm>
           <a:prstGeom prst="rect">
             <a:avLst/>
@@ -28325,7 +32030,83 @@
           </a:bodyPr>
           <a:lstStyle/>
           <a:p>
-            <a:pPr marL="206550" indent="-206550" defTabSz="308610">
+            <a:pPr marL="342900" indent="-342900" defTabSz="308610">
+              <a:spcBef>
+                <a:spcPct val="20000"/>
+              </a:spcBef>
+              <a:spcAft>
+                <a:spcPts val="405"/>
+              </a:spcAft>
+              <a:buClr>
+                <a:schemeClr val="accent1"/>
+              </a:buClr>
+              <a:buSzPct val="92000"/>
+              <a:buFont typeface="+mj-lt"/>
+              <a:buAutoNum type="arabicPeriod"/>
+            </a:pPr>
+            <a:r>
+              <a:rPr lang="en-US" altLang="zh-CN" sz="1600" dirty="0">
+                <a:solidFill>
+                  <a:schemeClr val="tx1">
+                    <a:lumMod val="75000"/>
+                    <a:lumOff val="25000"/>
+                  </a:schemeClr>
+                </a:solidFill>
+              </a:rPr>
+              <a:t>Open </a:t>
+            </a:r>
+            <a:r>
+              <a:rPr lang="en-US" altLang="zh-CN" sz="1600" dirty="0" err="1">
+                <a:solidFill>
+                  <a:schemeClr val="tx1">
+                    <a:lumMod val="75000"/>
+                    <a:lumOff val="25000"/>
+                  </a:schemeClr>
+                </a:solidFill>
+              </a:rPr>
+              <a:t>SatLook</a:t>
+            </a:r>
+            <a:r>
+              <a:rPr lang="en-US" altLang="zh-CN" sz="1600" dirty="0">
+                <a:solidFill>
+                  <a:schemeClr val="tx1">
+                    <a:lumMod val="75000"/>
+                    <a:lumOff val="25000"/>
+                  </a:schemeClr>
+                </a:solidFill>
+              </a:rPr>
+              <a:t> on your TDC100.</a:t>
+            </a:r>
+          </a:p>
+          <a:p>
+            <a:pPr marL="342900" indent="-342900" defTabSz="308610">
+              <a:spcBef>
+                <a:spcPct val="20000"/>
+              </a:spcBef>
+              <a:spcAft>
+                <a:spcPts val="405"/>
+              </a:spcAft>
+              <a:buClr>
+                <a:schemeClr val="accent1"/>
+              </a:buClr>
+              <a:buSzPct val="92000"/>
+              <a:buFont typeface="+mj-lt"/>
+              <a:buAutoNum type="arabicPeriod"/>
+            </a:pPr>
+            <a:r>
+              <a:rPr lang="en-US" altLang="zh-CN" sz="1600" dirty="0">
+                <a:solidFill>
+                  <a:schemeClr val="tx1">
+                    <a:lumMod val="75000"/>
+                    <a:lumOff val="25000"/>
+                  </a:schemeClr>
+                </a:solidFill>
+              </a:rPr>
+              <a:t>Show the 3 tabs:</a:t>
+            </a:r>
+          </a:p>
+          <a:p>
+            <a:pPr marL="663750" lvl="1" indent="-206550" defTabSz="308610">
               <a:spcBef>
                 <a:spcPct val="20000"/>
               </a:spcBef>
@@ -28340,7 +32121,7 @@
               <a:buChar char=""/>
             </a:pPr>
             <a:r>
-              <a:rPr lang="en-US" altLang="zh-CN" sz="1200" dirty="0">
+              <a:rPr lang="en-US" altLang="zh-CN" sz="1600" dirty="0">
                 <a:solidFill>
                   <a:schemeClr val="tx1">
                     <a:lumMod val="75000"/>
@@ -28348,11 +32129,11 @@
                   </a:schemeClr>
                 </a:solidFill>
               </a:rPr>
-              <a:t>The polar plot shows the sky overhead, with your device in the center.</a:t>
-            </a:r>
-          </a:p>
-          <a:p>
-            <a:pPr marL="206550" indent="-206550" defTabSz="308610">
+              <a:t>Sky Plot → Satellites in the sky (constellation + geometry).</a:t>
+            </a:r>
+          </a:p>
+          <a:p>
+            <a:pPr marL="663750" lvl="1" indent="-206550" defTabSz="308610">
               <a:spcBef>
                 <a:spcPct val="20000"/>
               </a:spcBef>
@@ -28367,7 +32148,7 @@
               <a:buChar char=""/>
             </a:pPr>
             <a:r>
-              <a:rPr lang="en-US" altLang="zh-CN" sz="1200" dirty="0">
+              <a:rPr lang="en-US" altLang="zh-CN" sz="1600" dirty="0">
                 <a:solidFill>
                   <a:schemeClr val="tx1">
                     <a:lumMod val="75000"/>
@@ -28375,11 +32156,11 @@
                   </a:schemeClr>
                 </a:solidFill>
               </a:rPr>
-              <a:t>Each dot = a satellite being tracked.</a:t>
-            </a:r>
-          </a:p>
-          <a:p>
-            <a:pPr marL="206550" indent="-206550" defTabSz="308610">
+              <a:t>NMEA → Raw GNSS data (for advanced logging).</a:t>
+            </a:r>
+          </a:p>
+          <a:p>
+            <a:pPr marL="663750" lvl="1" indent="-206550" defTabSz="308610">
               <a:spcBef>
                 <a:spcPct val="20000"/>
               </a:spcBef>
@@ -28394,7 +32175,7 @@
               <a:buChar char=""/>
             </a:pPr>
             <a:r>
-              <a:rPr lang="en-US" altLang="zh-CN" sz="1200" dirty="0">
+              <a:rPr lang="en-US" altLang="zh-CN" sz="1600" dirty="0">
                 <a:solidFill>
                   <a:schemeClr val="tx1">
                     <a:lumMod val="75000"/>
@@ -28402,11 +32183,11 @@
                   </a:schemeClr>
                 </a:solidFill>
               </a:rPr>
-              <a:t>Numbers inside the circles = satellite PRN numbers (identifiers).</a:t>
-            </a:r>
-          </a:p>
-          <a:p>
-            <a:pPr marL="206550" indent="-206550" defTabSz="308610">
+              <a:t>SNR → Signal strength for each satellite.</a:t>
+            </a:r>
+          </a:p>
+          <a:p>
+            <a:pPr marL="663750" lvl="1" indent="-206550" defTabSz="308610">
               <a:spcBef>
                 <a:spcPct val="20000"/>
               </a:spcBef>
@@ -28421,7 +32202,7 @@
               <a:buChar char=""/>
             </a:pPr>
             <a:r>
-              <a:rPr lang="en-US" altLang="zh-CN" sz="1200" dirty="0">
+              <a:rPr lang="en-US" altLang="zh-CN" sz="1600" dirty="0">
                 <a:solidFill>
                   <a:schemeClr val="tx1">
                     <a:lumMod val="75000"/>
@@ -28429,128 +32210,9 @@
                   </a:schemeClr>
                 </a:solidFill>
               </a:rPr>
-              <a:t>Position of the dot = where the satellite is in the sky (azimuth &amp; elevation).</a:t>
-            </a:r>
-          </a:p>
-          <a:p>
-            <a:pPr marL="206550" indent="-206550" defTabSz="308610">
-              <a:spcBef>
-                <a:spcPct val="20000"/>
-              </a:spcBef>
-              <a:spcAft>
-                <a:spcPts val="405"/>
-              </a:spcAft>
-              <a:buClr>
-                <a:schemeClr val="accent1"/>
-              </a:buClr>
-              <a:buSzPct val="92000"/>
-              <a:buFont typeface="Wingdings 2" panose="05020102010507070707" pitchFamily="18" charset="2"/>
-              <a:buChar char=""/>
-            </a:pPr>
-            <a:r>
-              <a:rPr lang="en-US" altLang="zh-CN" sz="1200" dirty="0">
-                <a:solidFill>
-                  <a:schemeClr val="tx1">
-                    <a:lumMod val="75000"/>
-                    <a:lumOff val="25000"/>
-                  </a:schemeClr>
-                </a:solidFill>
-              </a:rPr>
-              <a:t>“Tracked: 9 Used: 5” at the bottom means:</a:t>
-            </a:r>
-          </a:p>
-          <a:p>
-            <a:pPr marL="663750" lvl="1" indent="-206550" defTabSz="308610">
-              <a:spcBef>
-                <a:spcPct val="20000"/>
-              </a:spcBef>
-              <a:spcAft>
-                <a:spcPts val="405"/>
-              </a:spcAft>
-              <a:buClr>
-                <a:schemeClr val="accent1"/>
-              </a:buClr>
-              <a:buSzPct val="92000"/>
-              <a:buFont typeface="Wingdings" panose="05000000000000000000" pitchFamily="2" charset="2"/>
-              <a:buChar char="Ø"/>
-            </a:pPr>
-            <a:r>
-              <a:rPr lang="en-US" altLang="zh-CN" sz="1200" dirty="0">
-                <a:solidFill>
-                  <a:schemeClr val="tx1">
-                    <a:lumMod val="75000"/>
-                    <a:lumOff val="25000"/>
-                  </a:schemeClr>
-                </a:solidFill>
-              </a:rPr>
-              <a:t>9 satellites are visible</a:t>
-            </a:r>
-          </a:p>
-          <a:p>
-            <a:pPr marL="663750" lvl="1" indent="-206550" defTabSz="308610">
-              <a:spcBef>
-                <a:spcPct val="20000"/>
-              </a:spcBef>
-              <a:spcAft>
-                <a:spcPts val="405"/>
-              </a:spcAft>
-              <a:buClr>
-                <a:schemeClr val="accent1"/>
-              </a:buClr>
-              <a:buSzPct val="92000"/>
-              <a:buFont typeface="Wingdings" panose="05000000000000000000" pitchFamily="2" charset="2"/>
-              <a:buChar char="Ø"/>
-            </a:pPr>
-            <a:r>
-              <a:rPr lang="en-US" altLang="zh-CN" sz="1200" dirty="0">
-                <a:solidFill>
-                  <a:schemeClr val="tx1">
-                    <a:lumMod val="75000"/>
-                    <a:lumOff val="25000"/>
-                  </a:schemeClr>
-                </a:solidFill>
-              </a:rPr>
-              <a:t>5 are actually being used in your position calculation</a:t>
-            </a:r>
-          </a:p>
-          <a:p>
-            <a:pPr marL="206550" indent="-206550" defTabSz="308610">
-              <a:spcBef>
-                <a:spcPct val="20000"/>
-              </a:spcBef>
-              <a:spcAft>
-                <a:spcPts val="405"/>
-              </a:spcAft>
-              <a:buClr>
-                <a:schemeClr val="accent1"/>
-              </a:buClr>
-              <a:buSzPct val="92000"/>
-              <a:buFont typeface="Wingdings 2" panose="05020102010507070707" pitchFamily="18" charset="2"/>
-              <a:buChar char=""/>
-            </a:pPr>
-            <a:r>
-              <a:rPr lang="zh-CN" altLang="en-US" sz="1200" dirty="0">
-                <a:solidFill>
-                  <a:schemeClr val="tx1">
-                    <a:lumMod val="75000"/>
-                    <a:lumOff val="25000"/>
-                  </a:schemeClr>
-                </a:solidFill>
-              </a:rPr>
-              <a:t>👉 </a:t>
-            </a:r>
-            <a:r>
-              <a:rPr lang="en-US" altLang="zh-CN" sz="1200" dirty="0">
-                <a:solidFill>
-                  <a:schemeClr val="tx1">
-                    <a:lumMod val="75000"/>
-                    <a:lumOff val="25000"/>
-                  </a:schemeClr>
-                </a:solidFill>
-              </a:rPr>
-              <a:t>This tells you how well the antenna is seeing the sky. If many satellites are visible and used, your accuracy improves.</a:t>
-            </a:r>
-            <a:endParaRPr lang="zh-CN" altLang="en-US" sz="1200" dirty="0">
+              <a:t>Highlight: “Tracked vs Used satellites”, SNR levels, and constellations (GPS, GLONASS, BeiDou, Galileo).</a:t>
+            </a:r>
+            <a:endParaRPr lang="zh-CN" altLang="en-US" sz="1600" dirty="0">
               <a:solidFill>
                 <a:schemeClr val="tx1">
                   <a:lumMod val="75000"/>
@@ -28564,7 +32226,7 @@
     </p:spTree>
     <p:extLst>
       <p:ext uri="{BB962C8B-B14F-4D97-AF65-F5344CB8AC3E}">
-        <p14:creationId xmlns:p14="http://schemas.microsoft.com/office/powerpoint/2010/main" val="3525545515"/>
+        <p14:creationId xmlns:p14="http://schemas.microsoft.com/office/powerpoint/2010/main" val="2321144453"/>
       </p:ext>
     </p:extLst>
   </p:cSld>
@@ -28591,6 +32253,489 @@
           <a:chExt cx="0" cy="0"/>
         </a:xfrm>
       </p:grpSpPr>
+      <p:pic>
+        <p:nvPicPr>
+          <p:cNvPr id="7" name="Content Placeholder 6" descr="A screenshot of a cell phone&#10;&#10;AI-generated content may be incorrect.">
+            <a:extLst>
+              <a:ext uri="{FF2B5EF4-FFF2-40B4-BE49-F238E27FC236}">
+                <a16:creationId xmlns:a16="http://schemas.microsoft.com/office/drawing/2014/main" id="{DE80989D-19AC-0207-776D-DEB9DFADF45C}"/>
+              </a:ext>
+            </a:extLst>
+          </p:cNvPr>
+          <p:cNvPicPr>
+            <a:picLocks noGrp="1" noChangeAspect="1"/>
+          </p:cNvPicPr>
+          <p:nvPr>
+            <p:ph idx="1"/>
+          </p:nvPr>
+        </p:nvPicPr>
+        <p:blipFill>
+          <a:blip r:embed="rId2"/>
+          <a:stretch>
+            <a:fillRect/>
+          </a:stretch>
+        </p:blipFill>
+        <p:spPr>
+          <a:xfrm>
+            <a:off x="5463540" y="1072549"/>
+            <a:ext cx="2148075" cy="3818801"/>
+          </a:xfrm>
+        </p:spPr>
+      </p:pic>
+      <p:sp>
+        <p:nvSpPr>
+          <p:cNvPr id="4" name="Slide Number Placeholder 3">
+            <a:extLst>
+              <a:ext uri="{FF2B5EF4-FFF2-40B4-BE49-F238E27FC236}">
+                <a16:creationId xmlns:a16="http://schemas.microsoft.com/office/drawing/2014/main" id="{FC11821D-148B-55FE-43BD-159608F6886D}"/>
+              </a:ext>
+            </a:extLst>
+          </p:cNvPr>
+          <p:cNvSpPr>
+            <a:spLocks noGrp="1"/>
+          </p:cNvSpPr>
+          <p:nvPr>
+            <p:ph type="sldNum" sz="quarter" idx="12"/>
+          </p:nvPr>
+        </p:nvSpPr>
+        <p:spPr/>
+        <p:txBody>
+          <a:bodyPr/>
+          <a:lstStyle/>
+          <a:p>
+            <a:fld id="{127DDC20-79C9-9647-820E-6D40A3D210C3}" type="slidenum">
+              <a:rPr lang="en-US" smtClean="0"/>
+              <a:pPr/>
+              <a:t>21</a:t>
+            </a:fld>
+            <a:endParaRPr lang="en-US"/>
+          </a:p>
+        </p:txBody>
+      </p:sp>
+      <p:sp>
+        <p:nvSpPr>
+          <p:cNvPr id="5" name="Title 1">
+            <a:extLst>
+              <a:ext uri="{FF2B5EF4-FFF2-40B4-BE49-F238E27FC236}">
+                <a16:creationId xmlns:a16="http://schemas.microsoft.com/office/drawing/2014/main" id="{ED80DDB9-68EA-5F81-A54A-F26E46511FD9}"/>
+              </a:ext>
+            </a:extLst>
+          </p:cNvPr>
+          <p:cNvSpPr txBox="1">
+            <a:spLocks/>
+          </p:cNvSpPr>
+          <p:nvPr/>
+        </p:nvSpPr>
+        <p:spPr>
+          <a:xfrm>
+            <a:off x="392305" y="526617"/>
+            <a:ext cx="7444991" cy="471603"/>
+          </a:xfrm>
+          <a:prstGeom prst="rect">
+            <a:avLst/>
+          </a:prstGeom>
+        </p:spPr>
+        <p:txBody>
+          <a:bodyPr vert="horz" lIns="91440" tIns="45720" rIns="91440" bIns="45720" rtlCol="0" anchor="b">
+            <a:normAutofit/>
+          </a:bodyPr>
+          <a:lstStyle>
+            <a:lvl1pPr algn="l" defTabSz="308610" rtl="0" eaLnBrk="1" latinLnBrk="0" hangingPunct="1">
+              <a:lnSpc>
+                <a:spcPct val="100000"/>
+              </a:lnSpc>
+              <a:spcBef>
+                <a:spcPct val="0"/>
+              </a:spcBef>
+              <a:buNone/>
+              <a:defRPr sz="1890" b="0" kern="1200" cap="all">
+                <a:solidFill>
+                  <a:schemeClr val="tx1">
+                    <a:lumMod val="75000"/>
+                    <a:lumOff val="25000"/>
+                  </a:schemeClr>
+                </a:solidFill>
+                <a:latin typeface="+mj-lt"/>
+                <a:ea typeface="+mj-ea"/>
+                <a:cs typeface="+mj-cs"/>
+              </a:defRPr>
+            </a:lvl1pPr>
+            <a:lvl2pPr eaLnBrk="1" hangingPunct="1">
+              <a:defRPr>
+                <a:solidFill>
+                  <a:schemeClr val="tx2"/>
+                </a:solidFill>
+              </a:defRPr>
+            </a:lvl2pPr>
+            <a:lvl3pPr eaLnBrk="1" hangingPunct="1">
+              <a:defRPr>
+                <a:solidFill>
+                  <a:schemeClr val="tx2"/>
+                </a:solidFill>
+              </a:defRPr>
+            </a:lvl3pPr>
+            <a:lvl4pPr eaLnBrk="1" hangingPunct="1">
+              <a:defRPr>
+                <a:solidFill>
+                  <a:schemeClr val="tx2"/>
+                </a:solidFill>
+              </a:defRPr>
+            </a:lvl4pPr>
+            <a:lvl5pPr eaLnBrk="1" hangingPunct="1">
+              <a:defRPr>
+                <a:solidFill>
+                  <a:schemeClr val="tx2"/>
+                </a:solidFill>
+              </a:defRPr>
+            </a:lvl5pPr>
+            <a:lvl6pPr eaLnBrk="1" hangingPunct="1">
+              <a:defRPr>
+                <a:solidFill>
+                  <a:schemeClr val="tx2"/>
+                </a:solidFill>
+              </a:defRPr>
+            </a:lvl6pPr>
+            <a:lvl7pPr eaLnBrk="1" hangingPunct="1">
+              <a:defRPr>
+                <a:solidFill>
+                  <a:schemeClr val="tx2"/>
+                </a:solidFill>
+              </a:defRPr>
+            </a:lvl7pPr>
+            <a:lvl8pPr eaLnBrk="1" hangingPunct="1">
+              <a:defRPr>
+                <a:solidFill>
+                  <a:schemeClr val="tx2"/>
+                </a:solidFill>
+              </a:defRPr>
+            </a:lvl8pPr>
+            <a:lvl9pPr eaLnBrk="1" hangingPunct="1">
+              <a:defRPr>
+                <a:solidFill>
+                  <a:schemeClr val="tx2"/>
+                </a:solidFill>
+              </a:defRPr>
+            </a:lvl9pPr>
+          </a:lstStyle>
+          <a:p>
+            <a:r>
+              <a:rPr lang="en-US" altLang="zh-CN" sz="2000" dirty="0">
+                <a:solidFill>
+                  <a:srgbClr val="7030A0"/>
+                </a:solidFill>
+              </a:rPr>
+              <a:t>In-Class Activity: Exploring GNSS with </a:t>
+            </a:r>
+            <a:r>
+              <a:rPr lang="en-US" altLang="zh-CN" sz="2000" dirty="0" err="1">
+                <a:solidFill>
+                  <a:srgbClr val="7030A0"/>
+                </a:solidFill>
+              </a:rPr>
+              <a:t>SatLook</a:t>
+            </a:r>
+            <a:endParaRPr lang="zh-CN" altLang="en-US" sz="2000" dirty="0">
+              <a:solidFill>
+                <a:srgbClr val="7030A0"/>
+              </a:solidFill>
+            </a:endParaRPr>
+          </a:p>
+        </p:txBody>
+      </p:sp>
+      <p:sp>
+        <p:nvSpPr>
+          <p:cNvPr id="8" name="TextBox 7">
+            <a:extLst>
+              <a:ext uri="{FF2B5EF4-FFF2-40B4-BE49-F238E27FC236}">
+                <a16:creationId xmlns:a16="http://schemas.microsoft.com/office/drawing/2014/main" id="{5795BA1E-57E6-0652-1E2F-3AEED7AF1557}"/>
+              </a:ext>
+            </a:extLst>
+          </p:cNvPr>
+          <p:cNvSpPr txBox="1"/>
+          <p:nvPr/>
+        </p:nvSpPr>
+        <p:spPr>
+          <a:xfrm>
+            <a:off x="287336" y="1367877"/>
+            <a:ext cx="4937760" cy="2556597"/>
+          </a:xfrm>
+          <a:prstGeom prst="rect">
+            <a:avLst/>
+          </a:prstGeom>
+          <a:noFill/>
+        </p:spPr>
+        <p:txBody>
+          <a:bodyPr wrap="square" rtlCol="0">
+            <a:spAutoFit/>
+          </a:bodyPr>
+          <a:lstStyle/>
+          <a:p>
+            <a:pPr marL="206550" indent="-206550" defTabSz="308610">
+              <a:spcBef>
+                <a:spcPct val="20000"/>
+              </a:spcBef>
+              <a:spcAft>
+                <a:spcPts val="405"/>
+              </a:spcAft>
+              <a:buClr>
+                <a:schemeClr val="accent1"/>
+              </a:buClr>
+              <a:buSzPct val="92000"/>
+              <a:buFont typeface="Wingdings 2" panose="05020102010507070707" pitchFamily="18" charset="2"/>
+              <a:buChar char=""/>
+            </a:pPr>
+            <a:r>
+              <a:rPr lang="en-US" altLang="zh-CN" sz="1200" dirty="0">
+                <a:solidFill>
+                  <a:schemeClr val="tx1">
+                    <a:lumMod val="75000"/>
+                    <a:lumOff val="25000"/>
+                  </a:schemeClr>
+                </a:solidFill>
+              </a:rPr>
+              <a:t>The polar plot shows the sky overhead, with your device in the center.</a:t>
+            </a:r>
+          </a:p>
+          <a:p>
+            <a:pPr marL="206550" indent="-206550" defTabSz="308610">
+              <a:spcBef>
+                <a:spcPct val="20000"/>
+              </a:spcBef>
+              <a:spcAft>
+                <a:spcPts val="405"/>
+              </a:spcAft>
+              <a:buClr>
+                <a:schemeClr val="accent1"/>
+              </a:buClr>
+              <a:buSzPct val="92000"/>
+              <a:buFont typeface="Wingdings 2" panose="05020102010507070707" pitchFamily="18" charset="2"/>
+              <a:buChar char=""/>
+            </a:pPr>
+            <a:r>
+              <a:rPr lang="en-US" altLang="zh-CN" sz="1200" dirty="0">
+                <a:solidFill>
+                  <a:schemeClr val="tx1">
+                    <a:lumMod val="75000"/>
+                    <a:lumOff val="25000"/>
+                  </a:schemeClr>
+                </a:solidFill>
+              </a:rPr>
+              <a:t>Each dot = a satellite being tracked.</a:t>
+            </a:r>
+          </a:p>
+          <a:p>
+            <a:pPr marL="206550" indent="-206550" defTabSz="308610">
+              <a:spcBef>
+                <a:spcPct val="20000"/>
+              </a:spcBef>
+              <a:spcAft>
+                <a:spcPts val="405"/>
+              </a:spcAft>
+              <a:buClr>
+                <a:schemeClr val="accent1"/>
+              </a:buClr>
+              <a:buSzPct val="92000"/>
+              <a:buFont typeface="Wingdings 2" panose="05020102010507070707" pitchFamily="18" charset="2"/>
+              <a:buChar char=""/>
+            </a:pPr>
+            <a:r>
+              <a:rPr lang="en-US" altLang="zh-CN" sz="1200" dirty="0">
+                <a:solidFill>
+                  <a:schemeClr val="tx1">
+                    <a:lumMod val="75000"/>
+                    <a:lumOff val="25000"/>
+                  </a:schemeClr>
+                </a:solidFill>
+              </a:rPr>
+              <a:t>Numbers inside the circles = satellite PRN numbers (identifiers).</a:t>
+            </a:r>
+          </a:p>
+          <a:p>
+            <a:pPr marL="206550" indent="-206550" defTabSz="308610">
+              <a:spcBef>
+                <a:spcPct val="20000"/>
+              </a:spcBef>
+              <a:spcAft>
+                <a:spcPts val="405"/>
+              </a:spcAft>
+              <a:buClr>
+                <a:schemeClr val="accent1"/>
+              </a:buClr>
+              <a:buSzPct val="92000"/>
+              <a:buFont typeface="Wingdings 2" panose="05020102010507070707" pitchFamily="18" charset="2"/>
+              <a:buChar char=""/>
+            </a:pPr>
+            <a:r>
+              <a:rPr lang="en-US" altLang="zh-CN" sz="1200" dirty="0">
+                <a:solidFill>
+                  <a:schemeClr val="tx1">
+                    <a:lumMod val="75000"/>
+                    <a:lumOff val="25000"/>
+                  </a:schemeClr>
+                </a:solidFill>
+              </a:rPr>
+              <a:t>Position of the dot = where the satellite is in the sky (azimuth &amp; elevation).</a:t>
+            </a:r>
+          </a:p>
+          <a:p>
+            <a:pPr marL="206550" indent="-206550" defTabSz="308610">
+              <a:spcBef>
+                <a:spcPct val="20000"/>
+              </a:spcBef>
+              <a:spcAft>
+                <a:spcPts val="405"/>
+              </a:spcAft>
+              <a:buClr>
+                <a:schemeClr val="accent1"/>
+              </a:buClr>
+              <a:buSzPct val="92000"/>
+              <a:buFont typeface="Wingdings 2" panose="05020102010507070707" pitchFamily="18" charset="2"/>
+              <a:buChar char=""/>
+            </a:pPr>
+            <a:r>
+              <a:rPr lang="en-US" altLang="zh-CN" sz="1200" dirty="0">
+                <a:solidFill>
+                  <a:schemeClr val="tx1">
+                    <a:lumMod val="75000"/>
+                    <a:lumOff val="25000"/>
+                  </a:schemeClr>
+                </a:solidFill>
+              </a:rPr>
+              <a:t>“Tracked: 9 Used: 5” at the bottom means:</a:t>
+            </a:r>
+          </a:p>
+          <a:p>
+            <a:pPr marL="663750" lvl="1" indent="-206550" defTabSz="308610">
+              <a:spcBef>
+                <a:spcPct val="20000"/>
+              </a:spcBef>
+              <a:spcAft>
+                <a:spcPts val="405"/>
+              </a:spcAft>
+              <a:buClr>
+                <a:schemeClr val="accent1"/>
+              </a:buClr>
+              <a:buSzPct val="92000"/>
+              <a:buFont typeface="Wingdings" panose="05000000000000000000" pitchFamily="2" charset="2"/>
+              <a:buChar char="Ø"/>
+            </a:pPr>
+            <a:r>
+              <a:rPr lang="en-US" altLang="zh-CN" sz="1200" dirty="0">
+                <a:solidFill>
+                  <a:schemeClr val="tx1">
+                    <a:lumMod val="75000"/>
+                    <a:lumOff val="25000"/>
+                  </a:schemeClr>
+                </a:solidFill>
+              </a:rPr>
+              <a:t>9 satellites are visible</a:t>
+            </a:r>
+          </a:p>
+          <a:p>
+            <a:pPr marL="663750" lvl="1" indent="-206550" defTabSz="308610">
+              <a:spcBef>
+                <a:spcPct val="20000"/>
+              </a:spcBef>
+              <a:spcAft>
+                <a:spcPts val="405"/>
+              </a:spcAft>
+              <a:buClr>
+                <a:schemeClr val="accent1"/>
+              </a:buClr>
+              <a:buSzPct val="92000"/>
+              <a:buFont typeface="Wingdings" panose="05000000000000000000" pitchFamily="2" charset="2"/>
+              <a:buChar char="Ø"/>
+            </a:pPr>
+            <a:r>
+              <a:rPr lang="en-US" altLang="zh-CN" sz="1200" dirty="0">
+                <a:solidFill>
+                  <a:schemeClr val="tx1">
+                    <a:lumMod val="75000"/>
+                    <a:lumOff val="25000"/>
+                  </a:schemeClr>
+                </a:solidFill>
+              </a:rPr>
+              <a:t>5 are actually being used in your position calculation</a:t>
+            </a:r>
+          </a:p>
+          <a:p>
+            <a:pPr marL="206550" indent="-206550" defTabSz="308610">
+              <a:spcBef>
+                <a:spcPct val="20000"/>
+              </a:spcBef>
+              <a:spcAft>
+                <a:spcPts val="405"/>
+              </a:spcAft>
+              <a:buClr>
+                <a:schemeClr val="accent1"/>
+              </a:buClr>
+              <a:buSzPct val="92000"/>
+              <a:buFont typeface="Wingdings 2" panose="05020102010507070707" pitchFamily="18" charset="2"/>
+              <a:buChar char=""/>
+            </a:pPr>
+            <a:r>
+              <a:rPr lang="zh-CN" altLang="en-US" sz="1200" dirty="0">
+                <a:solidFill>
+                  <a:schemeClr val="tx1">
+                    <a:lumMod val="75000"/>
+                    <a:lumOff val="25000"/>
+                  </a:schemeClr>
+                </a:solidFill>
+              </a:rPr>
+              <a:t>👉 </a:t>
+            </a:r>
+            <a:r>
+              <a:rPr lang="en-US" altLang="zh-CN" sz="1200" dirty="0">
+                <a:solidFill>
+                  <a:schemeClr val="tx1">
+                    <a:lumMod val="75000"/>
+                    <a:lumOff val="25000"/>
+                  </a:schemeClr>
+                </a:solidFill>
+              </a:rPr>
+              <a:t>This tells you how well the antenna is seeing the sky. If many satellites are visible and used, your accuracy improves.</a:t>
+            </a:r>
+            <a:endParaRPr lang="zh-CN" altLang="en-US" sz="1200" dirty="0">
+              <a:solidFill>
+                <a:schemeClr val="tx1">
+                  <a:lumMod val="75000"/>
+                  <a:lumOff val="25000"/>
+                </a:schemeClr>
+              </a:solidFill>
+            </a:endParaRPr>
+          </a:p>
+        </p:txBody>
+      </p:sp>
+    </p:spTree>
+    <p:extLst>
+      <p:ext uri="{BB962C8B-B14F-4D97-AF65-F5344CB8AC3E}">
+        <p14:creationId xmlns:p14="http://schemas.microsoft.com/office/powerpoint/2010/main" val="3525545515"/>
+      </p:ext>
+    </p:extLst>
+  </p:cSld>
+  <p:clrMapOvr>
+    <a:masterClrMapping/>
+  </p:clrMapOvr>
+</p:sld>
+</file>
+
+<file path=ppt/slides/slide22.xml><?xml version="1.0" encoding="utf-8"?>
+<p:sld xmlns:a="http://schemas.openxmlformats.org/drawingml/2006/main" xmlns:r="http://schemas.openxmlformats.org/officeDocument/2006/relationships" xmlns:p="http://schemas.openxmlformats.org/presentationml/2006/main">
+  <p:cSld>
+    <p:spTree>
+      <p:nvGrpSpPr>
+        <p:cNvPr id="1" name=""/>
+        <p:cNvGrpSpPr/>
+        <p:nvPr/>
+      </p:nvGrpSpPr>
+      <p:grpSpPr>
+        <a:xfrm>
+          <a:off x="0" y="0"/>
+          <a:ext cx="0" cy="0"/>
+          <a:chOff x="0" y="0"/>
+          <a:chExt cx="0" cy="0"/>
+        </a:xfrm>
+      </p:grpSpPr>
       <p:sp>
         <p:nvSpPr>
           <p:cNvPr id="3" name="Content Placeholder 2">
@@ -28712,7 +32857,7 @@
             <a:fld id="{127DDC20-79C9-9647-820E-6D40A3D210C3}" type="slidenum">
               <a:rPr lang="en-US" smtClean="0"/>
               <a:pPr/>
-              <a:t>21</a:t>
+              <a:t>22</a:t>
             </a:fld>
             <a:endParaRPr lang="en-US"/>
           </a:p>
@@ -28891,7 +33036,7 @@
 </p:sld>
 </file>
 
-<file path=ppt/slides/slide22.xml><?xml version="1.0" encoding="utf-8"?>
+<file path=ppt/slides/slide23.xml><?xml version="1.0" encoding="utf-8"?>
 <p:sld xmlns:a="http://schemas.openxmlformats.org/drawingml/2006/main" xmlns:r="http://schemas.openxmlformats.org/officeDocument/2006/relationships" xmlns:p="http://schemas.openxmlformats.org/presentationml/2006/main">
   <p:cSld>
     <p:spTree>
@@ -28961,7 +33106,7 @@
             <a:fld id="{127DDC20-79C9-9647-820E-6D40A3D210C3}" type="slidenum">
               <a:rPr lang="en-US" smtClean="0"/>
               <a:pPr/>
-              <a:t>22</a:t>
+              <a:t>23</a:t>
             </a:fld>
             <a:endParaRPr lang="en-US"/>
           </a:p>
@@ -29164,156 +33309,6 @@
     <p:extLst>
       <p:ext uri="{BB962C8B-B14F-4D97-AF65-F5344CB8AC3E}">
         <p14:creationId xmlns:p14="http://schemas.microsoft.com/office/powerpoint/2010/main" val="1294966"/>
-      </p:ext>
-    </p:extLst>
-  </p:cSld>
-  <p:clrMapOvr>
-    <a:masterClrMapping/>
-  </p:clrMapOvr>
-</p:sld>
-</file>
-
-<file path=ppt/slides/slide23.xml><?xml version="1.0" encoding="utf-8"?>
-<p:sld xmlns:a="http://schemas.openxmlformats.org/drawingml/2006/main" xmlns:r="http://schemas.openxmlformats.org/officeDocument/2006/relationships" xmlns:p="http://schemas.openxmlformats.org/presentationml/2006/main">
-  <p:cSld>
-    <p:spTree>
-      <p:nvGrpSpPr>
-        <p:cNvPr id="1" name=""/>
-        <p:cNvGrpSpPr/>
-        <p:nvPr/>
-      </p:nvGrpSpPr>
-      <p:grpSpPr>
-        <a:xfrm>
-          <a:off x="0" y="0"/>
-          <a:ext cx="0" cy="0"/>
-          <a:chOff x="0" y="0"/>
-          <a:chExt cx="0" cy="0"/>
-        </a:xfrm>
-      </p:grpSpPr>
-      <p:sp>
-        <p:nvSpPr>
-          <p:cNvPr id="2" name="Title 1">
-            <a:extLst>
-              <a:ext uri="{FF2B5EF4-FFF2-40B4-BE49-F238E27FC236}">
-                <a16:creationId xmlns:a16="http://schemas.microsoft.com/office/drawing/2014/main" id="{179C717D-A1F0-36D1-D8F2-6EB46B16B9CE}"/>
-              </a:ext>
-            </a:extLst>
-          </p:cNvPr>
-          <p:cNvSpPr>
-            <a:spLocks noGrp="1"/>
-          </p:cNvSpPr>
-          <p:nvPr>
-            <p:ph type="title"/>
-          </p:nvPr>
-        </p:nvSpPr>
-        <p:spPr>
-          <a:xfrm>
-            <a:off x="392305" y="526617"/>
-            <a:ext cx="7444991" cy="418263"/>
-          </a:xfrm>
-        </p:spPr>
-        <p:txBody>
-          <a:bodyPr/>
-          <a:lstStyle/>
-          <a:p>
-            <a:r>
-              <a:rPr lang="en-US" altLang="zh-CN" sz="2000" dirty="0">
-                <a:solidFill>
-                  <a:srgbClr val="7030A0"/>
-                </a:solidFill>
-              </a:rPr>
-              <a:t>In class activity</a:t>
-            </a:r>
-            <a:endParaRPr lang="zh-CN" altLang="en-US" sz="2000" dirty="0">
-              <a:solidFill>
-                <a:srgbClr val="7030A0"/>
-              </a:solidFill>
-            </a:endParaRPr>
-          </a:p>
-        </p:txBody>
-      </p:sp>
-      <p:sp>
-        <p:nvSpPr>
-          <p:cNvPr id="3" name="Content Placeholder 2">
-            <a:extLst>
-              <a:ext uri="{FF2B5EF4-FFF2-40B4-BE49-F238E27FC236}">
-                <a16:creationId xmlns:a16="http://schemas.microsoft.com/office/drawing/2014/main" id="{29151E6C-5FB6-5D71-31AA-01A3A2F00797}"/>
-              </a:ext>
-            </a:extLst>
-          </p:cNvPr>
-          <p:cNvSpPr>
-            <a:spLocks noGrp="1"/>
-          </p:cNvSpPr>
-          <p:nvPr>
-            <p:ph idx="1"/>
-          </p:nvPr>
-        </p:nvSpPr>
-        <p:spPr>
-          <a:xfrm>
-            <a:off x="392307" y="982980"/>
-            <a:ext cx="7444990" cy="2735580"/>
-          </a:xfrm>
-        </p:spPr>
-        <p:txBody>
-          <a:bodyPr>
-            <a:noAutofit/>
-          </a:bodyPr>
-          <a:lstStyle/>
-          <a:p>
-            <a:r>
-              <a:rPr lang="en-US" altLang="zh-CN" sz="1600" dirty="0"/>
-              <a:t>For optimal GNSS reception, hold the handheld at 15° from horizontal allowing it visibility of the sky. </a:t>
-            </a:r>
-          </a:p>
-          <a:p>
-            <a:r>
-              <a:rPr lang="en-US" altLang="zh-CN" sz="1600" dirty="0"/>
-              <a:t>When collecting point data with a TDC100 handheld, it is recommended that you remain stationary at the point for at least 10 seconds before beginning to log GNSS positions. </a:t>
-            </a:r>
-          </a:p>
-          <a:p>
-            <a:r>
-              <a:rPr lang="en-US" altLang="zh-CN" sz="1600" dirty="0"/>
-              <a:t>This allows the GNSS receiver’s internal algorithms to stabilize, and ensures the best possible point feature accuracy</a:t>
-            </a:r>
-            <a:endParaRPr lang="zh-CN" altLang="en-US" sz="1600" dirty="0"/>
-          </a:p>
-        </p:txBody>
-      </p:sp>
-      <p:sp>
-        <p:nvSpPr>
-          <p:cNvPr id="4" name="Slide Number Placeholder 3">
-            <a:extLst>
-              <a:ext uri="{FF2B5EF4-FFF2-40B4-BE49-F238E27FC236}">
-                <a16:creationId xmlns:a16="http://schemas.microsoft.com/office/drawing/2014/main" id="{64B62200-57D0-1127-987C-99A7C1BC77D7}"/>
-              </a:ext>
-            </a:extLst>
-          </p:cNvPr>
-          <p:cNvSpPr>
-            <a:spLocks noGrp="1"/>
-          </p:cNvSpPr>
-          <p:nvPr>
-            <p:ph type="sldNum" sz="quarter" idx="12"/>
-          </p:nvPr>
-        </p:nvSpPr>
-        <p:spPr/>
-        <p:txBody>
-          <a:bodyPr/>
-          <a:lstStyle/>
-          <a:p>
-            <a:fld id="{127DDC20-79C9-9647-820E-6D40A3D210C3}" type="slidenum">
-              <a:rPr lang="en-US" smtClean="0"/>
-              <a:pPr/>
-              <a:t>23</a:t>
-            </a:fld>
-            <a:endParaRPr lang="en-US"/>
-          </a:p>
-        </p:txBody>
-      </p:sp>
-    </p:spTree>
-    <p:extLst>
-      <p:ext uri="{BB962C8B-B14F-4D97-AF65-F5344CB8AC3E}">
-        <p14:creationId xmlns:p14="http://schemas.microsoft.com/office/powerpoint/2010/main" val="1060793755"/>
       </p:ext>
     </p:extLst>
   </p:cSld>
@@ -29345,7 +33340,7 @@
           <p:cNvPr id="2" name="Title 1">
             <a:extLst>
               <a:ext uri="{FF2B5EF4-FFF2-40B4-BE49-F238E27FC236}">
-                <a16:creationId xmlns:a16="http://schemas.microsoft.com/office/drawing/2014/main" id="{0403A4D7-69DC-E1E8-9B73-5C4261EDDAEF}"/>
+                <a16:creationId xmlns:a16="http://schemas.microsoft.com/office/drawing/2014/main" id="{179C717D-A1F0-36D1-D8F2-6EB46B16B9CE}"/>
               </a:ext>
             </a:extLst>
           </p:cNvPr>
@@ -29356,12 +33351,29 @@
             <p:ph type="title"/>
           </p:nvPr>
         </p:nvSpPr>
-        <p:spPr/>
+        <p:spPr>
+          <a:xfrm>
+            <a:off x="392305" y="526617"/>
+            <a:ext cx="7444991" cy="418263"/>
+          </a:xfrm>
+        </p:spPr>
         <p:txBody>
           <a:bodyPr/>
           <a:lstStyle/>
           <a:p>
-            <a:endParaRPr lang="zh-CN" altLang="en-US"/>
+            <a:r>
+              <a:rPr lang="en-US" altLang="zh-CN" sz="2000" dirty="0">
+                <a:solidFill>
+                  <a:srgbClr val="7030A0"/>
+                </a:solidFill>
+              </a:rPr>
+              <a:t>GNSS receiver</a:t>
+            </a:r>
+            <a:endParaRPr lang="zh-CN" altLang="en-US" sz="2000" dirty="0">
+              <a:solidFill>
+                <a:srgbClr val="7030A0"/>
+              </a:solidFill>
+            </a:endParaRPr>
           </a:p>
         </p:txBody>
       </p:sp>
@@ -29370,7 +33382,7 @@
           <p:cNvPr id="3" name="Content Placeholder 2">
             <a:extLst>
               <a:ext uri="{FF2B5EF4-FFF2-40B4-BE49-F238E27FC236}">
-                <a16:creationId xmlns:a16="http://schemas.microsoft.com/office/drawing/2014/main" id="{71648C00-FC69-5CE5-87DA-9EEAE9836966}"/>
+                <a16:creationId xmlns:a16="http://schemas.microsoft.com/office/drawing/2014/main" id="{29151E6C-5FB6-5D71-31AA-01A3A2F00797}"/>
               </a:ext>
             </a:extLst>
           </p:cNvPr>
@@ -29381,16 +33393,55 @@
             <p:ph idx="1"/>
           </p:nvPr>
         </p:nvSpPr>
-        <p:spPr/>
-        <p:txBody>
-          <a:bodyPr/>
-          <a:lstStyle/>
-          <a:p>
-            <a:r>
-              <a:rPr lang="en-US" altLang="zh-CN" dirty="0"/>
-              <a:t>To use the GNSS receiver: 1. In the Apps screen, tap Settings then tap Location. 2. Slide the Location slider to On. 3. Tap Mode then select the mode you want the device to use to determine your location: l High accuracy. Uses GNSS satellites, WLAN, and cellular networks to determine your location. l Battery saving. Uses WLAN and cellular networks to determine your location. l Device only. Uses GNSS only to determine your location. 4. Tap NMEA output to turn it on or off. 5. Tap SBAS mode to turn it on or off. 6. Tap Location mode then select the Location mode you want the device to use (GPS + BDS; GPS + GLONASS; GPS only). 7. Tap Update rate to modify the update rate of the GNSS solution. Two settings are available; 1s and 2s. By default the receiver is set to 2s but it is recommended that you use 1s to maximize reactivity of any GNSS applications.</a:t>
-            </a:r>
-            <a:endParaRPr lang="zh-CN" altLang="en-US" dirty="0"/>
+        <p:spPr>
+          <a:xfrm>
+            <a:off x="392307" y="982980"/>
+            <a:ext cx="7444990" cy="3040380"/>
+          </a:xfrm>
+        </p:spPr>
+        <p:txBody>
+          <a:bodyPr>
+            <a:noAutofit/>
+          </a:bodyPr>
+          <a:lstStyle/>
+          <a:p>
+            <a:r>
+              <a:rPr lang="en-US" altLang="zh-CN" sz="1600" dirty="0"/>
+              <a:t>1. In the Apps screen, tap Settings, then tap Location. </a:t>
+            </a:r>
+          </a:p>
+          <a:p>
+            <a:r>
+              <a:rPr lang="en-US" altLang="zh-CN" sz="1600" dirty="0"/>
+              <a:t>2. Slide the Location slider to On. </a:t>
+            </a:r>
+          </a:p>
+          <a:p>
+            <a:r>
+              <a:rPr lang="en-US" altLang="zh-CN" sz="1600" dirty="0"/>
+              <a:t>3. Tap Mode and</a:t>
+            </a:r>
+            <a:r>
+              <a:rPr lang="zh-CN" altLang="en-US" sz="1600" dirty="0"/>
+              <a:t> </a:t>
+            </a:r>
+            <a:r>
+              <a:rPr lang="en-US" altLang="zh-CN" sz="1600" dirty="0"/>
+              <a:t>select the mode you want the device to use to determine your location: </a:t>
+            </a:r>
+          </a:p>
+          <a:p>
+            <a:r>
+              <a:rPr lang="en-US" altLang="zh-CN" sz="1600" dirty="0"/>
+              <a:t>4.  Tap Location mode, then select the Location mode you want the device to use (GPS + BDS; GPS + GLONASS; GPS only). </a:t>
+            </a:r>
+          </a:p>
+          <a:p>
+            <a:r>
+              <a:rPr lang="en-US" altLang="zh-CN" sz="1600" dirty="0"/>
+              <a:t>7. Tap Update rate to modify the update rate of the GNSS solution. Two settings are available: 1s and 2s. By default, the receiver is set to 2s, but it is recommended that you use 1s to maximize the reactivity of any GNSS applications.</a:t>
+            </a:r>
+            <a:endParaRPr lang="zh-CN" altLang="en-US" sz="1600" dirty="0"/>
           </a:p>
         </p:txBody>
       </p:sp>
@@ -29399,7 +33450,7 @@
           <p:cNvPr id="4" name="Slide Number Placeholder 3">
             <a:extLst>
               <a:ext uri="{FF2B5EF4-FFF2-40B4-BE49-F238E27FC236}">
-                <a16:creationId xmlns:a16="http://schemas.microsoft.com/office/drawing/2014/main" id="{44F7B7CF-D1D6-40F9-DC78-CA7321180948}"/>
+                <a16:creationId xmlns:a16="http://schemas.microsoft.com/office/drawing/2014/main" id="{64B62200-57D0-1127-987C-99A7C1BC77D7}"/>
               </a:ext>
             </a:extLst>
           </p:cNvPr>
@@ -29427,7 +33478,7 @@
     </p:spTree>
     <p:extLst>
       <p:ext uri="{BB962C8B-B14F-4D97-AF65-F5344CB8AC3E}">
-        <p14:creationId xmlns:p14="http://schemas.microsoft.com/office/powerpoint/2010/main" val="368391701"/>
+        <p14:creationId xmlns:p14="http://schemas.microsoft.com/office/powerpoint/2010/main" val="1060793755"/>
       </p:ext>
     </p:extLst>
   </p:cSld>
@@ -29456,920 +33507,6 @@
       </p:grpSpPr>
       <p:sp>
         <p:nvSpPr>
-          <p:cNvPr id="2" name="Title 1">
-            <a:extLst>
-              <a:ext uri="{FF2B5EF4-FFF2-40B4-BE49-F238E27FC236}">
-                <a16:creationId xmlns:a16="http://schemas.microsoft.com/office/drawing/2014/main" id="{40DDC8C5-FECA-BD40-2288-90941E0BC430}"/>
-              </a:ext>
-            </a:extLst>
-          </p:cNvPr>
-          <p:cNvSpPr>
-            <a:spLocks noGrp="1"/>
-          </p:cNvSpPr>
-          <p:nvPr>
-            <p:ph type="title"/>
-          </p:nvPr>
-        </p:nvSpPr>
-        <p:spPr/>
-        <p:txBody>
-          <a:bodyPr/>
-          <a:lstStyle/>
-          <a:p>
-            <a:endParaRPr lang="zh-CN" altLang="en-US"/>
-          </a:p>
-        </p:txBody>
-      </p:sp>
-      <p:sp>
-        <p:nvSpPr>
-          <p:cNvPr id="3" name="Content Placeholder 2">
-            <a:extLst>
-              <a:ext uri="{FF2B5EF4-FFF2-40B4-BE49-F238E27FC236}">
-                <a16:creationId xmlns:a16="http://schemas.microsoft.com/office/drawing/2014/main" id="{4A84AAEF-5F81-5F14-1331-4A618E284901}"/>
-              </a:ext>
-            </a:extLst>
-          </p:cNvPr>
-          <p:cNvSpPr>
-            <a:spLocks noGrp="1"/>
-          </p:cNvSpPr>
-          <p:nvPr>
-            <p:ph idx="1"/>
-          </p:nvPr>
-        </p:nvSpPr>
-        <p:spPr/>
-        <p:txBody>
-          <a:bodyPr/>
-          <a:lstStyle/>
-          <a:p>
-            <a:r>
-              <a:rPr lang="en-US" altLang="zh-CN" dirty="0"/>
-              <a:t>The TDC100 handheld achieves optimal GNSS results when used with the Trimble </a:t>
-            </a:r>
-            <a:r>
-              <a:rPr lang="en-US" altLang="zh-CN" dirty="0" err="1"/>
-              <a:t>TerraFlex</a:t>
-            </a:r>
-            <a:r>
-              <a:rPr lang="en-US" altLang="zh-CN" dirty="0"/>
-              <a:t>™ software (available mid-August 2016).</a:t>
-            </a:r>
-            <a:endParaRPr lang="zh-CN" altLang="en-US" dirty="0"/>
-          </a:p>
-        </p:txBody>
-      </p:sp>
-      <p:sp>
-        <p:nvSpPr>
-          <p:cNvPr id="4" name="Slide Number Placeholder 3">
-            <a:extLst>
-              <a:ext uri="{FF2B5EF4-FFF2-40B4-BE49-F238E27FC236}">
-                <a16:creationId xmlns:a16="http://schemas.microsoft.com/office/drawing/2014/main" id="{521D5864-379C-7EB6-0BC5-686D1AD5E3F0}"/>
-              </a:ext>
-            </a:extLst>
-          </p:cNvPr>
-          <p:cNvSpPr>
-            <a:spLocks noGrp="1"/>
-          </p:cNvSpPr>
-          <p:nvPr>
-            <p:ph type="sldNum" sz="quarter" idx="12"/>
-          </p:nvPr>
-        </p:nvSpPr>
-        <p:spPr/>
-        <p:txBody>
-          <a:bodyPr/>
-          <a:lstStyle/>
-          <a:p>
-            <a:fld id="{127DDC20-79C9-9647-820E-6D40A3D210C3}" type="slidenum">
-              <a:rPr lang="en-US" smtClean="0"/>
-              <a:pPr/>
-              <a:t>25</a:t>
-            </a:fld>
-            <a:endParaRPr lang="en-US"/>
-          </a:p>
-        </p:txBody>
-      </p:sp>
-    </p:spTree>
-    <p:extLst>
-      <p:ext uri="{BB962C8B-B14F-4D97-AF65-F5344CB8AC3E}">
-        <p14:creationId xmlns:p14="http://schemas.microsoft.com/office/powerpoint/2010/main" val="1626013556"/>
-      </p:ext>
-    </p:extLst>
-  </p:cSld>
-  <p:clrMapOvr>
-    <a:masterClrMapping/>
-  </p:clrMapOvr>
-</p:sld>
-</file>
-
-<file path=ppt/slides/slide26.xml><?xml version="1.0" encoding="utf-8"?>
-<p:sld xmlns:a="http://schemas.openxmlformats.org/drawingml/2006/main" xmlns:r="http://schemas.openxmlformats.org/officeDocument/2006/relationships" xmlns:p="http://schemas.openxmlformats.org/presentationml/2006/main">
-  <p:cSld>
-    <p:spTree>
-      <p:nvGrpSpPr>
-        <p:cNvPr id="1" name=""/>
-        <p:cNvGrpSpPr/>
-        <p:nvPr/>
-      </p:nvGrpSpPr>
-      <p:grpSpPr>
-        <a:xfrm>
-          <a:off x="0" y="0"/>
-          <a:ext cx="0" cy="0"/>
-          <a:chOff x="0" y="0"/>
-          <a:chExt cx="0" cy="0"/>
-        </a:xfrm>
-      </p:grpSpPr>
-      <p:sp>
-        <p:nvSpPr>
-          <p:cNvPr id="2" name="Title 1">
-            <a:extLst>
-              <a:ext uri="{FF2B5EF4-FFF2-40B4-BE49-F238E27FC236}">
-                <a16:creationId xmlns:a16="http://schemas.microsoft.com/office/drawing/2014/main" id="{2086AC2C-7EC0-AA45-1C3D-58061895B019}"/>
-              </a:ext>
-            </a:extLst>
-          </p:cNvPr>
-          <p:cNvSpPr>
-            <a:spLocks noGrp="1"/>
-          </p:cNvSpPr>
-          <p:nvPr>
-            <p:ph type="title"/>
-          </p:nvPr>
-        </p:nvSpPr>
-        <p:spPr/>
-        <p:txBody>
-          <a:bodyPr/>
-          <a:lstStyle/>
-          <a:p>
-            <a:endParaRPr lang="zh-CN" altLang="en-US"/>
-          </a:p>
-        </p:txBody>
-      </p:sp>
-      <p:sp>
-        <p:nvSpPr>
-          <p:cNvPr id="3" name="Content Placeholder 2">
-            <a:extLst>
-              <a:ext uri="{FF2B5EF4-FFF2-40B4-BE49-F238E27FC236}">
-                <a16:creationId xmlns:a16="http://schemas.microsoft.com/office/drawing/2014/main" id="{813C6F3A-399B-FBA1-E4CC-3333590A3973}"/>
-              </a:ext>
-            </a:extLst>
-          </p:cNvPr>
-          <p:cNvSpPr>
-            <a:spLocks noGrp="1"/>
-          </p:cNvSpPr>
-          <p:nvPr>
-            <p:ph idx="1"/>
-          </p:nvPr>
-        </p:nvSpPr>
-        <p:spPr/>
-        <p:txBody>
-          <a:bodyPr/>
-          <a:lstStyle/>
-          <a:p>
-            <a:r>
-              <a:rPr lang="en-US" altLang="zh-CN" b="1" dirty="0"/>
-              <a:t>How to access the photo gallery</a:t>
-            </a:r>
-          </a:p>
-          <a:p>
-            <a:r>
-              <a:rPr lang="en-US" altLang="zh-CN" dirty="0"/>
-              <a:t>Connect TDC100 to your computer with a USB cable.</a:t>
-            </a:r>
-          </a:p>
-          <a:p>
-            <a:r>
-              <a:rPr lang="en-US" altLang="zh-CN" dirty="0"/>
-              <a:t>On the TDC100 screen, swipe down from the top → you’ll see a notification like </a:t>
-            </a:r>
-            <a:r>
-              <a:rPr lang="en-US" altLang="zh-CN" b="1" dirty="0"/>
-              <a:t>“USB charging this device.”</a:t>
-            </a:r>
-            <a:endParaRPr lang="en-US" altLang="zh-CN" dirty="0"/>
-          </a:p>
-          <a:p>
-            <a:r>
-              <a:rPr lang="en-US" altLang="zh-CN" dirty="0"/>
-              <a:t>Tap the notification → select </a:t>
-            </a:r>
-            <a:r>
-              <a:rPr lang="en-US" altLang="zh-CN" b="1" dirty="0"/>
-              <a:t>File Transfer (MTP)</a:t>
-            </a:r>
-            <a:r>
-              <a:rPr lang="en-US" altLang="zh-CN" dirty="0"/>
-              <a:t> or </a:t>
-            </a:r>
-            <a:r>
-              <a:rPr lang="en-US" altLang="zh-CN" b="1" dirty="0"/>
-              <a:t>Media Transfer</a:t>
-            </a:r>
-            <a:r>
-              <a:rPr lang="en-US" altLang="zh-CN" dirty="0"/>
-              <a:t>.</a:t>
-            </a:r>
-          </a:p>
-          <a:p>
-            <a:r>
-              <a:rPr lang="en-US" altLang="zh-CN" dirty="0"/>
-              <a:t>Now, on your computer, open </a:t>
-            </a:r>
-            <a:r>
-              <a:rPr lang="en-US" altLang="zh-CN" b="1" dirty="0"/>
-              <a:t>This PC → TDC100 → Internal Storage → pictures</a:t>
-            </a:r>
-            <a:r>
-              <a:rPr lang="en-US" altLang="zh-CN" dirty="0"/>
-              <a:t>.</a:t>
-            </a:r>
-          </a:p>
-          <a:p>
-            <a:pPr lvl="1"/>
-            <a:r>
-              <a:rPr lang="en-US" altLang="zh-CN" dirty="0"/>
-              <a:t>Your photos and screenshots should be there.</a:t>
-            </a:r>
-          </a:p>
-          <a:p>
-            <a:endParaRPr lang="zh-CN" altLang="en-US" dirty="0"/>
-          </a:p>
-        </p:txBody>
-      </p:sp>
-      <p:sp>
-        <p:nvSpPr>
-          <p:cNvPr id="4" name="Slide Number Placeholder 3">
-            <a:extLst>
-              <a:ext uri="{FF2B5EF4-FFF2-40B4-BE49-F238E27FC236}">
-                <a16:creationId xmlns:a16="http://schemas.microsoft.com/office/drawing/2014/main" id="{1941403D-B3B2-B544-3771-BDEEBDAECB9F}"/>
-              </a:ext>
-            </a:extLst>
-          </p:cNvPr>
-          <p:cNvSpPr>
-            <a:spLocks noGrp="1"/>
-          </p:cNvSpPr>
-          <p:nvPr>
-            <p:ph type="sldNum" sz="quarter" idx="12"/>
-          </p:nvPr>
-        </p:nvSpPr>
-        <p:spPr/>
-        <p:txBody>
-          <a:bodyPr/>
-          <a:lstStyle/>
-          <a:p>
-            <a:fld id="{127DDC20-79C9-9647-820E-6D40A3D210C3}" type="slidenum">
-              <a:rPr lang="en-US" smtClean="0"/>
-              <a:pPr/>
-              <a:t>26</a:t>
-            </a:fld>
-            <a:endParaRPr lang="en-US"/>
-          </a:p>
-        </p:txBody>
-      </p:sp>
-    </p:spTree>
-    <p:extLst>
-      <p:ext uri="{BB962C8B-B14F-4D97-AF65-F5344CB8AC3E}">
-        <p14:creationId xmlns:p14="http://schemas.microsoft.com/office/powerpoint/2010/main" val="697722797"/>
-      </p:ext>
-    </p:extLst>
-  </p:cSld>
-  <p:clrMapOvr>
-    <a:masterClrMapping/>
-  </p:clrMapOvr>
-</p:sld>
-</file>
-
-<file path=ppt/slides/slide27.xml><?xml version="1.0" encoding="utf-8"?>
-<p:sld xmlns:a="http://schemas.openxmlformats.org/drawingml/2006/main" xmlns:r="http://schemas.openxmlformats.org/officeDocument/2006/relationships" xmlns:p="http://schemas.openxmlformats.org/presentationml/2006/main">
-  <p:cSld>
-    <p:spTree>
-      <p:nvGrpSpPr>
-        <p:cNvPr id="1" name=""/>
-        <p:cNvGrpSpPr/>
-        <p:nvPr/>
-      </p:nvGrpSpPr>
-      <p:grpSpPr>
-        <a:xfrm>
-          <a:off x="0" y="0"/>
-          <a:ext cx="0" cy="0"/>
-          <a:chOff x="0" y="0"/>
-          <a:chExt cx="0" cy="0"/>
-        </a:xfrm>
-      </p:grpSpPr>
-      <p:cxnSp>
-        <p:nvCxnSpPr>
-          <p:cNvPr id="4" name="Straight Connector 3">
-            <a:extLst>
-              <a:ext uri="{FF2B5EF4-FFF2-40B4-BE49-F238E27FC236}">
-                <a16:creationId xmlns:a16="http://schemas.microsoft.com/office/drawing/2014/main" id="{D4EB9696-B2DB-43F4-B52A-F64A3152234F}"/>
-              </a:ext>
-            </a:extLst>
-          </p:cNvPr>
-          <p:cNvCxnSpPr/>
-          <p:nvPr/>
-        </p:nvCxnSpPr>
-        <p:spPr>
-          <a:xfrm>
-            <a:off x="152400" y="922910"/>
-            <a:ext cx="8001000" cy="0"/>
-          </a:xfrm>
-          <a:prstGeom prst="line">
-            <a:avLst/>
-          </a:prstGeom>
-          <a:ln>
-            <a:solidFill>
-              <a:schemeClr val="tx1"/>
-            </a:solidFill>
-          </a:ln>
-          <a:effectLst/>
-        </p:spPr>
-        <p:style>
-          <a:lnRef idx="2">
-            <a:schemeClr val="accent1"/>
-          </a:lnRef>
-          <a:fillRef idx="0">
-            <a:schemeClr val="accent1"/>
-          </a:fillRef>
-          <a:effectRef idx="1">
-            <a:schemeClr val="accent1"/>
-          </a:effectRef>
-          <a:fontRef idx="minor">
-            <a:schemeClr val="tx1"/>
-          </a:fontRef>
-        </p:style>
-      </p:cxnSp>
-      <p:sp>
-        <p:nvSpPr>
-          <p:cNvPr id="5" name="Title 1">
-            <a:extLst>
-              <a:ext uri="{FF2B5EF4-FFF2-40B4-BE49-F238E27FC236}">
-                <a16:creationId xmlns:a16="http://schemas.microsoft.com/office/drawing/2014/main" id="{9D7B9A9B-3B1A-4D8A-8275-AAA1205C7D4E}"/>
-              </a:ext>
-            </a:extLst>
-          </p:cNvPr>
-          <p:cNvSpPr txBox="1">
-            <a:spLocks/>
-          </p:cNvSpPr>
-          <p:nvPr/>
-        </p:nvSpPr>
-        <p:spPr>
-          <a:xfrm>
-            <a:off x="118533" y="43082"/>
-            <a:ext cx="8077200" cy="857250"/>
-          </a:xfrm>
-          <a:prstGeom prst="rect">
-            <a:avLst/>
-          </a:prstGeom>
-        </p:spPr>
-        <p:txBody>
-          <a:bodyPr vert="horz" lIns="91440" tIns="45720" rIns="91440" bIns="45720" rtlCol="0" anchor="ctr">
-            <a:normAutofit/>
-          </a:bodyPr>
-          <a:lstStyle>
-            <a:lvl1pPr algn="ctr" defTabSz="411480" rtl="0" eaLnBrk="1" latinLnBrk="0" hangingPunct="1">
-              <a:spcBef>
-                <a:spcPct val="0"/>
-              </a:spcBef>
-              <a:buNone/>
-              <a:defRPr sz="3960" kern="1200">
-                <a:solidFill>
-                  <a:schemeClr val="tx1"/>
-                </a:solidFill>
-                <a:latin typeface="+mj-lt"/>
-                <a:ea typeface="+mj-ea"/>
-                <a:cs typeface="+mj-cs"/>
-              </a:defRPr>
-            </a:lvl1pPr>
-          </a:lstStyle>
-          <a:p>
-            <a:pPr algn="l"/>
-            <a:r>
-              <a:rPr lang="en-US" sz="3200" dirty="0">
-                <a:solidFill>
-                  <a:srgbClr val="7030A0"/>
-                </a:solidFill>
-              </a:rPr>
-              <a:t>R</a:t>
-            </a:r>
-            <a:r>
-              <a:rPr lang="en-US" altLang="zh-CN" sz="3200" dirty="0">
-                <a:solidFill>
-                  <a:srgbClr val="7030A0"/>
-                </a:solidFill>
-              </a:rPr>
-              <a:t>eceiver hardware</a:t>
-            </a:r>
-            <a:endParaRPr lang="en-US" sz="2600" dirty="0">
-              <a:solidFill>
-                <a:srgbClr val="7030A0"/>
-              </a:solidFill>
-            </a:endParaRPr>
-          </a:p>
-        </p:txBody>
-      </p:sp>
-      <p:sp>
-        <p:nvSpPr>
-          <p:cNvPr id="8" name="Content Placeholder 2">
-            <a:extLst>
-              <a:ext uri="{FF2B5EF4-FFF2-40B4-BE49-F238E27FC236}">
-                <a16:creationId xmlns:a16="http://schemas.microsoft.com/office/drawing/2014/main" id="{B39E6661-3EBE-4587-AE2F-09CE39F6F0DD}"/>
-              </a:ext>
-            </a:extLst>
-          </p:cNvPr>
-          <p:cNvSpPr>
-            <a:spLocks noGrp="1"/>
-          </p:cNvSpPr>
-          <p:nvPr>
-            <p:ph idx="1"/>
-          </p:nvPr>
-        </p:nvSpPr>
-        <p:spPr>
-          <a:xfrm>
-            <a:off x="118533" y="1030151"/>
-            <a:ext cx="7825317" cy="1111070"/>
-          </a:xfrm>
-        </p:spPr>
-        <p:txBody>
-          <a:bodyPr>
-            <a:normAutofit/>
-          </a:bodyPr>
-          <a:lstStyle/>
-          <a:p>
-            <a:pPr>
-              <a:spcBef>
-                <a:spcPts val="0"/>
-              </a:spcBef>
-              <a:buFont typeface="Courier New" panose="02070309020205020404" pitchFamily="49" charset="0"/>
-              <a:buChar char="o"/>
-            </a:pPr>
-            <a:r>
-              <a:rPr lang="en-US" dirty="0"/>
-              <a:t>Many functional elements present within a GPS receiver hardware</a:t>
-            </a:r>
-          </a:p>
-          <a:p>
-            <a:pPr lvl="1">
-              <a:spcBef>
-                <a:spcPts val="0"/>
-              </a:spcBef>
-              <a:buFont typeface="Wingdings" panose="05000000000000000000" pitchFamily="2" charset="2"/>
-              <a:buChar char="ü"/>
-            </a:pPr>
-            <a:r>
-              <a:rPr lang="en-US" dirty="0"/>
-              <a:t>Filters, Amplifier, Frequency unit, Process unit</a:t>
-            </a:r>
-          </a:p>
-          <a:p>
-            <a:pPr>
-              <a:spcBef>
-                <a:spcPts val="0"/>
-              </a:spcBef>
-              <a:buFont typeface="Courier New" panose="02070309020205020404" pitchFamily="49" charset="0"/>
-              <a:buChar char="o"/>
-            </a:pPr>
-            <a:endParaRPr lang="en-US" dirty="0"/>
-          </a:p>
-        </p:txBody>
-      </p:sp>
-      <p:sp>
-        <p:nvSpPr>
-          <p:cNvPr id="2" name="Slide Number Placeholder 1">
-            <a:extLst>
-              <a:ext uri="{FF2B5EF4-FFF2-40B4-BE49-F238E27FC236}">
-                <a16:creationId xmlns:a16="http://schemas.microsoft.com/office/drawing/2014/main" id="{6EDBF9BC-B3FC-4D00-B7E0-B2749A88364A}"/>
-              </a:ext>
-            </a:extLst>
-          </p:cNvPr>
-          <p:cNvSpPr>
-            <a:spLocks noGrp="1"/>
-          </p:cNvSpPr>
-          <p:nvPr>
-            <p:ph type="sldNum" sz="quarter" idx="12"/>
-          </p:nvPr>
-        </p:nvSpPr>
-        <p:spPr/>
-        <p:txBody>
-          <a:bodyPr/>
-          <a:lstStyle/>
-          <a:p>
-            <a:fld id="{127DDC20-79C9-9647-820E-6D40A3D210C3}" type="slidenum">
-              <a:rPr lang="en-US" smtClean="0"/>
-              <a:pPr/>
-              <a:t>27</a:t>
-            </a:fld>
-            <a:endParaRPr lang="en-US"/>
-          </a:p>
-        </p:txBody>
-      </p:sp>
-      <p:pic>
-        <p:nvPicPr>
-          <p:cNvPr id="9" name="Picture 8">
-            <a:extLst>
-              <a:ext uri="{FF2B5EF4-FFF2-40B4-BE49-F238E27FC236}">
-                <a16:creationId xmlns:a16="http://schemas.microsoft.com/office/drawing/2014/main" id="{80A2E9F9-2A8B-42F4-9295-FC1D7BB8019B}"/>
-              </a:ext>
-            </a:extLst>
-          </p:cNvPr>
-          <p:cNvPicPr>
-            <a:picLocks noChangeAspect="1"/>
-          </p:cNvPicPr>
-          <p:nvPr/>
-        </p:nvPicPr>
-        <p:blipFill>
-          <a:blip r:embed="rId3"/>
-          <a:stretch>
-            <a:fillRect/>
-          </a:stretch>
-        </p:blipFill>
-        <p:spPr>
-          <a:xfrm>
-            <a:off x="2382988" y="2436993"/>
-            <a:ext cx="3539824" cy="2583396"/>
-          </a:xfrm>
-          <a:prstGeom prst="rect">
-            <a:avLst/>
-          </a:prstGeom>
-        </p:spPr>
-      </p:pic>
-      <p:sp>
-        <p:nvSpPr>
-          <p:cNvPr id="10" name="Rectangle 9">
-            <a:extLst>
-              <a:ext uri="{FF2B5EF4-FFF2-40B4-BE49-F238E27FC236}">
-                <a16:creationId xmlns:a16="http://schemas.microsoft.com/office/drawing/2014/main" id="{C8E39AE1-D75B-4F34-80D5-574D16647649}"/>
-              </a:ext>
-            </a:extLst>
-          </p:cNvPr>
-          <p:cNvSpPr/>
-          <p:nvPr/>
-        </p:nvSpPr>
-        <p:spPr>
-          <a:xfrm>
-            <a:off x="2570205" y="3076832"/>
-            <a:ext cx="580768" cy="605482"/>
-          </a:xfrm>
-          <a:prstGeom prst="rect">
-            <a:avLst/>
-          </a:prstGeom>
-          <a:noFill/>
-          <a:ln>
-            <a:solidFill>
-              <a:srgbClr val="FF0000"/>
-            </a:solidFill>
-          </a:ln>
-        </p:spPr>
-        <p:style>
-          <a:lnRef idx="1">
-            <a:schemeClr val="accent1"/>
-          </a:lnRef>
-          <a:fillRef idx="3">
-            <a:schemeClr val="accent1"/>
-          </a:fillRef>
-          <a:effectRef idx="2">
-            <a:schemeClr val="accent1"/>
-          </a:effectRef>
-          <a:fontRef idx="minor">
-            <a:schemeClr val="lt1"/>
-          </a:fontRef>
-        </p:style>
-        <p:txBody>
-          <a:bodyPr rtlCol="0" anchor="ctr"/>
-          <a:lstStyle/>
-          <a:p>
-            <a:pPr algn="ctr"/>
-            <a:endParaRPr lang="en-US"/>
-          </a:p>
-        </p:txBody>
-      </p:sp>
-      <p:sp>
-        <p:nvSpPr>
-          <p:cNvPr id="11" name="Rectangle 10">
-            <a:extLst>
-              <a:ext uri="{FF2B5EF4-FFF2-40B4-BE49-F238E27FC236}">
-                <a16:creationId xmlns:a16="http://schemas.microsoft.com/office/drawing/2014/main" id="{95E73E86-79D2-42CE-9E92-69128DA3E9E6}"/>
-              </a:ext>
-            </a:extLst>
-          </p:cNvPr>
-          <p:cNvSpPr/>
-          <p:nvPr/>
-        </p:nvSpPr>
-        <p:spPr>
-          <a:xfrm>
-            <a:off x="3227475" y="3076832"/>
-            <a:ext cx="580768" cy="605482"/>
-          </a:xfrm>
-          <a:prstGeom prst="rect">
-            <a:avLst/>
-          </a:prstGeom>
-          <a:noFill/>
-          <a:ln>
-            <a:solidFill>
-              <a:schemeClr val="accent5"/>
-            </a:solidFill>
-          </a:ln>
-        </p:spPr>
-        <p:style>
-          <a:lnRef idx="1">
-            <a:schemeClr val="accent1"/>
-          </a:lnRef>
-          <a:fillRef idx="3">
-            <a:schemeClr val="accent1"/>
-          </a:fillRef>
-          <a:effectRef idx="2">
-            <a:schemeClr val="accent1"/>
-          </a:effectRef>
-          <a:fontRef idx="minor">
-            <a:schemeClr val="lt1"/>
-          </a:fontRef>
-        </p:style>
-        <p:txBody>
-          <a:bodyPr rtlCol="0" anchor="ctr"/>
-          <a:lstStyle/>
-          <a:p>
-            <a:pPr algn="ctr"/>
-            <a:endParaRPr lang="en-US"/>
-          </a:p>
-        </p:txBody>
-      </p:sp>
-      <p:sp>
-        <p:nvSpPr>
-          <p:cNvPr id="12" name="Rectangle 11">
-            <a:extLst>
-              <a:ext uri="{FF2B5EF4-FFF2-40B4-BE49-F238E27FC236}">
-                <a16:creationId xmlns:a16="http://schemas.microsoft.com/office/drawing/2014/main" id="{82E0CF17-C1F5-4E9F-89EB-F630AE579A42}"/>
-              </a:ext>
-            </a:extLst>
-          </p:cNvPr>
-          <p:cNvSpPr/>
-          <p:nvPr/>
-        </p:nvSpPr>
-        <p:spPr>
-          <a:xfrm>
-            <a:off x="3862392" y="2571750"/>
-            <a:ext cx="1920569" cy="1541600"/>
-          </a:xfrm>
-          <a:prstGeom prst="rect">
-            <a:avLst/>
-          </a:prstGeom>
-          <a:noFill/>
-          <a:ln>
-            <a:solidFill>
-              <a:schemeClr val="accent6"/>
-            </a:solidFill>
-          </a:ln>
-        </p:spPr>
-        <p:style>
-          <a:lnRef idx="1">
-            <a:schemeClr val="accent1"/>
-          </a:lnRef>
-          <a:fillRef idx="3">
-            <a:schemeClr val="accent1"/>
-          </a:fillRef>
-          <a:effectRef idx="2">
-            <a:schemeClr val="accent1"/>
-          </a:effectRef>
-          <a:fontRef idx="minor">
-            <a:schemeClr val="lt1"/>
-          </a:fontRef>
-        </p:style>
-        <p:txBody>
-          <a:bodyPr rtlCol="0" anchor="ctr"/>
-          <a:lstStyle/>
-          <a:p>
-            <a:pPr algn="ctr"/>
-            <a:endParaRPr lang="en-US"/>
-          </a:p>
-        </p:txBody>
-      </p:sp>
-      <p:sp>
-        <p:nvSpPr>
-          <p:cNvPr id="13" name="TextBox 12">
-            <a:extLst>
-              <a:ext uri="{FF2B5EF4-FFF2-40B4-BE49-F238E27FC236}">
-                <a16:creationId xmlns:a16="http://schemas.microsoft.com/office/drawing/2014/main" id="{EE242180-F701-481B-B083-90918A951194}"/>
-              </a:ext>
-            </a:extLst>
-          </p:cNvPr>
-          <p:cNvSpPr txBox="1"/>
-          <p:nvPr/>
-        </p:nvSpPr>
-        <p:spPr>
-          <a:xfrm>
-            <a:off x="5233686" y="4850571"/>
-            <a:ext cx="1587244" cy="246221"/>
-          </a:xfrm>
-          <a:prstGeom prst="rect">
-            <a:avLst/>
-          </a:prstGeom>
-          <a:noFill/>
-        </p:spPr>
-        <p:txBody>
-          <a:bodyPr wrap="square" rtlCol="0">
-            <a:spAutoFit/>
-          </a:bodyPr>
-          <a:lstStyle/>
-          <a:p>
-            <a:r>
-              <a:rPr lang="en-US" sz="1000" dirty="0">
-                <a:solidFill>
-                  <a:srgbClr val="7030A0"/>
-                </a:solidFill>
-              </a:rPr>
-              <a:t>Kaplan &amp; Hegarty, 2006</a:t>
-            </a:r>
-          </a:p>
-        </p:txBody>
-      </p:sp>
-    </p:spTree>
-    <p:extLst>
-      <p:ext uri="{BB962C8B-B14F-4D97-AF65-F5344CB8AC3E}">
-        <p14:creationId xmlns:p14="http://schemas.microsoft.com/office/powerpoint/2010/main" val="1956313971"/>
-      </p:ext>
-    </p:extLst>
-  </p:cSld>
-  <p:clrMapOvr>
-    <a:masterClrMapping/>
-  </p:clrMapOvr>
-  <p:timing>
-    <p:tnLst>
-      <p:par>
-        <p:cTn id="1" dur="indefinite" restart="never" nodeType="tmRoot">
-          <p:childTnLst>
-            <p:seq concurrent="1" nextAc="seek">
-              <p:cTn id="2" dur="indefinite" nodeType="mainSeq">
-                <p:childTnLst>
-                  <p:par>
-                    <p:cTn id="3" fill="hold">
-                      <p:stCondLst>
-                        <p:cond delay="indefinite"/>
-                      </p:stCondLst>
-                      <p:childTnLst>
-                        <p:par>
-                          <p:cTn id="4" fill="hold">
-                            <p:stCondLst>
-                              <p:cond delay="0"/>
-                            </p:stCondLst>
-                            <p:childTnLst>
-                              <p:par>
-                                <p:cTn id="5" presetID="1" presetClass="entr" presetSubtype="0" fill="hold" grpId="0" nodeType="clickEffect">
-                                  <p:stCondLst>
-                                    <p:cond delay="0"/>
-                                  </p:stCondLst>
-                                  <p:childTnLst>
-                                    <p:set>
-                                      <p:cBhvr>
-                                        <p:cTn id="6" dur="1" fill="hold">
-                                          <p:stCondLst>
-                                            <p:cond delay="0"/>
-                                          </p:stCondLst>
-                                        </p:cTn>
-                                        <p:tgtEl>
-                                          <p:spTgt spid="10"/>
-                                        </p:tgtEl>
-                                        <p:attrNameLst>
-                                          <p:attrName>style.visibility</p:attrName>
-                                        </p:attrNameLst>
-                                      </p:cBhvr>
-                                      <p:to>
-                                        <p:strVal val="visible"/>
-                                      </p:to>
-                                    </p:set>
-                                  </p:childTnLst>
-                                </p:cTn>
-                              </p:par>
-                              <p:par>
-                                <p:cTn id="7" presetID="1" presetClass="entr" presetSubtype="0" fill="hold" nodeType="withEffect">
-                                  <p:stCondLst>
-                                    <p:cond delay="0"/>
-                                  </p:stCondLst>
-                                  <p:childTnLst>
-                                    <p:set>
-                                      <p:cBhvr>
-                                        <p:cTn id="8" dur="1" fill="hold">
-                                          <p:stCondLst>
-                                            <p:cond delay="0"/>
-                                          </p:stCondLst>
-                                        </p:cTn>
-                                        <p:tgtEl>
-                                          <p:spTgt spid="9"/>
-                                        </p:tgtEl>
-                                        <p:attrNameLst>
-                                          <p:attrName>style.visibility</p:attrName>
-                                        </p:attrNameLst>
-                                      </p:cBhvr>
-                                      <p:to>
-                                        <p:strVal val="visible"/>
-                                      </p:to>
-                                    </p:set>
-                                  </p:childTnLst>
-                                </p:cTn>
-                              </p:par>
-                              <p:par>
-                                <p:cTn id="9" presetID="1" presetClass="entr" presetSubtype="0" fill="hold" grpId="0" nodeType="withEffect">
-                                  <p:stCondLst>
-                                    <p:cond delay="0"/>
-                                  </p:stCondLst>
-                                  <p:childTnLst>
-                                    <p:set>
-                                      <p:cBhvr>
-                                        <p:cTn id="10" dur="1" fill="hold">
-                                          <p:stCondLst>
-                                            <p:cond delay="0"/>
-                                          </p:stCondLst>
-                                        </p:cTn>
-                                        <p:tgtEl>
-                                          <p:spTgt spid="11"/>
-                                        </p:tgtEl>
-                                        <p:attrNameLst>
-                                          <p:attrName>style.visibility</p:attrName>
-                                        </p:attrNameLst>
-                                      </p:cBhvr>
-                                      <p:to>
-                                        <p:strVal val="visible"/>
-                                      </p:to>
-                                    </p:set>
-                                  </p:childTnLst>
-                                </p:cTn>
-                              </p:par>
-                              <p:par>
-                                <p:cTn id="11" presetID="1" presetClass="entr" presetSubtype="0" fill="hold" grpId="0" nodeType="withEffect">
-                                  <p:stCondLst>
-                                    <p:cond delay="0"/>
-                                  </p:stCondLst>
-                                  <p:childTnLst>
-                                    <p:set>
-                                      <p:cBhvr>
-                                        <p:cTn id="12" dur="1" fill="hold">
-                                          <p:stCondLst>
-                                            <p:cond delay="0"/>
-                                          </p:stCondLst>
-                                        </p:cTn>
-                                        <p:tgtEl>
-                                          <p:spTgt spid="12"/>
-                                        </p:tgtEl>
-                                        <p:attrNameLst>
-                                          <p:attrName>style.visibility</p:attrName>
-                                        </p:attrNameLst>
-                                      </p:cBhvr>
-                                      <p:to>
-                                        <p:strVal val="visible"/>
-                                      </p:to>
-                                    </p:set>
-                                  </p:childTnLst>
-                                </p:cTn>
-                              </p:par>
-                            </p:childTnLst>
-                          </p:cTn>
-                        </p:par>
-                      </p:childTnLst>
-                    </p:cTn>
-                  </p:par>
-                </p:childTnLst>
-              </p:cTn>
-              <p:prevCondLst>
-                <p:cond evt="onPrev" delay="0">
-                  <p:tgtEl>
-                    <p:sldTgt/>
-                  </p:tgtEl>
-                </p:cond>
-              </p:prevCondLst>
-              <p:nextCondLst>
-                <p:cond evt="onNext" delay="0">
-                  <p:tgtEl>
-                    <p:sldTgt/>
-                  </p:tgtEl>
-                </p:cond>
-              </p:nextCondLst>
-            </p:seq>
-          </p:childTnLst>
-        </p:cTn>
-      </p:par>
-    </p:tnLst>
-    <p:bldLst>
-      <p:bldP spid="10" grpId="0" animBg="1"/>
-      <p:bldP spid="11" grpId="0" animBg="1"/>
-      <p:bldP spid="12" grpId="0" animBg="1"/>
-    </p:bldLst>
-  </p:timing>
-</p:sld>
-</file>
-
-<file path=ppt/slides/slide28.xml><?xml version="1.0" encoding="utf-8"?>
-<p:sld xmlns:a="http://schemas.openxmlformats.org/drawingml/2006/main" xmlns:r="http://schemas.openxmlformats.org/officeDocument/2006/relationships" xmlns:p="http://schemas.openxmlformats.org/presentationml/2006/main">
-  <p:cSld>
-    <p:spTree>
-      <p:nvGrpSpPr>
-        <p:cNvPr id="1" name=""/>
-        <p:cNvGrpSpPr/>
-        <p:nvPr/>
-      </p:nvGrpSpPr>
-      <p:grpSpPr>
-        <a:xfrm>
-          <a:off x="0" y="0"/>
-          <a:ext cx="0" cy="0"/>
-          <a:chOff x="0" y="0"/>
-          <a:chExt cx="0" cy="0"/>
-        </a:xfrm>
-      </p:grpSpPr>
-      <p:sp>
-        <p:nvSpPr>
           <p:cNvPr id="2" name="Rectangle 1"/>
           <p:cNvSpPr/>
           <p:nvPr/>
@@ -30442,7 +33579,7 @@
             <a:fld id="{127DDC20-79C9-9647-820E-6D40A3D210C3}" type="slidenum">
               <a:rPr lang="en-US" smtClean="0"/>
               <a:pPr/>
-              <a:t>28</a:t>
+              <a:t>25</a:t>
             </a:fld>
             <a:endParaRPr lang="en-US"/>
           </a:p>
@@ -33941,4 +37078,324 @@
   </a:objectDefaults>
   <a:extraClrSchemeLst/>
 </a:theme>
+</file>
+
+<file path=ppt/theme/theme8.xml><?xml version="1.0" encoding="utf-8"?>
+<a:theme xmlns:a="http://schemas.openxmlformats.org/drawingml/2006/main" name="Office Theme">
+  <a:themeElements>
+    <a:clrScheme name="Office">
+      <a:dk1>
+        <a:sysClr val="windowText" lastClr="000000"/>
+      </a:dk1>
+      <a:lt1>
+        <a:sysClr val="window" lastClr="FFFFFF"/>
+      </a:lt1>
+      <a:dk2>
+        <a:srgbClr val="1F497D"/>
+      </a:dk2>
+      <a:lt2>
+        <a:srgbClr val="EEECE1"/>
+      </a:lt2>
+      <a:accent1>
+        <a:srgbClr val="4F81BD"/>
+      </a:accent1>
+      <a:accent2>
+        <a:srgbClr val="C0504D"/>
+      </a:accent2>
+      <a:accent3>
+        <a:srgbClr val="9BBB59"/>
+      </a:accent3>
+      <a:accent4>
+        <a:srgbClr val="8064A2"/>
+      </a:accent4>
+      <a:accent5>
+        <a:srgbClr val="4BACC6"/>
+      </a:accent5>
+      <a:accent6>
+        <a:srgbClr val="F79646"/>
+      </a:accent6>
+      <a:hlink>
+        <a:srgbClr val="0000FF"/>
+      </a:hlink>
+      <a:folHlink>
+        <a:srgbClr val="800080"/>
+      </a:folHlink>
+    </a:clrScheme>
+    <a:fontScheme name="Office">
+      <a:majorFont>
+        <a:latin typeface="Calibri"/>
+        <a:ea typeface=""/>
+        <a:cs typeface=""/>
+        <a:font script="Jpan" typeface="ＭＳ Ｐゴシック"/>
+        <a:font script="Hang" typeface="맑은 고딕"/>
+        <a:font script="Hans" typeface="宋体"/>
+        <a:font script="Hant" typeface="新細明體"/>
+        <a:font script="Arab" typeface="Times New Roman"/>
+        <a:font script="Hebr" typeface="Times New Roman"/>
+        <a:font script="Thai" typeface="Angsana New"/>
+        <a:font script="Ethi" typeface="Nyala"/>
+        <a:font script="Beng" typeface="Vrinda"/>
+        <a:font script="Gujr" typeface="Shruti"/>
+        <a:font script="Khmr" typeface="MoolBoran"/>
+        <a:font script="Knda" typeface="Tunga"/>
+        <a:font script="Guru" typeface="Raavi"/>
+        <a:font script="Cans" typeface="Euphemia"/>
+        <a:font script="Cher" typeface="Plantagenet Cherokee"/>
+        <a:font script="Yiii" typeface="Microsoft Yi Baiti"/>
+        <a:font script="Tibt" typeface="Microsoft Himalaya"/>
+        <a:font script="Thaa" typeface="MV Boli"/>
+        <a:font script="Deva" typeface="Mangal"/>
+        <a:font script="Telu" typeface="Gautami"/>
+        <a:font script="Taml" typeface="Latha"/>
+        <a:font script="Syrc" typeface="Estrangelo Edessa"/>
+        <a:font script="Orya" typeface="Kalinga"/>
+        <a:font script="Mlym" typeface="Kartika"/>
+        <a:font script="Laoo" typeface="DokChampa"/>
+        <a:font script="Sinh" typeface="Iskoola Pota"/>
+        <a:font script="Mong" typeface="Mongolian Baiti"/>
+        <a:font script="Viet" typeface="Times New Roman"/>
+        <a:font script="Uigh" typeface="Microsoft Uighur"/>
+        <a:font script="Geor" typeface="Sylfaen"/>
+      </a:majorFont>
+      <a:minorFont>
+        <a:latin typeface="Calibri"/>
+        <a:ea typeface=""/>
+        <a:cs typeface=""/>
+        <a:font script="Jpan" typeface="ＭＳ Ｐゴシック"/>
+        <a:font script="Hang" typeface="맑은 고딕"/>
+        <a:font script="Hans" typeface="宋体"/>
+        <a:font script="Hant" typeface="新細明體"/>
+        <a:font script="Arab" typeface="Arial"/>
+        <a:font script="Hebr" typeface="Arial"/>
+        <a:font script="Thai" typeface="Cordia New"/>
+        <a:font script="Ethi" typeface="Nyala"/>
+        <a:font script="Beng" typeface="Vrinda"/>
+        <a:font script="Gujr" typeface="Shruti"/>
+        <a:font script="Khmr" typeface="DaunPenh"/>
+        <a:font script="Knda" typeface="Tunga"/>
+        <a:font script="Guru" typeface="Raavi"/>
+        <a:font script="Cans" typeface="Euphemia"/>
+        <a:font script="Cher" typeface="Plantagenet Cherokee"/>
+        <a:font script="Yiii" typeface="Microsoft Yi Baiti"/>
+        <a:font script="Tibt" typeface="Microsoft Himalaya"/>
+        <a:font script="Thaa" typeface="MV Boli"/>
+        <a:font script="Deva" typeface="Mangal"/>
+        <a:font script="Telu" typeface="Gautami"/>
+        <a:font script="Taml" typeface="Latha"/>
+        <a:font script="Syrc" typeface="Estrangelo Edessa"/>
+        <a:font script="Orya" typeface="Kalinga"/>
+        <a:font script="Mlym" typeface="Kartika"/>
+        <a:font script="Laoo" typeface="DokChampa"/>
+        <a:font script="Sinh" typeface="Iskoola Pota"/>
+        <a:font script="Mong" typeface="Mongolian Baiti"/>
+        <a:font script="Viet" typeface="Arial"/>
+        <a:font script="Uigh" typeface="Microsoft Uighur"/>
+        <a:font script="Geor" typeface="Sylfaen"/>
+      </a:minorFont>
+    </a:fontScheme>
+    <a:fmtScheme name="Office">
+      <a:fillStyleLst>
+        <a:solidFill>
+          <a:schemeClr val="phClr"/>
+        </a:solidFill>
+        <a:gradFill rotWithShape="1">
+          <a:gsLst>
+            <a:gs pos="0">
+              <a:schemeClr val="phClr">
+                <a:tint val="50000"/>
+                <a:satMod val="300000"/>
+              </a:schemeClr>
+            </a:gs>
+            <a:gs pos="35000">
+              <a:schemeClr val="phClr">
+                <a:tint val="37000"/>
+                <a:satMod val="300000"/>
+              </a:schemeClr>
+            </a:gs>
+            <a:gs pos="100000">
+              <a:schemeClr val="phClr">
+                <a:tint val="15000"/>
+                <a:satMod val="350000"/>
+              </a:schemeClr>
+            </a:gs>
+          </a:gsLst>
+          <a:lin ang="16200000" scaled="1"/>
+        </a:gradFill>
+        <a:gradFill rotWithShape="1">
+          <a:gsLst>
+            <a:gs pos="0">
+              <a:schemeClr val="phClr">
+                <a:tint val="100000"/>
+                <a:shade val="100000"/>
+                <a:satMod val="130000"/>
+              </a:schemeClr>
+            </a:gs>
+            <a:gs pos="100000">
+              <a:schemeClr val="phClr">
+                <a:tint val="50000"/>
+                <a:shade val="100000"/>
+                <a:satMod val="350000"/>
+              </a:schemeClr>
+            </a:gs>
+          </a:gsLst>
+          <a:lin ang="16200000" scaled="0"/>
+        </a:gradFill>
+      </a:fillStyleLst>
+      <a:lnStyleLst>
+        <a:ln w="9525" cap="flat" cmpd="sng" algn="ctr">
+          <a:solidFill>
+            <a:schemeClr val="phClr">
+              <a:shade val="95000"/>
+              <a:satMod val="105000"/>
+            </a:schemeClr>
+          </a:solidFill>
+          <a:prstDash val="solid"/>
+        </a:ln>
+        <a:ln w="25400" cap="flat" cmpd="sng" algn="ctr">
+          <a:solidFill>
+            <a:schemeClr val="phClr"/>
+          </a:solidFill>
+          <a:prstDash val="solid"/>
+        </a:ln>
+        <a:ln w="38100" cap="flat" cmpd="sng" algn="ctr">
+          <a:solidFill>
+            <a:schemeClr val="phClr"/>
+          </a:solidFill>
+          <a:prstDash val="solid"/>
+        </a:ln>
+      </a:lnStyleLst>
+      <a:effectStyleLst>
+        <a:effectStyle>
+          <a:effectLst>
+            <a:outerShdw blurRad="40000" dist="20000" dir="5400000" rotWithShape="0">
+              <a:srgbClr val="000000">
+                <a:alpha val="38000"/>
+              </a:srgbClr>
+            </a:outerShdw>
+          </a:effectLst>
+        </a:effectStyle>
+        <a:effectStyle>
+          <a:effectLst>
+            <a:outerShdw blurRad="40000" dist="23000" dir="5400000" rotWithShape="0">
+              <a:srgbClr val="000000">
+                <a:alpha val="35000"/>
+              </a:srgbClr>
+            </a:outerShdw>
+          </a:effectLst>
+        </a:effectStyle>
+        <a:effectStyle>
+          <a:effectLst>
+            <a:outerShdw blurRad="40000" dist="23000" dir="5400000" rotWithShape="0">
+              <a:srgbClr val="000000">
+                <a:alpha val="35000"/>
+              </a:srgbClr>
+            </a:outerShdw>
+          </a:effectLst>
+          <a:scene3d>
+            <a:camera prst="orthographicFront">
+              <a:rot lat="0" lon="0" rev="0"/>
+            </a:camera>
+            <a:lightRig rig="threePt" dir="t">
+              <a:rot lat="0" lon="0" rev="1200000"/>
+            </a:lightRig>
+          </a:scene3d>
+          <a:sp3d>
+            <a:bevelT w="63500" h="25400"/>
+          </a:sp3d>
+        </a:effectStyle>
+      </a:effectStyleLst>
+      <a:bgFillStyleLst>
+        <a:solidFill>
+          <a:schemeClr val="phClr"/>
+        </a:solidFill>
+        <a:gradFill rotWithShape="1">
+          <a:gsLst>
+            <a:gs pos="0">
+              <a:schemeClr val="phClr">
+                <a:tint val="40000"/>
+                <a:satMod val="350000"/>
+              </a:schemeClr>
+            </a:gs>
+            <a:gs pos="40000">
+              <a:schemeClr val="phClr">
+                <a:tint val="45000"/>
+                <a:shade val="99000"/>
+                <a:satMod val="350000"/>
+              </a:schemeClr>
+            </a:gs>
+            <a:gs pos="100000">
+              <a:schemeClr val="phClr">
+                <a:shade val="20000"/>
+                <a:satMod val="255000"/>
+              </a:schemeClr>
+            </a:gs>
+          </a:gsLst>
+          <a:path path="circle">
+            <a:fillToRect l="50000" t="-80000" r="50000" b="180000"/>
+          </a:path>
+        </a:gradFill>
+        <a:gradFill rotWithShape="1">
+          <a:gsLst>
+            <a:gs pos="0">
+              <a:schemeClr val="phClr">
+                <a:tint val="80000"/>
+                <a:satMod val="300000"/>
+              </a:schemeClr>
+            </a:gs>
+            <a:gs pos="100000">
+              <a:schemeClr val="phClr">
+                <a:shade val="30000"/>
+                <a:satMod val="200000"/>
+              </a:schemeClr>
+            </a:gs>
+          </a:gsLst>
+          <a:path path="circle">
+            <a:fillToRect l="50000" t="50000" r="50000" b="50000"/>
+          </a:path>
+        </a:gradFill>
+      </a:bgFillStyleLst>
+    </a:fmtScheme>
+  </a:themeElements>
+  <a:objectDefaults>
+    <a:spDef>
+      <a:spPr/>
+      <a:bodyPr/>
+      <a:lstStyle/>
+      <a:style>
+        <a:lnRef idx="1">
+          <a:schemeClr val="accent1"/>
+        </a:lnRef>
+        <a:fillRef idx="3">
+          <a:schemeClr val="accent1"/>
+        </a:fillRef>
+        <a:effectRef idx="2">
+          <a:schemeClr val="accent1"/>
+        </a:effectRef>
+        <a:fontRef idx="minor">
+          <a:schemeClr val="lt1"/>
+        </a:fontRef>
+      </a:style>
+    </a:spDef>
+    <a:lnDef>
+      <a:spPr/>
+      <a:bodyPr/>
+      <a:lstStyle/>
+      <a:style>
+        <a:lnRef idx="2">
+          <a:schemeClr val="accent1"/>
+        </a:lnRef>
+        <a:fillRef idx="0">
+          <a:schemeClr val="accent1"/>
+        </a:fillRef>
+        <a:effectRef idx="1">
+          <a:schemeClr val="accent1"/>
+        </a:effectRef>
+        <a:fontRef idx="minor">
+          <a:schemeClr val="tx1"/>
+        </a:fontRef>
+      </a:style>
+    </a:lnDef>
+  </a:objectDefaults>
+  <a:extraClrSchemeLst/>
+</a:theme>
 </file>